--- a/static/ppts/G6_Math_T1_Rounding.pptx
+++ b/static/ppts/G6_Math_T1_Rounding.pptx
@@ -9,9 +9,10 @@
     <p:sldId id="257" r:id="rId3"/>
     <p:sldId id="258" r:id="rId4"/>
     <p:sldId id="259" r:id="rId5"/>
+    <p:sldId id="260" r:id="rId6"/>
   </p:sldIdLst>
   <p:notesMasterIdLst>
-    <p:notesMasterId r:id="rId6"/>
+    <p:notesMasterId r:id="rId7"/>
   </p:notesMasterIdLst>
   <p:sldSz cx="9144000" cy="5143500"/>
   <p:notesSz cx="5143500" cy="9144000"/>
@@ -811,6 +812,94 @@
 </p:notes>
 </file>
 
+<file path=ppt/notesSlides/notesSlide5.xml><?xml version="1.0" encoding="utf-8"?>
+<p:notes xmlns:a="http://schemas.openxmlformats.org/drawingml/2006/main" xmlns:r="http://schemas.openxmlformats.org/officeDocument/2006/relationships" xmlns:p="http://schemas.openxmlformats.org/presentationml/2006/main">
+  <p:cSld>
+    <p:spTree>
+      <p:nvGrpSpPr>
+        <p:cNvPr id="1" name=""/>
+        <p:cNvGrpSpPr/>
+        <p:nvPr/>
+      </p:nvGrpSpPr>
+      <p:grpSpPr>
+        <a:xfrm>
+          <a:off x="0" y="0"/>
+          <a:ext cx="0" cy="0"/>
+          <a:chOff x="0" y="0"/>
+          <a:chExt cx="0" cy="0"/>
+        </a:xfrm>
+      </p:grpSpPr>
+      <p:sp>
+        <p:nvSpPr>
+          <p:cNvPr id="2" name="Slide Image Placeholder 1"/>
+          <p:cNvSpPr>
+            <a:spLocks noGrp="1" noRot="1" noChangeAspect="1"/>
+          </p:cNvSpPr>
+          <p:nvPr>
+            <p:ph type="sldImg"/>
+          </p:nvPr>
+        </p:nvSpPr>
+        <p:spPr/>
+      </p:sp>
+      <p:sp>
+        <p:nvSpPr>
+          <p:cNvPr id="3" name="Notes Placeholder 2"/>
+          <p:cNvSpPr>
+            <a:spLocks noGrp="1"/>
+          </p:cNvSpPr>
+          <p:nvPr>
+            <p:ph type="body" idx="1"/>
+          </p:nvPr>
+        </p:nvSpPr>
+        <p:spPr/>
+        <p:txBody>
+          <a:bodyPr/>
+          <a:lstStyle/>
+          <a:p>
+            <a:r>
+              <a:rPr lang="en-US" dirty="0"/>
+              <a:t/>
+            </a:r>
+            <a:endParaRPr lang="en-US" dirty="0"/>
+          </a:p>
+        </p:txBody>
+      </p:sp>
+      <p:sp>
+        <p:nvSpPr>
+          <p:cNvPr id="4" name="Slide Number Placeholder 3"/>
+          <p:cNvSpPr>
+            <a:spLocks noGrp="1"/>
+          </p:cNvSpPr>
+          <p:nvPr>
+            <p:ph type="sldNum" sz="quarter" idx="10"/>
+          </p:nvPr>
+        </p:nvSpPr>
+        <p:spPr/>
+        <p:txBody>
+          <a:bodyPr/>
+          <a:lstStyle/>
+          <a:p>
+            <a:fld id="{F7021451-1387-4CA6-816F-3879F97B5CBC}" type="slidenum">
+              <a:rPr lang="en-US"/>
+              <a:t>5</a:t>
+            </a:fld>
+            <a:endParaRPr lang="en-US"/>
+          </a:p>
+        </p:txBody>
+      </p:sp>
+    </p:spTree>
+    <p:extLst>
+      <p:ext uri="{BB962C8B-B14F-4D97-AF65-F5344CB8AC3E}">
+        <p14:creationId xmlns:p14="http://schemas.microsoft.com/office/powerpoint/2010/main" val="1024086991"/>
+      </p:ext>
+    </p:extLst>
+  </p:cSld>
+  <p:clrMapOvr>
+    <a:masterClrMapping/>
+  </p:clrMapOvr>
+</p:notes>
+</file>
+
 <file path=ppt/slideLayouts/slideLayout1.xml><?xml version="1.0" encoding="utf-8"?>
 <p:sldLayout xmlns:a="http://schemas.openxmlformats.org/drawingml/2006/main" xmlns:r="http://schemas.openxmlformats.org/officeDocument/2006/relationships" xmlns:p="http://schemas.openxmlformats.org/presentationml/2006/main" preserve="1">
   <p:cSld name="DEFAULT">
@@ -1170,7 +1259,7 @@
         </p:nvSpPr>
         <p:spPr>
           <a:xfrm>
-            <a:off x="731520" y="1280160"/>
+            <a:off x="731520" y="1097280"/>
             <a:ext cx="7772400" cy="1371600"/>
           </a:xfrm>
           <a:prstGeom prst="rect">
@@ -1187,7 +1276,7 @@
               <a:buNone/>
             </a:pPr>
             <a:r>
-              <a:rPr lang="en-US" sz="3600" b="1" dirty="0">
+              <a:rPr lang="en-US" sz="4000" b="1" dirty="0">
                 <a:solidFill>
                   <a:srgbClr val="FFFFFF"/>
                 </a:solidFill>
@@ -1197,7 +1286,7 @@
               </a:rPr>
               <a:t>Rounding &amp; Estimation</a:t>
             </a:r>
-            <a:endParaRPr lang="en-US" sz="3600" dirty="0"/>
+            <a:endParaRPr lang="en-US" sz="4000" dirty="0"/>
           </a:p>
         </p:txBody>
       </p:sp>
@@ -1209,7 +1298,7 @@
         </p:nvSpPr>
         <p:spPr>
           <a:xfrm>
-            <a:off x="731520" y="2743200"/>
+            <a:off x="731520" y="2560320"/>
             <a:ext cx="7772400" cy="548640"/>
           </a:xfrm>
           <a:prstGeom prst="rect">
@@ -1228,13 +1317,13 @@
             <a:r>
               <a:rPr lang="en-US" sz="1600" dirty="0">
                 <a:solidFill>
-                  <a:srgbClr val="9B9690"/>
+                  <a:srgbClr val="E9C46A"/>
                 </a:solidFill>
                 <a:latin typeface="Calibri" pitchFamily="34" charset="0"/>
                 <a:ea typeface="Calibri" pitchFamily="34" charset="-122"/>
                 <a:cs typeface="Calibri" pitchFamily="34" charset="-120"/>
               </a:rPr>
-              <a:t>G6 Maths · Number Sense</a:t>
+              <a:t>Grade 6 Mathematics · Mr Zocchi</a:t>
             </a:r>
             <a:endParaRPr lang="en-US" sz="1600" dirty="0"/>
           </a:p>
@@ -1242,14 +1331,36 @@
       </p:sp>
       <p:sp>
         <p:nvSpPr>
-          <p:cNvPr id="5" name="Text 3"/>
-          <p:cNvSpPr/>
-          <p:nvPr/>
-        </p:nvSpPr>
-        <p:spPr>
-          <a:xfrm>
-            <a:off x="731520" y="4389120"/>
-            <a:ext cx="7772400" cy="457200"/>
+          <p:cNvPr id="5" name="Shape 3"/>
+          <p:cNvSpPr/>
+          <p:nvPr/>
+        </p:nvSpPr>
+        <p:spPr>
+          <a:xfrm>
+            <a:off x="731520" y="3474720"/>
+            <a:ext cx="2011680" cy="411480"/>
+          </a:xfrm>
+          <a:prstGeom prst="roundRect">
+            <a:avLst>
+              <a:gd name="adj" fmla="val 17778"/>
+            </a:avLst>
+          </a:prstGeom>
+          <a:solidFill>
+            <a:srgbClr val="2A9D8F"/>
+          </a:solidFill>
+          <a:ln/>
+        </p:spPr>
+      </p:sp>
+      <p:sp>
+        <p:nvSpPr>
+          <p:cNvPr id="6" name="Text 4"/>
+          <p:cNvSpPr/>
+          <p:nvPr/>
+        </p:nvSpPr>
+        <p:spPr>
+          <a:xfrm>
+            <a:off x="731520" y="3474720"/>
+            <a:ext cx="2011680" cy="411480"/>
           </a:xfrm>
           <a:prstGeom prst="rect">
             <a:avLst/>
@@ -1261,21 +1372,21 @@
           <a:bodyPr wrap="square" rtlCol="0" anchor="ctr"/>
           <a:lstStyle/>
           <a:p>
-            <a:pPr indent="0" marL="0">
+            <a:pPr algn="ctr" indent="0" marL="0">
               <a:buNone/>
             </a:pPr>
             <a:r>
-              <a:rPr lang="en-US" sz="1000" dirty="0">
-                <a:solidFill>
-                  <a:srgbClr val="6B6660"/>
+              <a:rPr lang="en-US" sz="1200" b="1" dirty="0">
+                <a:solidFill>
+                  <a:srgbClr val="FFFFFF"/>
                 </a:solidFill>
                 <a:latin typeface="Calibri" pitchFamily="34" charset="0"/>
                 <a:ea typeface="Calibri" pitchFamily="34" charset="-122"/>
                 <a:cs typeface="Calibri" pitchFamily="34" charset="-120"/>
               </a:rPr>
-              <a:t>Mr Zocchi · mrzocchi.com</a:t>
-            </a:r>
-            <a:endParaRPr lang="en-US" sz="1000" dirty="0"/>
+              <a:t>Term 1 · Number Sense</a:t>
+            </a:r>
+            <a:endParaRPr lang="en-US" sz="1200" dirty="0"/>
           </a:p>
         </p:txBody>
       </p:sp>
@@ -1293,7 +1404,7 @@
     <p:bg>
       <p:bgPr>
         <a:solidFill>
-          <a:srgbClr val="FFFFFF"/>
+          <a:srgbClr val="FAF8F5"/>
         </a:solidFill>
       </p:bgPr>
     </p:bg>
@@ -1339,8 +1450,8 @@
         </p:nvSpPr>
         <p:spPr>
           <a:xfrm>
-            <a:off x="548640" y="274320"/>
-            <a:ext cx="8046720" cy="640080"/>
+            <a:off x="7772400" y="4709160"/>
+            <a:ext cx="1097280" cy="320040"/>
           </a:xfrm>
           <a:prstGeom prst="rect">
             <a:avLst/>
@@ -1349,14 +1460,105 @@
           <a:ln/>
         </p:spPr>
         <p:txBody>
-          <a:bodyPr wrap="square" lIns="0" tIns="0" rIns="0" bIns="0" rtlCol="0" anchor="ctr"/>
+          <a:bodyPr wrap="square" rtlCol="0" anchor="ctr"/>
+          <a:lstStyle/>
+          <a:p>
+            <a:pPr algn="r" indent="0" marL="0">
+              <a:buNone/>
+            </a:pPr>
+            <a:r>
+              <a:rPr lang="en-US" sz="900" dirty="0">
+                <a:solidFill>
+                  <a:srgbClr val="6B6660"/>
+                </a:solidFill>
+                <a:latin typeface="Calibri" pitchFamily="34" charset="0"/>
+                <a:ea typeface="Calibri" pitchFamily="34" charset="-122"/>
+                <a:cs typeface="Calibri" pitchFamily="34" charset="-120"/>
+              </a:rPr>
+              <a:t>2 / 5</a:t>
+            </a:r>
+            <a:endParaRPr lang="en-US" sz="900" dirty="0"/>
+          </a:p>
+        </p:txBody>
+      </p:sp>
+      <p:sp>
+        <p:nvSpPr>
+          <p:cNvPr id="4" name="Shape 2"/>
+          <p:cNvSpPr/>
+          <p:nvPr/>
+        </p:nvSpPr>
+        <p:spPr>
+          <a:xfrm>
+            <a:off x="1371600" y="914400"/>
+            <a:ext cx="6400800" cy="3200400"/>
+          </a:xfrm>
+          <a:prstGeom prst="rect">
+            <a:avLst/>
+          </a:prstGeom>
+          <a:solidFill>
+            <a:srgbClr val="FFFFFF"/>
+          </a:solidFill>
+          <a:ln w="12700">
+            <a:solidFill>
+              <a:srgbClr val="E5E2DC"/>
+            </a:solidFill>
+            <a:prstDash val="solid"/>
+          </a:ln>
+          <a:effectLst>
+            <a:outerShdw sx="100000" sy="100000" kx="0" ky="0" algn="bl" rotWithShape="0" blurRad="50800" dist="25400" dir="8100000">
+              <a:srgbClr val="000000">
+                <a:alpha val="10000"/>
+              </a:srgbClr>
+            </a:outerShdw>
+          </a:effectLst>
+        </p:spPr>
+      </p:sp>
+      <p:sp>
+        <p:nvSpPr>
+          <p:cNvPr id="5" name="Shape 3"/>
+          <p:cNvSpPr/>
+          <p:nvPr/>
+        </p:nvSpPr>
+        <p:spPr>
+          <a:xfrm>
+            <a:off x="1371600" y="914400"/>
+            <a:ext cx="91440" cy="3200400"/>
+          </a:xfrm>
+          <a:prstGeom prst="rect">
+            <a:avLst/>
+          </a:prstGeom>
+          <a:solidFill>
+            <a:srgbClr val="2A9D8F"/>
+          </a:solidFill>
+          <a:ln/>
+        </p:spPr>
+      </p:sp>
+      <p:sp>
+        <p:nvSpPr>
+          <p:cNvPr id="6" name="Text 4"/>
+          <p:cNvSpPr/>
+          <p:nvPr/>
+        </p:nvSpPr>
+        <p:spPr>
+          <a:xfrm>
+            <a:off x="1828800" y="1097280"/>
+            <a:ext cx="5669280" cy="640080"/>
+          </a:xfrm>
+          <a:prstGeom prst="rect">
+            <a:avLst/>
+          </a:prstGeom>
+          <a:noFill/>
+          <a:ln/>
+        </p:spPr>
+        <p:txBody>
+          <a:bodyPr wrap="square" rtlCol="0" anchor="ctr"/>
           <a:lstStyle/>
           <a:p>
             <a:pPr indent="0" marL="0">
               <a:buNone/>
             </a:pPr>
             <a:r>
-              <a:rPr lang="en-US" sz="2600" b="1" dirty="0">
+              <a:rPr lang="en-US" sz="2400" b="1" dirty="0">
                 <a:solidFill>
                   <a:srgbClr val="1B2A4A"/>
                 </a:solidFill>
@@ -1364,22 +1566,22 @@
                 <a:ea typeface="Georgia" pitchFamily="34" charset="-122"/>
                 <a:cs typeface="Georgia" pitchFamily="34" charset="-120"/>
               </a:rPr>
-              <a:t>How to Round</a:t>
-            </a:r>
-            <a:endParaRPr lang="en-US" sz="2600" dirty="0"/>
-          </a:p>
-        </p:txBody>
-      </p:sp>
-      <p:sp>
-        <p:nvSpPr>
-          <p:cNvPr id="4" name="Text 2"/>
-          <p:cNvSpPr/>
-          <p:nvPr/>
-        </p:nvSpPr>
-        <p:spPr>
-          <a:xfrm>
-            <a:off x="548640" y="1097280"/>
-            <a:ext cx="8046720" cy="3474720"/>
+              <a:t>Why Round Numbers?</a:t>
+            </a:r>
+            <a:endParaRPr lang="en-US" sz="2400" dirty="0"/>
+          </a:p>
+        </p:txBody>
+      </p:sp>
+      <p:sp>
+        <p:nvSpPr>
+          <p:cNvPr id="7" name="Text 5"/>
+          <p:cNvSpPr/>
+          <p:nvPr/>
+        </p:nvSpPr>
+        <p:spPr>
+          <a:xfrm>
+            <a:off x="1828800" y="1828800"/>
+            <a:ext cx="5669280" cy="2011680"/>
           </a:xfrm>
           <a:prstGeom prst="rect">
             <a:avLst/>
@@ -1391,12 +1593,11 @@
           <a:bodyPr wrap="square" rtlCol="0" anchor="t"/>
           <a:lstStyle/>
           <a:p>
-            <a:pPr marL="342900" indent="-342900">
-              <a:spcAft>
-                <a:spcPts val="800"/>
-              </a:spcAft>
-              <a:buSzPct val="100000"/>
-              <a:buChar char="•"/>
+            <a:pPr indent="0" marL="0">
+              <a:lnSpc>
+                <a:spcPct val="130000"/>
+              </a:lnSpc>
+              <a:buNone/>
             </a:pPr>
             <a:r>
               <a:rPr lang="en-US" sz="1500" dirty="0">
@@ -1407,129 +1608,9 @@
                 <a:ea typeface="Calibri" pitchFamily="34" charset="-122"/>
                 <a:cs typeface="Calibri" pitchFamily="34" charset="-120"/>
               </a:rPr>
-              <a:t>Rounding simplifies numbers while keeping them close to the original</a:t>
+              <a:t>Rounding makes numbers simpler and easier to work with. We round to estimate answers, check calculations, and communicate approximate values. '4,873 people attended' is easier to understand when rounded to 'about 5,000 people'.</a:t>
             </a:r>
             <a:endParaRPr lang="en-US" sz="1500" dirty="0"/>
-          </a:p>
-          <a:p>
-            <a:pPr marL="342900" indent="-342900">
-              <a:spcAft>
-                <a:spcPts val="800"/>
-              </a:spcAft>
-              <a:buSzPct val="100000"/>
-              <a:buChar char="•"/>
-            </a:pPr>
-            <a:r>
-              <a:rPr lang="en-US" sz="1500" dirty="0">
-                <a:solidFill>
-                  <a:srgbClr val="3D3A36"/>
-                </a:solidFill>
-                <a:latin typeface="Calibri" pitchFamily="34" charset="0"/>
-                <a:ea typeface="Calibri" pitchFamily="34" charset="-122"/>
-                <a:cs typeface="Calibri" pitchFamily="34" charset="-120"/>
-              </a:rPr>
-              <a:t>Look at the digit to the RIGHT of the place you're rounding to</a:t>
-            </a:r>
-            <a:endParaRPr lang="en-US" sz="1500" dirty="0"/>
-          </a:p>
-          <a:p>
-            <a:pPr marL="342900" indent="-342900">
-              <a:spcAft>
-                <a:spcPts val="800"/>
-              </a:spcAft>
-              <a:buSzPct val="100000"/>
-              <a:buChar char="•"/>
-            </a:pPr>
-            <a:r>
-              <a:rPr lang="en-US" sz="1500" dirty="0">
-                <a:solidFill>
-                  <a:srgbClr val="3D3A36"/>
-                </a:solidFill>
-                <a:latin typeface="Calibri" pitchFamily="34" charset="0"/>
-                <a:ea typeface="Calibri" pitchFamily="34" charset="-122"/>
-                <a:cs typeface="Calibri" pitchFamily="34" charset="-120"/>
-              </a:rPr>
-              <a:t>If it's 5 or more → round UP; if it's less than 5 → round DOWN</a:t>
-            </a:r>
-            <a:endParaRPr lang="en-US" sz="1500" dirty="0"/>
-          </a:p>
-          <a:p>
-            <a:pPr marL="342900" indent="-342900">
-              <a:spcAft>
-                <a:spcPts val="800"/>
-              </a:spcAft>
-              <a:buSzPct val="100000"/>
-              <a:buChar char="•"/>
-            </a:pPr>
-            <a:r>
-              <a:rPr lang="en-US" sz="1500" dirty="0">
-                <a:solidFill>
-                  <a:srgbClr val="3D3A36"/>
-                </a:solidFill>
-                <a:latin typeface="Calibri" pitchFamily="34" charset="0"/>
-                <a:ea typeface="Calibri" pitchFamily="34" charset="-122"/>
-                <a:cs typeface="Calibri" pitchFamily="34" charset="-120"/>
-              </a:rPr>
-              <a:t>4,527 rounded to nearest 100 → 4,500 (2 is less than 5, round down)</a:t>
-            </a:r>
-            <a:endParaRPr lang="en-US" sz="1500" dirty="0"/>
-          </a:p>
-          <a:p>
-            <a:pPr marL="342900" indent="-342900">
-              <a:spcAft>
-                <a:spcPts val="800"/>
-              </a:spcAft>
-              <a:buSzPct val="100000"/>
-              <a:buChar char="•"/>
-            </a:pPr>
-            <a:r>
-              <a:rPr lang="en-US" sz="1500" dirty="0">
-                <a:solidFill>
-                  <a:srgbClr val="3D3A36"/>
-                </a:solidFill>
-                <a:latin typeface="Calibri" pitchFamily="34" charset="0"/>
-                <a:ea typeface="Calibri" pitchFamily="34" charset="-122"/>
-                <a:cs typeface="Calibri" pitchFamily="34" charset="-120"/>
-              </a:rPr>
-              <a:t>4,573 rounded to nearest 100 → 4,600 (7 is 5+, round up)</a:t>
-            </a:r>
-            <a:endParaRPr lang="en-US" sz="1500" dirty="0"/>
-          </a:p>
-        </p:txBody>
-      </p:sp>
-      <p:sp>
-        <p:nvSpPr>
-          <p:cNvPr id="5" name="Text 3"/>
-          <p:cNvSpPr/>
-          <p:nvPr/>
-        </p:nvSpPr>
-        <p:spPr>
-          <a:xfrm>
-            <a:off x="548640" y="4800600"/>
-            <a:ext cx="3657600" cy="274320"/>
-          </a:xfrm>
-          <a:prstGeom prst="rect">
-            <a:avLst/>
-          </a:prstGeom>
-          <a:noFill/>
-          <a:ln/>
-        </p:spPr>
-        <p:txBody>
-          <a:bodyPr wrap="square" rtlCol="0" anchor="ctr"/>
-          <a:lstStyle/>
-          <a:p>
-            <a:pPr indent="0" marL="0">
-              <a:buNone/>
-            </a:pPr>
-            <a:r>
-              <a:rPr lang="en-US" sz="800" dirty="0">
-                <a:solidFill>
-                  <a:srgbClr val="9B9690"/>
-                </a:solidFill>
-              </a:rPr>
-              <a:t>mrzocchi.com</a:t>
-            </a:r>
-            <a:endParaRPr lang="en-US" sz="800" dirty="0"/>
           </a:p>
         </p:txBody>
       </p:sp>
@@ -1547,7 +1628,7 @@
     <p:bg>
       <p:bgPr>
         <a:solidFill>
-          <a:srgbClr val="FFFFFF"/>
+          <a:srgbClr val="FAF8F5"/>
         </a:solidFill>
       </p:bgPr>
     </p:bg>
@@ -1593,8 +1674,8 @@
         </p:nvSpPr>
         <p:spPr>
           <a:xfrm>
-            <a:off x="548640" y="274320"/>
-            <a:ext cx="8046720" cy="640080"/>
+            <a:off x="7772400" y="4709160"/>
+            <a:ext cx="1097280" cy="320040"/>
           </a:xfrm>
           <a:prstGeom prst="rect">
             <a:avLst/>
@@ -1603,7 +1684,46 @@
           <a:ln/>
         </p:spPr>
         <p:txBody>
-          <a:bodyPr wrap="square" lIns="0" tIns="0" rIns="0" bIns="0" rtlCol="0" anchor="ctr"/>
+          <a:bodyPr wrap="square" rtlCol="0" anchor="ctr"/>
+          <a:lstStyle/>
+          <a:p>
+            <a:pPr algn="r" indent="0" marL="0">
+              <a:buNone/>
+            </a:pPr>
+            <a:r>
+              <a:rPr lang="en-US" sz="900" dirty="0">
+                <a:solidFill>
+                  <a:srgbClr val="6B6660"/>
+                </a:solidFill>
+                <a:latin typeface="Calibri" pitchFamily="34" charset="0"/>
+                <a:ea typeface="Calibri" pitchFamily="34" charset="-122"/>
+                <a:cs typeface="Calibri" pitchFamily="34" charset="-120"/>
+              </a:rPr>
+              <a:t>3 / 5</a:t>
+            </a:r>
+            <a:endParaRPr lang="en-US" sz="900" dirty="0"/>
+          </a:p>
+        </p:txBody>
+      </p:sp>
+      <p:sp>
+        <p:nvSpPr>
+          <p:cNvPr id="4" name="Text 2"/>
+          <p:cNvSpPr/>
+          <p:nvPr/>
+        </p:nvSpPr>
+        <p:spPr>
+          <a:xfrm>
+            <a:off x="457200" y="274320"/>
+            <a:ext cx="8229600" cy="640080"/>
+          </a:xfrm>
+          <a:prstGeom prst="rect">
+            <a:avLst/>
+          </a:prstGeom>
+          <a:noFill/>
+          <a:ln/>
+        </p:spPr>
+        <p:txBody>
+          <a:bodyPr wrap="square" rtlCol="0" anchor="ctr"/>
           <a:lstStyle/>
           <a:p>
             <a:pPr indent="0" marL="0">
@@ -1618,7 +1738,7 @@
                 <a:ea typeface="Georgia" pitchFamily="34" charset="-122"/>
                 <a:cs typeface="Georgia" pitchFamily="34" charset="-120"/>
               </a:rPr>
-              <a:t>Using Estimation</a:t>
+              <a:t>Rounding Rules</a:t>
             </a:r>
             <a:endParaRPr lang="en-US" sz="2600" dirty="0"/>
           </a:p>
@@ -1626,14 +1746,66 @@
       </p:sp>
       <p:sp>
         <p:nvSpPr>
-          <p:cNvPr id="4" name="Text 2"/>
-          <p:cNvSpPr/>
-          <p:nvPr/>
-        </p:nvSpPr>
-        <p:spPr>
-          <a:xfrm>
-            <a:off x="548640" y="1097280"/>
-            <a:ext cx="8046720" cy="3474720"/>
+          <p:cNvPr id="5" name="Shape 3"/>
+          <p:cNvSpPr/>
+          <p:nvPr/>
+        </p:nvSpPr>
+        <p:spPr>
+          <a:xfrm>
+            <a:off x="457200" y="1188720"/>
+            <a:ext cx="2560320" cy="1828800"/>
+          </a:xfrm>
+          <a:prstGeom prst="rect">
+            <a:avLst/>
+          </a:prstGeom>
+          <a:solidFill>
+            <a:srgbClr val="FFFFFF"/>
+          </a:solidFill>
+          <a:ln w="12700">
+            <a:solidFill>
+              <a:srgbClr val="E5E2DC"/>
+            </a:solidFill>
+            <a:prstDash val="solid"/>
+          </a:ln>
+          <a:effectLst>
+            <a:outerShdw sx="100000" sy="100000" kx="0" ky="0" algn="bl" rotWithShape="0" blurRad="50800" dist="25400" dir="8100000">
+              <a:srgbClr val="000000">
+                <a:alpha val="10000"/>
+              </a:srgbClr>
+            </a:outerShdw>
+          </a:effectLst>
+        </p:spPr>
+      </p:sp>
+      <p:sp>
+        <p:nvSpPr>
+          <p:cNvPr id="6" name="Shape 4"/>
+          <p:cNvSpPr/>
+          <p:nvPr/>
+        </p:nvSpPr>
+        <p:spPr>
+          <a:xfrm>
+            <a:off x="457200" y="1188720"/>
+            <a:ext cx="2560320" cy="54864"/>
+          </a:xfrm>
+          <a:prstGeom prst="rect">
+            <a:avLst/>
+          </a:prstGeom>
+          <a:solidFill>
+            <a:srgbClr val="2A9D8F"/>
+          </a:solidFill>
+          <a:ln/>
+        </p:spPr>
+      </p:sp>
+      <p:sp>
+        <p:nvSpPr>
+          <p:cNvPr id="7" name="Text 5"/>
+          <p:cNvSpPr/>
+          <p:nvPr/>
+        </p:nvSpPr>
+        <p:spPr>
+          <a:xfrm>
+            <a:off x="594360" y="1325880"/>
+            <a:ext cx="2286000" cy="365760"/>
           </a:xfrm>
           <a:prstGeom prst="rect">
             <a:avLst/>
@@ -1642,39 +1814,53 @@
           <a:ln/>
         </p:spPr>
         <p:txBody>
-          <a:bodyPr wrap="square" rtlCol="0" anchor="t"/>
-          <a:lstStyle/>
-          <a:p>
-            <a:pPr marL="342900" indent="-342900">
-              <a:spcAft>
-                <a:spcPts val="800"/>
-              </a:spcAft>
-              <a:buSzPct val="100000"/>
-              <a:buChar char="•"/>
-            </a:pPr>
-            <a:r>
-              <a:rPr lang="en-US" sz="1500" dirty="0">
-                <a:solidFill>
-                  <a:srgbClr val="3D3A36"/>
+          <a:bodyPr wrap="square" rtlCol="0" anchor="ctr"/>
+          <a:lstStyle/>
+          <a:p>
+            <a:pPr indent="0" marL="0">
+              <a:buNone/>
+            </a:pPr>
+            <a:r>
+              <a:rPr lang="en-US" sz="1400" b="1" dirty="0">
+                <a:solidFill>
+                  <a:srgbClr val="1B2A4A"/>
                 </a:solidFill>
                 <a:latin typeface="Calibri" pitchFamily="34" charset="0"/>
                 <a:ea typeface="Calibri" pitchFamily="34" charset="-122"/>
                 <a:cs typeface="Calibri" pitchFamily="34" charset="-120"/>
               </a:rPr>
-              <a:t>Round numbers BEFORE calculating to get a quick approximate answer</a:t>
-            </a:r>
-            <a:endParaRPr lang="en-US" sz="1500" dirty="0"/>
-          </a:p>
-          <a:p>
-            <a:pPr marL="342900" indent="-342900">
-              <a:spcAft>
-                <a:spcPts val="800"/>
-              </a:spcAft>
-              <a:buSzPct val="100000"/>
-              <a:buChar char="•"/>
-            </a:pPr>
-            <a:r>
-              <a:rPr lang="en-US" sz="1500" dirty="0">
+              <a:t>Step 1: Find</a:t>
+            </a:r>
+            <a:endParaRPr lang="en-US" sz="1400" dirty="0"/>
+          </a:p>
+        </p:txBody>
+      </p:sp>
+      <p:sp>
+        <p:nvSpPr>
+          <p:cNvPr id="8" name="Text 6"/>
+          <p:cNvSpPr/>
+          <p:nvPr/>
+        </p:nvSpPr>
+        <p:spPr>
+          <a:xfrm>
+            <a:off x="594360" y="1737360"/>
+            <a:ext cx="2286000" cy="1097280"/>
+          </a:xfrm>
+          <a:prstGeom prst="rect">
+            <a:avLst/>
+          </a:prstGeom>
+          <a:noFill/>
+          <a:ln/>
+        </p:spPr>
+        <p:txBody>
+          <a:bodyPr wrap="square" rtlCol="0" anchor="t"/>
+          <a:lstStyle/>
+          <a:p>
+            <a:pPr indent="0" marL="0">
+              <a:buNone/>
+            </a:pPr>
+            <a:r>
+              <a:rPr lang="en-US" sz="1100" dirty="0">
                 <a:solidFill>
                   <a:srgbClr val="3D3A36"/>
                 </a:solidFill>
@@ -1682,41 +1868,129 @@
                 <a:ea typeface="Calibri" pitchFamily="34" charset="-122"/>
                 <a:cs typeface="Calibri" pitchFamily="34" charset="-120"/>
               </a:rPr>
-              <a:t>Useful for checking if your calculator answer makes sense</a:t>
-            </a:r>
-            <a:endParaRPr lang="en-US" sz="1500" dirty="0"/>
-          </a:p>
-          <a:p>
-            <a:pPr marL="342900" indent="-342900">
-              <a:spcAft>
-                <a:spcPts val="800"/>
-              </a:spcAft>
-              <a:buSzPct val="100000"/>
-              <a:buChar char="•"/>
-            </a:pPr>
-            <a:r>
-              <a:rPr lang="en-US" sz="1500" dirty="0">
-                <a:solidFill>
-                  <a:srgbClr val="3D3A36"/>
+              <a:t>Look at the digit in the place you're rounding to. Example: Round 4,873 to the nearest hundred. The hundreds digit is 8.</a:t>
+            </a:r>
+            <a:endParaRPr lang="en-US" sz="1100" dirty="0"/>
+          </a:p>
+        </p:txBody>
+      </p:sp>
+      <p:sp>
+        <p:nvSpPr>
+          <p:cNvPr id="9" name="Shape 7"/>
+          <p:cNvSpPr/>
+          <p:nvPr/>
+        </p:nvSpPr>
+        <p:spPr>
+          <a:xfrm>
+            <a:off x="3291840" y="1188720"/>
+            <a:ext cx="2560320" cy="1828800"/>
+          </a:xfrm>
+          <a:prstGeom prst="rect">
+            <a:avLst/>
+          </a:prstGeom>
+          <a:solidFill>
+            <a:srgbClr val="FFFFFF"/>
+          </a:solidFill>
+          <a:ln w="12700">
+            <a:solidFill>
+              <a:srgbClr val="E5E2DC"/>
+            </a:solidFill>
+            <a:prstDash val="solid"/>
+          </a:ln>
+          <a:effectLst>
+            <a:outerShdw sx="100000" sy="100000" kx="0" ky="0" algn="bl" rotWithShape="0" blurRad="50800" dist="25400" dir="8100000">
+              <a:srgbClr val="000000">
+                <a:alpha val="10000"/>
+              </a:srgbClr>
+            </a:outerShdw>
+          </a:effectLst>
+        </p:spPr>
+      </p:sp>
+      <p:sp>
+        <p:nvSpPr>
+          <p:cNvPr id="10" name="Shape 8"/>
+          <p:cNvSpPr/>
+          <p:nvPr/>
+        </p:nvSpPr>
+        <p:spPr>
+          <a:xfrm>
+            <a:off x="3291840" y="1188720"/>
+            <a:ext cx="2560320" cy="54864"/>
+          </a:xfrm>
+          <a:prstGeom prst="rect">
+            <a:avLst/>
+          </a:prstGeom>
+          <a:solidFill>
+            <a:srgbClr val="2A9D8F"/>
+          </a:solidFill>
+          <a:ln/>
+        </p:spPr>
+      </p:sp>
+      <p:sp>
+        <p:nvSpPr>
+          <p:cNvPr id="11" name="Text 9"/>
+          <p:cNvSpPr/>
+          <p:nvPr/>
+        </p:nvSpPr>
+        <p:spPr>
+          <a:xfrm>
+            <a:off x="3429000" y="1325880"/>
+            <a:ext cx="2286000" cy="365760"/>
+          </a:xfrm>
+          <a:prstGeom prst="rect">
+            <a:avLst/>
+          </a:prstGeom>
+          <a:noFill/>
+          <a:ln/>
+        </p:spPr>
+        <p:txBody>
+          <a:bodyPr wrap="square" rtlCol="0" anchor="ctr"/>
+          <a:lstStyle/>
+          <a:p>
+            <a:pPr indent="0" marL="0">
+              <a:buNone/>
+            </a:pPr>
+            <a:r>
+              <a:rPr lang="en-US" sz="1400" b="1" dirty="0">
+                <a:solidFill>
+                  <a:srgbClr val="1B2A4A"/>
                 </a:solidFill>
                 <a:latin typeface="Calibri" pitchFamily="34" charset="0"/>
                 <a:ea typeface="Calibri" pitchFamily="34" charset="-122"/>
                 <a:cs typeface="Calibri" pitchFamily="34" charset="-120"/>
               </a:rPr>
-              <a:t>Example: 487 × 21 ≈ 500 × 20 = 10,000</a:t>
-            </a:r>
-            <a:endParaRPr lang="en-US" sz="1500" dirty="0"/>
-          </a:p>
-          <a:p>
-            <a:pPr marL="342900" indent="-342900">
-              <a:spcAft>
-                <a:spcPts val="800"/>
-              </a:spcAft>
-              <a:buSzPct val="100000"/>
-              <a:buChar char="•"/>
-            </a:pPr>
-            <a:r>
-              <a:rPr lang="en-US" sz="1500" dirty="0">
+              <a:t>Step 2: Check</a:t>
+            </a:r>
+            <a:endParaRPr lang="en-US" sz="1400" dirty="0"/>
+          </a:p>
+        </p:txBody>
+      </p:sp>
+      <p:sp>
+        <p:nvSpPr>
+          <p:cNvPr id="12" name="Text 10"/>
+          <p:cNvSpPr/>
+          <p:nvPr/>
+        </p:nvSpPr>
+        <p:spPr>
+          <a:xfrm>
+            <a:off x="3429000" y="1737360"/>
+            <a:ext cx="2286000" cy="1097280"/>
+          </a:xfrm>
+          <a:prstGeom prst="rect">
+            <a:avLst/>
+          </a:prstGeom>
+          <a:noFill/>
+          <a:ln/>
+        </p:spPr>
+        <p:txBody>
+          <a:bodyPr wrap="square" rtlCol="0" anchor="t"/>
+          <a:lstStyle/>
+          <a:p>
+            <a:pPr indent="0" marL="0">
+              <a:buNone/>
+            </a:pPr>
+            <a:r>
+              <a:rPr lang="en-US" sz="1100" dirty="0">
                 <a:solidFill>
                   <a:srgbClr val="3D3A36"/>
                 </a:solidFill>
@@ -1724,43 +1998,113 @@
                 <a:ea typeface="Calibri" pitchFamily="34" charset="-122"/>
                 <a:cs typeface="Calibri" pitchFamily="34" charset="-120"/>
               </a:rPr>
-              <a:t>Always show your rounded numbers when estimating</a:t>
-            </a:r>
-            <a:endParaRPr lang="en-US" sz="1500" dirty="0"/>
-          </a:p>
-          <a:p>
-            <a:pPr marL="342900" indent="-342900">
-              <a:spcAft>
-                <a:spcPts val="800"/>
-              </a:spcAft>
-              <a:buSzPct val="100000"/>
-              <a:buChar char="•"/>
-            </a:pPr>
-            <a:r>
-              <a:rPr lang="en-US" sz="1500" dirty="0">
-                <a:solidFill>
-                  <a:srgbClr val="3D3A36"/>
+              <a:t>Look at the digit to the RIGHT. If it's 5 or more, round UP. If it's less than 5, round DOWN. The digit to the right of 8 is 7 (≥5), so round up.</a:t>
+            </a:r>
+            <a:endParaRPr lang="en-US" sz="1100" dirty="0"/>
+          </a:p>
+        </p:txBody>
+      </p:sp>
+      <p:sp>
+        <p:nvSpPr>
+          <p:cNvPr id="13" name="Shape 11"/>
+          <p:cNvSpPr/>
+          <p:nvPr/>
+        </p:nvSpPr>
+        <p:spPr>
+          <a:xfrm>
+            <a:off x="6126480" y="1188720"/>
+            <a:ext cx="2560320" cy="1828800"/>
+          </a:xfrm>
+          <a:prstGeom prst="rect">
+            <a:avLst/>
+          </a:prstGeom>
+          <a:solidFill>
+            <a:srgbClr val="FFFFFF"/>
+          </a:solidFill>
+          <a:ln w="12700">
+            <a:solidFill>
+              <a:srgbClr val="E5E2DC"/>
+            </a:solidFill>
+            <a:prstDash val="solid"/>
+          </a:ln>
+          <a:effectLst>
+            <a:outerShdw sx="100000" sy="100000" kx="0" ky="0" algn="bl" rotWithShape="0" blurRad="50800" dist="25400" dir="8100000">
+              <a:srgbClr val="000000">
+                <a:alpha val="10000"/>
+              </a:srgbClr>
+            </a:outerShdw>
+          </a:effectLst>
+        </p:spPr>
+      </p:sp>
+      <p:sp>
+        <p:nvSpPr>
+          <p:cNvPr id="14" name="Shape 12"/>
+          <p:cNvSpPr/>
+          <p:nvPr/>
+        </p:nvSpPr>
+        <p:spPr>
+          <a:xfrm>
+            <a:off x="6126480" y="1188720"/>
+            <a:ext cx="2560320" cy="54864"/>
+          </a:xfrm>
+          <a:prstGeom prst="rect">
+            <a:avLst/>
+          </a:prstGeom>
+          <a:solidFill>
+            <a:srgbClr val="2A9D8F"/>
+          </a:solidFill>
+          <a:ln/>
+        </p:spPr>
+      </p:sp>
+      <p:sp>
+        <p:nvSpPr>
+          <p:cNvPr id="15" name="Text 13"/>
+          <p:cNvSpPr/>
+          <p:nvPr/>
+        </p:nvSpPr>
+        <p:spPr>
+          <a:xfrm>
+            <a:off x="6263640" y="1325880"/>
+            <a:ext cx="2286000" cy="365760"/>
+          </a:xfrm>
+          <a:prstGeom prst="rect">
+            <a:avLst/>
+          </a:prstGeom>
+          <a:noFill/>
+          <a:ln/>
+        </p:spPr>
+        <p:txBody>
+          <a:bodyPr wrap="square" rtlCol="0" anchor="ctr"/>
+          <a:lstStyle/>
+          <a:p>
+            <a:pPr indent="0" marL="0">
+              <a:buNone/>
+            </a:pPr>
+            <a:r>
+              <a:rPr lang="en-US" sz="1400" b="1" dirty="0">
+                <a:solidFill>
+                  <a:srgbClr val="1B2A4A"/>
                 </a:solidFill>
                 <a:latin typeface="Calibri" pitchFamily="34" charset="0"/>
                 <a:ea typeface="Calibri" pitchFamily="34" charset="-122"/>
                 <a:cs typeface="Calibri" pitchFamily="34" charset="-120"/>
               </a:rPr>
-              <a:t>Estimation is not exact — it gives a reasonable approximation</a:t>
-            </a:r>
-            <a:endParaRPr lang="en-US" sz="1500" dirty="0"/>
-          </a:p>
-        </p:txBody>
-      </p:sp>
-      <p:sp>
-        <p:nvSpPr>
-          <p:cNvPr id="5" name="Text 3"/>
-          <p:cNvSpPr/>
-          <p:nvPr/>
-        </p:nvSpPr>
-        <p:spPr>
-          <a:xfrm>
-            <a:off x="548640" y="4800600"/>
-            <a:ext cx="3657600" cy="274320"/>
+              <a:t>Step 3: Replace</a:t>
+            </a:r>
+            <a:endParaRPr lang="en-US" sz="1400" dirty="0"/>
+          </a:p>
+        </p:txBody>
+      </p:sp>
+      <p:sp>
+        <p:nvSpPr>
+          <p:cNvPr id="16" name="Text 14"/>
+          <p:cNvSpPr/>
+          <p:nvPr/>
+        </p:nvSpPr>
+        <p:spPr>
+          <a:xfrm>
+            <a:off x="6263640" y="1737360"/>
+            <a:ext cx="2286000" cy="1097280"/>
           </a:xfrm>
           <a:prstGeom prst="rect">
             <a:avLst/>
@@ -1769,21 +2113,24 @@
           <a:ln/>
         </p:spPr>
         <p:txBody>
-          <a:bodyPr wrap="square" rtlCol="0" anchor="ctr"/>
+          <a:bodyPr wrap="square" rtlCol="0" anchor="t"/>
           <a:lstStyle/>
           <a:p>
             <a:pPr indent="0" marL="0">
               <a:buNone/>
             </a:pPr>
             <a:r>
-              <a:rPr lang="en-US" sz="800" dirty="0">
-                <a:solidFill>
-                  <a:srgbClr val="9B9690"/>
-                </a:solidFill>
-              </a:rPr>
-              <a:t>mrzocchi.com</a:t>
-            </a:r>
-            <a:endParaRPr lang="en-US" sz="800" dirty="0"/>
+              <a:rPr lang="en-US" sz="1100" dirty="0">
+                <a:solidFill>
+                  <a:srgbClr val="3D3A36"/>
+                </a:solidFill>
+                <a:latin typeface="Calibri" pitchFamily="34" charset="0"/>
+                <a:ea typeface="Calibri" pitchFamily="34" charset="-122"/>
+                <a:cs typeface="Calibri" pitchFamily="34" charset="-120"/>
+              </a:rPr>
+              <a:t>Change all digits to the right to zero. 4,873 → 4,900 (rounded to nearest hundred). The 8 becomes 9, and 7 and 3 become 0.</a:t>
+            </a:r>
+            <a:endParaRPr lang="en-US" sz="1100" dirty="0"/>
           </a:p>
         </p:txBody>
       </p:sp>
@@ -1798,6 +2145,466 @@
 <file path=ppt/slides/slide4.xml><?xml version="1.0" encoding="utf-8"?>
 <p:sld xmlns:a="http://schemas.openxmlformats.org/drawingml/2006/main" xmlns:r="http://schemas.openxmlformats.org/officeDocument/2006/relationships" xmlns:p="http://schemas.openxmlformats.org/presentationml/2006/main">
   <p:cSld name="Slide 4">
+    <p:bg>
+      <p:bgPr>
+        <a:solidFill>
+          <a:srgbClr val="FAF8F5"/>
+        </a:solidFill>
+      </p:bgPr>
+    </p:bg>
+    <p:spTree>
+      <p:nvGrpSpPr>
+        <p:cNvPr id="1" name=""/>
+        <p:cNvGrpSpPr/>
+        <p:nvPr/>
+      </p:nvGrpSpPr>
+      <p:grpSpPr>
+        <a:xfrm>
+          <a:off x="0" y="0"/>
+          <a:ext cx="0" cy="0"/>
+          <a:chOff x="0" y="0"/>
+          <a:chExt cx="0" cy="0"/>
+        </a:xfrm>
+      </p:grpSpPr>
+      <p:sp>
+        <p:nvSpPr>
+          <p:cNvPr id="2" name="Shape 0"/>
+          <p:cNvSpPr/>
+          <p:nvPr/>
+        </p:nvSpPr>
+        <p:spPr>
+          <a:xfrm>
+            <a:off x="0" y="0"/>
+            <a:ext cx="9144000" cy="54864"/>
+          </a:xfrm>
+          <a:prstGeom prst="rect">
+            <a:avLst/>
+          </a:prstGeom>
+          <a:solidFill>
+            <a:srgbClr val="2A9D8F"/>
+          </a:solidFill>
+          <a:ln/>
+        </p:spPr>
+      </p:sp>
+      <p:sp>
+        <p:nvSpPr>
+          <p:cNvPr id="3" name="Text 1"/>
+          <p:cNvSpPr/>
+          <p:nvPr/>
+        </p:nvSpPr>
+        <p:spPr>
+          <a:xfrm>
+            <a:off x="7772400" y="4709160"/>
+            <a:ext cx="1097280" cy="320040"/>
+          </a:xfrm>
+          <a:prstGeom prst="rect">
+            <a:avLst/>
+          </a:prstGeom>
+          <a:noFill/>
+          <a:ln/>
+        </p:spPr>
+        <p:txBody>
+          <a:bodyPr wrap="square" rtlCol="0" anchor="ctr"/>
+          <a:lstStyle/>
+          <a:p>
+            <a:pPr algn="r" indent="0" marL="0">
+              <a:buNone/>
+            </a:pPr>
+            <a:r>
+              <a:rPr lang="en-US" sz="900" dirty="0">
+                <a:solidFill>
+                  <a:srgbClr val="6B6660"/>
+                </a:solidFill>
+                <a:latin typeface="Calibri" pitchFamily="34" charset="0"/>
+                <a:ea typeface="Calibri" pitchFamily="34" charset="-122"/>
+                <a:cs typeface="Calibri" pitchFamily="34" charset="-120"/>
+              </a:rPr>
+              <a:t>4 / 5</a:t>
+            </a:r>
+            <a:endParaRPr lang="en-US" sz="900" dirty="0"/>
+          </a:p>
+        </p:txBody>
+      </p:sp>
+      <p:sp>
+        <p:nvSpPr>
+          <p:cNvPr id="4" name="Text 2"/>
+          <p:cNvSpPr/>
+          <p:nvPr/>
+        </p:nvSpPr>
+        <p:spPr>
+          <a:xfrm>
+            <a:off x="457200" y="274320"/>
+            <a:ext cx="8229600" cy="640080"/>
+          </a:xfrm>
+          <a:prstGeom prst="rect">
+            <a:avLst/>
+          </a:prstGeom>
+          <a:noFill/>
+          <a:ln/>
+        </p:spPr>
+        <p:txBody>
+          <a:bodyPr wrap="square" rtlCol="0" anchor="ctr"/>
+          <a:lstStyle/>
+          <a:p>
+            <a:pPr indent="0" marL="0">
+              <a:buNone/>
+            </a:pPr>
+            <a:r>
+              <a:rPr lang="en-US" sz="2600" b="1" dirty="0">
+                <a:solidFill>
+                  <a:srgbClr val="1B2A4A"/>
+                </a:solidFill>
+                <a:latin typeface="Georgia" pitchFamily="34" charset="0"/>
+                <a:ea typeface="Georgia" pitchFamily="34" charset="-122"/>
+                <a:cs typeface="Georgia" pitchFamily="34" charset="-120"/>
+              </a:rPr>
+              <a:t>Examples</a:t>
+            </a:r>
+            <a:endParaRPr lang="en-US" sz="2600" dirty="0"/>
+          </a:p>
+        </p:txBody>
+      </p:sp>
+      <p:sp>
+        <p:nvSpPr>
+          <p:cNvPr id="5" name="Text 3"/>
+          <p:cNvSpPr/>
+          <p:nvPr/>
+        </p:nvSpPr>
+        <p:spPr>
+          <a:xfrm>
+            <a:off x="457200" y="1188720"/>
+            <a:ext cx="3840480" cy="3474720"/>
+          </a:xfrm>
+          <a:prstGeom prst="rect">
+            <a:avLst/>
+          </a:prstGeom>
+          <a:noFill/>
+          <a:ln/>
+        </p:spPr>
+        <p:txBody>
+          <a:bodyPr wrap="square" rtlCol="0" anchor="t"/>
+          <a:lstStyle/>
+          <a:p>
+            <a:pPr marL="342900" indent="-342900">
+              <a:spcAft>
+                <a:spcPts val="600"/>
+              </a:spcAft>
+              <a:buSzPct val="100000"/>
+              <a:buChar char="•"/>
+            </a:pPr>
+            <a:r>
+              <a:rPr lang="en-US" sz="1400" dirty="0">
+                <a:solidFill>
+                  <a:srgbClr val="3D3A36"/>
+                </a:solidFill>
+                <a:latin typeface="Calibri" pitchFamily="34" charset="0"/>
+                <a:ea typeface="Calibri" pitchFamily="34" charset="-122"/>
+                <a:cs typeface="Calibri" pitchFamily="34" charset="-120"/>
+              </a:rPr>
+              <a:t>3,456 → nearest 10 = 3,460 (check 6 ≥ 5: round up)</a:t>
+            </a:r>
+            <a:endParaRPr lang="en-US" sz="1400" dirty="0"/>
+          </a:p>
+          <a:p>
+            <a:pPr marL="342900" indent="-342900">
+              <a:spcAft>
+                <a:spcPts val="600"/>
+              </a:spcAft>
+              <a:buSzPct val="100000"/>
+              <a:buChar char="•"/>
+            </a:pPr>
+            <a:r>
+              <a:rPr lang="en-US" sz="1400" dirty="0">
+                <a:solidFill>
+                  <a:srgbClr val="3D3A36"/>
+                </a:solidFill>
+                <a:latin typeface="Calibri" pitchFamily="34" charset="0"/>
+                <a:ea typeface="Calibri" pitchFamily="34" charset="-122"/>
+                <a:cs typeface="Calibri" pitchFamily="34" charset="-120"/>
+              </a:rPr>
+              <a:t>3,456 → nearest 100 = 3,500 (check 5 ≥ 5: round up)</a:t>
+            </a:r>
+            <a:endParaRPr lang="en-US" sz="1400" dirty="0"/>
+          </a:p>
+          <a:p>
+            <a:pPr marL="342900" indent="-342900">
+              <a:spcAft>
+                <a:spcPts val="600"/>
+              </a:spcAft>
+              <a:buSzPct val="100000"/>
+              <a:buChar char="•"/>
+            </a:pPr>
+            <a:r>
+              <a:rPr lang="en-US" sz="1400" dirty="0">
+                <a:solidFill>
+                  <a:srgbClr val="3D3A36"/>
+                </a:solidFill>
+                <a:latin typeface="Calibri" pitchFamily="34" charset="0"/>
+                <a:ea typeface="Calibri" pitchFamily="34" charset="-122"/>
+                <a:cs typeface="Calibri" pitchFamily="34" charset="-120"/>
+              </a:rPr>
+              <a:t>3,456 → nearest 1000 = 3,000 (check 4 &lt; 5: round down)</a:t>
+            </a:r>
+            <a:endParaRPr lang="en-US" sz="1400" dirty="0"/>
+          </a:p>
+          <a:p>
+            <a:pPr marL="342900" indent="-342900">
+              <a:spcAft>
+                <a:spcPts val="600"/>
+              </a:spcAft>
+              <a:buSzPct val="100000"/>
+              <a:buChar char="•"/>
+            </a:pPr>
+            <a:r>
+              <a:rPr lang="en-US" sz="1400" dirty="0">
+                <a:solidFill>
+                  <a:srgbClr val="3D3A36"/>
+                </a:solidFill>
+                <a:latin typeface="Calibri" pitchFamily="34" charset="0"/>
+                <a:ea typeface="Calibri" pitchFamily="34" charset="-122"/>
+                <a:cs typeface="Calibri" pitchFamily="34" charset="-120"/>
+              </a:rPr>
+              <a:t>7.83 → nearest whole = 8 (check 8 ≥ 5: round up)</a:t>
+            </a:r>
+            <a:endParaRPr lang="en-US" sz="1400" dirty="0"/>
+          </a:p>
+          <a:p>
+            <a:pPr marL="342900" indent="-342900">
+              <a:spcAft>
+                <a:spcPts val="600"/>
+              </a:spcAft>
+              <a:buSzPct val="100000"/>
+              <a:buChar char="•"/>
+            </a:pPr>
+            <a:r>
+              <a:rPr lang="en-US" sz="1400" dirty="0">
+                <a:solidFill>
+                  <a:srgbClr val="3D3A36"/>
+                </a:solidFill>
+                <a:latin typeface="Calibri" pitchFamily="34" charset="0"/>
+                <a:ea typeface="Calibri" pitchFamily="34" charset="-122"/>
+                <a:cs typeface="Calibri" pitchFamily="34" charset="-120"/>
+              </a:rPr>
+              <a:t>12.347 → 1 dp = 12.3 (check 4 &lt; 5: round down)</a:t>
+            </a:r>
+            <a:endParaRPr lang="en-US" sz="1400" dirty="0"/>
+          </a:p>
+        </p:txBody>
+      </p:sp>
+      <p:sp>
+        <p:nvSpPr>
+          <p:cNvPr id="6" name="Shape 4"/>
+          <p:cNvSpPr/>
+          <p:nvPr/>
+        </p:nvSpPr>
+        <p:spPr>
+          <a:xfrm>
+            <a:off x="4846320" y="1188720"/>
+            <a:ext cx="3840480" cy="3474720"/>
+          </a:xfrm>
+          <a:prstGeom prst="rect">
+            <a:avLst/>
+          </a:prstGeom>
+          <a:solidFill>
+            <a:srgbClr val="FFFFFF"/>
+          </a:solidFill>
+          <a:ln w="12700">
+            <a:solidFill>
+              <a:srgbClr val="E5E2DC"/>
+            </a:solidFill>
+            <a:prstDash val="solid"/>
+          </a:ln>
+          <a:effectLst>
+            <a:outerShdw sx="100000" sy="100000" kx="0" ky="0" algn="bl" rotWithShape="0" blurRad="50800" dist="25400" dir="8100000">
+              <a:srgbClr val="000000">
+                <a:alpha val="10000"/>
+              </a:srgbClr>
+            </a:outerShdw>
+          </a:effectLst>
+        </p:spPr>
+      </p:sp>
+      <p:sp>
+        <p:nvSpPr>
+          <p:cNvPr id="7" name="Shape 5"/>
+          <p:cNvSpPr/>
+          <p:nvPr/>
+        </p:nvSpPr>
+        <p:spPr>
+          <a:xfrm>
+            <a:off x="4846320" y="1188720"/>
+            <a:ext cx="3840480" cy="54864"/>
+          </a:xfrm>
+          <a:prstGeom prst="rect">
+            <a:avLst/>
+          </a:prstGeom>
+          <a:solidFill>
+            <a:srgbClr val="2A9D8F"/>
+          </a:solidFill>
+          <a:ln/>
+        </p:spPr>
+      </p:sp>
+      <p:sp>
+        <p:nvSpPr>
+          <p:cNvPr id="8" name="Text 6"/>
+          <p:cNvSpPr/>
+          <p:nvPr/>
+        </p:nvSpPr>
+        <p:spPr>
+          <a:xfrm>
+            <a:off x="5120640" y="1371600"/>
+            <a:ext cx="3291840" cy="3108960"/>
+          </a:xfrm>
+          <a:prstGeom prst="rect">
+            <a:avLst/>
+          </a:prstGeom>
+          <a:noFill/>
+          <a:ln/>
+        </p:spPr>
+        <p:txBody>
+          <a:bodyPr wrap="square" rtlCol="0" anchor="t"/>
+          <a:lstStyle/>
+          <a:p>
+            <a:pPr indent="0" marL="0">
+              <a:spcAft>
+                <a:spcPts val="400"/>
+              </a:spcAft>
+              <a:buNone/>
+            </a:pPr>
+            <a:r>
+              <a:rPr lang="en-US" sz="1600" b="1" dirty="0">
+                <a:solidFill>
+                  <a:srgbClr val="1B2A4A"/>
+                </a:solidFill>
+                <a:latin typeface="Calibri" pitchFamily="34" charset="0"/>
+                <a:ea typeface="Calibri" pitchFamily="34" charset="-122"/>
+                <a:cs typeface="Calibri" pitchFamily="34" charset="-120"/>
+              </a:rPr>
+              <a:t>Estimation</a:t>
+            </a:r>
+            <a:endParaRPr lang="en-US" sz="1600" dirty="0"/>
+          </a:p>
+          <a:p>
+            <a:pPr indent="0" marL="0">
+              <a:spcAft>
+                <a:spcPts val="400"/>
+              </a:spcAft>
+              <a:buNone/>
+            </a:pPr>
+            <a:endParaRPr lang="en-US" sz="1600" dirty="0"/>
+          </a:p>
+          <a:p>
+            <a:pPr indent="0" marL="0">
+              <a:spcAft>
+                <a:spcPts val="400"/>
+              </a:spcAft>
+              <a:buNone/>
+            </a:pPr>
+            <a:r>
+              <a:rPr lang="en-US" sz="1300" dirty="0">
+                <a:solidFill>
+                  <a:srgbClr val="3D3A36"/>
+                </a:solidFill>
+                <a:latin typeface="Calibri" pitchFamily="34" charset="0"/>
+                <a:ea typeface="Calibri" pitchFamily="34" charset="-122"/>
+                <a:cs typeface="Calibri" pitchFamily="34" charset="-120"/>
+              </a:rPr>
+              <a:t>Estimate by rounding each number before calculating</a:t>
+            </a:r>
+            <a:endParaRPr lang="en-US" sz="1600" dirty="0"/>
+          </a:p>
+          <a:p>
+            <a:pPr indent="0" marL="0">
+              <a:spcAft>
+                <a:spcPts val="400"/>
+              </a:spcAft>
+              <a:buNone/>
+            </a:pPr>
+            <a:r>
+              <a:rPr lang="en-US" sz="1300" dirty="0">
+                <a:solidFill>
+                  <a:srgbClr val="3D3A36"/>
+                </a:solidFill>
+                <a:latin typeface="Calibri" pitchFamily="34" charset="0"/>
+                <a:ea typeface="Calibri" pitchFamily="34" charset="-122"/>
+                <a:cs typeface="Calibri" pitchFamily="34" charset="-120"/>
+              </a:rPr>
+              <a:t>67 × 42 ≈ 70 × 40 = 2,800</a:t>
+            </a:r>
+            <a:endParaRPr lang="en-US" sz="1600" dirty="0"/>
+          </a:p>
+          <a:p>
+            <a:pPr indent="0" marL="0">
+              <a:spcAft>
+                <a:spcPts val="400"/>
+              </a:spcAft>
+              <a:buNone/>
+            </a:pPr>
+            <a:r>
+              <a:rPr lang="en-US" sz="1300" dirty="0">
+                <a:solidFill>
+                  <a:srgbClr val="3D3A36"/>
+                </a:solidFill>
+                <a:latin typeface="Calibri" pitchFamily="34" charset="0"/>
+                <a:ea typeface="Calibri" pitchFamily="34" charset="-122"/>
+                <a:cs typeface="Calibri" pitchFamily="34" charset="-120"/>
+              </a:rPr>
+              <a:t>Check: actual answer is 2,814 — close!</a:t>
+            </a:r>
+            <a:endParaRPr lang="en-US" sz="1600" dirty="0"/>
+          </a:p>
+          <a:p>
+            <a:pPr indent="0" marL="0">
+              <a:spcAft>
+                <a:spcPts val="400"/>
+              </a:spcAft>
+              <a:buNone/>
+            </a:pPr>
+            <a:r>
+              <a:rPr lang="en-US" sz="1300" dirty="0">
+                <a:solidFill>
+                  <a:srgbClr val="3D3A36"/>
+                </a:solidFill>
+                <a:latin typeface="Calibri" pitchFamily="34" charset="0"/>
+                <a:ea typeface="Calibri" pitchFamily="34" charset="-122"/>
+                <a:cs typeface="Calibri" pitchFamily="34" charset="-120"/>
+              </a:rPr>
+              <a:t>892 + 3,107 ≈ 900 + 3,100 = 4,000</a:t>
+            </a:r>
+            <a:endParaRPr lang="en-US" sz="1600" dirty="0"/>
+          </a:p>
+          <a:p>
+            <a:pPr indent="0" marL="0">
+              <a:spcAft>
+                <a:spcPts val="400"/>
+              </a:spcAft>
+              <a:buNone/>
+            </a:pPr>
+            <a:r>
+              <a:rPr lang="en-US" sz="1300" dirty="0">
+                <a:solidFill>
+                  <a:srgbClr val="3D3A36"/>
+                </a:solidFill>
+                <a:latin typeface="Calibri" pitchFamily="34" charset="0"/>
+                <a:ea typeface="Calibri" pitchFamily="34" charset="-122"/>
+                <a:cs typeface="Calibri" pitchFamily="34" charset="-120"/>
+              </a:rPr>
+              <a:t>Estimation helps you spot calculator mistakes</a:t>
+            </a:r>
+            <a:endParaRPr lang="en-US" sz="1600" dirty="0"/>
+          </a:p>
+        </p:txBody>
+      </p:sp>
+    </p:spTree>
+  </p:cSld>
+  <p:clrMapOvr>
+    <a:masterClrMapping/>
+  </p:clrMapOvr>
+</p:sld>
+</file>
+
+<file path=ppt/slides/slide5.xml><?xml version="1.0" encoding="utf-8"?>
+<p:sld xmlns:a="http://schemas.openxmlformats.org/drawingml/2006/main" xmlns:r="http://schemas.openxmlformats.org/officeDocument/2006/relationships" xmlns:p="http://schemas.openxmlformats.org/presentationml/2006/main">
+  <p:cSld name="Slide 5">
     <p:bg>
       <p:bgPr>
         <a:solidFill>
@@ -1828,13 +2635,13 @@
         <p:spPr>
           <a:xfrm>
             <a:off x="0" y="0"/>
-            <a:ext cx="9144000" cy="54864"/>
-          </a:xfrm>
-          <a:prstGeom prst="rect">
-            <a:avLst/>
-          </a:prstGeom>
-          <a:solidFill>
-            <a:srgbClr val="2A9D8F"/>
+            <a:ext cx="109728" cy="5143500"/>
+          </a:xfrm>
+          <a:prstGeom prst="rect">
+            <a:avLst/>
+          </a:prstGeom>
+          <a:solidFill>
+            <a:srgbClr val="E9C46A"/>
           </a:solidFill>
           <a:ln/>
         </p:spPr>
@@ -1847,8 +2654,8 @@
         </p:nvSpPr>
         <p:spPr>
           <a:xfrm>
-            <a:off x="548640" y="457200"/>
-            <a:ext cx="8046720" cy="640080"/>
+            <a:off x="731520" y="457200"/>
+            <a:ext cx="7772400" cy="731520"/>
           </a:xfrm>
           <a:prstGeom prst="rect">
             <a:avLst/>
@@ -1864,7 +2671,7 @@
               <a:buNone/>
             </a:pPr>
             <a:r>
-              <a:rPr lang="en-US" sz="2800" b="1" dirty="0">
+              <a:rPr lang="en-US" sz="3200" b="1" dirty="0">
                 <a:solidFill>
                   <a:srgbClr val="FFFFFF"/>
                 </a:solidFill>
@@ -1874,7 +2681,7 @@
               </a:rPr>
               <a:t>Key Takeaways</a:t>
             </a:r>
-            <a:endParaRPr lang="en-US" sz="2800" dirty="0"/>
+            <a:endParaRPr lang="en-US" sz="3200" dirty="0"/>
           </a:p>
         </p:txBody>
       </p:sp>
@@ -1886,8 +2693,8 @@
         </p:nvSpPr>
         <p:spPr>
           <a:xfrm>
-            <a:off x="731520" y="1371600"/>
-            <a:ext cx="7680960" cy="3200400"/>
+            <a:off x="731520" y="1463040"/>
+            <a:ext cx="7772400" cy="3200400"/>
           </a:xfrm>
           <a:prstGeom prst="rect">
             <a:avLst/>
@@ -1907,7 +2714,7 @@
               <a:buChar char="•"/>
             </a:pPr>
             <a:r>
-              <a:rPr lang="en-US" sz="1600" dirty="0">
+              <a:rPr lang="en-US" sz="1500" dirty="0">
                 <a:solidFill>
                   <a:srgbClr val="CADCFC"/>
                 </a:solidFill>
@@ -1915,9 +2722,9 @@
                 <a:ea typeface="Calibri" pitchFamily="34" charset="-122"/>
                 <a:cs typeface="Calibri" pitchFamily="34" charset="-120"/>
               </a:rPr>
-              <a:t>5 or more → round up; less than 5 → round down</a:t>
-            </a:r>
-            <a:endParaRPr lang="en-US" sz="1600" dirty="0"/>
+              <a:t>Round to make numbers simpler; look at digit to the right</a:t>
+            </a:r>
+            <a:endParaRPr lang="en-US" sz="1500" dirty="0"/>
           </a:p>
           <a:p>
             <a:pPr marL="342900" indent="-342900">
@@ -1928,7 +2735,7 @@
               <a:buChar char="•"/>
             </a:pPr>
             <a:r>
-              <a:rPr lang="en-US" sz="1600" dirty="0">
+              <a:rPr lang="en-US" sz="1500" dirty="0">
                 <a:solidFill>
                   <a:srgbClr val="CADCFC"/>
                 </a:solidFill>
@@ -1936,9 +2743,9 @@
                 <a:ea typeface="Calibri" pitchFamily="34" charset="-122"/>
                 <a:cs typeface="Calibri" pitchFamily="34" charset="-120"/>
               </a:rPr>
-              <a:t>Look at the digit to the RIGHT of your rounding place</a:t>
-            </a:r>
-            <a:endParaRPr lang="en-US" sz="1600" dirty="0"/>
+              <a:t>5 or more → round up; less than 5 → round down</a:t>
+            </a:r>
+            <a:endParaRPr lang="en-US" sz="1500" dirty="0"/>
           </a:p>
           <a:p>
             <a:pPr marL="342900" indent="-342900">
@@ -1949,7 +2756,7 @@
               <a:buChar char="•"/>
             </a:pPr>
             <a:r>
-              <a:rPr lang="en-US" sz="1600" dirty="0">
+              <a:rPr lang="en-US" sz="1500" dirty="0">
                 <a:solidFill>
                   <a:srgbClr val="CADCFC"/>
                 </a:solidFill>
@@ -1957,9 +2764,9 @@
                 <a:ea typeface="Calibri" pitchFamily="34" charset="-122"/>
                 <a:cs typeface="Calibri" pitchFamily="34" charset="-120"/>
               </a:rPr>
-              <a:t>Estimation = round first, then calculate (quick check)</a:t>
-            </a:r>
-            <a:endParaRPr lang="en-US" sz="1600" dirty="0"/>
+              <a:t>Replace all digits to the right with zeros</a:t>
+            </a:r>
+            <a:endParaRPr lang="en-US" sz="1500" dirty="0"/>
           </a:p>
           <a:p>
             <a:pPr marL="342900" indent="-342900">
@@ -1970,7 +2777,7 @@
               <a:buChar char="•"/>
             </a:pPr>
             <a:r>
-              <a:rPr lang="en-US" sz="1600" dirty="0">
+              <a:rPr lang="en-US" sz="1500" dirty="0">
                 <a:solidFill>
                   <a:srgbClr val="CADCFC"/>
                 </a:solidFill>
@@ -1978,9 +2785,30 @@
                 <a:ea typeface="Calibri" pitchFamily="34" charset="-122"/>
                 <a:cs typeface="Calibri" pitchFamily="34" charset="-120"/>
               </a:rPr>
-              <a:t>Always useful for checking if answers are reasonable</a:t>
-            </a:r>
-            <a:endParaRPr lang="en-US" sz="1600" dirty="0"/>
+              <a:t>Estimation: round first, then calculate</a:t>
+            </a:r>
+            <a:endParaRPr lang="en-US" sz="1500" dirty="0"/>
+          </a:p>
+          <a:p>
+            <a:pPr marL="342900" indent="-342900">
+              <a:spcAft>
+                <a:spcPts val="1000"/>
+              </a:spcAft>
+              <a:buSzPct val="100000"/>
+              <a:buChar char="•"/>
+            </a:pPr>
+            <a:r>
+              <a:rPr lang="en-US" sz="1500" dirty="0">
+                <a:solidFill>
+                  <a:srgbClr val="CADCFC"/>
+                </a:solidFill>
+                <a:latin typeface="Calibri" pitchFamily="34" charset="0"/>
+                <a:ea typeface="Calibri" pitchFamily="34" charset="-122"/>
+                <a:cs typeface="Calibri" pitchFamily="34" charset="-120"/>
+              </a:rPr>
+              <a:t>Use estimation to check if your answer is reasonable</a:t>
+            </a:r>
+            <a:endParaRPr lang="en-US" sz="1500" dirty="0"/>
           </a:p>
         </p:txBody>
       </p:sp>
@@ -1992,8 +2820,8 @@
         </p:nvSpPr>
         <p:spPr>
           <a:xfrm>
-            <a:off x="548640" y="4572000"/>
-            <a:ext cx="3657600" cy="274320"/>
+            <a:off x="731520" y="4572000"/>
+            <a:ext cx="7772400" cy="365760"/>
           </a:xfrm>
           <a:prstGeom prst="rect">
             <a:avLst/>
@@ -2009,14 +2837,17 @@
               <a:buNone/>
             </a:pPr>
             <a:r>
-              <a:rPr lang="en-US" sz="1000" dirty="0">
-                <a:solidFill>
-                  <a:srgbClr val="6B6660"/>
-                </a:solidFill>
+              <a:rPr lang="en-US" sz="1100" dirty="0">
+                <a:solidFill>
+                  <a:srgbClr val="E9C46A"/>
+                </a:solidFill>
+                <a:latin typeface="Calibri" pitchFamily="34" charset="0"/>
+                <a:ea typeface="Calibri" pitchFamily="34" charset="-122"/>
+                <a:cs typeface="Calibri" pitchFamily="34" charset="-120"/>
               </a:rPr>
               <a:t>mrzocchi.com</a:t>
             </a:r>
-            <a:endParaRPr lang="en-US" sz="1000" dirty="0"/>
+            <a:endParaRPr lang="en-US" sz="1100" dirty="0"/>
           </a:p>
         </p:txBody>
       </p:sp>

--- a/static/ppts/G6_Math_T1_Rounding.pptx
+++ b/static/ppts/G6_Math_T1_Rounding.pptx
@@ -10,9 +10,11 @@
     <p:sldId id="258" r:id="rId4"/>
     <p:sldId id="259" r:id="rId5"/>
     <p:sldId id="260" r:id="rId6"/>
+    <p:sldId id="261" r:id="rId7"/>
+    <p:sldId id="262" r:id="rId8"/>
   </p:sldIdLst>
   <p:notesMasterIdLst>
-    <p:notesMasterId r:id="rId7"/>
+    <p:notesMasterId r:id="rId9"/>
   </p:notesMasterIdLst>
   <p:sldSz cx="9144000" cy="5143500"/>
   <p:notesSz cx="5143500" cy="9144000"/>
@@ -900,6 +902,182 @@
 </p:notes>
 </file>
 
+<file path=ppt/notesSlides/notesSlide6.xml><?xml version="1.0" encoding="utf-8"?>
+<p:notes xmlns:a="http://schemas.openxmlformats.org/drawingml/2006/main" xmlns:r="http://schemas.openxmlformats.org/officeDocument/2006/relationships" xmlns:p="http://schemas.openxmlformats.org/presentationml/2006/main">
+  <p:cSld>
+    <p:spTree>
+      <p:nvGrpSpPr>
+        <p:cNvPr id="1" name=""/>
+        <p:cNvGrpSpPr/>
+        <p:nvPr/>
+      </p:nvGrpSpPr>
+      <p:grpSpPr>
+        <a:xfrm>
+          <a:off x="0" y="0"/>
+          <a:ext cx="0" cy="0"/>
+          <a:chOff x="0" y="0"/>
+          <a:chExt cx="0" cy="0"/>
+        </a:xfrm>
+      </p:grpSpPr>
+      <p:sp>
+        <p:nvSpPr>
+          <p:cNvPr id="2" name="Slide Image Placeholder 1"/>
+          <p:cNvSpPr>
+            <a:spLocks noGrp="1" noRot="1" noChangeAspect="1"/>
+          </p:cNvSpPr>
+          <p:nvPr>
+            <p:ph type="sldImg"/>
+          </p:nvPr>
+        </p:nvSpPr>
+        <p:spPr/>
+      </p:sp>
+      <p:sp>
+        <p:nvSpPr>
+          <p:cNvPr id="3" name="Notes Placeholder 2"/>
+          <p:cNvSpPr>
+            <a:spLocks noGrp="1"/>
+          </p:cNvSpPr>
+          <p:nvPr>
+            <p:ph type="body" idx="1"/>
+          </p:nvPr>
+        </p:nvSpPr>
+        <p:spPr/>
+        <p:txBody>
+          <a:bodyPr/>
+          <a:lstStyle/>
+          <a:p>
+            <a:r>
+              <a:rPr lang="en-US" dirty="0"/>
+              <a:t/>
+            </a:r>
+            <a:endParaRPr lang="en-US" dirty="0"/>
+          </a:p>
+        </p:txBody>
+      </p:sp>
+      <p:sp>
+        <p:nvSpPr>
+          <p:cNvPr id="4" name="Slide Number Placeholder 3"/>
+          <p:cNvSpPr>
+            <a:spLocks noGrp="1"/>
+          </p:cNvSpPr>
+          <p:nvPr>
+            <p:ph type="sldNum" sz="quarter" idx="10"/>
+          </p:nvPr>
+        </p:nvSpPr>
+        <p:spPr/>
+        <p:txBody>
+          <a:bodyPr/>
+          <a:lstStyle/>
+          <a:p>
+            <a:fld id="{F7021451-1387-4CA6-816F-3879F97B5CBC}" type="slidenum">
+              <a:rPr lang="en-US"/>
+              <a:t>6</a:t>
+            </a:fld>
+            <a:endParaRPr lang="en-US"/>
+          </a:p>
+        </p:txBody>
+      </p:sp>
+    </p:spTree>
+    <p:extLst>
+      <p:ext uri="{BB962C8B-B14F-4D97-AF65-F5344CB8AC3E}">
+        <p14:creationId xmlns:p14="http://schemas.microsoft.com/office/powerpoint/2010/main" val="1024086991"/>
+      </p:ext>
+    </p:extLst>
+  </p:cSld>
+  <p:clrMapOvr>
+    <a:masterClrMapping/>
+  </p:clrMapOvr>
+</p:notes>
+</file>
+
+<file path=ppt/notesSlides/notesSlide7.xml><?xml version="1.0" encoding="utf-8"?>
+<p:notes xmlns:a="http://schemas.openxmlformats.org/drawingml/2006/main" xmlns:r="http://schemas.openxmlformats.org/officeDocument/2006/relationships" xmlns:p="http://schemas.openxmlformats.org/presentationml/2006/main">
+  <p:cSld>
+    <p:spTree>
+      <p:nvGrpSpPr>
+        <p:cNvPr id="1" name=""/>
+        <p:cNvGrpSpPr/>
+        <p:nvPr/>
+      </p:nvGrpSpPr>
+      <p:grpSpPr>
+        <a:xfrm>
+          <a:off x="0" y="0"/>
+          <a:ext cx="0" cy="0"/>
+          <a:chOff x="0" y="0"/>
+          <a:chExt cx="0" cy="0"/>
+        </a:xfrm>
+      </p:grpSpPr>
+      <p:sp>
+        <p:nvSpPr>
+          <p:cNvPr id="2" name="Slide Image Placeholder 1"/>
+          <p:cNvSpPr>
+            <a:spLocks noGrp="1" noRot="1" noChangeAspect="1"/>
+          </p:cNvSpPr>
+          <p:nvPr>
+            <p:ph type="sldImg"/>
+          </p:nvPr>
+        </p:nvSpPr>
+        <p:spPr/>
+      </p:sp>
+      <p:sp>
+        <p:nvSpPr>
+          <p:cNvPr id="3" name="Notes Placeholder 2"/>
+          <p:cNvSpPr>
+            <a:spLocks noGrp="1"/>
+          </p:cNvSpPr>
+          <p:nvPr>
+            <p:ph type="body" idx="1"/>
+          </p:nvPr>
+        </p:nvSpPr>
+        <p:spPr/>
+        <p:txBody>
+          <a:bodyPr/>
+          <a:lstStyle/>
+          <a:p>
+            <a:r>
+              <a:rPr lang="en-US" dirty="0"/>
+              <a:t/>
+            </a:r>
+            <a:endParaRPr lang="en-US" dirty="0"/>
+          </a:p>
+        </p:txBody>
+      </p:sp>
+      <p:sp>
+        <p:nvSpPr>
+          <p:cNvPr id="4" name="Slide Number Placeholder 3"/>
+          <p:cNvSpPr>
+            <a:spLocks noGrp="1"/>
+          </p:cNvSpPr>
+          <p:nvPr>
+            <p:ph type="sldNum" sz="quarter" idx="10"/>
+          </p:nvPr>
+        </p:nvSpPr>
+        <p:spPr/>
+        <p:txBody>
+          <a:bodyPr/>
+          <a:lstStyle/>
+          <a:p>
+            <a:fld id="{F7021451-1387-4CA6-816F-3879F97B5CBC}" type="slidenum">
+              <a:rPr lang="en-US"/>
+              <a:t>7</a:t>
+            </a:fld>
+            <a:endParaRPr lang="en-US"/>
+          </a:p>
+        </p:txBody>
+      </p:sp>
+    </p:spTree>
+    <p:extLst>
+      <p:ext uri="{BB962C8B-B14F-4D97-AF65-F5344CB8AC3E}">
+        <p14:creationId xmlns:p14="http://schemas.microsoft.com/office/powerpoint/2010/main" val="1024086991"/>
+      </p:ext>
+    </p:extLst>
+  </p:cSld>
+  <p:clrMapOvr>
+    <a:masterClrMapping/>
+  </p:clrMapOvr>
+</p:notes>
+</file>
+
 <file path=ppt/slideLayouts/slideLayout1.xml><?xml version="1.0" encoding="utf-8"?>
 <p:sldLayout xmlns:a="http://schemas.openxmlformats.org/drawingml/2006/main" xmlns:r="http://schemas.openxmlformats.org/officeDocument/2006/relationships" xmlns:p="http://schemas.openxmlformats.org/presentationml/2006/main" preserve="1">
   <p:cSld name="DEFAULT">
@@ -1210,13 +1388,6 @@
 <file path=ppt/slides/slide1.xml><?xml version="1.0" encoding="utf-8"?>
 <p:sld xmlns:a="http://schemas.openxmlformats.org/drawingml/2006/main" xmlns:r="http://schemas.openxmlformats.org/officeDocument/2006/relationships" xmlns:p="http://schemas.openxmlformats.org/presentationml/2006/main">
   <p:cSld name="Slide 1">
-    <p:bg>
-      <p:bgPr>
-        <a:solidFill>
-          <a:srgbClr val="1B2A4A"/>
-        </a:solidFill>
-      </p:bgPr>
-    </p:bg>
     <p:spTree>
       <p:nvGrpSpPr>
         <p:cNvPr id="1" name=""/>
@@ -1240,7 +1411,27 @@
         <p:spPr>
           <a:xfrm>
             <a:off x="0" y="0"/>
-            <a:ext cx="109728" cy="5143500"/>
+            <a:ext cx="9144000" cy="5143500"/>
+          </a:xfrm>
+          <a:prstGeom prst="rect">
+            <a:avLst/>
+          </a:prstGeom>
+          <a:solidFill>
+            <a:srgbClr val="1B2A4A"/>
+          </a:solidFill>
+          <a:ln/>
+        </p:spPr>
+      </p:sp>
+      <p:sp>
+        <p:nvSpPr>
+          <p:cNvPr id="3" name="Shape 1"/>
+          <p:cNvSpPr/>
+          <p:nvPr/>
+        </p:nvSpPr>
+        <p:spPr>
+          <a:xfrm>
+            <a:off x="0" y="4777740"/>
+            <a:ext cx="9144000" cy="365760"/>
           </a:xfrm>
           <a:prstGeom prst="rect">
             <a:avLst/>
@@ -1253,14 +1444,36 @@
       </p:sp>
       <p:sp>
         <p:nvSpPr>
-          <p:cNvPr id="3" name="Text 1"/>
-          <p:cNvSpPr/>
-          <p:nvPr/>
-        </p:nvSpPr>
-        <p:spPr>
-          <a:xfrm>
-            <a:off x="731520" y="1097280"/>
-            <a:ext cx="7772400" cy="1371600"/>
+          <p:cNvPr id="4" name="Shape 2"/>
+          <p:cNvSpPr/>
+          <p:nvPr/>
+        </p:nvSpPr>
+        <p:spPr>
+          <a:xfrm>
+            <a:off x="6858000" y="-1371600"/>
+            <a:ext cx="4572000" cy="4572000"/>
+          </a:xfrm>
+          <a:prstGeom prst="ellipse">
+            <a:avLst/>
+          </a:prstGeom>
+          <a:solidFill>
+            <a:srgbClr val="2A9D8F">
+              <a:alpha val="12000"/>
+            </a:srgbClr>
+          </a:solidFill>
+          <a:ln/>
+        </p:spPr>
+      </p:sp>
+      <p:sp>
+        <p:nvSpPr>
+          <p:cNvPr id="5" name="Text 3"/>
+          <p:cNvSpPr/>
+          <p:nvPr/>
+        </p:nvSpPr>
+        <p:spPr>
+          <a:xfrm>
+            <a:off x="731520" y="914400"/>
+            <a:ext cx="7680960" cy="457200"/>
           </a:xfrm>
           <a:prstGeom prst="rect">
             <a:avLst/>
@@ -1276,7 +1489,46 @@
               <a:buNone/>
             </a:pPr>
             <a:r>
-              <a:rPr lang="en-US" sz="4000" b="1" dirty="0">
+              <a:rPr lang="en-US" sz="1300" b="1" spc="500" kern="0" dirty="0">
+                <a:solidFill>
+                  <a:srgbClr val="2A9D8F"/>
+                </a:solidFill>
+                <a:latin typeface="Calibri" pitchFamily="34" charset="0"/>
+                <a:ea typeface="Calibri" pitchFamily="34" charset="-122"/>
+                <a:cs typeface="Calibri" pitchFamily="34" charset="-120"/>
+              </a:rPr>
+              <a:t>GRADE 6 MATHEMATICS</a:t>
+            </a:r>
+            <a:endParaRPr lang="en-US" sz="1300" dirty="0"/>
+          </a:p>
+        </p:txBody>
+      </p:sp>
+      <p:sp>
+        <p:nvSpPr>
+          <p:cNvPr id="6" name="Text 4"/>
+          <p:cNvSpPr/>
+          <p:nvPr/>
+        </p:nvSpPr>
+        <p:spPr>
+          <a:xfrm>
+            <a:off x="731520" y="1463040"/>
+            <a:ext cx="6858000" cy="1645920"/>
+          </a:xfrm>
+          <a:prstGeom prst="rect">
+            <a:avLst/>
+          </a:prstGeom>
+          <a:noFill/>
+          <a:ln/>
+        </p:spPr>
+        <p:txBody>
+          <a:bodyPr wrap="square" rtlCol="0" anchor="t"/>
+          <a:lstStyle/>
+          <a:p>
+            <a:pPr indent="0" marL="0">
+              <a:buNone/>
+            </a:pPr>
+            <a:r>
+              <a:rPr lang="en-US" sz="3800" b="1" dirty="0">
                 <a:solidFill>
                   <a:srgbClr val="FFFFFF"/>
                 </a:solidFill>
@@ -1284,46 +1536,63 @@
                 <a:ea typeface="Georgia" pitchFamily="34" charset="-122"/>
                 <a:cs typeface="Georgia" pitchFamily="34" charset="-120"/>
               </a:rPr>
-              <a:t>Rounding &amp; Estimation</a:t>
-            </a:r>
-            <a:endParaRPr lang="en-US" sz="4000" dirty="0"/>
-          </a:p>
-        </p:txBody>
-      </p:sp>
-      <p:sp>
-        <p:nvSpPr>
-          <p:cNvPr id="4" name="Text 2"/>
-          <p:cNvSpPr/>
-          <p:nvPr/>
-        </p:nvSpPr>
-        <p:spPr>
-          <a:xfrm>
-            <a:off x="731520" y="2560320"/>
-            <a:ext cx="7772400" cy="548640"/>
-          </a:xfrm>
-          <a:prstGeom prst="rect">
-            <a:avLst/>
-          </a:prstGeom>
-          <a:noFill/>
-          <a:ln/>
-        </p:spPr>
-        <p:txBody>
-          <a:bodyPr wrap="square" rtlCol="0" anchor="ctr"/>
-          <a:lstStyle/>
+              <a:t>Rounding &amp;</a:t>
+            </a:r>
+            <a:endParaRPr lang="en-US" sz="3800" dirty="0"/>
+          </a:p>
           <a:p>
             <a:pPr indent="0" marL="0">
               <a:buNone/>
             </a:pPr>
             <a:r>
-              <a:rPr lang="en-US" sz="1600" dirty="0">
-                <a:solidFill>
-                  <a:srgbClr val="E9C46A"/>
+              <a:rPr lang="en-US" sz="3800" b="1" dirty="0">
+                <a:solidFill>
+                  <a:srgbClr val="FFFFFF"/>
+                </a:solidFill>
+                <a:latin typeface="Georgia" pitchFamily="34" charset="0"/>
+                <a:ea typeface="Georgia" pitchFamily="34" charset="-122"/>
+                <a:cs typeface="Georgia" pitchFamily="34" charset="-120"/>
+              </a:rPr>
+              <a:t>Estimation</a:t>
+            </a:r>
+            <a:endParaRPr lang="en-US" sz="3800" dirty="0"/>
+          </a:p>
+        </p:txBody>
+      </p:sp>
+      <p:sp>
+        <p:nvSpPr>
+          <p:cNvPr id="7" name="Text 5"/>
+          <p:cNvSpPr/>
+          <p:nvPr/>
+        </p:nvSpPr>
+        <p:spPr>
+          <a:xfrm>
+            <a:off x="731520" y="3200400"/>
+            <a:ext cx="6400800" cy="548640"/>
+          </a:xfrm>
+          <a:prstGeom prst="rect">
+            <a:avLst/>
+          </a:prstGeom>
+          <a:noFill/>
+          <a:ln/>
+        </p:spPr>
+        <p:txBody>
+          <a:bodyPr wrap="square" rtlCol="0" anchor="ctr"/>
+          <a:lstStyle/>
+          <a:p>
+            <a:pPr indent="0" marL="0">
+              <a:buNone/>
+            </a:pPr>
+            <a:r>
+              <a:rPr lang="en-US" sz="1600" i="1" dirty="0">
+                <a:solidFill>
+                  <a:srgbClr val="9B9690"/>
                 </a:solidFill>
                 <a:latin typeface="Calibri" pitchFamily="34" charset="0"/>
                 <a:ea typeface="Calibri" pitchFamily="34" charset="-122"/>
                 <a:cs typeface="Calibri" pitchFamily="34" charset="-120"/>
               </a:rPr>
-              <a:t>Grade 6 Mathematics · Mr Zocchi</a:t>
+              <a:t>Making numbers simpler to work with</a:t>
             </a:r>
             <a:endParaRPr lang="en-US" sz="1600" dirty="0"/>
           </a:p>
@@ -1331,36 +1600,14 @@
       </p:sp>
       <p:sp>
         <p:nvSpPr>
-          <p:cNvPr id="5" name="Shape 3"/>
-          <p:cNvSpPr/>
-          <p:nvPr/>
-        </p:nvSpPr>
-        <p:spPr>
-          <a:xfrm>
-            <a:off x="731520" y="3474720"/>
-            <a:ext cx="2011680" cy="411480"/>
-          </a:xfrm>
-          <a:prstGeom prst="roundRect">
-            <a:avLst>
-              <a:gd name="adj" fmla="val 17778"/>
-            </a:avLst>
-          </a:prstGeom>
-          <a:solidFill>
-            <a:srgbClr val="2A9D8F"/>
-          </a:solidFill>
-          <a:ln/>
-        </p:spPr>
-      </p:sp>
-      <p:sp>
-        <p:nvSpPr>
-          <p:cNvPr id="6" name="Text 4"/>
-          <p:cNvSpPr/>
-          <p:nvPr/>
-        </p:nvSpPr>
-        <p:spPr>
-          <a:xfrm>
-            <a:off x="731520" y="3474720"/>
-            <a:ext cx="2011680" cy="411480"/>
+          <p:cNvPr id="8" name="Text 6"/>
+          <p:cNvSpPr/>
+          <p:nvPr/>
+        </p:nvSpPr>
+        <p:spPr>
+          <a:xfrm>
+            <a:off x="731520" y="4297680"/>
+            <a:ext cx="2743200" cy="365760"/>
           </a:xfrm>
           <a:prstGeom prst="rect">
             <a:avLst/>
@@ -1372,21 +1619,21 @@
           <a:bodyPr wrap="square" rtlCol="0" anchor="ctr"/>
           <a:lstStyle/>
           <a:p>
-            <a:pPr algn="ctr" indent="0" marL="0">
+            <a:pPr indent="0" marL="0">
               <a:buNone/>
             </a:pPr>
             <a:r>
-              <a:rPr lang="en-US" sz="1200" b="1" dirty="0">
-                <a:solidFill>
-                  <a:srgbClr val="FFFFFF"/>
+              <a:rPr lang="en-US" sz="1100" dirty="0">
+                <a:solidFill>
+                  <a:srgbClr val="9B9690"/>
                 </a:solidFill>
                 <a:latin typeface="Calibri" pitchFamily="34" charset="0"/>
                 <a:ea typeface="Calibri" pitchFamily="34" charset="-122"/>
                 <a:cs typeface="Calibri" pitchFamily="34" charset="-120"/>
               </a:rPr>
-              <a:t>Term 1 · Number Sense</a:t>
-            </a:r>
-            <a:endParaRPr lang="en-US" sz="1200" dirty="0"/>
+              <a:t>mrzocchi.com</a:t>
+            </a:r>
+            <a:endParaRPr lang="en-US" sz="1100" dirty="0"/>
           </a:p>
         </p:txBody>
       </p:sp>
@@ -1431,7 +1678,47 @@
         <p:spPr>
           <a:xfrm>
             <a:off x="0" y="0"/>
-            <a:ext cx="9144000" cy="54864"/>
+            <a:ext cx="9144000" cy="822960"/>
+          </a:xfrm>
+          <a:prstGeom prst="rect">
+            <a:avLst/>
+          </a:prstGeom>
+          <a:solidFill>
+            <a:srgbClr val="FFFFFF"/>
+          </a:solidFill>
+          <a:ln/>
+        </p:spPr>
+      </p:sp>
+      <p:sp>
+        <p:nvSpPr>
+          <p:cNvPr id="3" name="Shape 1"/>
+          <p:cNvSpPr/>
+          <p:nvPr/>
+        </p:nvSpPr>
+        <p:spPr>
+          <a:xfrm>
+            <a:off x="0" y="804672"/>
+            <a:ext cx="9144000" cy="27432"/>
+          </a:xfrm>
+          <a:prstGeom prst="rect">
+            <a:avLst/>
+          </a:prstGeom>
+          <a:solidFill>
+            <a:srgbClr val="E5E2DC"/>
+          </a:solidFill>
+          <a:ln/>
+        </p:spPr>
+      </p:sp>
+      <p:sp>
+        <p:nvSpPr>
+          <p:cNvPr id="4" name="Shape 2"/>
+          <p:cNvSpPr/>
+          <p:nvPr/>
+        </p:nvSpPr>
+        <p:spPr>
+          <a:xfrm>
+            <a:off x="548640" y="201168"/>
+            <a:ext cx="54864" cy="420624"/>
           </a:xfrm>
           <a:prstGeom prst="rect">
             <a:avLst/>
@@ -1444,14 +1731,14 @@
       </p:sp>
       <p:sp>
         <p:nvSpPr>
-          <p:cNvPr id="3" name="Text 1"/>
-          <p:cNvSpPr/>
-          <p:nvPr/>
-        </p:nvSpPr>
-        <p:spPr>
-          <a:xfrm>
-            <a:off x="7772400" y="4709160"/>
-            <a:ext cx="1097280" cy="320040"/>
+          <p:cNvPr id="5" name="Text 3"/>
+          <p:cNvSpPr/>
+          <p:nvPr/>
+        </p:nvSpPr>
+        <p:spPr>
+          <a:xfrm>
+            <a:off x="777240" y="137160"/>
+            <a:ext cx="7772400" cy="548640"/>
           </a:xfrm>
           <a:prstGeom prst="rect">
             <a:avLst/>
@@ -1460,37 +1747,37 @@
           <a:ln/>
         </p:spPr>
         <p:txBody>
-          <a:bodyPr wrap="square" rtlCol="0" anchor="ctr"/>
-          <a:lstStyle/>
-          <a:p>
-            <a:pPr algn="r" indent="0" marL="0">
+          <a:bodyPr wrap="square" lIns="0" tIns="0" rIns="0" bIns="0" rtlCol="0" anchor="ctr"/>
+          <a:lstStyle/>
+          <a:p>
+            <a:pPr indent="0" marL="0">
               <a:buNone/>
             </a:pPr>
             <a:r>
-              <a:rPr lang="en-US" sz="900" dirty="0">
-                <a:solidFill>
-                  <a:srgbClr val="6B6660"/>
-                </a:solidFill>
-                <a:latin typeface="Calibri" pitchFamily="34" charset="0"/>
-                <a:ea typeface="Calibri" pitchFamily="34" charset="-122"/>
-                <a:cs typeface="Calibri" pitchFamily="34" charset="-120"/>
-              </a:rPr>
-              <a:t>2 / 5</a:t>
-            </a:r>
-            <a:endParaRPr lang="en-US" sz="900" dirty="0"/>
-          </a:p>
-        </p:txBody>
-      </p:sp>
-      <p:sp>
-        <p:nvSpPr>
-          <p:cNvPr id="4" name="Shape 2"/>
-          <p:cNvSpPr/>
-          <p:nvPr/>
-        </p:nvSpPr>
-        <p:spPr>
-          <a:xfrm>
-            <a:off x="1371600" y="914400"/>
-            <a:ext cx="6400800" cy="3200400"/>
+              <a:rPr lang="en-US" sz="2000" b="1" dirty="0">
+                <a:solidFill>
+                  <a:srgbClr val="1B2A4A"/>
+                </a:solidFill>
+                <a:latin typeface="Georgia" pitchFamily="34" charset="0"/>
+                <a:ea typeface="Georgia" pitchFamily="34" charset="-122"/>
+                <a:cs typeface="Georgia" pitchFamily="34" charset="-120"/>
+              </a:rPr>
+              <a:t>Key Vocabulary</a:t>
+            </a:r>
+            <a:endParaRPr lang="en-US" sz="2000" dirty="0"/>
+          </a:p>
+        </p:txBody>
+      </p:sp>
+      <p:sp>
+        <p:nvSpPr>
+          <p:cNvPr id="6" name="Shape 4"/>
+          <p:cNvSpPr/>
+          <p:nvPr/>
+        </p:nvSpPr>
+        <p:spPr>
+          <a:xfrm>
+            <a:off x="731520" y="1051560"/>
+            <a:ext cx="3657600" cy="658368"/>
           </a:xfrm>
           <a:prstGeom prst="rect">
             <a:avLst/>
@@ -1498,12 +1785,7 @@
           <a:solidFill>
             <a:srgbClr val="FFFFFF"/>
           </a:solidFill>
-          <a:ln w="12700">
-            <a:solidFill>
-              <a:srgbClr val="E5E2DC"/>
-            </a:solidFill>
-            <a:prstDash val="solid"/>
-          </a:ln>
+          <a:ln/>
           <a:effectLst>
             <a:outerShdw sx="100000" sy="100000" kx="0" ky="0" algn="bl" rotWithShape="0" blurRad="50800" dist="25400" dir="8100000">
               <a:srgbClr val="000000">
@@ -1515,14 +1797,14 @@
       </p:sp>
       <p:sp>
         <p:nvSpPr>
-          <p:cNvPr id="5" name="Shape 3"/>
-          <p:cNvSpPr/>
-          <p:nvPr/>
-        </p:nvSpPr>
-        <p:spPr>
-          <a:xfrm>
-            <a:off x="1371600" y="914400"/>
-            <a:ext cx="91440" cy="3200400"/>
+          <p:cNvPr id="7" name="Shape 5"/>
+          <p:cNvSpPr/>
+          <p:nvPr/>
+        </p:nvSpPr>
+        <p:spPr>
+          <a:xfrm>
+            <a:off x="731520" y="1051560"/>
+            <a:ext cx="54864" cy="658368"/>
           </a:xfrm>
           <a:prstGeom prst="rect">
             <a:avLst/>
@@ -1535,14 +1817,14 @@
       </p:sp>
       <p:sp>
         <p:nvSpPr>
-          <p:cNvPr id="6" name="Text 4"/>
-          <p:cNvSpPr/>
-          <p:nvPr/>
-        </p:nvSpPr>
-        <p:spPr>
-          <a:xfrm>
-            <a:off x="1828800" y="1097280"/>
-            <a:ext cx="5669280" cy="640080"/>
+          <p:cNvPr id="8" name="Text 6"/>
+          <p:cNvSpPr/>
+          <p:nvPr/>
+        </p:nvSpPr>
+        <p:spPr>
+          <a:xfrm>
+            <a:off x="914400" y="1051560"/>
+            <a:ext cx="1463040" cy="658368"/>
           </a:xfrm>
           <a:prstGeom prst="rect">
             <a:avLst/>
@@ -1551,14 +1833,14 @@
           <a:ln/>
         </p:spPr>
         <p:txBody>
-          <a:bodyPr wrap="square" rtlCol="0" anchor="ctr"/>
+          <a:bodyPr wrap="square" lIns="0" tIns="0" rIns="0" bIns="0" rtlCol="0" anchor="ctr"/>
           <a:lstStyle/>
           <a:p>
             <a:pPr indent="0" marL="0">
               <a:buNone/>
             </a:pPr>
             <a:r>
-              <a:rPr lang="en-US" sz="2400" b="1" dirty="0">
+              <a:rPr lang="en-US" sz="1300" b="1" dirty="0">
                 <a:solidFill>
                   <a:srgbClr val="1B2A4A"/>
                 </a:solidFill>
@@ -1566,22 +1848,22 @@
                 <a:ea typeface="Georgia" pitchFamily="34" charset="-122"/>
                 <a:cs typeface="Georgia" pitchFamily="34" charset="-120"/>
               </a:rPr>
-              <a:t>Why Round Numbers?</a:t>
-            </a:r>
-            <a:endParaRPr lang="en-US" sz="2400" dirty="0"/>
-          </a:p>
-        </p:txBody>
-      </p:sp>
-      <p:sp>
-        <p:nvSpPr>
-          <p:cNvPr id="7" name="Text 5"/>
-          <p:cNvSpPr/>
-          <p:nvPr/>
-        </p:nvSpPr>
-        <p:spPr>
-          <a:xfrm>
-            <a:off x="1828800" y="1828800"/>
-            <a:ext cx="5669280" cy="2011680"/>
+              <a:t>Rounding</a:t>
+            </a:r>
+            <a:endParaRPr lang="en-US" sz="1300" dirty="0"/>
+          </a:p>
+        </p:txBody>
+      </p:sp>
+      <p:sp>
+        <p:nvSpPr>
+          <p:cNvPr id="9" name="Text 7"/>
+          <p:cNvSpPr/>
+          <p:nvPr/>
+        </p:nvSpPr>
+        <p:spPr>
+          <a:xfrm>
+            <a:off x="2377440" y="1051560"/>
+            <a:ext cx="1920240" cy="658368"/>
           </a:xfrm>
           <a:prstGeom prst="rect">
             <a:avLst/>
@@ -1590,27 +1872,649 @@
           <a:ln/>
         </p:spPr>
         <p:txBody>
-          <a:bodyPr wrap="square" rtlCol="0" anchor="t"/>
+          <a:bodyPr wrap="square" lIns="0" tIns="0" rIns="0" bIns="0" rtlCol="0" anchor="ctr"/>
           <a:lstStyle/>
           <a:p>
             <a:pPr indent="0" marL="0">
-              <a:lnSpc>
-                <a:spcPct val="130000"/>
-              </a:lnSpc>
               <a:buNone/>
             </a:pPr>
             <a:r>
-              <a:rPr lang="en-US" sz="1500" dirty="0">
-                <a:solidFill>
-                  <a:srgbClr val="3D3A36"/>
+              <a:rPr lang="en-US" sz="1100" dirty="0">
+                <a:solidFill>
+                  <a:srgbClr val="6B6660"/>
                 </a:solidFill>
                 <a:latin typeface="Calibri" pitchFamily="34" charset="0"/>
                 <a:ea typeface="Calibri" pitchFamily="34" charset="-122"/>
                 <a:cs typeface="Calibri" pitchFamily="34" charset="-120"/>
               </a:rPr>
-              <a:t>Rounding makes numbers simpler and easier to work with. We round to estimate answers, check calculations, and communicate approximate values. '4,873 people attended' is easier to understand when rounded to 'about 5,000 people'.</a:t>
-            </a:r>
-            <a:endParaRPr lang="en-US" sz="1500" dirty="0"/>
+              <a:t>Replacing a number with a simpler nearby value</a:t>
+            </a:r>
+            <a:endParaRPr lang="en-US" sz="1100" dirty="0"/>
+          </a:p>
+        </p:txBody>
+      </p:sp>
+      <p:sp>
+        <p:nvSpPr>
+          <p:cNvPr id="10" name="Shape 8"/>
+          <p:cNvSpPr/>
+          <p:nvPr/>
+        </p:nvSpPr>
+        <p:spPr>
+          <a:xfrm>
+            <a:off x="4754880" y="1051560"/>
+            <a:ext cx="3657600" cy="658368"/>
+          </a:xfrm>
+          <a:prstGeom prst="rect">
+            <a:avLst/>
+          </a:prstGeom>
+          <a:solidFill>
+            <a:srgbClr val="FFFFFF"/>
+          </a:solidFill>
+          <a:ln/>
+          <a:effectLst>
+            <a:outerShdw sx="100000" sy="100000" kx="0" ky="0" algn="bl" rotWithShape="0" blurRad="50800" dist="25400" dir="8100000">
+              <a:srgbClr val="000000">
+                <a:alpha val="10000"/>
+              </a:srgbClr>
+            </a:outerShdw>
+          </a:effectLst>
+        </p:spPr>
+      </p:sp>
+      <p:sp>
+        <p:nvSpPr>
+          <p:cNvPr id="11" name="Shape 9"/>
+          <p:cNvSpPr/>
+          <p:nvPr/>
+        </p:nvSpPr>
+        <p:spPr>
+          <a:xfrm>
+            <a:off x="4754880" y="1051560"/>
+            <a:ext cx="54864" cy="658368"/>
+          </a:xfrm>
+          <a:prstGeom prst="rect">
+            <a:avLst/>
+          </a:prstGeom>
+          <a:solidFill>
+            <a:srgbClr val="2A9D8F"/>
+          </a:solidFill>
+          <a:ln/>
+        </p:spPr>
+      </p:sp>
+      <p:sp>
+        <p:nvSpPr>
+          <p:cNvPr id="12" name="Text 10"/>
+          <p:cNvSpPr/>
+          <p:nvPr/>
+        </p:nvSpPr>
+        <p:spPr>
+          <a:xfrm>
+            <a:off x="4937760" y="1051560"/>
+            <a:ext cx="1463040" cy="658368"/>
+          </a:xfrm>
+          <a:prstGeom prst="rect">
+            <a:avLst/>
+          </a:prstGeom>
+          <a:noFill/>
+          <a:ln/>
+        </p:spPr>
+        <p:txBody>
+          <a:bodyPr wrap="square" lIns="0" tIns="0" rIns="0" bIns="0" rtlCol="0" anchor="ctr"/>
+          <a:lstStyle/>
+          <a:p>
+            <a:pPr indent="0" marL="0">
+              <a:buNone/>
+            </a:pPr>
+            <a:r>
+              <a:rPr lang="en-US" sz="1300" b="1" dirty="0">
+                <a:solidFill>
+                  <a:srgbClr val="1B2A4A"/>
+                </a:solidFill>
+                <a:latin typeface="Georgia" pitchFamily="34" charset="0"/>
+                <a:ea typeface="Georgia" pitchFamily="34" charset="-122"/>
+                <a:cs typeface="Georgia" pitchFamily="34" charset="-120"/>
+              </a:rPr>
+              <a:t>Estimate</a:t>
+            </a:r>
+            <a:endParaRPr lang="en-US" sz="1300" dirty="0"/>
+          </a:p>
+        </p:txBody>
+      </p:sp>
+      <p:sp>
+        <p:nvSpPr>
+          <p:cNvPr id="13" name="Text 11"/>
+          <p:cNvSpPr/>
+          <p:nvPr/>
+        </p:nvSpPr>
+        <p:spPr>
+          <a:xfrm>
+            <a:off x="6400800" y="1051560"/>
+            <a:ext cx="1920240" cy="658368"/>
+          </a:xfrm>
+          <a:prstGeom prst="rect">
+            <a:avLst/>
+          </a:prstGeom>
+          <a:noFill/>
+          <a:ln/>
+        </p:spPr>
+        <p:txBody>
+          <a:bodyPr wrap="square" lIns="0" tIns="0" rIns="0" bIns="0" rtlCol="0" anchor="ctr"/>
+          <a:lstStyle/>
+          <a:p>
+            <a:pPr indent="0" marL="0">
+              <a:buNone/>
+            </a:pPr>
+            <a:r>
+              <a:rPr lang="en-US" sz="1100" dirty="0">
+                <a:solidFill>
+                  <a:srgbClr val="6B6660"/>
+                </a:solidFill>
+                <a:latin typeface="Calibri" pitchFamily="34" charset="0"/>
+                <a:ea typeface="Calibri" pitchFamily="34" charset="-122"/>
+                <a:cs typeface="Calibri" pitchFamily="34" charset="-120"/>
+              </a:rPr>
+              <a:t>A rough calculation using rounded numbers</a:t>
+            </a:r>
+            <a:endParaRPr lang="en-US" sz="1100" dirty="0"/>
+          </a:p>
+        </p:txBody>
+      </p:sp>
+      <p:sp>
+        <p:nvSpPr>
+          <p:cNvPr id="14" name="Shape 12"/>
+          <p:cNvSpPr/>
+          <p:nvPr/>
+        </p:nvSpPr>
+        <p:spPr>
+          <a:xfrm>
+            <a:off x="731520" y="1819656"/>
+            <a:ext cx="3657600" cy="658368"/>
+          </a:xfrm>
+          <a:prstGeom prst="rect">
+            <a:avLst/>
+          </a:prstGeom>
+          <a:solidFill>
+            <a:srgbClr val="FFFFFF"/>
+          </a:solidFill>
+          <a:ln/>
+          <a:effectLst>
+            <a:outerShdw sx="100000" sy="100000" kx="0" ky="0" algn="bl" rotWithShape="0" blurRad="50800" dist="25400" dir="8100000">
+              <a:srgbClr val="000000">
+                <a:alpha val="10000"/>
+              </a:srgbClr>
+            </a:outerShdw>
+          </a:effectLst>
+        </p:spPr>
+      </p:sp>
+      <p:sp>
+        <p:nvSpPr>
+          <p:cNvPr id="15" name="Shape 13"/>
+          <p:cNvSpPr/>
+          <p:nvPr/>
+        </p:nvSpPr>
+        <p:spPr>
+          <a:xfrm>
+            <a:off x="731520" y="1819656"/>
+            <a:ext cx="54864" cy="658368"/>
+          </a:xfrm>
+          <a:prstGeom prst="rect">
+            <a:avLst/>
+          </a:prstGeom>
+          <a:solidFill>
+            <a:srgbClr val="2A9D8F"/>
+          </a:solidFill>
+          <a:ln/>
+        </p:spPr>
+      </p:sp>
+      <p:sp>
+        <p:nvSpPr>
+          <p:cNvPr id="16" name="Text 14"/>
+          <p:cNvSpPr/>
+          <p:nvPr/>
+        </p:nvSpPr>
+        <p:spPr>
+          <a:xfrm>
+            <a:off x="914400" y="1819656"/>
+            <a:ext cx="1463040" cy="658368"/>
+          </a:xfrm>
+          <a:prstGeom prst="rect">
+            <a:avLst/>
+          </a:prstGeom>
+          <a:noFill/>
+          <a:ln/>
+        </p:spPr>
+        <p:txBody>
+          <a:bodyPr wrap="square" lIns="0" tIns="0" rIns="0" bIns="0" rtlCol="0" anchor="ctr"/>
+          <a:lstStyle/>
+          <a:p>
+            <a:pPr indent="0" marL="0">
+              <a:buNone/>
+            </a:pPr>
+            <a:r>
+              <a:rPr lang="en-US" sz="1300" b="1" dirty="0">
+                <a:solidFill>
+                  <a:srgbClr val="1B2A4A"/>
+                </a:solidFill>
+                <a:latin typeface="Georgia" pitchFamily="34" charset="0"/>
+                <a:ea typeface="Georgia" pitchFamily="34" charset="-122"/>
+                <a:cs typeface="Georgia" pitchFamily="34" charset="-120"/>
+              </a:rPr>
+              <a:t>Significant fig.</a:t>
+            </a:r>
+            <a:endParaRPr lang="en-US" sz="1300" dirty="0"/>
+          </a:p>
+        </p:txBody>
+      </p:sp>
+      <p:sp>
+        <p:nvSpPr>
+          <p:cNvPr id="17" name="Text 15"/>
+          <p:cNvSpPr/>
+          <p:nvPr/>
+        </p:nvSpPr>
+        <p:spPr>
+          <a:xfrm>
+            <a:off x="2377440" y="1819656"/>
+            <a:ext cx="1920240" cy="658368"/>
+          </a:xfrm>
+          <a:prstGeom prst="rect">
+            <a:avLst/>
+          </a:prstGeom>
+          <a:noFill/>
+          <a:ln/>
+        </p:spPr>
+        <p:txBody>
+          <a:bodyPr wrap="square" lIns="0" tIns="0" rIns="0" bIns="0" rtlCol="0" anchor="ctr"/>
+          <a:lstStyle/>
+          <a:p>
+            <a:pPr indent="0" marL="0">
+              <a:buNone/>
+            </a:pPr>
+            <a:r>
+              <a:rPr lang="en-US" sz="1100" dirty="0">
+                <a:solidFill>
+                  <a:srgbClr val="6B6660"/>
+                </a:solidFill>
+                <a:latin typeface="Calibri" pitchFamily="34" charset="0"/>
+                <a:ea typeface="Calibri" pitchFamily="34" charset="-122"/>
+                <a:cs typeface="Calibri" pitchFamily="34" charset="-120"/>
+              </a:rPr>
+              <a:t>The important digits in a number</a:t>
+            </a:r>
+            <a:endParaRPr lang="en-US" sz="1100" dirty="0"/>
+          </a:p>
+        </p:txBody>
+      </p:sp>
+      <p:sp>
+        <p:nvSpPr>
+          <p:cNvPr id="18" name="Shape 16"/>
+          <p:cNvSpPr/>
+          <p:nvPr/>
+        </p:nvSpPr>
+        <p:spPr>
+          <a:xfrm>
+            <a:off x="4754880" y="1819656"/>
+            <a:ext cx="3657600" cy="658368"/>
+          </a:xfrm>
+          <a:prstGeom prst="rect">
+            <a:avLst/>
+          </a:prstGeom>
+          <a:solidFill>
+            <a:srgbClr val="FFFFFF"/>
+          </a:solidFill>
+          <a:ln/>
+          <a:effectLst>
+            <a:outerShdw sx="100000" sy="100000" kx="0" ky="0" algn="bl" rotWithShape="0" blurRad="50800" dist="25400" dir="8100000">
+              <a:srgbClr val="000000">
+                <a:alpha val="10000"/>
+              </a:srgbClr>
+            </a:outerShdw>
+          </a:effectLst>
+        </p:spPr>
+      </p:sp>
+      <p:sp>
+        <p:nvSpPr>
+          <p:cNvPr id="19" name="Shape 17"/>
+          <p:cNvSpPr/>
+          <p:nvPr/>
+        </p:nvSpPr>
+        <p:spPr>
+          <a:xfrm>
+            <a:off x="4754880" y="1819656"/>
+            <a:ext cx="54864" cy="658368"/>
+          </a:xfrm>
+          <a:prstGeom prst="rect">
+            <a:avLst/>
+          </a:prstGeom>
+          <a:solidFill>
+            <a:srgbClr val="2A9D8F"/>
+          </a:solidFill>
+          <a:ln/>
+        </p:spPr>
+      </p:sp>
+      <p:sp>
+        <p:nvSpPr>
+          <p:cNvPr id="20" name="Text 18"/>
+          <p:cNvSpPr/>
+          <p:nvPr/>
+        </p:nvSpPr>
+        <p:spPr>
+          <a:xfrm>
+            <a:off x="4937760" y="1819656"/>
+            <a:ext cx="1463040" cy="658368"/>
+          </a:xfrm>
+          <a:prstGeom prst="rect">
+            <a:avLst/>
+          </a:prstGeom>
+          <a:noFill/>
+          <a:ln/>
+        </p:spPr>
+        <p:txBody>
+          <a:bodyPr wrap="square" lIns="0" tIns="0" rIns="0" bIns="0" rtlCol="0" anchor="ctr"/>
+          <a:lstStyle/>
+          <a:p>
+            <a:pPr indent="0" marL="0">
+              <a:buNone/>
+            </a:pPr>
+            <a:r>
+              <a:rPr lang="en-US" sz="1300" b="1" dirty="0">
+                <a:solidFill>
+                  <a:srgbClr val="1B2A4A"/>
+                </a:solidFill>
+                <a:latin typeface="Georgia" pitchFamily="34" charset="0"/>
+                <a:ea typeface="Georgia" pitchFamily="34" charset="-122"/>
+                <a:cs typeface="Georgia" pitchFamily="34" charset="-120"/>
+              </a:rPr>
+              <a:t>Nearest 10</a:t>
+            </a:r>
+            <a:endParaRPr lang="en-US" sz="1300" dirty="0"/>
+          </a:p>
+        </p:txBody>
+      </p:sp>
+      <p:sp>
+        <p:nvSpPr>
+          <p:cNvPr id="21" name="Text 19"/>
+          <p:cNvSpPr/>
+          <p:nvPr/>
+        </p:nvSpPr>
+        <p:spPr>
+          <a:xfrm>
+            <a:off x="6400800" y="1819656"/>
+            <a:ext cx="1920240" cy="658368"/>
+          </a:xfrm>
+          <a:prstGeom prst="rect">
+            <a:avLst/>
+          </a:prstGeom>
+          <a:noFill/>
+          <a:ln/>
+        </p:spPr>
+        <p:txBody>
+          <a:bodyPr wrap="square" lIns="0" tIns="0" rIns="0" bIns="0" rtlCol="0" anchor="ctr"/>
+          <a:lstStyle/>
+          <a:p>
+            <a:pPr indent="0" marL="0">
+              <a:buNone/>
+            </a:pPr>
+            <a:r>
+              <a:rPr lang="en-US" sz="1100" dirty="0">
+                <a:solidFill>
+                  <a:srgbClr val="6B6660"/>
+                </a:solidFill>
+                <a:latin typeface="Calibri" pitchFamily="34" charset="0"/>
+                <a:ea typeface="Calibri" pitchFamily="34" charset="-122"/>
+                <a:cs typeface="Calibri" pitchFamily="34" charset="-120"/>
+              </a:rPr>
+              <a:t>Round to the closest multiple of 10</a:t>
+            </a:r>
+            <a:endParaRPr lang="en-US" sz="1100" dirty="0"/>
+          </a:p>
+        </p:txBody>
+      </p:sp>
+      <p:sp>
+        <p:nvSpPr>
+          <p:cNvPr id="22" name="Shape 20"/>
+          <p:cNvSpPr/>
+          <p:nvPr/>
+        </p:nvSpPr>
+        <p:spPr>
+          <a:xfrm>
+            <a:off x="731520" y="2587752"/>
+            <a:ext cx="3657600" cy="658368"/>
+          </a:xfrm>
+          <a:prstGeom prst="rect">
+            <a:avLst/>
+          </a:prstGeom>
+          <a:solidFill>
+            <a:srgbClr val="FFFFFF"/>
+          </a:solidFill>
+          <a:ln/>
+          <a:effectLst>
+            <a:outerShdw sx="100000" sy="100000" kx="0" ky="0" algn="bl" rotWithShape="0" blurRad="50800" dist="25400" dir="8100000">
+              <a:srgbClr val="000000">
+                <a:alpha val="10000"/>
+              </a:srgbClr>
+            </a:outerShdw>
+          </a:effectLst>
+        </p:spPr>
+      </p:sp>
+      <p:sp>
+        <p:nvSpPr>
+          <p:cNvPr id="23" name="Shape 21"/>
+          <p:cNvSpPr/>
+          <p:nvPr/>
+        </p:nvSpPr>
+        <p:spPr>
+          <a:xfrm>
+            <a:off x="731520" y="2587752"/>
+            <a:ext cx="54864" cy="658368"/>
+          </a:xfrm>
+          <a:prstGeom prst="rect">
+            <a:avLst/>
+          </a:prstGeom>
+          <a:solidFill>
+            <a:srgbClr val="2A9D8F"/>
+          </a:solidFill>
+          <a:ln/>
+        </p:spPr>
+      </p:sp>
+      <p:sp>
+        <p:nvSpPr>
+          <p:cNvPr id="24" name="Text 22"/>
+          <p:cNvSpPr/>
+          <p:nvPr/>
+        </p:nvSpPr>
+        <p:spPr>
+          <a:xfrm>
+            <a:off x="914400" y="2587752"/>
+            <a:ext cx="1463040" cy="658368"/>
+          </a:xfrm>
+          <a:prstGeom prst="rect">
+            <a:avLst/>
+          </a:prstGeom>
+          <a:noFill/>
+          <a:ln/>
+        </p:spPr>
+        <p:txBody>
+          <a:bodyPr wrap="square" lIns="0" tIns="0" rIns="0" bIns="0" rtlCol="0" anchor="ctr"/>
+          <a:lstStyle/>
+          <a:p>
+            <a:pPr indent="0" marL="0">
+              <a:buNone/>
+            </a:pPr>
+            <a:r>
+              <a:rPr lang="en-US" sz="1300" b="1" dirty="0">
+                <a:solidFill>
+                  <a:srgbClr val="1B2A4A"/>
+                </a:solidFill>
+                <a:latin typeface="Georgia" pitchFamily="34" charset="0"/>
+                <a:ea typeface="Georgia" pitchFamily="34" charset="-122"/>
+                <a:cs typeface="Georgia" pitchFamily="34" charset="-120"/>
+              </a:rPr>
+              <a:t>Round up</a:t>
+            </a:r>
+            <a:endParaRPr lang="en-US" sz="1300" dirty="0"/>
+          </a:p>
+        </p:txBody>
+      </p:sp>
+      <p:sp>
+        <p:nvSpPr>
+          <p:cNvPr id="25" name="Text 23"/>
+          <p:cNvSpPr/>
+          <p:nvPr/>
+        </p:nvSpPr>
+        <p:spPr>
+          <a:xfrm>
+            <a:off x="2377440" y="2587752"/>
+            <a:ext cx="1920240" cy="658368"/>
+          </a:xfrm>
+          <a:prstGeom prst="rect">
+            <a:avLst/>
+          </a:prstGeom>
+          <a:noFill/>
+          <a:ln/>
+        </p:spPr>
+        <p:txBody>
+          <a:bodyPr wrap="square" lIns="0" tIns="0" rIns="0" bIns="0" rtlCol="0" anchor="ctr"/>
+          <a:lstStyle/>
+          <a:p>
+            <a:pPr indent="0" marL="0">
+              <a:buNone/>
+            </a:pPr>
+            <a:r>
+              <a:rPr lang="en-US" sz="1100" dirty="0">
+                <a:solidFill>
+                  <a:srgbClr val="6B6660"/>
+                </a:solidFill>
+                <a:latin typeface="Calibri" pitchFamily="34" charset="0"/>
+                <a:ea typeface="Calibri" pitchFamily="34" charset="-122"/>
+                <a:cs typeface="Calibri" pitchFamily="34" charset="-120"/>
+              </a:rPr>
+              <a:t>Go to the next value (digit is 5+)</a:t>
+            </a:r>
+            <a:endParaRPr lang="en-US" sz="1100" dirty="0"/>
+          </a:p>
+        </p:txBody>
+      </p:sp>
+      <p:sp>
+        <p:nvSpPr>
+          <p:cNvPr id="26" name="Shape 24"/>
+          <p:cNvSpPr/>
+          <p:nvPr/>
+        </p:nvSpPr>
+        <p:spPr>
+          <a:xfrm>
+            <a:off x="4754880" y="2587752"/>
+            <a:ext cx="3657600" cy="658368"/>
+          </a:xfrm>
+          <a:prstGeom prst="rect">
+            <a:avLst/>
+          </a:prstGeom>
+          <a:solidFill>
+            <a:srgbClr val="FFFFFF"/>
+          </a:solidFill>
+          <a:ln/>
+          <a:effectLst>
+            <a:outerShdw sx="100000" sy="100000" kx="0" ky="0" algn="bl" rotWithShape="0" blurRad="50800" dist="25400" dir="8100000">
+              <a:srgbClr val="000000">
+                <a:alpha val="10000"/>
+              </a:srgbClr>
+            </a:outerShdw>
+          </a:effectLst>
+        </p:spPr>
+      </p:sp>
+      <p:sp>
+        <p:nvSpPr>
+          <p:cNvPr id="27" name="Shape 25"/>
+          <p:cNvSpPr/>
+          <p:nvPr/>
+        </p:nvSpPr>
+        <p:spPr>
+          <a:xfrm>
+            <a:off x="4754880" y="2587752"/>
+            <a:ext cx="54864" cy="658368"/>
+          </a:xfrm>
+          <a:prstGeom prst="rect">
+            <a:avLst/>
+          </a:prstGeom>
+          <a:solidFill>
+            <a:srgbClr val="2A9D8F"/>
+          </a:solidFill>
+          <a:ln/>
+        </p:spPr>
+      </p:sp>
+      <p:sp>
+        <p:nvSpPr>
+          <p:cNvPr id="28" name="Text 26"/>
+          <p:cNvSpPr/>
+          <p:nvPr/>
+        </p:nvSpPr>
+        <p:spPr>
+          <a:xfrm>
+            <a:off x="4937760" y="2587752"/>
+            <a:ext cx="1463040" cy="658368"/>
+          </a:xfrm>
+          <a:prstGeom prst="rect">
+            <a:avLst/>
+          </a:prstGeom>
+          <a:noFill/>
+          <a:ln/>
+        </p:spPr>
+        <p:txBody>
+          <a:bodyPr wrap="square" lIns="0" tIns="0" rIns="0" bIns="0" rtlCol="0" anchor="ctr"/>
+          <a:lstStyle/>
+          <a:p>
+            <a:pPr indent="0" marL="0">
+              <a:buNone/>
+            </a:pPr>
+            <a:r>
+              <a:rPr lang="en-US" sz="1300" b="1" dirty="0">
+                <a:solidFill>
+                  <a:srgbClr val="1B2A4A"/>
+                </a:solidFill>
+                <a:latin typeface="Georgia" pitchFamily="34" charset="0"/>
+                <a:ea typeface="Georgia" pitchFamily="34" charset="-122"/>
+                <a:cs typeface="Georgia" pitchFamily="34" charset="-120"/>
+              </a:rPr>
+              <a:t>Round down</a:t>
+            </a:r>
+            <a:endParaRPr lang="en-US" sz="1300" dirty="0"/>
+          </a:p>
+        </p:txBody>
+      </p:sp>
+      <p:sp>
+        <p:nvSpPr>
+          <p:cNvPr id="29" name="Text 27"/>
+          <p:cNvSpPr/>
+          <p:nvPr/>
+        </p:nvSpPr>
+        <p:spPr>
+          <a:xfrm>
+            <a:off x="6400800" y="2587752"/>
+            <a:ext cx="1920240" cy="658368"/>
+          </a:xfrm>
+          <a:prstGeom prst="rect">
+            <a:avLst/>
+          </a:prstGeom>
+          <a:noFill/>
+          <a:ln/>
+        </p:spPr>
+        <p:txBody>
+          <a:bodyPr wrap="square" lIns="0" tIns="0" rIns="0" bIns="0" rtlCol="0" anchor="ctr"/>
+          <a:lstStyle/>
+          <a:p>
+            <a:pPr indent="0" marL="0">
+              <a:buNone/>
+            </a:pPr>
+            <a:r>
+              <a:rPr lang="en-US" sz="1100" dirty="0">
+                <a:solidFill>
+                  <a:srgbClr val="6B6660"/>
+                </a:solidFill>
+                <a:latin typeface="Calibri" pitchFamily="34" charset="0"/>
+                <a:ea typeface="Calibri" pitchFamily="34" charset="-122"/>
+                <a:cs typeface="Calibri" pitchFamily="34" charset="-120"/>
+              </a:rPr>
+              <a:t>Stay at the current value (digit is 0–4)</a:t>
+            </a:r>
+            <a:endParaRPr lang="en-US" sz="1100" dirty="0"/>
           </a:p>
         </p:txBody>
       </p:sp>
@@ -1655,7 +2559,47 @@
         <p:spPr>
           <a:xfrm>
             <a:off x="0" y="0"/>
-            <a:ext cx="9144000" cy="54864"/>
+            <a:ext cx="9144000" cy="822960"/>
+          </a:xfrm>
+          <a:prstGeom prst="rect">
+            <a:avLst/>
+          </a:prstGeom>
+          <a:solidFill>
+            <a:srgbClr val="FFFFFF"/>
+          </a:solidFill>
+          <a:ln/>
+        </p:spPr>
+      </p:sp>
+      <p:sp>
+        <p:nvSpPr>
+          <p:cNvPr id="3" name="Shape 1"/>
+          <p:cNvSpPr/>
+          <p:nvPr/>
+        </p:nvSpPr>
+        <p:spPr>
+          <a:xfrm>
+            <a:off x="0" y="804672"/>
+            <a:ext cx="9144000" cy="27432"/>
+          </a:xfrm>
+          <a:prstGeom prst="rect">
+            <a:avLst/>
+          </a:prstGeom>
+          <a:solidFill>
+            <a:srgbClr val="E5E2DC"/>
+          </a:solidFill>
+          <a:ln/>
+        </p:spPr>
+      </p:sp>
+      <p:sp>
+        <p:nvSpPr>
+          <p:cNvPr id="4" name="Shape 2"/>
+          <p:cNvSpPr/>
+          <p:nvPr/>
+        </p:nvSpPr>
+        <p:spPr>
+          <a:xfrm>
+            <a:off x="548640" y="201168"/>
+            <a:ext cx="54864" cy="420624"/>
           </a:xfrm>
           <a:prstGeom prst="rect">
             <a:avLst/>
@@ -1668,14 +2612,14 @@
       </p:sp>
       <p:sp>
         <p:nvSpPr>
-          <p:cNvPr id="3" name="Text 1"/>
-          <p:cNvSpPr/>
-          <p:nvPr/>
-        </p:nvSpPr>
-        <p:spPr>
-          <a:xfrm>
-            <a:off x="7772400" y="4709160"/>
-            <a:ext cx="1097280" cy="320040"/>
+          <p:cNvPr id="5" name="Text 3"/>
+          <p:cNvSpPr/>
+          <p:nvPr/>
+        </p:nvSpPr>
+        <p:spPr>
+          <a:xfrm>
+            <a:off x="777240" y="137160"/>
+            <a:ext cx="7772400" cy="548640"/>
           </a:xfrm>
           <a:prstGeom prst="rect">
             <a:avLst/>
@@ -1684,89 +2628,193 @@
           <a:ln/>
         </p:spPr>
         <p:txBody>
-          <a:bodyPr wrap="square" rtlCol="0" anchor="ctr"/>
-          <a:lstStyle/>
-          <a:p>
-            <a:pPr algn="r" indent="0" marL="0">
+          <a:bodyPr wrap="square" lIns="0" tIns="0" rIns="0" bIns="0" rtlCol="0" anchor="ctr"/>
+          <a:lstStyle/>
+          <a:p>
+            <a:pPr indent="0" marL="0">
               <a:buNone/>
             </a:pPr>
             <a:r>
-              <a:rPr lang="en-US" sz="900" dirty="0">
-                <a:solidFill>
-                  <a:srgbClr val="6B6660"/>
+              <a:rPr lang="en-US" sz="2000" b="1" dirty="0">
+                <a:solidFill>
+                  <a:srgbClr val="1B2A4A"/>
+                </a:solidFill>
+                <a:latin typeface="Georgia" pitchFamily="34" charset="0"/>
+                <a:ea typeface="Georgia" pitchFamily="34" charset="-122"/>
+                <a:cs typeface="Georgia" pitchFamily="34" charset="-120"/>
+              </a:rPr>
+              <a:t>How to Round — The 5 Rule</a:t>
+            </a:r>
+            <a:endParaRPr lang="en-US" sz="2000" dirty="0"/>
+          </a:p>
+        </p:txBody>
+      </p:sp>
+      <p:sp>
+        <p:nvSpPr>
+          <p:cNvPr id="6" name="Text 4"/>
+          <p:cNvSpPr/>
+          <p:nvPr/>
+        </p:nvSpPr>
+        <p:spPr>
+          <a:xfrm>
+            <a:off x="731520" y="1051560"/>
+            <a:ext cx="7680960" cy="3108960"/>
+          </a:xfrm>
+          <a:prstGeom prst="rect">
+            <a:avLst/>
+          </a:prstGeom>
+          <a:noFill/>
+          <a:ln/>
+        </p:spPr>
+        <p:txBody>
+          <a:bodyPr wrap="square" rtlCol="0" anchor="t"/>
+          <a:lstStyle/>
+          <a:p>
+            <a:pPr marL="342900" indent="-342900">
+              <a:spcAft>
+                <a:spcPts val="800"/>
+              </a:spcAft>
+              <a:buSzPct val="100000"/>
+              <a:buChar char="•"/>
+            </a:pPr>
+            <a:r>
+              <a:rPr lang="en-US" sz="1500" dirty="0">
+                <a:solidFill>
+                  <a:srgbClr val="3D3A36"/>
                 </a:solidFill>
                 <a:latin typeface="Calibri" pitchFamily="34" charset="0"/>
                 <a:ea typeface="Calibri" pitchFamily="34" charset="-122"/>
                 <a:cs typeface="Calibri" pitchFamily="34" charset="-120"/>
               </a:rPr>
-              <a:t>3 / 5</a:t>
-            </a:r>
-            <a:endParaRPr lang="en-US" sz="900" dirty="0"/>
-          </a:p>
-        </p:txBody>
-      </p:sp>
-      <p:sp>
-        <p:nvSpPr>
-          <p:cNvPr id="4" name="Text 2"/>
-          <p:cNvSpPr/>
-          <p:nvPr/>
-        </p:nvSpPr>
-        <p:spPr>
-          <a:xfrm>
-            <a:off x="457200" y="274320"/>
-            <a:ext cx="8229600" cy="640080"/>
-          </a:xfrm>
-          <a:prstGeom prst="rect">
-            <a:avLst/>
-          </a:prstGeom>
-          <a:noFill/>
-          <a:ln/>
-        </p:spPr>
-        <p:txBody>
-          <a:bodyPr wrap="square" rtlCol="0" anchor="ctr"/>
-          <a:lstStyle/>
-          <a:p>
-            <a:pPr indent="0" marL="0">
-              <a:buNone/>
-            </a:pPr>
-            <a:r>
-              <a:rPr lang="en-US" sz="2600" b="1" dirty="0">
-                <a:solidFill>
-                  <a:srgbClr val="1B2A4A"/>
-                </a:solidFill>
-                <a:latin typeface="Georgia" pitchFamily="34" charset="0"/>
-                <a:ea typeface="Georgia" pitchFamily="34" charset="-122"/>
-                <a:cs typeface="Georgia" pitchFamily="34" charset="-120"/>
-              </a:rPr>
-              <a:t>Rounding Rules</a:t>
-            </a:r>
-            <a:endParaRPr lang="en-US" sz="2600" dirty="0"/>
-          </a:p>
-        </p:txBody>
-      </p:sp>
-      <p:sp>
-        <p:nvSpPr>
-          <p:cNvPr id="5" name="Shape 3"/>
-          <p:cNvSpPr/>
-          <p:nvPr/>
-        </p:nvSpPr>
-        <p:spPr>
-          <a:xfrm>
-            <a:off x="457200" y="1188720"/>
-            <a:ext cx="2560320" cy="1828800"/>
-          </a:xfrm>
-          <a:prstGeom prst="rect">
-            <a:avLst/>
-          </a:prstGeom>
-          <a:solidFill>
-            <a:srgbClr val="FFFFFF"/>
-          </a:solidFill>
-          <a:ln w="12700">
-            <a:solidFill>
-              <a:srgbClr val="E5E2DC"/>
-            </a:solidFill>
-            <a:prstDash val="solid"/>
-          </a:ln>
+              <a:t>1. Find the PLACE VALUE you are rounding to.</a:t>
+            </a:r>
+            <a:endParaRPr lang="en-US" sz="1500" dirty="0"/>
+          </a:p>
+          <a:p>
+            <a:pPr marL="342900" indent="-342900">
+              <a:spcAft>
+                <a:spcPts val="800"/>
+              </a:spcAft>
+              <a:buSzPct val="100000"/>
+              <a:buChar char="•"/>
+            </a:pPr>
+            <a:r>
+              <a:rPr lang="en-US" sz="1500" dirty="0">
+                <a:solidFill>
+                  <a:srgbClr val="3D3A36"/>
+                </a:solidFill>
+                <a:latin typeface="Calibri" pitchFamily="34" charset="0"/>
+                <a:ea typeface="Calibri" pitchFamily="34" charset="-122"/>
+                <a:cs typeface="Calibri" pitchFamily="34" charset="-120"/>
+              </a:rPr>
+              <a:t>2. Look at the digit ONE PLACE to the RIGHT.</a:t>
+            </a:r>
+            <a:endParaRPr lang="en-US" sz="1500" dirty="0"/>
+          </a:p>
+          <a:p>
+            <a:pPr marL="342900" indent="-342900">
+              <a:spcAft>
+                <a:spcPts val="800"/>
+              </a:spcAft>
+              <a:buSzPct val="100000"/>
+              <a:buChar char="•"/>
+            </a:pPr>
+            <a:r>
+              <a:rPr lang="en-US" sz="1500" dirty="0">
+                <a:solidFill>
+                  <a:srgbClr val="3D3A36"/>
+                </a:solidFill>
+                <a:latin typeface="Calibri" pitchFamily="34" charset="0"/>
+                <a:ea typeface="Calibri" pitchFamily="34" charset="-122"/>
+                <a:cs typeface="Calibri" pitchFamily="34" charset="-120"/>
+              </a:rPr>
+              <a:t>3. If it is 0, 1, 2, 3, or 4 → ROUND DOWN (keep the digit the same).</a:t>
+            </a:r>
+            <a:endParaRPr lang="en-US" sz="1500" dirty="0"/>
+          </a:p>
+          <a:p>
+            <a:pPr marL="342900" indent="-342900">
+              <a:spcAft>
+                <a:spcPts val="800"/>
+              </a:spcAft>
+              <a:buSzPct val="100000"/>
+              <a:buChar char="•"/>
+            </a:pPr>
+            <a:r>
+              <a:rPr lang="en-US" sz="1500" dirty="0">
+                <a:solidFill>
+                  <a:srgbClr val="3D3A36"/>
+                </a:solidFill>
+                <a:latin typeface="Calibri" pitchFamily="34" charset="0"/>
+                <a:ea typeface="Calibri" pitchFamily="34" charset="-122"/>
+                <a:cs typeface="Calibri" pitchFamily="34" charset="-120"/>
+              </a:rPr>
+              <a:t>4. If it is 5, 6, 7, 8, or 9 → ROUND UP (increase the digit by 1).</a:t>
+            </a:r>
+            <a:endParaRPr lang="en-US" sz="1500" dirty="0"/>
+          </a:p>
+          <a:p>
+            <a:pPr marL="342900" indent="-342900">
+              <a:spcAft>
+                <a:spcPts val="800"/>
+              </a:spcAft>
+              <a:buSzPct val="100000"/>
+              <a:buChar char="•"/>
+            </a:pPr>
+            <a:r>
+              <a:rPr lang="en-US" sz="1500" dirty="0">
+                <a:solidFill>
+                  <a:srgbClr val="3D3A36"/>
+                </a:solidFill>
+                <a:latin typeface="Calibri" pitchFamily="34" charset="0"/>
+                <a:ea typeface="Calibri" pitchFamily="34" charset="-122"/>
+                <a:cs typeface="Calibri" pitchFamily="34" charset="-120"/>
+              </a:rPr>
+              <a:t>5. Replace all digits to the right with zeros.</a:t>
+            </a:r>
+            <a:endParaRPr lang="en-US" sz="1500" dirty="0"/>
+          </a:p>
+          <a:p>
+            <a:pPr marL="342900" indent="-342900">
+              <a:spcAft>
+                <a:spcPts val="800"/>
+              </a:spcAft>
+              <a:buSzPct val="100000"/>
+              <a:buChar char="•"/>
+            </a:pPr>
+            <a:r>
+              <a:rPr lang="en-US" sz="1500" dirty="0">
+                <a:solidFill>
+                  <a:srgbClr val="3D3A36"/>
+                </a:solidFill>
+                <a:latin typeface="Calibri" pitchFamily="34" charset="0"/>
+                <a:ea typeface="Calibri" pitchFamily="34" charset="-122"/>
+                <a:cs typeface="Calibri" pitchFamily="34" charset="-120"/>
+              </a:rPr>
+              <a:t>Example: 3,847 rounded to nearest 100 → look at the 4 (tens) → 4 &lt; 5 → round down → 3,800.</a:t>
+            </a:r>
+            <a:endParaRPr lang="en-US" sz="1500" dirty="0"/>
+          </a:p>
+        </p:txBody>
+      </p:sp>
+      <p:sp>
+        <p:nvSpPr>
+          <p:cNvPr id="7" name="Shape 5"/>
+          <p:cNvSpPr/>
+          <p:nvPr/>
+        </p:nvSpPr>
+        <p:spPr>
+          <a:xfrm>
+            <a:off x="731520" y="4206240"/>
+            <a:ext cx="7680960" cy="640080"/>
+          </a:xfrm>
+          <a:prstGeom prst="rect">
+            <a:avLst/>
+          </a:prstGeom>
+          <a:solidFill>
+            <a:srgbClr val="E8F5F3"/>
+          </a:solidFill>
+          <a:ln/>
           <a:effectLst>
             <a:outerShdw sx="100000" sy="100000" kx="0" ky="0" algn="bl" rotWithShape="0" blurRad="50800" dist="25400" dir="8100000">
               <a:srgbClr val="000000">
@@ -1778,34 +2826,14 @@
       </p:sp>
       <p:sp>
         <p:nvSpPr>
-          <p:cNvPr id="6" name="Shape 4"/>
-          <p:cNvSpPr/>
-          <p:nvPr/>
-        </p:nvSpPr>
-        <p:spPr>
-          <a:xfrm>
-            <a:off x="457200" y="1188720"/>
-            <a:ext cx="2560320" cy="54864"/>
-          </a:xfrm>
-          <a:prstGeom prst="rect">
-            <a:avLst/>
-          </a:prstGeom>
-          <a:solidFill>
-            <a:srgbClr val="2A9D8F"/>
-          </a:solidFill>
-          <a:ln/>
-        </p:spPr>
-      </p:sp>
-      <p:sp>
-        <p:nvSpPr>
-          <p:cNvPr id="7" name="Text 5"/>
-          <p:cNvSpPr/>
-          <p:nvPr/>
-        </p:nvSpPr>
-        <p:spPr>
-          <a:xfrm>
-            <a:off x="594360" y="1325880"/>
-            <a:ext cx="2286000" cy="365760"/>
+          <p:cNvPr id="8" name="Text 6"/>
+          <p:cNvSpPr/>
+          <p:nvPr/>
+        </p:nvSpPr>
+        <p:spPr>
+          <a:xfrm>
+            <a:off x="914400" y="4251960"/>
+            <a:ext cx="7315200" cy="548640"/>
           </a:xfrm>
           <a:prstGeom prst="rect">
             <a:avLst/>
@@ -1821,46 +2849,21 @@
               <a:buNone/>
             </a:pPr>
             <a:r>
-              <a:rPr lang="en-US" sz="1400" b="1" dirty="0">
-                <a:solidFill>
-                  <a:srgbClr val="1B2A4A"/>
+              <a:rPr lang="en-US" sz="1200" b="1" dirty="0">
+                <a:solidFill>
+                  <a:srgbClr val="2A9D8F"/>
                 </a:solidFill>
                 <a:latin typeface="Calibri" pitchFamily="34" charset="0"/>
                 <a:ea typeface="Calibri" pitchFamily="34" charset="-122"/>
                 <a:cs typeface="Calibri" pitchFamily="34" charset="-120"/>
               </a:rPr>
-              <a:t>Step 1: Find</a:t>
-            </a:r>
-            <a:endParaRPr lang="en-US" sz="1400" dirty="0"/>
-          </a:p>
-        </p:txBody>
-      </p:sp>
-      <p:sp>
-        <p:nvSpPr>
-          <p:cNvPr id="8" name="Text 6"/>
-          <p:cNvSpPr/>
-          <p:nvPr/>
-        </p:nvSpPr>
-        <p:spPr>
-          <a:xfrm>
-            <a:off x="594360" y="1737360"/>
-            <a:ext cx="2286000" cy="1097280"/>
-          </a:xfrm>
-          <a:prstGeom prst="rect">
-            <a:avLst/>
-          </a:prstGeom>
-          <a:noFill/>
-          <a:ln/>
-        </p:spPr>
-        <p:txBody>
-          <a:bodyPr wrap="square" rtlCol="0" anchor="t"/>
-          <a:lstStyle/>
-          <a:p>
+              <a:t>Key Idea: </a:t>
+            </a:r>
             <a:pPr indent="0" marL="0">
               <a:buNone/>
             </a:pPr>
             <a:r>
-              <a:rPr lang="en-US" sz="1100" dirty="0">
+              <a:rPr lang="en-US" sz="1200" i="1" dirty="0">
                 <a:solidFill>
                   <a:srgbClr val="3D3A36"/>
                 </a:solidFill>
@@ -1868,269 +2871,9 @@
                 <a:ea typeface="Calibri" pitchFamily="34" charset="-122"/>
                 <a:cs typeface="Calibri" pitchFamily="34" charset="-120"/>
               </a:rPr>
-              <a:t>Look at the digit in the place you're rounding to. Example: Round 4,873 to the nearest hundred. The hundreds digit is 8.</a:t>
-            </a:r>
-            <a:endParaRPr lang="en-US" sz="1100" dirty="0"/>
-          </a:p>
-        </p:txBody>
-      </p:sp>
-      <p:sp>
-        <p:nvSpPr>
-          <p:cNvPr id="9" name="Shape 7"/>
-          <p:cNvSpPr/>
-          <p:nvPr/>
-        </p:nvSpPr>
-        <p:spPr>
-          <a:xfrm>
-            <a:off x="3291840" y="1188720"/>
-            <a:ext cx="2560320" cy="1828800"/>
-          </a:xfrm>
-          <a:prstGeom prst="rect">
-            <a:avLst/>
-          </a:prstGeom>
-          <a:solidFill>
-            <a:srgbClr val="FFFFFF"/>
-          </a:solidFill>
-          <a:ln w="12700">
-            <a:solidFill>
-              <a:srgbClr val="E5E2DC"/>
-            </a:solidFill>
-            <a:prstDash val="solid"/>
-          </a:ln>
-          <a:effectLst>
-            <a:outerShdw sx="100000" sy="100000" kx="0" ky="0" algn="bl" rotWithShape="0" blurRad="50800" dist="25400" dir="8100000">
-              <a:srgbClr val="000000">
-                <a:alpha val="10000"/>
-              </a:srgbClr>
-            </a:outerShdw>
-          </a:effectLst>
-        </p:spPr>
-      </p:sp>
-      <p:sp>
-        <p:nvSpPr>
-          <p:cNvPr id="10" name="Shape 8"/>
-          <p:cNvSpPr/>
-          <p:nvPr/>
-        </p:nvSpPr>
-        <p:spPr>
-          <a:xfrm>
-            <a:off x="3291840" y="1188720"/>
-            <a:ext cx="2560320" cy="54864"/>
-          </a:xfrm>
-          <a:prstGeom prst="rect">
-            <a:avLst/>
-          </a:prstGeom>
-          <a:solidFill>
-            <a:srgbClr val="2A9D8F"/>
-          </a:solidFill>
-          <a:ln/>
-        </p:spPr>
-      </p:sp>
-      <p:sp>
-        <p:nvSpPr>
-          <p:cNvPr id="11" name="Text 9"/>
-          <p:cNvSpPr/>
-          <p:nvPr/>
-        </p:nvSpPr>
-        <p:spPr>
-          <a:xfrm>
-            <a:off x="3429000" y="1325880"/>
-            <a:ext cx="2286000" cy="365760"/>
-          </a:xfrm>
-          <a:prstGeom prst="rect">
-            <a:avLst/>
-          </a:prstGeom>
-          <a:noFill/>
-          <a:ln/>
-        </p:spPr>
-        <p:txBody>
-          <a:bodyPr wrap="square" rtlCol="0" anchor="ctr"/>
-          <a:lstStyle/>
-          <a:p>
-            <a:pPr indent="0" marL="0">
-              <a:buNone/>
-            </a:pPr>
-            <a:r>
-              <a:rPr lang="en-US" sz="1400" b="1" dirty="0">
-                <a:solidFill>
-                  <a:srgbClr val="1B2A4A"/>
-                </a:solidFill>
-                <a:latin typeface="Calibri" pitchFamily="34" charset="0"/>
-                <a:ea typeface="Calibri" pitchFamily="34" charset="-122"/>
-                <a:cs typeface="Calibri" pitchFamily="34" charset="-120"/>
-              </a:rPr>
-              <a:t>Step 2: Check</a:t>
-            </a:r>
-            <a:endParaRPr lang="en-US" sz="1400" dirty="0"/>
-          </a:p>
-        </p:txBody>
-      </p:sp>
-      <p:sp>
-        <p:nvSpPr>
-          <p:cNvPr id="12" name="Text 10"/>
-          <p:cNvSpPr/>
-          <p:nvPr/>
-        </p:nvSpPr>
-        <p:spPr>
-          <a:xfrm>
-            <a:off x="3429000" y="1737360"/>
-            <a:ext cx="2286000" cy="1097280"/>
-          </a:xfrm>
-          <a:prstGeom prst="rect">
-            <a:avLst/>
-          </a:prstGeom>
-          <a:noFill/>
-          <a:ln/>
-        </p:spPr>
-        <p:txBody>
-          <a:bodyPr wrap="square" rtlCol="0" anchor="t"/>
-          <a:lstStyle/>
-          <a:p>
-            <a:pPr indent="0" marL="0">
-              <a:buNone/>
-            </a:pPr>
-            <a:r>
-              <a:rPr lang="en-US" sz="1100" dirty="0">
-                <a:solidFill>
-                  <a:srgbClr val="3D3A36"/>
-                </a:solidFill>
-                <a:latin typeface="Calibri" pitchFamily="34" charset="0"/>
-                <a:ea typeface="Calibri" pitchFamily="34" charset="-122"/>
-                <a:cs typeface="Calibri" pitchFamily="34" charset="-120"/>
-              </a:rPr>
-              <a:t>Look at the digit to the RIGHT. If it's 5 or more, round UP. If it's less than 5, round DOWN. The digit to the right of 8 is 7 (≥5), so round up.</a:t>
-            </a:r>
-            <a:endParaRPr lang="en-US" sz="1100" dirty="0"/>
-          </a:p>
-        </p:txBody>
-      </p:sp>
-      <p:sp>
-        <p:nvSpPr>
-          <p:cNvPr id="13" name="Shape 11"/>
-          <p:cNvSpPr/>
-          <p:nvPr/>
-        </p:nvSpPr>
-        <p:spPr>
-          <a:xfrm>
-            <a:off x="6126480" y="1188720"/>
-            <a:ext cx="2560320" cy="1828800"/>
-          </a:xfrm>
-          <a:prstGeom prst="rect">
-            <a:avLst/>
-          </a:prstGeom>
-          <a:solidFill>
-            <a:srgbClr val="FFFFFF"/>
-          </a:solidFill>
-          <a:ln w="12700">
-            <a:solidFill>
-              <a:srgbClr val="E5E2DC"/>
-            </a:solidFill>
-            <a:prstDash val="solid"/>
-          </a:ln>
-          <a:effectLst>
-            <a:outerShdw sx="100000" sy="100000" kx="0" ky="0" algn="bl" rotWithShape="0" blurRad="50800" dist="25400" dir="8100000">
-              <a:srgbClr val="000000">
-                <a:alpha val="10000"/>
-              </a:srgbClr>
-            </a:outerShdw>
-          </a:effectLst>
-        </p:spPr>
-      </p:sp>
-      <p:sp>
-        <p:nvSpPr>
-          <p:cNvPr id="14" name="Shape 12"/>
-          <p:cNvSpPr/>
-          <p:nvPr/>
-        </p:nvSpPr>
-        <p:spPr>
-          <a:xfrm>
-            <a:off x="6126480" y="1188720"/>
-            <a:ext cx="2560320" cy="54864"/>
-          </a:xfrm>
-          <a:prstGeom prst="rect">
-            <a:avLst/>
-          </a:prstGeom>
-          <a:solidFill>
-            <a:srgbClr val="2A9D8F"/>
-          </a:solidFill>
-          <a:ln/>
-        </p:spPr>
-      </p:sp>
-      <p:sp>
-        <p:nvSpPr>
-          <p:cNvPr id="15" name="Text 13"/>
-          <p:cNvSpPr/>
-          <p:nvPr/>
-        </p:nvSpPr>
-        <p:spPr>
-          <a:xfrm>
-            <a:off x="6263640" y="1325880"/>
-            <a:ext cx="2286000" cy="365760"/>
-          </a:xfrm>
-          <a:prstGeom prst="rect">
-            <a:avLst/>
-          </a:prstGeom>
-          <a:noFill/>
-          <a:ln/>
-        </p:spPr>
-        <p:txBody>
-          <a:bodyPr wrap="square" rtlCol="0" anchor="ctr"/>
-          <a:lstStyle/>
-          <a:p>
-            <a:pPr indent="0" marL="0">
-              <a:buNone/>
-            </a:pPr>
-            <a:r>
-              <a:rPr lang="en-US" sz="1400" b="1" dirty="0">
-                <a:solidFill>
-                  <a:srgbClr val="1B2A4A"/>
-                </a:solidFill>
-                <a:latin typeface="Calibri" pitchFamily="34" charset="0"/>
-                <a:ea typeface="Calibri" pitchFamily="34" charset="-122"/>
-                <a:cs typeface="Calibri" pitchFamily="34" charset="-120"/>
-              </a:rPr>
-              <a:t>Step 3: Replace</a:t>
-            </a:r>
-            <a:endParaRPr lang="en-US" sz="1400" dirty="0"/>
-          </a:p>
-        </p:txBody>
-      </p:sp>
-      <p:sp>
-        <p:nvSpPr>
-          <p:cNvPr id="16" name="Text 14"/>
-          <p:cNvSpPr/>
-          <p:nvPr/>
-        </p:nvSpPr>
-        <p:spPr>
-          <a:xfrm>
-            <a:off x="6263640" y="1737360"/>
-            <a:ext cx="2286000" cy="1097280"/>
-          </a:xfrm>
-          <a:prstGeom prst="rect">
-            <a:avLst/>
-          </a:prstGeom>
-          <a:noFill/>
-          <a:ln/>
-        </p:spPr>
-        <p:txBody>
-          <a:bodyPr wrap="square" rtlCol="0" anchor="t"/>
-          <a:lstStyle/>
-          <a:p>
-            <a:pPr indent="0" marL="0">
-              <a:buNone/>
-            </a:pPr>
-            <a:r>
-              <a:rPr lang="en-US" sz="1100" dirty="0">
-                <a:solidFill>
-                  <a:srgbClr val="3D3A36"/>
-                </a:solidFill>
-                <a:latin typeface="Calibri" pitchFamily="34" charset="0"/>
-                <a:ea typeface="Calibri" pitchFamily="34" charset="-122"/>
-                <a:cs typeface="Calibri" pitchFamily="34" charset="-120"/>
-              </a:rPr>
-              <a:t>Change all digits to the right to zero. 4,873 → 4,900 (rounded to nearest hundred). The 8 becomes 9, and 7 and 3 become 0.</a:t>
-            </a:r>
-            <a:endParaRPr lang="en-US" sz="1100" dirty="0"/>
+              <a:t>5 or above? Give it a shove! 4 or below? Let it go!</a:t>
+            </a:r>
+            <a:endParaRPr lang="en-US" sz="1200" dirty="0"/>
           </a:p>
         </p:txBody>
       </p:sp>
@@ -2175,7 +2918,47 @@
         <p:spPr>
           <a:xfrm>
             <a:off x="0" y="0"/>
-            <a:ext cx="9144000" cy="54864"/>
+            <a:ext cx="9144000" cy="822960"/>
+          </a:xfrm>
+          <a:prstGeom prst="rect">
+            <a:avLst/>
+          </a:prstGeom>
+          <a:solidFill>
+            <a:srgbClr val="FFFFFF"/>
+          </a:solidFill>
+          <a:ln/>
+        </p:spPr>
+      </p:sp>
+      <p:sp>
+        <p:nvSpPr>
+          <p:cNvPr id="3" name="Shape 1"/>
+          <p:cNvSpPr/>
+          <p:nvPr/>
+        </p:nvSpPr>
+        <p:spPr>
+          <a:xfrm>
+            <a:off x="0" y="804672"/>
+            <a:ext cx="9144000" cy="27432"/>
+          </a:xfrm>
+          <a:prstGeom prst="rect">
+            <a:avLst/>
+          </a:prstGeom>
+          <a:solidFill>
+            <a:srgbClr val="E5E2DC"/>
+          </a:solidFill>
+          <a:ln/>
+        </p:spPr>
+      </p:sp>
+      <p:sp>
+        <p:nvSpPr>
+          <p:cNvPr id="4" name="Shape 2"/>
+          <p:cNvSpPr/>
+          <p:nvPr/>
+        </p:nvSpPr>
+        <p:spPr>
+          <a:xfrm>
+            <a:off x="548640" y="201168"/>
+            <a:ext cx="54864" cy="420624"/>
           </a:xfrm>
           <a:prstGeom prst="rect">
             <a:avLst/>
@@ -2188,14 +2971,14 @@
       </p:sp>
       <p:sp>
         <p:nvSpPr>
-          <p:cNvPr id="3" name="Text 1"/>
-          <p:cNvSpPr/>
-          <p:nvPr/>
-        </p:nvSpPr>
-        <p:spPr>
-          <a:xfrm>
-            <a:off x="7772400" y="4709160"/>
-            <a:ext cx="1097280" cy="320040"/>
+          <p:cNvPr id="5" name="Text 3"/>
+          <p:cNvSpPr/>
+          <p:nvPr/>
+        </p:nvSpPr>
+        <p:spPr>
+          <a:xfrm>
+            <a:off x="777240" y="137160"/>
+            <a:ext cx="7772400" cy="548640"/>
           </a:xfrm>
           <a:prstGeom prst="rect">
             <a:avLst/>
@@ -2204,53 +2987,14 @@
           <a:ln/>
         </p:spPr>
         <p:txBody>
-          <a:bodyPr wrap="square" rtlCol="0" anchor="ctr"/>
-          <a:lstStyle/>
-          <a:p>
-            <a:pPr algn="r" indent="0" marL="0">
-              <a:buNone/>
-            </a:pPr>
-            <a:r>
-              <a:rPr lang="en-US" sz="900" dirty="0">
-                <a:solidFill>
-                  <a:srgbClr val="6B6660"/>
-                </a:solidFill>
-                <a:latin typeface="Calibri" pitchFamily="34" charset="0"/>
-                <a:ea typeface="Calibri" pitchFamily="34" charset="-122"/>
-                <a:cs typeface="Calibri" pitchFamily="34" charset="-120"/>
-              </a:rPr>
-              <a:t>4 / 5</a:t>
-            </a:r>
-            <a:endParaRPr lang="en-US" sz="900" dirty="0"/>
-          </a:p>
-        </p:txBody>
-      </p:sp>
-      <p:sp>
-        <p:nvSpPr>
-          <p:cNvPr id="4" name="Text 2"/>
-          <p:cNvSpPr/>
-          <p:nvPr/>
-        </p:nvSpPr>
-        <p:spPr>
-          <a:xfrm>
-            <a:off x="457200" y="274320"/>
-            <a:ext cx="8229600" cy="640080"/>
-          </a:xfrm>
-          <a:prstGeom prst="rect">
-            <a:avLst/>
-          </a:prstGeom>
-          <a:noFill/>
-          <a:ln/>
-        </p:spPr>
-        <p:txBody>
-          <a:bodyPr wrap="square" rtlCol="0" anchor="ctr"/>
+          <a:bodyPr wrap="square" lIns="0" tIns="0" rIns="0" bIns="0" rtlCol="0" anchor="ctr"/>
           <a:lstStyle/>
           <a:p>
             <a:pPr indent="0" marL="0">
               <a:buNone/>
             </a:pPr>
             <a:r>
-              <a:rPr lang="en-US" sz="2600" b="1" dirty="0">
+              <a:rPr lang="en-US" sz="2000" b="1" dirty="0">
                 <a:solidFill>
                   <a:srgbClr val="1B2A4A"/>
                 </a:solidFill>
@@ -2258,162 +3002,30 @@
                 <a:ea typeface="Georgia" pitchFamily="34" charset="-122"/>
                 <a:cs typeface="Georgia" pitchFamily="34" charset="-120"/>
               </a:rPr>
-              <a:t>Examples</a:t>
-            </a:r>
-            <a:endParaRPr lang="en-US" sz="2600" dirty="0"/>
-          </a:p>
-        </p:txBody>
-      </p:sp>
-      <p:sp>
-        <p:nvSpPr>
-          <p:cNvPr id="5" name="Text 3"/>
-          <p:cNvSpPr/>
-          <p:nvPr/>
-        </p:nvSpPr>
-        <p:spPr>
-          <a:xfrm>
-            <a:off x="457200" y="1188720"/>
+              <a:t>Why Estimate?</a:t>
+            </a:r>
+            <a:endParaRPr lang="en-US" sz="2000" dirty="0"/>
+          </a:p>
+        </p:txBody>
+      </p:sp>
+      <p:sp>
+        <p:nvSpPr>
+          <p:cNvPr id="6" name="Shape 4"/>
+          <p:cNvSpPr/>
+          <p:nvPr/>
+        </p:nvSpPr>
+        <p:spPr>
+          <a:xfrm>
+            <a:off x="548640" y="1051560"/>
             <a:ext cx="3840480" cy="3474720"/>
           </a:xfrm>
           <a:prstGeom prst="rect">
             <a:avLst/>
           </a:prstGeom>
-          <a:noFill/>
-          <a:ln/>
-        </p:spPr>
-        <p:txBody>
-          <a:bodyPr wrap="square" rtlCol="0" anchor="t"/>
-          <a:lstStyle/>
-          <a:p>
-            <a:pPr marL="342900" indent="-342900">
-              <a:spcAft>
-                <a:spcPts val="600"/>
-              </a:spcAft>
-              <a:buSzPct val="100000"/>
-              <a:buChar char="•"/>
-            </a:pPr>
-            <a:r>
-              <a:rPr lang="en-US" sz="1400" dirty="0">
-                <a:solidFill>
-                  <a:srgbClr val="3D3A36"/>
-                </a:solidFill>
-                <a:latin typeface="Calibri" pitchFamily="34" charset="0"/>
-                <a:ea typeface="Calibri" pitchFamily="34" charset="-122"/>
-                <a:cs typeface="Calibri" pitchFamily="34" charset="-120"/>
-              </a:rPr>
-              <a:t>3,456 → nearest 10 = 3,460 (check 6 ≥ 5: round up)</a:t>
-            </a:r>
-            <a:endParaRPr lang="en-US" sz="1400" dirty="0"/>
-          </a:p>
-          <a:p>
-            <a:pPr marL="342900" indent="-342900">
-              <a:spcAft>
-                <a:spcPts val="600"/>
-              </a:spcAft>
-              <a:buSzPct val="100000"/>
-              <a:buChar char="•"/>
-            </a:pPr>
-            <a:r>
-              <a:rPr lang="en-US" sz="1400" dirty="0">
-                <a:solidFill>
-                  <a:srgbClr val="3D3A36"/>
-                </a:solidFill>
-                <a:latin typeface="Calibri" pitchFamily="34" charset="0"/>
-                <a:ea typeface="Calibri" pitchFamily="34" charset="-122"/>
-                <a:cs typeface="Calibri" pitchFamily="34" charset="-120"/>
-              </a:rPr>
-              <a:t>3,456 → nearest 100 = 3,500 (check 5 ≥ 5: round up)</a:t>
-            </a:r>
-            <a:endParaRPr lang="en-US" sz="1400" dirty="0"/>
-          </a:p>
-          <a:p>
-            <a:pPr marL="342900" indent="-342900">
-              <a:spcAft>
-                <a:spcPts val="600"/>
-              </a:spcAft>
-              <a:buSzPct val="100000"/>
-              <a:buChar char="•"/>
-            </a:pPr>
-            <a:r>
-              <a:rPr lang="en-US" sz="1400" dirty="0">
-                <a:solidFill>
-                  <a:srgbClr val="3D3A36"/>
-                </a:solidFill>
-                <a:latin typeface="Calibri" pitchFamily="34" charset="0"/>
-                <a:ea typeface="Calibri" pitchFamily="34" charset="-122"/>
-                <a:cs typeface="Calibri" pitchFamily="34" charset="-120"/>
-              </a:rPr>
-              <a:t>3,456 → nearest 1000 = 3,000 (check 4 &lt; 5: round down)</a:t>
-            </a:r>
-            <a:endParaRPr lang="en-US" sz="1400" dirty="0"/>
-          </a:p>
-          <a:p>
-            <a:pPr marL="342900" indent="-342900">
-              <a:spcAft>
-                <a:spcPts val="600"/>
-              </a:spcAft>
-              <a:buSzPct val="100000"/>
-              <a:buChar char="•"/>
-            </a:pPr>
-            <a:r>
-              <a:rPr lang="en-US" sz="1400" dirty="0">
-                <a:solidFill>
-                  <a:srgbClr val="3D3A36"/>
-                </a:solidFill>
-                <a:latin typeface="Calibri" pitchFamily="34" charset="0"/>
-                <a:ea typeface="Calibri" pitchFamily="34" charset="-122"/>
-                <a:cs typeface="Calibri" pitchFamily="34" charset="-120"/>
-              </a:rPr>
-              <a:t>7.83 → nearest whole = 8 (check 8 ≥ 5: round up)</a:t>
-            </a:r>
-            <a:endParaRPr lang="en-US" sz="1400" dirty="0"/>
-          </a:p>
-          <a:p>
-            <a:pPr marL="342900" indent="-342900">
-              <a:spcAft>
-                <a:spcPts val="600"/>
-              </a:spcAft>
-              <a:buSzPct val="100000"/>
-              <a:buChar char="•"/>
-            </a:pPr>
-            <a:r>
-              <a:rPr lang="en-US" sz="1400" dirty="0">
-                <a:solidFill>
-                  <a:srgbClr val="3D3A36"/>
-                </a:solidFill>
-                <a:latin typeface="Calibri" pitchFamily="34" charset="0"/>
-                <a:ea typeface="Calibri" pitchFamily="34" charset="-122"/>
-                <a:cs typeface="Calibri" pitchFamily="34" charset="-120"/>
-              </a:rPr>
-              <a:t>12.347 → 1 dp = 12.3 (check 4 &lt; 5: round down)</a:t>
-            </a:r>
-            <a:endParaRPr lang="en-US" sz="1400" dirty="0"/>
-          </a:p>
-        </p:txBody>
-      </p:sp>
-      <p:sp>
-        <p:nvSpPr>
-          <p:cNvPr id="6" name="Shape 4"/>
-          <p:cNvSpPr/>
-          <p:nvPr/>
-        </p:nvSpPr>
-        <p:spPr>
-          <a:xfrm>
-            <a:off x="4846320" y="1188720"/>
-            <a:ext cx="3840480" cy="3474720"/>
-          </a:xfrm>
-          <a:prstGeom prst="rect">
-            <a:avLst/>
-          </a:prstGeom>
           <a:solidFill>
             <a:srgbClr val="FFFFFF"/>
           </a:solidFill>
-          <a:ln w="12700">
-            <a:solidFill>
-              <a:srgbClr val="E5E2DC"/>
-            </a:solidFill>
-            <a:prstDash val="solid"/>
-          </a:ln>
+          <a:ln/>
           <a:effectLst>
             <a:outerShdw sx="100000" sy="100000" kx="0" ky="0" algn="bl" rotWithShape="0" blurRad="50800" dist="25400" dir="8100000">
               <a:srgbClr val="000000">
@@ -2431,7 +3043,7 @@
         </p:nvSpPr>
         <p:spPr>
           <a:xfrm>
-            <a:off x="4846320" y="1188720"/>
+            <a:off x="548640" y="1051560"/>
             <a:ext cx="3840480" cy="54864"/>
           </a:xfrm>
           <a:prstGeom prst="rect">
@@ -2451,8 +3063,8 @@
         </p:nvSpPr>
         <p:spPr>
           <a:xfrm>
-            <a:off x="5120640" y="1371600"/>
-            <a:ext cx="3291840" cy="3108960"/>
+            <a:off x="777240" y="1188720"/>
+            <a:ext cx="3383280" cy="457200"/>
           </a:xfrm>
           <a:prstGeom prst="rect">
             <a:avLst/>
@@ -2461,43 +3073,75 @@
           <a:ln/>
         </p:spPr>
         <p:txBody>
+          <a:bodyPr wrap="square" lIns="0" tIns="0" rIns="0" bIns="0" rtlCol="0" anchor="ctr"/>
+          <a:lstStyle/>
+          <a:p>
+            <a:pPr indent="0" marL="0">
+              <a:buNone/>
+            </a:pPr>
+            <a:r>
+              <a:rPr lang="en-US" sz="1500" b="1" dirty="0">
+                <a:solidFill>
+                  <a:srgbClr val="1B2A4A"/>
+                </a:solidFill>
+                <a:latin typeface="Georgia" pitchFamily="34" charset="0"/>
+                <a:ea typeface="Georgia" pitchFamily="34" charset="-122"/>
+                <a:cs typeface="Georgia" pitchFamily="34" charset="-120"/>
+              </a:rPr>
+              <a:t>When To Estimate</a:t>
+            </a:r>
+            <a:endParaRPr lang="en-US" sz="1500" dirty="0"/>
+          </a:p>
+        </p:txBody>
+      </p:sp>
+      <p:sp>
+        <p:nvSpPr>
+          <p:cNvPr id="9" name="Text 7"/>
+          <p:cNvSpPr/>
+          <p:nvPr/>
+        </p:nvSpPr>
+        <p:spPr>
+          <a:xfrm>
+            <a:off x="777240" y="1691640"/>
+            <a:ext cx="3383280" cy="2651760"/>
+          </a:xfrm>
+          <a:prstGeom prst="rect">
+            <a:avLst/>
+          </a:prstGeom>
+          <a:noFill/>
+          <a:ln/>
+        </p:spPr>
+        <p:txBody>
           <a:bodyPr wrap="square" rtlCol="0" anchor="t"/>
           <a:lstStyle/>
           <a:p>
-            <a:pPr indent="0" marL="0">
+            <a:pPr marL="342900" indent="-342900">
               <a:spcAft>
-                <a:spcPts val="400"/>
+                <a:spcPts val="600"/>
               </a:spcAft>
-              <a:buNone/>
-            </a:pPr>
-            <a:r>
-              <a:rPr lang="en-US" sz="1600" b="1" dirty="0">
-                <a:solidFill>
-                  <a:srgbClr val="1B2A4A"/>
+              <a:buSzPct val="100000"/>
+              <a:buChar char="•"/>
+            </a:pPr>
+            <a:r>
+              <a:rPr lang="en-US" sz="1300" dirty="0">
+                <a:solidFill>
+                  <a:srgbClr val="3D3A36"/>
                 </a:solidFill>
                 <a:latin typeface="Calibri" pitchFamily="34" charset="0"/>
                 <a:ea typeface="Calibri" pitchFamily="34" charset="-122"/>
                 <a:cs typeface="Calibri" pitchFamily="34" charset="-120"/>
               </a:rPr>
-              <a:t>Estimation</a:t>
-            </a:r>
-            <a:endParaRPr lang="en-US" sz="1600" dirty="0"/>
-          </a:p>
-          <a:p>
-            <a:pPr indent="0" marL="0">
+              <a:t>Checking if your answer is reasonable</a:t>
+            </a:r>
+            <a:endParaRPr lang="en-US" sz="1300" dirty="0"/>
+          </a:p>
+          <a:p>
+            <a:pPr marL="342900" indent="-342900">
               <a:spcAft>
-                <a:spcPts val="400"/>
+                <a:spcPts val="600"/>
               </a:spcAft>
-              <a:buNone/>
-            </a:pPr>
-            <a:endParaRPr lang="en-US" sz="1600" dirty="0"/>
-          </a:p>
-          <a:p>
-            <a:pPr indent="0" marL="0">
-              <a:spcAft>
-                <a:spcPts val="400"/>
-              </a:spcAft>
-              <a:buNone/>
+              <a:buSzPct val="100000"/>
+              <a:buChar char="•"/>
             </a:pPr>
             <a:r>
               <a:rPr lang="en-US" sz="1300" dirty="0">
@@ -2508,16 +3152,17 @@
                 <a:ea typeface="Calibri" pitchFamily="34" charset="-122"/>
                 <a:cs typeface="Calibri" pitchFamily="34" charset="-120"/>
               </a:rPr>
-              <a:t>Estimate by rounding each number before calculating</a:t>
-            </a:r>
-            <a:endParaRPr lang="en-US" sz="1600" dirty="0"/>
-          </a:p>
-          <a:p>
-            <a:pPr indent="0" marL="0">
+              <a:t>Quick mental calculations</a:t>
+            </a:r>
+            <a:endParaRPr lang="en-US" sz="1300" dirty="0"/>
+          </a:p>
+          <a:p>
+            <a:pPr marL="342900" indent="-342900">
               <a:spcAft>
-                <a:spcPts val="400"/>
+                <a:spcPts val="600"/>
               </a:spcAft>
-              <a:buNone/>
+              <a:buSzPct val="100000"/>
+              <a:buChar char="•"/>
             </a:pPr>
             <a:r>
               <a:rPr lang="en-US" sz="1300" dirty="0">
@@ -2528,16 +3173,17 @@
                 <a:ea typeface="Calibri" pitchFamily="34" charset="-122"/>
                 <a:cs typeface="Calibri" pitchFamily="34" charset="-120"/>
               </a:rPr>
-              <a:t>67 × 42 ≈ 70 × 40 = 2,800</a:t>
-            </a:r>
-            <a:endParaRPr lang="en-US" sz="1600" dirty="0"/>
-          </a:p>
-          <a:p>
-            <a:pPr indent="0" marL="0">
+              <a:t>When exact values aren't needed</a:t>
+            </a:r>
+            <a:endParaRPr lang="en-US" sz="1300" dirty="0"/>
+          </a:p>
+          <a:p>
+            <a:pPr marL="342900" indent="-342900">
               <a:spcAft>
-                <a:spcPts val="400"/>
+                <a:spcPts val="600"/>
               </a:spcAft>
-              <a:buNone/>
+              <a:buSzPct val="100000"/>
+              <a:buChar char="•"/>
             </a:pPr>
             <a:r>
               <a:rPr lang="en-US" sz="1300" dirty="0">
@@ -2548,16 +3194,125 @@
                 <a:ea typeface="Calibri" pitchFamily="34" charset="-122"/>
                 <a:cs typeface="Calibri" pitchFamily="34" charset="-120"/>
               </a:rPr>
-              <a:t>Check: actual answer is 2,814 — close!</a:t>
-            </a:r>
-            <a:endParaRPr lang="en-US" sz="1600" dirty="0"/>
-          </a:p>
+              <a:t>Shopping: 'About how much will this cost?'</a:t>
+            </a:r>
+            <a:endParaRPr lang="en-US" sz="1300" dirty="0"/>
+          </a:p>
+        </p:txBody>
+      </p:sp>
+      <p:sp>
+        <p:nvSpPr>
+          <p:cNvPr id="10" name="Shape 8"/>
+          <p:cNvSpPr/>
+          <p:nvPr/>
+        </p:nvSpPr>
+        <p:spPr>
+          <a:xfrm>
+            <a:off x="4754880" y="1051560"/>
+            <a:ext cx="3840480" cy="3474720"/>
+          </a:xfrm>
+          <a:prstGeom prst="rect">
+            <a:avLst/>
+          </a:prstGeom>
+          <a:solidFill>
+            <a:srgbClr val="FFFFFF"/>
+          </a:solidFill>
+          <a:ln/>
+          <a:effectLst>
+            <a:outerShdw sx="100000" sy="100000" kx="0" ky="0" algn="bl" rotWithShape="0" blurRad="50800" dist="25400" dir="8100000">
+              <a:srgbClr val="000000">
+                <a:alpha val="10000"/>
+              </a:srgbClr>
+            </a:outerShdw>
+          </a:effectLst>
+        </p:spPr>
+      </p:sp>
+      <p:sp>
+        <p:nvSpPr>
+          <p:cNvPr id="11" name="Shape 9"/>
+          <p:cNvSpPr/>
+          <p:nvPr/>
+        </p:nvSpPr>
+        <p:spPr>
+          <a:xfrm>
+            <a:off x="4754880" y="1051560"/>
+            <a:ext cx="3840480" cy="54864"/>
+          </a:xfrm>
+          <a:prstGeom prst="rect">
+            <a:avLst/>
+          </a:prstGeom>
+          <a:solidFill>
+            <a:srgbClr val="E9C46A"/>
+          </a:solidFill>
+          <a:ln/>
+        </p:spPr>
+      </p:sp>
+      <p:sp>
+        <p:nvSpPr>
+          <p:cNvPr id="12" name="Text 10"/>
+          <p:cNvSpPr/>
+          <p:nvPr/>
+        </p:nvSpPr>
+        <p:spPr>
+          <a:xfrm>
+            <a:off x="4983480" y="1188720"/>
+            <a:ext cx="3383280" cy="457200"/>
+          </a:xfrm>
+          <a:prstGeom prst="rect">
+            <a:avLst/>
+          </a:prstGeom>
+          <a:noFill/>
+          <a:ln/>
+        </p:spPr>
+        <p:txBody>
+          <a:bodyPr wrap="square" lIns="0" tIns="0" rIns="0" bIns="0" rtlCol="0" anchor="ctr"/>
+          <a:lstStyle/>
           <a:p>
             <a:pPr indent="0" marL="0">
+              <a:buNone/>
+            </a:pPr>
+            <a:r>
+              <a:rPr lang="en-US" sz="1500" b="1" dirty="0">
+                <a:solidFill>
+                  <a:srgbClr val="1B2A4A"/>
+                </a:solidFill>
+                <a:latin typeface="Georgia" pitchFamily="34" charset="0"/>
+                <a:ea typeface="Georgia" pitchFamily="34" charset="-122"/>
+                <a:cs typeface="Georgia" pitchFamily="34" charset="-120"/>
+              </a:rPr>
+              <a:t>How To Estimate</a:t>
+            </a:r>
+            <a:endParaRPr lang="en-US" sz="1500" dirty="0"/>
+          </a:p>
+        </p:txBody>
+      </p:sp>
+      <p:sp>
+        <p:nvSpPr>
+          <p:cNvPr id="13" name="Text 11"/>
+          <p:cNvSpPr/>
+          <p:nvPr/>
+        </p:nvSpPr>
+        <p:spPr>
+          <a:xfrm>
+            <a:off x="4983480" y="1691640"/>
+            <a:ext cx="3383280" cy="2651760"/>
+          </a:xfrm>
+          <a:prstGeom prst="rect">
+            <a:avLst/>
+          </a:prstGeom>
+          <a:noFill/>
+          <a:ln/>
+        </p:spPr>
+        <p:txBody>
+          <a:bodyPr wrap="square" rtlCol="0" anchor="t"/>
+          <a:lstStyle/>
+          <a:p>
+            <a:pPr marL="342900" indent="-342900">
               <a:spcAft>
-                <a:spcPts val="400"/>
+                <a:spcPts val="600"/>
               </a:spcAft>
-              <a:buNone/>
+              <a:buSzPct val="100000"/>
+              <a:buChar char="•"/>
             </a:pPr>
             <a:r>
               <a:rPr lang="en-US" sz="1300" dirty="0">
@@ -2568,16 +3323,17 @@
                 <a:ea typeface="Calibri" pitchFamily="34" charset="-122"/>
                 <a:cs typeface="Calibri" pitchFamily="34" charset="-120"/>
               </a:rPr>
-              <a:t>892 + 3,107 ≈ 900 + 3,100 = 4,000</a:t>
-            </a:r>
-            <a:endParaRPr lang="en-US" sz="1600" dirty="0"/>
-          </a:p>
-          <a:p>
-            <a:pPr indent="0" marL="0">
+              <a:t>Round each number first, then calculate</a:t>
+            </a:r>
+            <a:endParaRPr lang="en-US" sz="1300" dirty="0"/>
+          </a:p>
+          <a:p>
+            <a:pPr marL="342900" indent="-342900">
               <a:spcAft>
-                <a:spcPts val="400"/>
+                <a:spcPts val="600"/>
               </a:spcAft>
-              <a:buNone/>
+              <a:buSzPct val="100000"/>
+              <a:buChar char="•"/>
             </a:pPr>
             <a:r>
               <a:rPr lang="en-US" sz="1300" dirty="0">
@@ -2588,9 +3344,51 @@
                 <a:ea typeface="Calibri" pitchFamily="34" charset="-122"/>
                 <a:cs typeface="Calibri" pitchFamily="34" charset="-120"/>
               </a:rPr>
-              <a:t>Estimation helps you spot calculator mistakes</a:t>
-            </a:r>
-            <a:endParaRPr lang="en-US" sz="1600" dirty="0"/>
+              <a:t>Example: 48 × 21 ≈ 50 × 20 = 1,000</a:t>
+            </a:r>
+            <a:endParaRPr lang="en-US" sz="1300" dirty="0"/>
+          </a:p>
+          <a:p>
+            <a:pPr marL="342900" indent="-342900">
+              <a:spcAft>
+                <a:spcPts val="600"/>
+              </a:spcAft>
+              <a:buSzPct val="100000"/>
+              <a:buChar char="•"/>
+            </a:pPr>
+            <a:r>
+              <a:rPr lang="en-US" sz="1300" dirty="0">
+                <a:solidFill>
+                  <a:srgbClr val="3D3A36"/>
+                </a:solidFill>
+                <a:latin typeface="Calibri" pitchFamily="34" charset="0"/>
+                <a:ea typeface="Calibri" pitchFamily="34" charset="-122"/>
+                <a:cs typeface="Calibri" pitchFamily="34" charset="-120"/>
+              </a:rPr>
+              <a:t>The actual answer is 1,008 — close!</a:t>
+            </a:r>
+            <a:endParaRPr lang="en-US" sz="1300" dirty="0"/>
+          </a:p>
+          <a:p>
+            <a:pPr marL="342900" indent="-342900">
+              <a:spcAft>
+                <a:spcPts val="600"/>
+              </a:spcAft>
+              <a:buSzPct val="100000"/>
+              <a:buChar char="•"/>
+            </a:pPr>
+            <a:r>
+              <a:rPr lang="en-US" sz="1300" dirty="0">
+                <a:solidFill>
+                  <a:srgbClr val="3D3A36"/>
+                </a:solidFill>
+                <a:latin typeface="Calibri" pitchFamily="34" charset="0"/>
+                <a:ea typeface="Calibri" pitchFamily="34" charset="-122"/>
+                <a:cs typeface="Calibri" pitchFamily="34" charset="-120"/>
+              </a:rPr>
+              <a:t>Estimation catches big mistakes</a:t>
+            </a:r>
+            <a:endParaRPr lang="en-US" sz="1300" dirty="0"/>
           </a:p>
         </p:txBody>
       </p:sp>
@@ -2608,7 +3406,7 @@
     <p:bg>
       <p:bgPr>
         <a:solidFill>
-          <a:srgbClr val="1B2A4A"/>
+          <a:srgbClr val="FAF8F5"/>
         </a:solidFill>
       </p:bgPr>
     </p:bg>
@@ -2635,27 +3433,67 @@
         <p:spPr>
           <a:xfrm>
             <a:off x="0" y="0"/>
-            <a:ext cx="109728" cy="5143500"/>
-          </a:xfrm>
-          <a:prstGeom prst="rect">
-            <a:avLst/>
-          </a:prstGeom>
-          <a:solidFill>
-            <a:srgbClr val="E9C46A"/>
-          </a:solidFill>
-          <a:ln/>
-        </p:spPr>
-      </p:sp>
-      <p:sp>
-        <p:nvSpPr>
-          <p:cNvPr id="3" name="Text 1"/>
-          <p:cNvSpPr/>
-          <p:nvPr/>
-        </p:nvSpPr>
-        <p:spPr>
-          <a:xfrm>
-            <a:off x="731520" y="457200"/>
-            <a:ext cx="7772400" cy="731520"/>
+            <a:ext cx="9144000" cy="822960"/>
+          </a:xfrm>
+          <a:prstGeom prst="rect">
+            <a:avLst/>
+          </a:prstGeom>
+          <a:solidFill>
+            <a:srgbClr val="FFFFFF"/>
+          </a:solidFill>
+          <a:ln/>
+        </p:spPr>
+      </p:sp>
+      <p:sp>
+        <p:nvSpPr>
+          <p:cNvPr id="3" name="Shape 1"/>
+          <p:cNvSpPr/>
+          <p:nvPr/>
+        </p:nvSpPr>
+        <p:spPr>
+          <a:xfrm>
+            <a:off x="0" y="804672"/>
+            <a:ext cx="9144000" cy="27432"/>
+          </a:xfrm>
+          <a:prstGeom prst="rect">
+            <a:avLst/>
+          </a:prstGeom>
+          <a:solidFill>
+            <a:srgbClr val="E5E2DC"/>
+          </a:solidFill>
+          <a:ln/>
+        </p:spPr>
+      </p:sp>
+      <p:sp>
+        <p:nvSpPr>
+          <p:cNvPr id="4" name="Shape 2"/>
+          <p:cNvSpPr/>
+          <p:nvPr/>
+        </p:nvSpPr>
+        <p:spPr>
+          <a:xfrm>
+            <a:off x="548640" y="201168"/>
+            <a:ext cx="54864" cy="420624"/>
+          </a:xfrm>
+          <a:prstGeom prst="rect">
+            <a:avLst/>
+          </a:prstGeom>
+          <a:solidFill>
+            <a:srgbClr val="2A9D8F"/>
+          </a:solidFill>
+          <a:ln/>
+        </p:spPr>
+      </p:sp>
+      <p:sp>
+        <p:nvSpPr>
+          <p:cNvPr id="5" name="Text 3"/>
+          <p:cNvSpPr/>
+          <p:nvPr/>
+        </p:nvSpPr>
+        <p:spPr>
+          <a:xfrm>
+            <a:off x="777240" y="137160"/>
+            <a:ext cx="7772400" cy="548640"/>
           </a:xfrm>
           <a:prstGeom prst="rect">
             <a:avLst/>
@@ -2664,37 +3502,37 @@
           <a:ln/>
         </p:spPr>
         <p:txBody>
-          <a:bodyPr wrap="square" rtlCol="0" anchor="ctr"/>
+          <a:bodyPr wrap="square" lIns="0" tIns="0" rIns="0" bIns="0" rtlCol="0" anchor="ctr"/>
           <a:lstStyle/>
           <a:p>
             <a:pPr indent="0" marL="0">
               <a:buNone/>
             </a:pPr>
             <a:r>
-              <a:rPr lang="en-US" sz="3200" b="1" dirty="0">
-                <a:solidFill>
-                  <a:srgbClr val="FFFFFF"/>
+              <a:rPr lang="en-US" sz="2000" b="1" dirty="0">
+                <a:solidFill>
+                  <a:srgbClr val="1B2A4A"/>
                 </a:solidFill>
                 <a:latin typeface="Georgia" pitchFamily="34" charset="0"/>
                 <a:ea typeface="Georgia" pitchFamily="34" charset="-122"/>
                 <a:cs typeface="Georgia" pitchFamily="34" charset="-120"/>
               </a:rPr>
-              <a:t>Key Takeaways</a:t>
-            </a:r>
-            <a:endParaRPr lang="en-US" sz="3200" dirty="0"/>
-          </a:p>
-        </p:txBody>
-      </p:sp>
-      <p:sp>
-        <p:nvSpPr>
-          <p:cNvPr id="4" name="Text 2"/>
-          <p:cNvSpPr/>
-          <p:nvPr/>
-        </p:nvSpPr>
-        <p:spPr>
-          <a:xfrm>
-            <a:off x="731520" y="1463040"/>
-            <a:ext cx="7772400" cy="3200400"/>
+              <a:t>Rounding Decimals</a:t>
+            </a:r>
+            <a:endParaRPr lang="en-US" sz="2000" dirty="0"/>
+          </a:p>
+        </p:txBody>
+      </p:sp>
+      <p:sp>
+        <p:nvSpPr>
+          <p:cNvPr id="6" name="Text 4"/>
+          <p:cNvSpPr/>
+          <p:nvPr/>
+        </p:nvSpPr>
+        <p:spPr>
+          <a:xfrm>
+            <a:off x="731520" y="1051560"/>
+            <a:ext cx="7680960" cy="3108960"/>
           </a:xfrm>
           <a:prstGeom prst="rect">
             <a:avLst/>
@@ -2708,7 +3546,7 @@
           <a:p>
             <a:pPr marL="342900" indent="-342900">
               <a:spcAft>
-                <a:spcPts val="1000"/>
+                <a:spcPts val="800"/>
               </a:spcAft>
               <a:buSzPct val="100000"/>
               <a:buChar char="•"/>
@@ -2716,20 +3554,20 @@
             <a:r>
               <a:rPr lang="en-US" sz="1500" dirty="0">
                 <a:solidFill>
-                  <a:srgbClr val="CADCFC"/>
+                  <a:srgbClr val="3D3A36"/>
                 </a:solidFill>
                 <a:latin typeface="Calibri" pitchFamily="34" charset="0"/>
                 <a:ea typeface="Calibri" pitchFamily="34" charset="-122"/>
                 <a:cs typeface="Calibri" pitchFamily="34" charset="-120"/>
               </a:rPr>
-              <a:t>Round to make numbers simpler; look at digit to the right</a:t>
+              <a:t>Rounding to 1 decimal place (1 d.p.): look at the 2nd decimal digit.</a:t>
             </a:r>
             <a:endParaRPr lang="en-US" sz="1500" dirty="0"/>
           </a:p>
           <a:p>
             <a:pPr marL="342900" indent="-342900">
               <a:spcAft>
-                <a:spcPts val="1000"/>
+                <a:spcPts val="800"/>
               </a:spcAft>
               <a:buSzPct val="100000"/>
               <a:buChar char="•"/>
@@ -2737,20 +3575,20 @@
             <a:r>
               <a:rPr lang="en-US" sz="1500" dirty="0">
                 <a:solidFill>
-                  <a:srgbClr val="CADCFC"/>
+                  <a:srgbClr val="3D3A36"/>
                 </a:solidFill>
                 <a:latin typeface="Calibri" pitchFamily="34" charset="0"/>
                 <a:ea typeface="Calibri" pitchFamily="34" charset="-122"/>
                 <a:cs typeface="Calibri" pitchFamily="34" charset="-120"/>
               </a:rPr>
-              <a:t>5 or more → round up; less than 5 → round down</a:t>
+              <a:t>Example: 3.847 to 1 d.p. → look at 4 → 4 &lt; 5 → round down → 3.8.</a:t>
             </a:r>
             <a:endParaRPr lang="en-US" sz="1500" dirty="0"/>
           </a:p>
           <a:p>
             <a:pPr marL="342900" indent="-342900">
               <a:spcAft>
-                <a:spcPts val="1000"/>
+                <a:spcPts val="800"/>
               </a:spcAft>
               <a:buSzPct val="100000"/>
               <a:buChar char="•"/>
@@ -2758,20 +3596,20 @@
             <a:r>
               <a:rPr lang="en-US" sz="1500" dirty="0">
                 <a:solidFill>
-                  <a:srgbClr val="CADCFC"/>
+                  <a:srgbClr val="3D3A36"/>
                 </a:solidFill>
                 <a:latin typeface="Calibri" pitchFamily="34" charset="0"/>
                 <a:ea typeface="Calibri" pitchFamily="34" charset="-122"/>
                 <a:cs typeface="Calibri" pitchFamily="34" charset="-120"/>
               </a:rPr>
-              <a:t>Replace all digits to the right with zeros</a:t>
+              <a:t>Example: 6.251 to 1 d.p. → look at 5 → 5 ≥ 5 → round up → 6.3.</a:t>
             </a:r>
             <a:endParaRPr lang="en-US" sz="1500" dirty="0"/>
           </a:p>
           <a:p>
             <a:pPr marL="342900" indent="-342900">
               <a:spcAft>
-                <a:spcPts val="1000"/>
+                <a:spcPts val="800"/>
               </a:spcAft>
               <a:buSzPct val="100000"/>
               <a:buChar char="•"/>
@@ -2779,20 +3617,20 @@
             <a:r>
               <a:rPr lang="en-US" sz="1500" dirty="0">
                 <a:solidFill>
-                  <a:srgbClr val="CADCFC"/>
+                  <a:srgbClr val="3D3A36"/>
                 </a:solidFill>
                 <a:latin typeface="Calibri" pitchFamily="34" charset="0"/>
                 <a:ea typeface="Calibri" pitchFamily="34" charset="-122"/>
                 <a:cs typeface="Calibri" pitchFamily="34" charset="-120"/>
               </a:rPr>
-              <a:t>Estimation: round first, then calculate</a:t>
+              <a:t>Rounding to the nearest whole number: look at the first decimal digit.</a:t>
             </a:r>
             <a:endParaRPr lang="en-US" sz="1500" dirty="0"/>
           </a:p>
           <a:p>
             <a:pPr marL="342900" indent="-342900">
               <a:spcAft>
-                <a:spcPts val="1000"/>
+                <a:spcPts val="800"/>
               </a:spcAft>
               <a:buSzPct val="100000"/>
               <a:buChar char="•"/>
@@ -2800,18 +3638,110 @@
             <a:r>
               <a:rPr lang="en-US" sz="1500" dirty="0">
                 <a:solidFill>
-                  <a:srgbClr val="CADCFC"/>
+                  <a:srgbClr val="3D3A36"/>
                 </a:solidFill>
                 <a:latin typeface="Calibri" pitchFamily="34" charset="0"/>
                 <a:ea typeface="Calibri" pitchFamily="34" charset="-122"/>
                 <a:cs typeface="Calibri" pitchFamily="34" charset="-120"/>
               </a:rPr>
-              <a:t>Use estimation to check if your answer is reasonable</a:t>
+              <a:t>Example: 7.6 → 6 ≥ 5 → round up → 8.</a:t>
             </a:r>
             <a:endParaRPr lang="en-US" sz="1500" dirty="0"/>
           </a:p>
         </p:txBody>
       </p:sp>
+    </p:spTree>
+  </p:cSld>
+  <p:clrMapOvr>
+    <a:masterClrMapping/>
+  </p:clrMapOvr>
+</p:sld>
+</file>
+
+<file path=ppt/slides/slide6.xml><?xml version="1.0" encoding="utf-8"?>
+<p:sld xmlns:a="http://schemas.openxmlformats.org/drawingml/2006/main" xmlns:r="http://schemas.openxmlformats.org/officeDocument/2006/relationships" xmlns:p="http://schemas.openxmlformats.org/presentationml/2006/main">
+  <p:cSld name="Slide 6">
+    <p:bg>
+      <p:bgPr>
+        <a:solidFill>
+          <a:srgbClr val="FAF8F5"/>
+        </a:solidFill>
+      </p:bgPr>
+    </p:bg>
+    <p:spTree>
+      <p:nvGrpSpPr>
+        <p:cNvPr id="1" name=""/>
+        <p:cNvGrpSpPr/>
+        <p:nvPr/>
+      </p:nvGrpSpPr>
+      <p:grpSpPr>
+        <a:xfrm>
+          <a:off x="0" y="0"/>
+          <a:ext cx="0" cy="0"/>
+          <a:chOff x="0" y="0"/>
+          <a:chExt cx="0" cy="0"/>
+        </a:xfrm>
+      </p:grpSpPr>
+      <p:sp>
+        <p:nvSpPr>
+          <p:cNvPr id="2" name="Shape 0"/>
+          <p:cNvSpPr/>
+          <p:nvPr/>
+        </p:nvSpPr>
+        <p:spPr>
+          <a:xfrm>
+            <a:off x="0" y="0"/>
+            <a:ext cx="9144000" cy="822960"/>
+          </a:xfrm>
+          <a:prstGeom prst="rect">
+            <a:avLst/>
+          </a:prstGeom>
+          <a:solidFill>
+            <a:srgbClr val="FFFFFF"/>
+          </a:solidFill>
+          <a:ln/>
+        </p:spPr>
+      </p:sp>
+      <p:sp>
+        <p:nvSpPr>
+          <p:cNvPr id="3" name="Shape 1"/>
+          <p:cNvSpPr/>
+          <p:nvPr/>
+        </p:nvSpPr>
+        <p:spPr>
+          <a:xfrm>
+            <a:off x="0" y="804672"/>
+            <a:ext cx="9144000" cy="27432"/>
+          </a:xfrm>
+          <a:prstGeom prst="rect">
+            <a:avLst/>
+          </a:prstGeom>
+          <a:solidFill>
+            <a:srgbClr val="E5E2DC"/>
+          </a:solidFill>
+          <a:ln/>
+        </p:spPr>
+      </p:sp>
+      <p:sp>
+        <p:nvSpPr>
+          <p:cNvPr id="4" name="Shape 2"/>
+          <p:cNvSpPr/>
+          <p:nvPr/>
+        </p:nvSpPr>
+        <p:spPr>
+          <a:xfrm>
+            <a:off x="548640" y="201168"/>
+            <a:ext cx="54864" cy="420624"/>
+          </a:xfrm>
+          <a:prstGeom prst="rect">
+            <a:avLst/>
+          </a:prstGeom>
+          <a:solidFill>
+            <a:srgbClr val="2A9D8F"/>
+          </a:solidFill>
+          <a:ln/>
+        </p:spPr>
+      </p:sp>
       <p:sp>
         <p:nvSpPr>
           <p:cNvPr id="5" name="Text 3"/>
@@ -2820,8 +3750,8 @@
         </p:nvSpPr>
         <p:spPr>
           <a:xfrm>
-            <a:off x="731520" y="4572000"/>
-            <a:ext cx="7772400" cy="365760"/>
+            <a:off x="777240" y="137160"/>
+            <a:ext cx="7772400" cy="548640"/>
           </a:xfrm>
           <a:prstGeom prst="rect">
             <a:avLst/>
@@ -2830,24 +3760,783 @@
           <a:ln/>
         </p:spPr>
         <p:txBody>
-          <a:bodyPr wrap="square" rtlCol="0" anchor="ctr"/>
+          <a:bodyPr wrap="square" lIns="0" tIns="0" rIns="0" bIns="0" rtlCol="0" anchor="ctr"/>
           <a:lstStyle/>
           <a:p>
             <a:pPr indent="0" marL="0">
               <a:buNone/>
             </a:pPr>
             <a:r>
-              <a:rPr lang="en-US" sz="1100" dirty="0">
-                <a:solidFill>
-                  <a:srgbClr val="E9C46A"/>
+              <a:rPr lang="en-US" sz="2000" b="1" dirty="0">
+                <a:solidFill>
+                  <a:srgbClr val="1B2A4A"/>
+                </a:solidFill>
+                <a:latin typeface="Georgia" pitchFamily="34" charset="0"/>
+                <a:ea typeface="Georgia" pitchFamily="34" charset="-122"/>
+                <a:cs typeface="Georgia" pitchFamily="34" charset="-120"/>
+              </a:rPr>
+              <a:t>Check Your Understanding</a:t>
+            </a:r>
+            <a:endParaRPr lang="en-US" sz="2000" dirty="0"/>
+          </a:p>
+        </p:txBody>
+      </p:sp>
+      <p:sp>
+        <p:nvSpPr>
+          <p:cNvPr id="6" name="Shape 4"/>
+          <p:cNvSpPr/>
+          <p:nvPr/>
+        </p:nvSpPr>
+        <p:spPr>
+          <a:xfrm>
+            <a:off x="731520" y="1051560"/>
+            <a:ext cx="7680960" cy="438912"/>
+          </a:xfrm>
+          <a:prstGeom prst="rect">
+            <a:avLst/>
+          </a:prstGeom>
+          <a:solidFill>
+            <a:srgbClr val="FFFFFF"/>
+          </a:solidFill>
+          <a:ln/>
+        </p:spPr>
+      </p:sp>
+      <p:sp>
+        <p:nvSpPr>
+          <p:cNvPr id="7" name="Text 5"/>
+          <p:cNvSpPr/>
+          <p:nvPr/>
+        </p:nvSpPr>
+        <p:spPr>
+          <a:xfrm>
+            <a:off x="868680" y="1051560"/>
+            <a:ext cx="320040" cy="438912"/>
+          </a:xfrm>
+          <a:prstGeom prst="rect">
+            <a:avLst/>
+          </a:prstGeom>
+          <a:noFill/>
+          <a:ln/>
+        </p:spPr>
+        <p:txBody>
+          <a:bodyPr wrap="square" rtlCol="0" anchor="ctr"/>
+          <a:lstStyle/>
+          <a:p>
+            <a:pPr indent="0" marL="0">
+              <a:buNone/>
+            </a:pPr>
+            <a:r>
+              <a:rPr lang="en-US" sz="1400" dirty="0">
+                <a:solidFill>
+                  <a:srgbClr val="2A9D8F"/>
+                </a:solidFill>
+              </a:rPr>
+              <a:t>☐</a:t>
+            </a:r>
+            <a:endParaRPr lang="en-US" sz="1400" dirty="0"/>
+          </a:p>
+        </p:txBody>
+      </p:sp>
+      <p:sp>
+        <p:nvSpPr>
+          <p:cNvPr id="8" name="Text 6"/>
+          <p:cNvSpPr/>
+          <p:nvPr/>
+        </p:nvSpPr>
+        <p:spPr>
+          <a:xfrm>
+            <a:off x="1234440" y="1051560"/>
+            <a:ext cx="6949440" cy="438912"/>
+          </a:xfrm>
+          <a:prstGeom prst="rect">
+            <a:avLst/>
+          </a:prstGeom>
+          <a:noFill/>
+          <a:ln/>
+        </p:spPr>
+        <p:txBody>
+          <a:bodyPr wrap="square" rtlCol="0" anchor="ctr"/>
+          <a:lstStyle/>
+          <a:p>
+            <a:pPr indent="0" marL="0">
+              <a:buNone/>
+            </a:pPr>
+            <a:r>
+              <a:rPr lang="en-US" sz="1300" dirty="0">
+                <a:solidFill>
+                  <a:srgbClr val="3D3A36"/>
                 </a:solidFill>
                 <a:latin typeface="Calibri" pitchFamily="34" charset="0"/>
                 <a:ea typeface="Calibri" pitchFamily="34" charset="-122"/>
                 <a:cs typeface="Calibri" pitchFamily="34" charset="-120"/>
               </a:rPr>
+              <a:t>I can round numbers to the nearest 10, 100, and 1000</a:t>
+            </a:r>
+            <a:endParaRPr lang="en-US" sz="1300" dirty="0"/>
+          </a:p>
+        </p:txBody>
+      </p:sp>
+      <p:sp>
+        <p:nvSpPr>
+          <p:cNvPr id="9" name="Shape 7"/>
+          <p:cNvSpPr/>
+          <p:nvPr/>
+        </p:nvSpPr>
+        <p:spPr>
+          <a:xfrm>
+            <a:off x="731520" y="1554480"/>
+            <a:ext cx="7680960" cy="438912"/>
+          </a:xfrm>
+          <a:prstGeom prst="rect">
+            <a:avLst/>
+          </a:prstGeom>
+          <a:solidFill>
+            <a:srgbClr val="F8F6F3"/>
+          </a:solidFill>
+          <a:ln/>
+        </p:spPr>
+      </p:sp>
+      <p:sp>
+        <p:nvSpPr>
+          <p:cNvPr id="10" name="Text 8"/>
+          <p:cNvSpPr/>
+          <p:nvPr/>
+        </p:nvSpPr>
+        <p:spPr>
+          <a:xfrm>
+            <a:off x="868680" y="1554480"/>
+            <a:ext cx="320040" cy="438912"/>
+          </a:xfrm>
+          <a:prstGeom prst="rect">
+            <a:avLst/>
+          </a:prstGeom>
+          <a:noFill/>
+          <a:ln/>
+        </p:spPr>
+        <p:txBody>
+          <a:bodyPr wrap="square" rtlCol="0" anchor="ctr"/>
+          <a:lstStyle/>
+          <a:p>
+            <a:pPr indent="0" marL="0">
+              <a:buNone/>
+            </a:pPr>
+            <a:r>
+              <a:rPr lang="en-US" sz="1400" dirty="0">
+                <a:solidFill>
+                  <a:srgbClr val="2A9D8F"/>
+                </a:solidFill>
+              </a:rPr>
+              <a:t>☐</a:t>
+            </a:r>
+            <a:endParaRPr lang="en-US" sz="1400" dirty="0"/>
+          </a:p>
+        </p:txBody>
+      </p:sp>
+      <p:sp>
+        <p:nvSpPr>
+          <p:cNvPr id="11" name="Text 9"/>
+          <p:cNvSpPr/>
+          <p:nvPr/>
+        </p:nvSpPr>
+        <p:spPr>
+          <a:xfrm>
+            <a:off x="1234440" y="1554480"/>
+            <a:ext cx="6949440" cy="438912"/>
+          </a:xfrm>
+          <a:prstGeom prst="rect">
+            <a:avLst/>
+          </a:prstGeom>
+          <a:noFill/>
+          <a:ln/>
+        </p:spPr>
+        <p:txBody>
+          <a:bodyPr wrap="square" rtlCol="0" anchor="ctr"/>
+          <a:lstStyle/>
+          <a:p>
+            <a:pPr indent="0" marL="0">
+              <a:buNone/>
+            </a:pPr>
+            <a:r>
+              <a:rPr lang="en-US" sz="1300" dirty="0">
+                <a:solidFill>
+                  <a:srgbClr val="3D3A36"/>
+                </a:solidFill>
+                <a:latin typeface="Calibri" pitchFamily="34" charset="0"/>
+                <a:ea typeface="Calibri" pitchFamily="34" charset="-122"/>
+                <a:cs typeface="Calibri" pitchFamily="34" charset="-120"/>
+              </a:rPr>
+              <a:t>I can round decimal numbers to 1 and 2 decimal places</a:t>
+            </a:r>
+            <a:endParaRPr lang="en-US" sz="1300" dirty="0"/>
+          </a:p>
+        </p:txBody>
+      </p:sp>
+      <p:sp>
+        <p:nvSpPr>
+          <p:cNvPr id="12" name="Shape 10"/>
+          <p:cNvSpPr/>
+          <p:nvPr/>
+        </p:nvSpPr>
+        <p:spPr>
+          <a:xfrm>
+            <a:off x="731520" y="2057400"/>
+            <a:ext cx="7680960" cy="438912"/>
+          </a:xfrm>
+          <a:prstGeom prst="rect">
+            <a:avLst/>
+          </a:prstGeom>
+          <a:solidFill>
+            <a:srgbClr val="FFFFFF"/>
+          </a:solidFill>
+          <a:ln/>
+        </p:spPr>
+      </p:sp>
+      <p:sp>
+        <p:nvSpPr>
+          <p:cNvPr id="13" name="Text 11"/>
+          <p:cNvSpPr/>
+          <p:nvPr/>
+        </p:nvSpPr>
+        <p:spPr>
+          <a:xfrm>
+            <a:off x="868680" y="2057400"/>
+            <a:ext cx="320040" cy="438912"/>
+          </a:xfrm>
+          <a:prstGeom prst="rect">
+            <a:avLst/>
+          </a:prstGeom>
+          <a:noFill/>
+          <a:ln/>
+        </p:spPr>
+        <p:txBody>
+          <a:bodyPr wrap="square" rtlCol="0" anchor="ctr"/>
+          <a:lstStyle/>
+          <a:p>
+            <a:pPr indent="0" marL="0">
+              <a:buNone/>
+            </a:pPr>
+            <a:r>
+              <a:rPr lang="en-US" sz="1400" dirty="0">
+                <a:solidFill>
+                  <a:srgbClr val="2A9D8F"/>
+                </a:solidFill>
+              </a:rPr>
+              <a:t>☐</a:t>
+            </a:r>
+            <a:endParaRPr lang="en-US" sz="1400" dirty="0"/>
+          </a:p>
+        </p:txBody>
+      </p:sp>
+      <p:sp>
+        <p:nvSpPr>
+          <p:cNvPr id="14" name="Text 12"/>
+          <p:cNvSpPr/>
+          <p:nvPr/>
+        </p:nvSpPr>
+        <p:spPr>
+          <a:xfrm>
+            <a:off x="1234440" y="2057400"/>
+            <a:ext cx="6949440" cy="438912"/>
+          </a:xfrm>
+          <a:prstGeom prst="rect">
+            <a:avLst/>
+          </a:prstGeom>
+          <a:noFill/>
+          <a:ln/>
+        </p:spPr>
+        <p:txBody>
+          <a:bodyPr wrap="square" rtlCol="0" anchor="ctr"/>
+          <a:lstStyle/>
+          <a:p>
+            <a:pPr indent="0" marL="0">
+              <a:buNone/>
+            </a:pPr>
+            <a:r>
+              <a:rPr lang="en-US" sz="1300" dirty="0">
+                <a:solidFill>
+                  <a:srgbClr val="3D3A36"/>
+                </a:solidFill>
+                <a:latin typeface="Calibri" pitchFamily="34" charset="0"/>
+                <a:ea typeface="Calibri" pitchFamily="34" charset="-122"/>
+                <a:cs typeface="Calibri" pitchFamily="34" charset="-120"/>
+              </a:rPr>
+              <a:t>I know the '5 or above' rule</a:t>
+            </a:r>
+            <a:endParaRPr lang="en-US" sz="1300" dirty="0"/>
+          </a:p>
+        </p:txBody>
+      </p:sp>
+      <p:sp>
+        <p:nvSpPr>
+          <p:cNvPr id="15" name="Shape 13"/>
+          <p:cNvSpPr/>
+          <p:nvPr/>
+        </p:nvSpPr>
+        <p:spPr>
+          <a:xfrm>
+            <a:off x="731520" y="2560320"/>
+            <a:ext cx="7680960" cy="438912"/>
+          </a:xfrm>
+          <a:prstGeom prst="rect">
+            <a:avLst/>
+          </a:prstGeom>
+          <a:solidFill>
+            <a:srgbClr val="F8F6F3"/>
+          </a:solidFill>
+          <a:ln/>
+        </p:spPr>
+      </p:sp>
+      <p:sp>
+        <p:nvSpPr>
+          <p:cNvPr id="16" name="Text 14"/>
+          <p:cNvSpPr/>
+          <p:nvPr/>
+        </p:nvSpPr>
+        <p:spPr>
+          <a:xfrm>
+            <a:off x="868680" y="2560320"/>
+            <a:ext cx="320040" cy="438912"/>
+          </a:xfrm>
+          <a:prstGeom prst="rect">
+            <a:avLst/>
+          </a:prstGeom>
+          <a:noFill/>
+          <a:ln/>
+        </p:spPr>
+        <p:txBody>
+          <a:bodyPr wrap="square" rtlCol="0" anchor="ctr"/>
+          <a:lstStyle/>
+          <a:p>
+            <a:pPr indent="0" marL="0">
+              <a:buNone/>
+            </a:pPr>
+            <a:r>
+              <a:rPr lang="en-US" sz="1400" dirty="0">
+                <a:solidFill>
+                  <a:srgbClr val="2A9D8F"/>
+                </a:solidFill>
+              </a:rPr>
+              <a:t>☐</a:t>
+            </a:r>
+            <a:endParaRPr lang="en-US" sz="1400" dirty="0"/>
+          </a:p>
+        </p:txBody>
+      </p:sp>
+      <p:sp>
+        <p:nvSpPr>
+          <p:cNvPr id="17" name="Text 15"/>
+          <p:cNvSpPr/>
+          <p:nvPr/>
+        </p:nvSpPr>
+        <p:spPr>
+          <a:xfrm>
+            <a:off x="1234440" y="2560320"/>
+            <a:ext cx="6949440" cy="438912"/>
+          </a:xfrm>
+          <a:prstGeom prst="rect">
+            <a:avLst/>
+          </a:prstGeom>
+          <a:noFill/>
+          <a:ln/>
+        </p:spPr>
+        <p:txBody>
+          <a:bodyPr wrap="square" rtlCol="0" anchor="ctr"/>
+          <a:lstStyle/>
+          <a:p>
+            <a:pPr indent="0" marL="0">
+              <a:buNone/>
+            </a:pPr>
+            <a:r>
+              <a:rPr lang="en-US" sz="1300" dirty="0">
+                <a:solidFill>
+                  <a:srgbClr val="3D3A36"/>
+                </a:solidFill>
+                <a:latin typeface="Calibri" pitchFamily="34" charset="0"/>
+                <a:ea typeface="Calibri" pitchFamily="34" charset="-122"/>
+                <a:cs typeface="Calibri" pitchFamily="34" charset="-120"/>
+              </a:rPr>
+              <a:t>I can use estimation to check my answers</a:t>
+            </a:r>
+            <a:endParaRPr lang="en-US" sz="1300" dirty="0"/>
+          </a:p>
+        </p:txBody>
+      </p:sp>
+      <p:sp>
+        <p:nvSpPr>
+          <p:cNvPr id="18" name="Shape 16"/>
+          <p:cNvSpPr/>
+          <p:nvPr/>
+        </p:nvSpPr>
+        <p:spPr>
+          <a:xfrm>
+            <a:off x="731520" y="3063240"/>
+            <a:ext cx="7680960" cy="438912"/>
+          </a:xfrm>
+          <a:prstGeom prst="rect">
+            <a:avLst/>
+          </a:prstGeom>
+          <a:solidFill>
+            <a:srgbClr val="FFFFFF"/>
+          </a:solidFill>
+          <a:ln/>
+        </p:spPr>
+      </p:sp>
+      <p:sp>
+        <p:nvSpPr>
+          <p:cNvPr id="19" name="Text 17"/>
+          <p:cNvSpPr/>
+          <p:nvPr/>
+        </p:nvSpPr>
+        <p:spPr>
+          <a:xfrm>
+            <a:off x="868680" y="3063240"/>
+            <a:ext cx="320040" cy="438912"/>
+          </a:xfrm>
+          <a:prstGeom prst="rect">
+            <a:avLst/>
+          </a:prstGeom>
+          <a:noFill/>
+          <a:ln/>
+        </p:spPr>
+        <p:txBody>
+          <a:bodyPr wrap="square" rtlCol="0" anchor="ctr"/>
+          <a:lstStyle/>
+          <a:p>
+            <a:pPr indent="0" marL="0">
+              <a:buNone/>
+            </a:pPr>
+            <a:r>
+              <a:rPr lang="en-US" sz="1400" dirty="0">
+                <a:solidFill>
+                  <a:srgbClr val="2A9D8F"/>
+                </a:solidFill>
+              </a:rPr>
+              <a:t>☐</a:t>
+            </a:r>
+            <a:endParaRPr lang="en-US" sz="1400" dirty="0"/>
+          </a:p>
+        </p:txBody>
+      </p:sp>
+      <p:sp>
+        <p:nvSpPr>
+          <p:cNvPr id="20" name="Text 18"/>
+          <p:cNvSpPr/>
+          <p:nvPr/>
+        </p:nvSpPr>
+        <p:spPr>
+          <a:xfrm>
+            <a:off x="1234440" y="3063240"/>
+            <a:ext cx="6949440" cy="438912"/>
+          </a:xfrm>
+          <a:prstGeom prst="rect">
+            <a:avLst/>
+          </a:prstGeom>
+          <a:noFill/>
+          <a:ln/>
+        </p:spPr>
+        <p:txBody>
+          <a:bodyPr wrap="square" rtlCol="0" anchor="ctr"/>
+          <a:lstStyle/>
+          <a:p>
+            <a:pPr indent="0" marL="0">
+              <a:buNone/>
+            </a:pPr>
+            <a:r>
+              <a:rPr lang="en-US" sz="1300" dirty="0">
+                <a:solidFill>
+                  <a:srgbClr val="3D3A36"/>
+                </a:solidFill>
+                <a:latin typeface="Calibri" pitchFamily="34" charset="0"/>
+                <a:ea typeface="Calibri" pitchFamily="34" charset="-122"/>
+                <a:cs typeface="Calibri" pitchFamily="34" charset="-120"/>
+              </a:rPr>
+              <a:t>I understand why rounding is useful in real life</a:t>
+            </a:r>
+            <a:endParaRPr lang="en-US" sz="1300" dirty="0"/>
+          </a:p>
+        </p:txBody>
+      </p:sp>
+      <p:sp>
+        <p:nvSpPr>
+          <p:cNvPr id="21" name="Shape 19"/>
+          <p:cNvSpPr/>
+          <p:nvPr/>
+        </p:nvSpPr>
+        <p:spPr>
+          <a:xfrm>
+            <a:off x="731520" y="3749040"/>
+            <a:ext cx="7680960" cy="594360"/>
+          </a:xfrm>
+          <a:prstGeom prst="rect">
+            <a:avLst/>
+          </a:prstGeom>
+          <a:solidFill>
+            <a:srgbClr val="E8F5F3"/>
+          </a:solidFill>
+          <a:ln/>
+          <a:effectLst>
+            <a:outerShdw sx="100000" sy="100000" kx="0" ky="0" algn="bl" rotWithShape="0" blurRad="50800" dist="25400" dir="8100000">
+              <a:srgbClr val="000000">
+                <a:alpha val="10000"/>
+              </a:srgbClr>
+            </a:outerShdw>
+          </a:effectLst>
+        </p:spPr>
+      </p:sp>
+      <p:sp>
+        <p:nvSpPr>
+          <p:cNvPr id="22" name="Text 20"/>
+          <p:cNvSpPr/>
+          <p:nvPr/>
+        </p:nvSpPr>
+        <p:spPr>
+          <a:xfrm>
+            <a:off x="914400" y="3749040"/>
+            <a:ext cx="7315200" cy="594360"/>
+          </a:xfrm>
+          <a:prstGeom prst="rect">
+            <a:avLst/>
+          </a:prstGeom>
+          <a:noFill/>
+          <a:ln/>
+        </p:spPr>
+        <p:txBody>
+          <a:bodyPr wrap="square" rtlCol="0" anchor="ctr"/>
+          <a:lstStyle/>
+          <a:p>
+            <a:pPr indent="0" marL="0">
+              <a:buNone/>
+            </a:pPr>
+            <a:r>
+              <a:rPr lang="en-US" sz="1200" b="1" dirty="0">
+                <a:solidFill>
+                  <a:srgbClr val="2A9D8F"/>
+                </a:solidFill>
+                <a:latin typeface="Calibri" pitchFamily="34" charset="0"/>
+                <a:ea typeface="Calibri" pitchFamily="34" charset="-122"/>
+                <a:cs typeface="Calibri" pitchFamily="34" charset="-120"/>
+              </a:rPr>
+              <a:t>Key Idea: </a:t>
+            </a:r>
+            <a:pPr indent="0" marL="0">
+              <a:buNone/>
+            </a:pPr>
+            <a:r>
+              <a:rPr lang="en-US" sz="1200" i="1" dirty="0">
+                <a:solidFill>
+                  <a:srgbClr val="3D3A36"/>
+                </a:solidFill>
+                <a:latin typeface="Calibri" pitchFamily="34" charset="0"/>
+                <a:ea typeface="Calibri" pitchFamily="34" charset="-122"/>
+                <a:cs typeface="Calibri" pitchFamily="34" charset="-120"/>
+              </a:rPr>
+              <a:t>Rounding makes big numbers easier to work with and helps you check answers.</a:t>
+            </a:r>
+            <a:endParaRPr lang="en-US" sz="1200" dirty="0"/>
+          </a:p>
+        </p:txBody>
+      </p:sp>
+    </p:spTree>
+  </p:cSld>
+  <p:clrMapOvr>
+    <a:masterClrMapping/>
+  </p:clrMapOvr>
+</p:sld>
+</file>
+
+<file path=ppt/slides/slide7.xml><?xml version="1.0" encoding="utf-8"?>
+<p:sld xmlns:a="http://schemas.openxmlformats.org/drawingml/2006/main" xmlns:r="http://schemas.openxmlformats.org/officeDocument/2006/relationships" xmlns:p="http://schemas.openxmlformats.org/presentationml/2006/main">
+  <p:cSld name="Slide 7">
+    <p:spTree>
+      <p:nvGrpSpPr>
+        <p:cNvPr id="1" name=""/>
+        <p:cNvGrpSpPr/>
+        <p:nvPr/>
+      </p:nvGrpSpPr>
+      <p:grpSpPr>
+        <a:xfrm>
+          <a:off x="0" y="0"/>
+          <a:ext cx="0" cy="0"/>
+          <a:chOff x="0" y="0"/>
+          <a:chExt cx="0" cy="0"/>
+        </a:xfrm>
+      </p:grpSpPr>
+      <p:sp>
+        <p:nvSpPr>
+          <p:cNvPr id="2" name="Shape 0"/>
+          <p:cNvSpPr/>
+          <p:nvPr/>
+        </p:nvSpPr>
+        <p:spPr>
+          <a:xfrm>
+            <a:off x="0" y="0"/>
+            <a:ext cx="9144000" cy="5143500"/>
+          </a:xfrm>
+          <a:prstGeom prst="rect">
+            <a:avLst/>
+          </a:prstGeom>
+          <a:solidFill>
+            <a:srgbClr val="1B2A4A"/>
+          </a:solidFill>
+          <a:ln/>
+        </p:spPr>
+      </p:sp>
+      <p:sp>
+        <p:nvSpPr>
+          <p:cNvPr id="3" name="Shape 1"/>
+          <p:cNvSpPr/>
+          <p:nvPr/>
+        </p:nvSpPr>
+        <p:spPr>
+          <a:xfrm>
+            <a:off x="0" y="4777740"/>
+            <a:ext cx="9144000" cy="365760"/>
+          </a:xfrm>
+          <a:prstGeom prst="rect">
+            <a:avLst/>
+          </a:prstGeom>
+          <a:solidFill>
+            <a:srgbClr val="2A9D8F"/>
+          </a:solidFill>
+          <a:ln/>
+        </p:spPr>
+      </p:sp>
+      <p:sp>
+        <p:nvSpPr>
+          <p:cNvPr id="4" name="Shape 2"/>
+          <p:cNvSpPr/>
+          <p:nvPr/>
+        </p:nvSpPr>
+        <p:spPr>
+          <a:xfrm>
+            <a:off x="-914400" y="-914400"/>
+            <a:ext cx="3657600" cy="3657600"/>
+          </a:xfrm>
+          <a:prstGeom prst="ellipse">
+            <a:avLst/>
+          </a:prstGeom>
+          <a:solidFill>
+            <a:srgbClr val="2A9D8F">
+              <a:alpha val="10000"/>
+            </a:srgbClr>
+          </a:solidFill>
+          <a:ln/>
+        </p:spPr>
+      </p:sp>
+      <p:sp>
+        <p:nvSpPr>
+          <p:cNvPr id="5" name="Text 3"/>
+          <p:cNvSpPr/>
+          <p:nvPr/>
+        </p:nvSpPr>
+        <p:spPr>
+          <a:xfrm>
+            <a:off x="731520" y="1463040"/>
+            <a:ext cx="7680960" cy="822960"/>
+          </a:xfrm>
+          <a:prstGeom prst="rect">
+            <a:avLst/>
+          </a:prstGeom>
+          <a:noFill/>
+          <a:ln/>
+        </p:spPr>
+        <p:txBody>
+          <a:bodyPr wrap="square" rtlCol="0" anchor="ctr"/>
+          <a:lstStyle/>
+          <a:p>
+            <a:pPr algn="ctr" indent="0" marL="0">
+              <a:buNone/>
+            </a:pPr>
+            <a:r>
+              <a:rPr lang="en-US" sz="3400" b="1" dirty="0">
+                <a:solidFill>
+                  <a:srgbClr val="FFFFFF"/>
+                </a:solidFill>
+                <a:latin typeface="Georgia" pitchFamily="34" charset="0"/>
+                <a:ea typeface="Georgia" pitchFamily="34" charset="-122"/>
+                <a:cs typeface="Georgia" pitchFamily="34" charset="-120"/>
+              </a:rPr>
+              <a:t>Review &amp; Practise</a:t>
+            </a:r>
+            <a:endParaRPr lang="en-US" sz="3400" dirty="0"/>
+          </a:p>
+        </p:txBody>
+      </p:sp>
+      <p:sp>
+        <p:nvSpPr>
+          <p:cNvPr id="6" name="Text 4"/>
+          <p:cNvSpPr/>
+          <p:nvPr/>
+        </p:nvSpPr>
+        <p:spPr>
+          <a:xfrm>
+            <a:off x="731520" y="2468880"/>
+            <a:ext cx="7680960" cy="457200"/>
+          </a:xfrm>
+          <a:prstGeom prst="rect">
+            <a:avLst/>
+          </a:prstGeom>
+          <a:noFill/>
+          <a:ln/>
+        </p:spPr>
+        <p:txBody>
+          <a:bodyPr wrap="square" rtlCol="0" anchor="ctr"/>
+          <a:lstStyle/>
+          <a:p>
+            <a:pPr algn="ctr" indent="0" marL="0">
+              <a:buNone/>
+            </a:pPr>
+            <a:r>
+              <a:rPr lang="en-US" sz="1800" dirty="0">
+                <a:solidFill>
+                  <a:srgbClr val="2A9D8F"/>
+                </a:solidFill>
+                <a:latin typeface="Calibri" pitchFamily="34" charset="0"/>
+                <a:ea typeface="Calibri" pitchFamily="34" charset="-122"/>
+                <a:cs typeface="Calibri" pitchFamily="34" charset="-120"/>
+              </a:rPr>
               <a:t>mrzocchi.com</a:t>
             </a:r>
-            <a:endParaRPr lang="en-US" sz="1100" dirty="0"/>
+            <a:endParaRPr lang="en-US" sz="1800" dirty="0"/>
+          </a:p>
+        </p:txBody>
+      </p:sp>
+      <p:sp>
+        <p:nvSpPr>
+          <p:cNvPr id="7" name="Text 5"/>
+          <p:cNvSpPr/>
+          <p:nvPr/>
+        </p:nvSpPr>
+        <p:spPr>
+          <a:xfrm>
+            <a:off x="731520" y="3108960"/>
+            <a:ext cx="7680960" cy="457200"/>
+          </a:xfrm>
+          <a:prstGeom prst="rect">
+            <a:avLst/>
+          </a:prstGeom>
+          <a:noFill/>
+          <a:ln/>
+        </p:spPr>
+        <p:txBody>
+          <a:bodyPr wrap="square" rtlCol="0" anchor="ctr"/>
+          <a:lstStyle/>
+          <a:p>
+            <a:pPr algn="ctr" indent="0" marL="0">
+              <a:buNone/>
+            </a:pPr>
+            <a:r>
+              <a:rPr lang="en-US" sz="1300" dirty="0">
+                <a:solidFill>
+                  <a:srgbClr val="9B9690"/>
+                </a:solidFill>
+                <a:latin typeface="Calibri" pitchFamily="34" charset="0"/>
+                <a:ea typeface="Calibri" pitchFamily="34" charset="-122"/>
+                <a:cs typeface="Calibri" pitchFamily="34" charset="-120"/>
+              </a:rPr>
+              <a:t>Use the Self-Quiz, Review Games, and Practice Builder to test yourself.</a:t>
+            </a:r>
+            <a:endParaRPr lang="en-US" sz="1300" dirty="0"/>
           </a:p>
         </p:txBody>
       </p:sp>

--- a/static/ppts/G6_Math_T1_Rounding.pptx
+++ b/static/ppts/G6_Math_T1_Rounding.pptx
@@ -12,12 +12,13 @@
     <p:sldId id="260" r:id="rId6"/>
     <p:sldId id="261" r:id="rId7"/>
     <p:sldId id="262" r:id="rId8"/>
+    <p:sldId id="263" r:id="rId9"/>
   </p:sldIdLst>
   <p:notesMasterIdLst>
-    <p:notesMasterId r:id="rId9"/>
+    <p:notesMasterId r:id="rId10"/>
   </p:notesMasterIdLst>
-  <p:sldSz cx="9144000" cy="5143500"/>
-  <p:notesSz cx="5143500" cy="9144000"/>
+  <p:sldSz cx="12192000" cy="6858000"/>
+  <p:notesSz cx="6858000" cy="12192000"/>
   <p:defaultTextStyle>
     <a:lvl1pPr marL="0" algn="l" defTabSz="914400" rtl="0" eaLnBrk="1" latinLnBrk="0" hangingPunct="1">
       <a:defRPr sz="1800" kern="1200">
@@ -1060,6 +1061,94 @@
             <a:fld id="{F7021451-1387-4CA6-816F-3879F97B5CBC}" type="slidenum">
               <a:rPr lang="en-US"/>
               <a:t>7</a:t>
+            </a:fld>
+            <a:endParaRPr lang="en-US"/>
+          </a:p>
+        </p:txBody>
+      </p:sp>
+    </p:spTree>
+    <p:extLst>
+      <p:ext uri="{BB962C8B-B14F-4D97-AF65-F5344CB8AC3E}">
+        <p14:creationId xmlns:p14="http://schemas.microsoft.com/office/powerpoint/2010/main" val="1024086991"/>
+      </p:ext>
+    </p:extLst>
+  </p:cSld>
+  <p:clrMapOvr>
+    <a:masterClrMapping/>
+  </p:clrMapOvr>
+</p:notes>
+</file>
+
+<file path=ppt/notesSlides/notesSlide8.xml><?xml version="1.0" encoding="utf-8"?>
+<p:notes xmlns:a="http://schemas.openxmlformats.org/drawingml/2006/main" xmlns:r="http://schemas.openxmlformats.org/officeDocument/2006/relationships" xmlns:p="http://schemas.openxmlformats.org/presentationml/2006/main">
+  <p:cSld>
+    <p:spTree>
+      <p:nvGrpSpPr>
+        <p:cNvPr id="1" name=""/>
+        <p:cNvGrpSpPr/>
+        <p:nvPr/>
+      </p:nvGrpSpPr>
+      <p:grpSpPr>
+        <a:xfrm>
+          <a:off x="0" y="0"/>
+          <a:ext cx="0" cy="0"/>
+          <a:chOff x="0" y="0"/>
+          <a:chExt cx="0" cy="0"/>
+        </a:xfrm>
+      </p:grpSpPr>
+      <p:sp>
+        <p:nvSpPr>
+          <p:cNvPr id="2" name="Slide Image Placeholder 1"/>
+          <p:cNvSpPr>
+            <a:spLocks noGrp="1" noRot="1" noChangeAspect="1"/>
+          </p:cNvSpPr>
+          <p:nvPr>
+            <p:ph type="sldImg"/>
+          </p:nvPr>
+        </p:nvSpPr>
+        <p:spPr/>
+      </p:sp>
+      <p:sp>
+        <p:nvSpPr>
+          <p:cNvPr id="3" name="Notes Placeholder 2"/>
+          <p:cNvSpPr>
+            <a:spLocks noGrp="1"/>
+          </p:cNvSpPr>
+          <p:nvPr>
+            <p:ph type="body" idx="1"/>
+          </p:nvPr>
+        </p:nvSpPr>
+        <p:spPr/>
+        <p:txBody>
+          <a:bodyPr/>
+          <a:lstStyle/>
+          <a:p>
+            <a:r>
+              <a:rPr lang="en-US" dirty="0"/>
+              <a:t/>
+            </a:r>
+            <a:endParaRPr lang="en-US" dirty="0"/>
+          </a:p>
+        </p:txBody>
+      </p:sp>
+      <p:sp>
+        <p:nvSpPr>
+          <p:cNvPr id="4" name="Slide Number Placeholder 3"/>
+          <p:cNvSpPr>
+            <a:spLocks noGrp="1"/>
+          </p:cNvSpPr>
+          <p:nvPr>
+            <p:ph type="sldNum" sz="quarter" idx="10"/>
+          </p:nvPr>
+        </p:nvSpPr>
+        <p:spPr/>
+        <p:txBody>
+          <a:bodyPr/>
+          <a:lstStyle/>
+          <a:p>
+            <a:fld id="{F7021451-1387-4CA6-816F-3879F97B5CBC}" type="slidenum">
+              <a:rPr lang="en-US"/>
+              <a:t>8</a:t>
             </a:fld>
             <a:endParaRPr lang="en-US"/>
           </a:p>
@@ -1388,6 +1477,13 @@
 <file path=ppt/slides/slide1.xml><?xml version="1.0" encoding="utf-8"?>
 <p:sld xmlns:a="http://schemas.openxmlformats.org/drawingml/2006/main" xmlns:r="http://schemas.openxmlformats.org/officeDocument/2006/relationships" xmlns:p="http://schemas.openxmlformats.org/presentationml/2006/main">
   <p:cSld name="Slide 1">
+    <p:bg>
+      <p:bgPr>
+        <a:solidFill>
+          <a:srgbClr val="2A9D8F"/>
+        </a:solidFill>
+      </p:bgPr>
+    </p:bg>
     <p:spTree>
       <p:nvGrpSpPr>
         <p:cNvPr id="1" name=""/>
@@ -1410,55 +1506,15 @@
         </p:nvSpPr>
         <p:spPr>
           <a:xfrm>
-            <a:off x="0" y="0"/>
-            <a:ext cx="9144000" cy="5143500"/>
-          </a:xfrm>
-          <a:prstGeom prst="rect">
+            <a:off x="7772400" y="-914400"/>
+            <a:ext cx="3657600" cy="3657600"/>
+          </a:xfrm>
+          <a:prstGeom prst="ellipse">
             <a:avLst/>
           </a:prstGeom>
           <a:solidFill>
-            <a:srgbClr val="1B2A4A"/>
-          </a:solidFill>
-          <a:ln/>
-        </p:spPr>
-      </p:sp>
-      <p:sp>
-        <p:nvSpPr>
-          <p:cNvPr id="3" name="Shape 1"/>
-          <p:cNvSpPr/>
-          <p:nvPr/>
-        </p:nvSpPr>
-        <p:spPr>
-          <a:xfrm>
-            <a:off x="0" y="4777740"/>
-            <a:ext cx="9144000" cy="365760"/>
-          </a:xfrm>
-          <a:prstGeom prst="rect">
-            <a:avLst/>
-          </a:prstGeom>
-          <a:solidFill>
-            <a:srgbClr val="2A9D8F"/>
-          </a:solidFill>
-          <a:ln/>
-        </p:spPr>
-      </p:sp>
-      <p:sp>
-        <p:nvSpPr>
-          <p:cNvPr id="4" name="Shape 2"/>
-          <p:cNvSpPr/>
-          <p:nvPr/>
-        </p:nvSpPr>
-        <p:spPr>
-          <a:xfrm>
-            <a:off x="6858000" y="-1371600"/>
-            <a:ext cx="4572000" cy="4572000"/>
-          </a:xfrm>
-          <a:prstGeom prst="ellipse">
-            <a:avLst/>
-          </a:prstGeom>
-          <a:solidFill>
-            <a:srgbClr val="2A9D8F">
-              <a:alpha val="12000"/>
+            <a:srgbClr val="FFFFFF">
+              <a:alpha val="8000"/>
             </a:srgbClr>
           </a:solidFill>
           <a:ln/>
@@ -1466,14 +1522,14 @@
       </p:sp>
       <p:sp>
         <p:nvSpPr>
-          <p:cNvPr id="5" name="Text 3"/>
-          <p:cNvSpPr/>
-          <p:nvPr/>
-        </p:nvSpPr>
-        <p:spPr>
-          <a:xfrm>
-            <a:off x="731520" y="914400"/>
-            <a:ext cx="7680960" cy="457200"/>
+          <p:cNvPr id="3" name="Text 1"/>
+          <p:cNvSpPr/>
+          <p:nvPr/>
+        </p:nvSpPr>
+        <p:spPr>
+          <a:xfrm>
+            <a:off x="731520" y="548640"/>
+            <a:ext cx="7315200" cy="365760"/>
           </a:xfrm>
           <a:prstGeom prst="rect">
             <a:avLst/>
@@ -1489,30 +1545,30 @@
               <a:buNone/>
             </a:pPr>
             <a:r>
-              <a:rPr lang="en-US" sz="1300" b="1" spc="500" kern="0" dirty="0">
-                <a:solidFill>
-                  <a:srgbClr val="2A9D8F"/>
-                </a:solidFill>
-                <a:latin typeface="Calibri" pitchFamily="34" charset="0"/>
-                <a:ea typeface="Calibri" pitchFamily="34" charset="-122"/>
-                <a:cs typeface="Calibri" pitchFamily="34" charset="-120"/>
+              <a:rPr lang="en-US" sz="1100" b="1" dirty="0">
+                <a:solidFill>
+                  <a:srgbClr val="F2D68A"/>
+                </a:solidFill>
+                <a:latin typeface="Arial" pitchFamily="34" charset="0"/>
+                <a:ea typeface="Arial" pitchFamily="34" charset="-122"/>
+                <a:cs typeface="Arial" pitchFamily="34" charset="-120"/>
               </a:rPr>
               <a:t>GRADE 6 MATHEMATICS</a:t>
             </a:r>
-            <a:endParaRPr lang="en-US" sz="1300" dirty="0"/>
-          </a:p>
-        </p:txBody>
-      </p:sp>
-      <p:sp>
-        <p:nvSpPr>
-          <p:cNvPr id="6" name="Text 4"/>
-          <p:cNvSpPr/>
-          <p:nvPr/>
-        </p:nvSpPr>
-        <p:spPr>
-          <a:xfrm>
-            <a:off x="731520" y="1463040"/>
-            <a:ext cx="6858000" cy="1645920"/>
+            <a:endParaRPr lang="en-US" sz="1100" dirty="0"/>
+          </a:p>
+        </p:txBody>
+      </p:sp>
+      <p:sp>
+        <p:nvSpPr>
+          <p:cNvPr id="4" name="Text 2"/>
+          <p:cNvSpPr/>
+          <p:nvPr/>
+        </p:nvSpPr>
+        <p:spPr>
+          <a:xfrm>
+            <a:off x="731520" y="1371600"/>
+            <a:ext cx="9144000" cy="1645920"/>
           </a:xfrm>
           <a:prstGeom prst="rect">
             <a:avLst/>
@@ -1521,14 +1577,17 @@
           <a:ln/>
         </p:spPr>
         <p:txBody>
-          <a:bodyPr wrap="square" rtlCol="0" anchor="t"/>
+          <a:bodyPr wrap="square" rtlCol="0" anchor="ctr"/>
           <a:lstStyle/>
           <a:p>
             <a:pPr indent="0" marL="0">
+              <a:lnSpc>
+                <a:spcPct val="110000"/>
+              </a:lnSpc>
               <a:buNone/>
             </a:pPr>
             <a:r>
-              <a:rPr lang="en-US" sz="3800" b="1" dirty="0">
+              <a:rPr lang="en-US" sz="3600" b="1" dirty="0">
                 <a:solidFill>
                   <a:srgbClr val="FFFFFF"/>
                 </a:solidFill>
@@ -1536,39 +1595,63 @@
                 <a:ea typeface="Georgia" pitchFamily="34" charset="-122"/>
                 <a:cs typeface="Georgia" pitchFamily="34" charset="-120"/>
               </a:rPr>
-              <a:t>Rounding &amp;</a:t>
-            </a:r>
-            <a:endParaRPr lang="en-US" sz="3800" dirty="0"/>
-          </a:p>
+              <a:t>Rounding &amp; Estimation</a:t>
+            </a:r>
+            <a:endParaRPr lang="en-US" sz="3600" dirty="0"/>
+          </a:p>
+        </p:txBody>
+      </p:sp>
+      <p:sp>
+        <p:nvSpPr>
+          <p:cNvPr id="5" name="Text 3"/>
+          <p:cNvSpPr/>
+          <p:nvPr/>
+        </p:nvSpPr>
+        <p:spPr>
+          <a:xfrm>
+            <a:off x="731520" y="3200400"/>
+            <a:ext cx="7315200" cy="548640"/>
+          </a:xfrm>
+          <a:prstGeom prst="rect">
+            <a:avLst/>
+          </a:prstGeom>
+          <a:noFill/>
+          <a:ln/>
+        </p:spPr>
+        <p:txBody>
+          <a:bodyPr wrap="square" rtlCol="0" anchor="ctr"/>
+          <a:lstStyle/>
           <a:p>
             <a:pPr indent="0" marL="0">
               <a:buNone/>
             </a:pPr>
             <a:r>
-              <a:rPr lang="en-US" sz="3800" b="1" dirty="0">
-                <a:solidFill>
-                  <a:srgbClr val="FFFFFF"/>
-                </a:solidFill>
-                <a:latin typeface="Georgia" pitchFamily="34" charset="0"/>
-                <a:ea typeface="Georgia" pitchFamily="34" charset="-122"/>
-                <a:cs typeface="Georgia" pitchFamily="34" charset="-120"/>
-              </a:rPr>
-              <a:t>Estimation</a:t>
-            </a:r>
-            <a:endParaRPr lang="en-US" sz="3800" dirty="0"/>
-          </a:p>
-        </p:txBody>
-      </p:sp>
-      <p:sp>
-        <p:nvSpPr>
-          <p:cNvPr id="7" name="Text 5"/>
-          <p:cNvSpPr/>
-          <p:nvPr/>
-        </p:nvSpPr>
-        <p:spPr>
-          <a:xfrm>
-            <a:off x="731520" y="3200400"/>
-            <a:ext cx="6400800" cy="548640"/>
+              <a:rPr lang="en-US" sz="1600" dirty="0">
+                <a:solidFill>
+                  <a:srgbClr val="FFFFFF">
+                    <a:alpha val="65000"/>
+                  </a:srgbClr>
+                </a:solidFill>
+                <a:latin typeface="Arial" pitchFamily="34" charset="0"/>
+                <a:ea typeface="Arial" pitchFamily="34" charset="-122"/>
+                <a:cs typeface="Arial" pitchFamily="34" charset="-120"/>
+              </a:rPr>
+              <a:t>Making numbers simpler to work with</a:t>
+            </a:r>
+            <a:endParaRPr lang="en-US" sz="1600" dirty="0"/>
+          </a:p>
+        </p:txBody>
+      </p:sp>
+      <p:sp>
+        <p:nvSpPr>
+          <p:cNvPr id="6" name="Text 4"/>
+          <p:cNvSpPr/>
+          <p:nvPr/>
+        </p:nvSpPr>
+        <p:spPr>
+          <a:xfrm>
+            <a:off x="731520" y="4389120"/>
+            <a:ext cx="2743200" cy="320040"/>
           </a:xfrm>
           <a:prstGeom prst="rect">
             <a:avLst/>
@@ -1584,56 +1667,19 @@
               <a:buNone/>
             </a:pPr>
             <a:r>
-              <a:rPr lang="en-US" sz="1600" i="1" dirty="0">
-                <a:solidFill>
-                  <a:srgbClr val="9B9690"/>
-                </a:solidFill>
-                <a:latin typeface="Calibri" pitchFamily="34" charset="0"/>
-                <a:ea typeface="Calibri" pitchFamily="34" charset="-122"/>
-                <a:cs typeface="Calibri" pitchFamily="34" charset="-120"/>
-              </a:rPr>
-              <a:t>Making numbers simpler to work with</a:t>
-            </a:r>
-            <a:endParaRPr lang="en-US" sz="1600" dirty="0"/>
-          </a:p>
-        </p:txBody>
-      </p:sp>
-      <p:sp>
-        <p:nvSpPr>
-          <p:cNvPr id="8" name="Text 6"/>
-          <p:cNvSpPr/>
-          <p:nvPr/>
-        </p:nvSpPr>
-        <p:spPr>
-          <a:xfrm>
-            <a:off x="731520" y="4297680"/>
-            <a:ext cx="2743200" cy="365760"/>
-          </a:xfrm>
-          <a:prstGeom prst="rect">
-            <a:avLst/>
-          </a:prstGeom>
-          <a:noFill/>
-          <a:ln/>
-        </p:spPr>
-        <p:txBody>
-          <a:bodyPr wrap="square" rtlCol="0" anchor="ctr"/>
-          <a:lstStyle/>
-          <a:p>
-            <a:pPr indent="0" marL="0">
-              <a:buNone/>
-            </a:pPr>
-            <a:r>
-              <a:rPr lang="en-US" sz="1100" dirty="0">
-                <a:solidFill>
-                  <a:srgbClr val="9B9690"/>
-                </a:solidFill>
-                <a:latin typeface="Calibri" pitchFamily="34" charset="0"/>
-                <a:ea typeface="Calibri" pitchFamily="34" charset="-122"/>
-                <a:cs typeface="Calibri" pitchFamily="34" charset="-120"/>
+              <a:rPr lang="en-US" sz="1000" dirty="0">
+                <a:solidFill>
+                  <a:srgbClr val="FFFFFF">
+                    <a:alpha val="40000"/>
+                  </a:srgbClr>
+                </a:solidFill>
+                <a:latin typeface="Arial" pitchFamily="34" charset="0"/>
+                <a:ea typeface="Arial" pitchFamily="34" charset="-122"/>
+                <a:cs typeface="Arial" pitchFamily="34" charset="-120"/>
               </a:rPr>
               <a:t>mrzocchi.com</a:t>
             </a:r>
-            <a:endParaRPr lang="en-US" sz="1100" dirty="0"/>
+            <a:endParaRPr lang="en-US" sz="1000" dirty="0"/>
           </a:p>
         </p:txBody>
       </p:sp>
@@ -1678,67 +1724,113 @@
         <p:spPr>
           <a:xfrm>
             <a:off x="0" y="0"/>
-            <a:ext cx="9144000" cy="822960"/>
-          </a:xfrm>
-          <a:prstGeom prst="rect">
-            <a:avLst/>
+            <a:ext cx="73152" cy="5148072"/>
+          </a:xfrm>
+          <a:prstGeom prst="rect">
+            <a:avLst/>
+          </a:prstGeom>
+          <a:solidFill>
+            <a:srgbClr val="2A9D8F"/>
+          </a:solidFill>
+          <a:ln/>
+        </p:spPr>
+      </p:sp>
+      <p:sp>
+        <p:nvSpPr>
+          <p:cNvPr id="3" name="Text 1"/>
+          <p:cNvSpPr/>
+          <p:nvPr/>
+        </p:nvSpPr>
+        <p:spPr>
+          <a:xfrm>
+            <a:off x="548640" y="274320"/>
+            <a:ext cx="9144000" cy="640080"/>
+          </a:xfrm>
+          <a:prstGeom prst="rect">
+            <a:avLst/>
+          </a:prstGeom>
+          <a:noFill/>
+          <a:ln/>
+        </p:spPr>
+        <p:txBody>
+          <a:bodyPr wrap="square" rtlCol="0" anchor="ctr"/>
+          <a:lstStyle/>
+          <a:p>
+            <a:pPr indent="0" marL="0">
+              <a:buNone/>
+            </a:pPr>
+            <a:r>
+              <a:rPr lang="en-US" sz="2400" b="1" dirty="0">
+                <a:solidFill>
+                  <a:srgbClr val="1B2A4A"/>
+                </a:solidFill>
+                <a:latin typeface="Georgia" pitchFamily="34" charset="0"/>
+                <a:ea typeface="Georgia" pitchFamily="34" charset="-122"/>
+                <a:cs typeface="Georgia" pitchFamily="34" charset="-120"/>
+              </a:rPr>
+              <a:t>Key Vocabulary</a:t>
+            </a:r>
+            <a:endParaRPr lang="en-US" sz="2400" dirty="0"/>
+          </a:p>
+        </p:txBody>
+      </p:sp>
+      <p:sp>
+        <p:nvSpPr>
+          <p:cNvPr id="4" name="Shape 2"/>
+          <p:cNvSpPr/>
+          <p:nvPr/>
+        </p:nvSpPr>
+        <p:spPr>
+          <a:xfrm>
+            <a:off x="548640" y="960120"/>
+            <a:ext cx="2286000" cy="36576"/>
+          </a:xfrm>
+          <a:prstGeom prst="rect">
+            <a:avLst/>
+          </a:prstGeom>
+          <a:solidFill>
+            <a:srgbClr val="2A9D8F"/>
+          </a:solidFill>
+          <a:ln/>
+        </p:spPr>
+      </p:sp>
+      <p:sp>
+        <p:nvSpPr>
+          <p:cNvPr id="5" name="Shape 3"/>
+          <p:cNvSpPr/>
+          <p:nvPr/>
+        </p:nvSpPr>
+        <p:spPr>
+          <a:xfrm>
+            <a:off x="548640" y="1234440"/>
+            <a:ext cx="4846320" cy="914400"/>
+          </a:xfrm>
+          <a:prstGeom prst="roundRect">
+            <a:avLst>
+              <a:gd name="adj" fmla="val 10000"/>
+            </a:avLst>
           </a:prstGeom>
           <a:solidFill>
             <a:srgbClr val="FFFFFF"/>
           </a:solidFill>
-          <a:ln/>
-        </p:spPr>
-      </p:sp>
-      <p:sp>
-        <p:nvSpPr>
-          <p:cNvPr id="3" name="Shape 1"/>
-          <p:cNvSpPr/>
-          <p:nvPr/>
-        </p:nvSpPr>
-        <p:spPr>
-          <a:xfrm>
-            <a:off x="0" y="804672"/>
-            <a:ext cx="9144000" cy="27432"/>
-          </a:xfrm>
-          <a:prstGeom prst="rect">
-            <a:avLst/>
-          </a:prstGeom>
-          <a:solidFill>
-            <a:srgbClr val="E5E2DC"/>
-          </a:solidFill>
-          <a:ln/>
-        </p:spPr>
-      </p:sp>
-      <p:sp>
-        <p:nvSpPr>
-          <p:cNvPr id="4" name="Shape 2"/>
-          <p:cNvSpPr/>
-          <p:nvPr/>
-        </p:nvSpPr>
-        <p:spPr>
-          <a:xfrm>
-            <a:off x="548640" y="201168"/>
-            <a:ext cx="54864" cy="420624"/>
-          </a:xfrm>
-          <a:prstGeom prst="rect">
-            <a:avLst/>
-          </a:prstGeom>
-          <a:solidFill>
-            <a:srgbClr val="2A9D8F"/>
-          </a:solidFill>
-          <a:ln/>
-        </p:spPr>
-      </p:sp>
-      <p:sp>
-        <p:nvSpPr>
-          <p:cNvPr id="5" name="Text 3"/>
-          <p:cNvSpPr/>
-          <p:nvPr/>
-        </p:nvSpPr>
-        <p:spPr>
-          <a:xfrm>
-            <a:off x="777240" y="137160"/>
-            <a:ext cx="7772400" cy="548640"/>
+          <a:ln w="9525">
+            <a:solidFill>
+              <a:srgbClr val="E5E2DC"/>
+            </a:solidFill>
+            <a:prstDash val="solid"/>
+          </a:ln>
+        </p:spPr>
+      </p:sp>
+      <p:sp>
+        <p:nvSpPr>
+          <p:cNvPr id="6" name="Text 4"/>
+          <p:cNvSpPr/>
+          <p:nvPr/>
+        </p:nvSpPr>
+        <p:spPr>
+          <a:xfrm>
+            <a:off x="685800" y="1307592"/>
+            <a:ext cx="4572000" cy="320040"/>
           </a:xfrm>
           <a:prstGeom prst="rect">
             <a:avLst/>
@@ -1747,84 +1839,106 @@
           <a:ln/>
         </p:spPr>
         <p:txBody>
-          <a:bodyPr wrap="square" lIns="0" tIns="0" rIns="0" bIns="0" rtlCol="0" anchor="ctr"/>
+          <a:bodyPr wrap="square" rtlCol="0" anchor="ctr"/>
           <a:lstStyle/>
           <a:p>
             <a:pPr indent="0" marL="0">
               <a:buNone/>
             </a:pPr>
             <a:r>
-              <a:rPr lang="en-US" sz="2000" b="1" dirty="0">
-                <a:solidFill>
-                  <a:srgbClr val="1B2A4A"/>
+              <a:rPr lang="en-US" sz="1400" b="1" dirty="0">
+                <a:solidFill>
+                  <a:srgbClr val="2A9D8F"/>
                 </a:solidFill>
                 <a:latin typeface="Georgia" pitchFamily="34" charset="0"/>
                 <a:ea typeface="Georgia" pitchFamily="34" charset="-122"/>
                 <a:cs typeface="Georgia" pitchFamily="34" charset="-120"/>
               </a:rPr>
-              <a:t>Key Vocabulary</a:t>
-            </a:r>
-            <a:endParaRPr lang="en-US" sz="2000" dirty="0"/>
-          </a:p>
-        </p:txBody>
-      </p:sp>
-      <p:sp>
-        <p:nvSpPr>
-          <p:cNvPr id="6" name="Shape 4"/>
-          <p:cNvSpPr/>
-          <p:nvPr/>
-        </p:nvSpPr>
-        <p:spPr>
-          <a:xfrm>
-            <a:off x="731520" y="1051560"/>
-            <a:ext cx="3657600" cy="658368"/>
-          </a:xfrm>
-          <a:prstGeom prst="rect">
-            <a:avLst/>
+              <a:t>Rounding</a:t>
+            </a:r>
+            <a:endParaRPr lang="en-US" sz="1400" dirty="0"/>
+          </a:p>
+        </p:txBody>
+      </p:sp>
+      <p:sp>
+        <p:nvSpPr>
+          <p:cNvPr id="7" name="Text 5"/>
+          <p:cNvSpPr/>
+          <p:nvPr/>
+        </p:nvSpPr>
+        <p:spPr>
+          <a:xfrm>
+            <a:off x="685800" y="1645920"/>
+            <a:ext cx="4572000" cy="457200"/>
+          </a:xfrm>
+          <a:prstGeom prst="rect">
+            <a:avLst/>
+          </a:prstGeom>
+          <a:noFill/>
+          <a:ln/>
+        </p:spPr>
+        <p:txBody>
+          <a:bodyPr wrap="square" rtlCol="0" anchor="ctr"/>
+          <a:lstStyle/>
+          <a:p>
+            <a:pPr indent="0" marL="0">
+              <a:lnSpc>
+                <a:spcPct val="130000"/>
+              </a:lnSpc>
+              <a:buNone/>
+            </a:pPr>
+            <a:r>
+              <a:rPr lang="en-US" sz="1100" dirty="0">
+                <a:solidFill>
+                  <a:srgbClr val="6B6660"/>
+                </a:solidFill>
+                <a:latin typeface="Arial" pitchFamily="34" charset="0"/>
+                <a:ea typeface="Arial" pitchFamily="34" charset="-122"/>
+                <a:cs typeface="Arial" pitchFamily="34" charset="-120"/>
+              </a:rPr>
+              <a:t>Replacing a number with a simpler, approximate value.</a:t>
+            </a:r>
+            <a:endParaRPr lang="en-US" sz="1100" dirty="0"/>
+          </a:p>
+        </p:txBody>
+      </p:sp>
+      <p:sp>
+        <p:nvSpPr>
+          <p:cNvPr id="8" name="Shape 6"/>
+          <p:cNvSpPr/>
+          <p:nvPr/>
+        </p:nvSpPr>
+        <p:spPr>
+          <a:xfrm>
+            <a:off x="5669280" y="1234440"/>
+            <a:ext cx="4846320" cy="914400"/>
+          </a:xfrm>
+          <a:prstGeom prst="roundRect">
+            <a:avLst>
+              <a:gd name="adj" fmla="val 10000"/>
+            </a:avLst>
           </a:prstGeom>
           <a:solidFill>
             <a:srgbClr val="FFFFFF"/>
           </a:solidFill>
-          <a:ln/>
-          <a:effectLst>
-            <a:outerShdw sx="100000" sy="100000" kx="0" ky="0" algn="bl" rotWithShape="0" blurRad="50800" dist="25400" dir="8100000">
-              <a:srgbClr val="000000">
-                <a:alpha val="10000"/>
-              </a:srgbClr>
-            </a:outerShdw>
-          </a:effectLst>
-        </p:spPr>
-      </p:sp>
-      <p:sp>
-        <p:nvSpPr>
-          <p:cNvPr id="7" name="Shape 5"/>
-          <p:cNvSpPr/>
-          <p:nvPr/>
-        </p:nvSpPr>
-        <p:spPr>
-          <a:xfrm>
-            <a:off x="731520" y="1051560"/>
-            <a:ext cx="54864" cy="658368"/>
-          </a:xfrm>
-          <a:prstGeom prst="rect">
-            <a:avLst/>
-          </a:prstGeom>
-          <a:solidFill>
-            <a:srgbClr val="2A9D8F"/>
-          </a:solidFill>
-          <a:ln/>
-        </p:spPr>
-      </p:sp>
-      <p:sp>
-        <p:nvSpPr>
-          <p:cNvPr id="8" name="Text 6"/>
-          <p:cNvSpPr/>
-          <p:nvPr/>
-        </p:nvSpPr>
-        <p:spPr>
-          <a:xfrm>
-            <a:off x="914400" y="1051560"/>
-            <a:ext cx="1463040" cy="658368"/>
+          <a:ln w="9525">
+            <a:solidFill>
+              <a:srgbClr val="E5E2DC"/>
+            </a:solidFill>
+            <a:prstDash val="solid"/>
+          </a:ln>
+        </p:spPr>
+      </p:sp>
+      <p:sp>
+        <p:nvSpPr>
+          <p:cNvPr id="9" name="Text 7"/>
+          <p:cNvSpPr/>
+          <p:nvPr/>
+        </p:nvSpPr>
+        <p:spPr>
+          <a:xfrm>
+            <a:off x="5806440" y="1307592"/>
+            <a:ext cx="4572000" cy="320040"/>
           </a:xfrm>
           <a:prstGeom prst="rect">
             <a:avLst/>
@@ -1833,37 +1947,37 @@
           <a:ln/>
         </p:spPr>
         <p:txBody>
-          <a:bodyPr wrap="square" lIns="0" tIns="0" rIns="0" bIns="0" rtlCol="0" anchor="ctr"/>
+          <a:bodyPr wrap="square" rtlCol="0" anchor="ctr"/>
           <a:lstStyle/>
           <a:p>
             <a:pPr indent="0" marL="0">
               <a:buNone/>
             </a:pPr>
             <a:r>
-              <a:rPr lang="en-US" sz="1300" b="1" dirty="0">
-                <a:solidFill>
-                  <a:srgbClr val="1B2A4A"/>
+              <a:rPr lang="en-US" sz="1400" b="1" dirty="0">
+                <a:solidFill>
+                  <a:srgbClr val="2A9D8F"/>
                 </a:solidFill>
                 <a:latin typeface="Georgia" pitchFamily="34" charset="0"/>
                 <a:ea typeface="Georgia" pitchFamily="34" charset="-122"/>
                 <a:cs typeface="Georgia" pitchFamily="34" charset="-120"/>
               </a:rPr>
-              <a:t>Rounding</a:t>
-            </a:r>
-            <a:endParaRPr lang="en-US" sz="1300" dirty="0"/>
-          </a:p>
-        </p:txBody>
-      </p:sp>
-      <p:sp>
-        <p:nvSpPr>
-          <p:cNvPr id="9" name="Text 7"/>
-          <p:cNvSpPr/>
-          <p:nvPr/>
-        </p:nvSpPr>
-        <p:spPr>
-          <a:xfrm>
-            <a:off x="2377440" y="1051560"/>
-            <a:ext cx="1920240" cy="658368"/>
+              <a:t>Estimate</a:t>
+            </a:r>
+            <a:endParaRPr lang="en-US" sz="1400" dirty="0"/>
+          </a:p>
+        </p:txBody>
+      </p:sp>
+      <p:sp>
+        <p:nvSpPr>
+          <p:cNvPr id="10" name="Text 8"/>
+          <p:cNvSpPr/>
+          <p:nvPr/>
+        </p:nvSpPr>
+        <p:spPr>
+          <a:xfrm>
+            <a:off x="5806440" y="1645920"/>
+            <a:ext cx="4572000" cy="457200"/>
           </a:xfrm>
           <a:prstGeom prst="rect">
             <a:avLst/>
@@ -1872,10 +1986,13 @@
           <a:ln/>
         </p:spPr>
         <p:txBody>
-          <a:bodyPr wrap="square" lIns="0" tIns="0" rIns="0" bIns="0" rtlCol="0" anchor="ctr"/>
+          <a:bodyPr wrap="square" rtlCol="0" anchor="ctr"/>
           <a:lstStyle/>
           <a:p>
             <a:pPr indent="0" marL="0">
+              <a:lnSpc>
+                <a:spcPct val="130000"/>
+              </a:lnSpc>
               <a:buNone/>
             </a:pPr>
             <a:r>
@@ -1883,11 +2000,11 @@
                 <a:solidFill>
                   <a:srgbClr val="6B6660"/>
                 </a:solidFill>
-                <a:latin typeface="Calibri" pitchFamily="34" charset="0"/>
-                <a:ea typeface="Calibri" pitchFamily="34" charset="-122"/>
-                <a:cs typeface="Calibri" pitchFamily="34" charset="-120"/>
-              </a:rPr>
-              <a:t>Replacing a number with a simpler nearby value</a:t>
+                <a:latin typeface="Arial" pitchFamily="34" charset="0"/>
+                <a:ea typeface="Arial" pitchFamily="34" charset="-122"/>
+                <a:cs typeface="Arial" pitchFamily="34" charset="-120"/>
+              </a:rPr>
+              <a:t>A rough calculation using rounded numbers.</a:t>
             </a:r>
             <a:endParaRPr lang="en-US" sz="1100" dirty="0"/>
           </a:p>
@@ -1895,49 +2012,29 @@
       </p:sp>
       <p:sp>
         <p:nvSpPr>
-          <p:cNvPr id="10" name="Shape 8"/>
-          <p:cNvSpPr/>
-          <p:nvPr/>
-        </p:nvSpPr>
-        <p:spPr>
-          <a:xfrm>
-            <a:off x="4754880" y="1051560"/>
-            <a:ext cx="3657600" cy="658368"/>
-          </a:xfrm>
-          <a:prstGeom prst="rect">
-            <a:avLst/>
+          <p:cNvPr id="11" name="Shape 9"/>
+          <p:cNvSpPr/>
+          <p:nvPr/>
+        </p:nvSpPr>
+        <p:spPr>
+          <a:xfrm>
+            <a:off x="548640" y="2286000"/>
+            <a:ext cx="4846320" cy="914400"/>
+          </a:xfrm>
+          <a:prstGeom prst="roundRect">
+            <a:avLst>
+              <a:gd name="adj" fmla="val 10000"/>
+            </a:avLst>
           </a:prstGeom>
           <a:solidFill>
             <a:srgbClr val="FFFFFF"/>
           </a:solidFill>
-          <a:ln/>
-          <a:effectLst>
-            <a:outerShdw sx="100000" sy="100000" kx="0" ky="0" algn="bl" rotWithShape="0" blurRad="50800" dist="25400" dir="8100000">
-              <a:srgbClr val="000000">
-                <a:alpha val="10000"/>
-              </a:srgbClr>
-            </a:outerShdw>
-          </a:effectLst>
-        </p:spPr>
-      </p:sp>
-      <p:sp>
-        <p:nvSpPr>
-          <p:cNvPr id="11" name="Shape 9"/>
-          <p:cNvSpPr/>
-          <p:nvPr/>
-        </p:nvSpPr>
-        <p:spPr>
-          <a:xfrm>
-            <a:off x="4754880" y="1051560"/>
-            <a:ext cx="54864" cy="658368"/>
-          </a:xfrm>
-          <a:prstGeom prst="rect">
-            <a:avLst/>
-          </a:prstGeom>
-          <a:solidFill>
-            <a:srgbClr val="2A9D8F"/>
-          </a:solidFill>
-          <a:ln/>
+          <a:ln w="9525">
+            <a:solidFill>
+              <a:srgbClr val="E5E2DC"/>
+            </a:solidFill>
+            <a:prstDash val="solid"/>
+          </a:ln>
         </p:spPr>
       </p:sp>
       <p:sp>
@@ -1948,8 +2045,8 @@
         </p:nvSpPr>
         <p:spPr>
           <a:xfrm>
-            <a:off x="4937760" y="1051560"/>
-            <a:ext cx="1463040" cy="658368"/>
+            <a:off x="685800" y="2359152"/>
+            <a:ext cx="4572000" cy="320040"/>
           </a:xfrm>
           <a:prstGeom prst="rect">
             <a:avLst/>
@@ -1958,24 +2055,24 @@
           <a:ln/>
         </p:spPr>
         <p:txBody>
-          <a:bodyPr wrap="square" lIns="0" tIns="0" rIns="0" bIns="0" rtlCol="0" anchor="ctr"/>
+          <a:bodyPr wrap="square" rtlCol="0" anchor="ctr"/>
           <a:lstStyle/>
           <a:p>
             <a:pPr indent="0" marL="0">
               <a:buNone/>
             </a:pPr>
             <a:r>
-              <a:rPr lang="en-US" sz="1300" b="1" dirty="0">
-                <a:solidFill>
-                  <a:srgbClr val="1B2A4A"/>
+              <a:rPr lang="en-US" sz="1400" b="1" dirty="0">
+                <a:solidFill>
+                  <a:srgbClr val="2A9D8F"/>
                 </a:solidFill>
                 <a:latin typeface="Georgia" pitchFamily="34" charset="0"/>
                 <a:ea typeface="Georgia" pitchFamily="34" charset="-122"/>
                 <a:cs typeface="Georgia" pitchFamily="34" charset="-120"/>
               </a:rPr>
-              <a:t>Estimate</a:t>
-            </a:r>
-            <a:endParaRPr lang="en-US" sz="1300" dirty="0"/>
+              <a:t>Significant Figure</a:t>
+            </a:r>
+            <a:endParaRPr lang="en-US" sz="1400" dirty="0"/>
           </a:p>
         </p:txBody>
       </p:sp>
@@ -1987,8 +2084,8 @@
         </p:nvSpPr>
         <p:spPr>
           <a:xfrm>
-            <a:off x="6400800" y="1051560"/>
-            <a:ext cx="1920240" cy="658368"/>
+            <a:off x="685800" y="2697480"/>
+            <a:ext cx="4572000" cy="457200"/>
           </a:xfrm>
           <a:prstGeom prst="rect">
             <a:avLst/>
@@ -1997,10 +2094,13 @@
           <a:ln/>
         </p:spPr>
         <p:txBody>
-          <a:bodyPr wrap="square" lIns="0" tIns="0" rIns="0" bIns="0" rtlCol="0" anchor="ctr"/>
+          <a:bodyPr wrap="square" rtlCol="0" anchor="ctr"/>
           <a:lstStyle/>
           <a:p>
             <a:pPr indent="0" marL="0">
+              <a:lnSpc>
+                <a:spcPct val="130000"/>
+              </a:lnSpc>
               <a:buNone/>
             </a:pPr>
             <a:r>
@@ -2008,11 +2108,11 @@
                 <a:solidFill>
                   <a:srgbClr val="6B6660"/>
                 </a:solidFill>
-                <a:latin typeface="Calibri" pitchFamily="34" charset="0"/>
-                <a:ea typeface="Calibri" pitchFamily="34" charset="-122"/>
-                <a:cs typeface="Calibri" pitchFamily="34" charset="-120"/>
-              </a:rPr>
-              <a:t>A rough calculation using rounded numbers</a:t>
+                <a:latin typeface="Arial" pitchFamily="34" charset="0"/>
+                <a:ea typeface="Arial" pitchFamily="34" charset="-122"/>
+                <a:cs typeface="Arial" pitchFamily="34" charset="-120"/>
+              </a:rPr>
+              <a:t>The most important digits that show a number's size.</a:t>
             </a:r>
             <a:endParaRPr lang="en-US" sz="1100" dirty="0"/>
           </a:p>
@@ -2026,55 +2126,35 @@
         </p:nvSpPr>
         <p:spPr>
           <a:xfrm>
-            <a:off x="731520" y="1819656"/>
-            <a:ext cx="3657600" cy="658368"/>
-          </a:xfrm>
-          <a:prstGeom prst="rect">
-            <a:avLst/>
+            <a:off x="5669280" y="2286000"/>
+            <a:ext cx="4846320" cy="914400"/>
+          </a:xfrm>
+          <a:prstGeom prst="roundRect">
+            <a:avLst>
+              <a:gd name="adj" fmla="val 10000"/>
+            </a:avLst>
           </a:prstGeom>
           <a:solidFill>
             <a:srgbClr val="FFFFFF"/>
           </a:solidFill>
-          <a:ln/>
-          <a:effectLst>
-            <a:outerShdw sx="100000" sy="100000" kx="0" ky="0" algn="bl" rotWithShape="0" blurRad="50800" dist="25400" dir="8100000">
-              <a:srgbClr val="000000">
-                <a:alpha val="10000"/>
-              </a:srgbClr>
-            </a:outerShdw>
-          </a:effectLst>
-        </p:spPr>
-      </p:sp>
-      <p:sp>
-        <p:nvSpPr>
-          <p:cNvPr id="15" name="Shape 13"/>
-          <p:cNvSpPr/>
-          <p:nvPr/>
-        </p:nvSpPr>
-        <p:spPr>
-          <a:xfrm>
-            <a:off x="731520" y="1819656"/>
-            <a:ext cx="54864" cy="658368"/>
-          </a:xfrm>
-          <a:prstGeom prst="rect">
-            <a:avLst/>
-          </a:prstGeom>
-          <a:solidFill>
-            <a:srgbClr val="2A9D8F"/>
-          </a:solidFill>
-          <a:ln/>
-        </p:spPr>
-      </p:sp>
-      <p:sp>
-        <p:nvSpPr>
-          <p:cNvPr id="16" name="Text 14"/>
-          <p:cNvSpPr/>
-          <p:nvPr/>
-        </p:nvSpPr>
-        <p:spPr>
-          <a:xfrm>
-            <a:off x="914400" y="1819656"/>
-            <a:ext cx="1463040" cy="658368"/>
+          <a:ln w="9525">
+            <a:solidFill>
+              <a:srgbClr val="E5E2DC"/>
+            </a:solidFill>
+            <a:prstDash val="solid"/>
+          </a:ln>
+        </p:spPr>
+      </p:sp>
+      <p:sp>
+        <p:nvSpPr>
+          <p:cNvPr id="15" name="Text 13"/>
+          <p:cNvSpPr/>
+          <p:nvPr/>
+        </p:nvSpPr>
+        <p:spPr>
+          <a:xfrm>
+            <a:off x="5806440" y="2359152"/>
+            <a:ext cx="4572000" cy="320040"/>
           </a:xfrm>
           <a:prstGeom prst="rect">
             <a:avLst/>
@@ -2083,37 +2163,37 @@
           <a:ln/>
         </p:spPr>
         <p:txBody>
-          <a:bodyPr wrap="square" lIns="0" tIns="0" rIns="0" bIns="0" rtlCol="0" anchor="ctr"/>
+          <a:bodyPr wrap="square" rtlCol="0" anchor="ctr"/>
           <a:lstStyle/>
           <a:p>
             <a:pPr indent="0" marL="0">
               <a:buNone/>
             </a:pPr>
             <a:r>
-              <a:rPr lang="en-US" sz="1300" b="1" dirty="0">
-                <a:solidFill>
-                  <a:srgbClr val="1B2A4A"/>
+              <a:rPr lang="en-US" sz="1400" b="1" dirty="0">
+                <a:solidFill>
+                  <a:srgbClr val="2A9D8F"/>
                 </a:solidFill>
                 <a:latin typeface="Georgia" pitchFamily="34" charset="0"/>
                 <a:ea typeface="Georgia" pitchFamily="34" charset="-122"/>
                 <a:cs typeface="Georgia" pitchFamily="34" charset="-120"/>
               </a:rPr>
-              <a:t>Significant fig.</a:t>
-            </a:r>
-            <a:endParaRPr lang="en-US" sz="1300" dirty="0"/>
-          </a:p>
-        </p:txBody>
-      </p:sp>
-      <p:sp>
-        <p:nvSpPr>
-          <p:cNvPr id="17" name="Text 15"/>
-          <p:cNvSpPr/>
-          <p:nvPr/>
-        </p:nvSpPr>
-        <p:spPr>
-          <a:xfrm>
-            <a:off x="2377440" y="1819656"/>
-            <a:ext cx="1920240" cy="658368"/>
+              <a:t>Decimal Place</a:t>
+            </a:r>
+            <a:endParaRPr lang="en-US" sz="1400" dirty="0"/>
+          </a:p>
+        </p:txBody>
+      </p:sp>
+      <p:sp>
+        <p:nvSpPr>
+          <p:cNvPr id="16" name="Text 14"/>
+          <p:cNvSpPr/>
+          <p:nvPr/>
+        </p:nvSpPr>
+        <p:spPr>
+          <a:xfrm>
+            <a:off x="5806440" y="2697480"/>
+            <a:ext cx="4572000" cy="457200"/>
           </a:xfrm>
           <a:prstGeom prst="rect">
             <a:avLst/>
@@ -2122,10 +2202,13 @@
           <a:ln/>
         </p:spPr>
         <p:txBody>
-          <a:bodyPr wrap="square" lIns="0" tIns="0" rIns="0" bIns="0" rtlCol="0" anchor="ctr"/>
+          <a:bodyPr wrap="square" rtlCol="0" anchor="ctr"/>
           <a:lstStyle/>
           <a:p>
             <a:pPr indent="0" marL="0">
+              <a:lnSpc>
+                <a:spcPct val="130000"/>
+              </a:lnSpc>
               <a:buNone/>
             </a:pPr>
             <a:r>
@@ -2133,386 +2216,11 @@
                 <a:solidFill>
                   <a:srgbClr val="6B6660"/>
                 </a:solidFill>
-                <a:latin typeface="Calibri" pitchFamily="34" charset="0"/>
-                <a:ea typeface="Calibri" pitchFamily="34" charset="-122"/>
-                <a:cs typeface="Calibri" pitchFamily="34" charset="-120"/>
-              </a:rPr>
-              <a:t>The important digits in a number</a:t>
-            </a:r>
-            <a:endParaRPr lang="en-US" sz="1100" dirty="0"/>
-          </a:p>
-        </p:txBody>
-      </p:sp>
-      <p:sp>
-        <p:nvSpPr>
-          <p:cNvPr id="18" name="Shape 16"/>
-          <p:cNvSpPr/>
-          <p:nvPr/>
-        </p:nvSpPr>
-        <p:spPr>
-          <a:xfrm>
-            <a:off x="4754880" y="1819656"/>
-            <a:ext cx="3657600" cy="658368"/>
-          </a:xfrm>
-          <a:prstGeom prst="rect">
-            <a:avLst/>
-          </a:prstGeom>
-          <a:solidFill>
-            <a:srgbClr val="FFFFFF"/>
-          </a:solidFill>
-          <a:ln/>
-          <a:effectLst>
-            <a:outerShdw sx="100000" sy="100000" kx="0" ky="0" algn="bl" rotWithShape="0" blurRad="50800" dist="25400" dir="8100000">
-              <a:srgbClr val="000000">
-                <a:alpha val="10000"/>
-              </a:srgbClr>
-            </a:outerShdw>
-          </a:effectLst>
-        </p:spPr>
-      </p:sp>
-      <p:sp>
-        <p:nvSpPr>
-          <p:cNvPr id="19" name="Shape 17"/>
-          <p:cNvSpPr/>
-          <p:nvPr/>
-        </p:nvSpPr>
-        <p:spPr>
-          <a:xfrm>
-            <a:off x="4754880" y="1819656"/>
-            <a:ext cx="54864" cy="658368"/>
-          </a:xfrm>
-          <a:prstGeom prst="rect">
-            <a:avLst/>
-          </a:prstGeom>
-          <a:solidFill>
-            <a:srgbClr val="2A9D8F"/>
-          </a:solidFill>
-          <a:ln/>
-        </p:spPr>
-      </p:sp>
-      <p:sp>
-        <p:nvSpPr>
-          <p:cNvPr id="20" name="Text 18"/>
-          <p:cNvSpPr/>
-          <p:nvPr/>
-        </p:nvSpPr>
-        <p:spPr>
-          <a:xfrm>
-            <a:off x="4937760" y="1819656"/>
-            <a:ext cx="1463040" cy="658368"/>
-          </a:xfrm>
-          <a:prstGeom prst="rect">
-            <a:avLst/>
-          </a:prstGeom>
-          <a:noFill/>
-          <a:ln/>
-        </p:spPr>
-        <p:txBody>
-          <a:bodyPr wrap="square" lIns="0" tIns="0" rIns="0" bIns="0" rtlCol="0" anchor="ctr"/>
-          <a:lstStyle/>
-          <a:p>
-            <a:pPr indent="0" marL="0">
-              <a:buNone/>
-            </a:pPr>
-            <a:r>
-              <a:rPr lang="en-US" sz="1300" b="1" dirty="0">
-                <a:solidFill>
-                  <a:srgbClr val="1B2A4A"/>
-                </a:solidFill>
-                <a:latin typeface="Georgia" pitchFamily="34" charset="0"/>
-                <a:ea typeface="Georgia" pitchFamily="34" charset="-122"/>
-                <a:cs typeface="Georgia" pitchFamily="34" charset="-120"/>
-              </a:rPr>
-              <a:t>Nearest 10</a:t>
-            </a:r>
-            <a:endParaRPr lang="en-US" sz="1300" dirty="0"/>
-          </a:p>
-        </p:txBody>
-      </p:sp>
-      <p:sp>
-        <p:nvSpPr>
-          <p:cNvPr id="21" name="Text 19"/>
-          <p:cNvSpPr/>
-          <p:nvPr/>
-        </p:nvSpPr>
-        <p:spPr>
-          <a:xfrm>
-            <a:off x="6400800" y="1819656"/>
-            <a:ext cx="1920240" cy="658368"/>
-          </a:xfrm>
-          <a:prstGeom prst="rect">
-            <a:avLst/>
-          </a:prstGeom>
-          <a:noFill/>
-          <a:ln/>
-        </p:spPr>
-        <p:txBody>
-          <a:bodyPr wrap="square" lIns="0" tIns="0" rIns="0" bIns="0" rtlCol="0" anchor="ctr"/>
-          <a:lstStyle/>
-          <a:p>
-            <a:pPr indent="0" marL="0">
-              <a:buNone/>
-            </a:pPr>
-            <a:r>
-              <a:rPr lang="en-US" sz="1100" dirty="0">
-                <a:solidFill>
-                  <a:srgbClr val="6B6660"/>
-                </a:solidFill>
-                <a:latin typeface="Calibri" pitchFamily="34" charset="0"/>
-                <a:ea typeface="Calibri" pitchFamily="34" charset="-122"/>
-                <a:cs typeface="Calibri" pitchFamily="34" charset="-120"/>
-              </a:rPr>
-              <a:t>Round to the closest multiple of 10</a:t>
-            </a:r>
-            <a:endParaRPr lang="en-US" sz="1100" dirty="0"/>
-          </a:p>
-        </p:txBody>
-      </p:sp>
-      <p:sp>
-        <p:nvSpPr>
-          <p:cNvPr id="22" name="Shape 20"/>
-          <p:cNvSpPr/>
-          <p:nvPr/>
-        </p:nvSpPr>
-        <p:spPr>
-          <a:xfrm>
-            <a:off x="731520" y="2587752"/>
-            <a:ext cx="3657600" cy="658368"/>
-          </a:xfrm>
-          <a:prstGeom prst="rect">
-            <a:avLst/>
-          </a:prstGeom>
-          <a:solidFill>
-            <a:srgbClr val="FFFFFF"/>
-          </a:solidFill>
-          <a:ln/>
-          <a:effectLst>
-            <a:outerShdw sx="100000" sy="100000" kx="0" ky="0" algn="bl" rotWithShape="0" blurRad="50800" dist="25400" dir="8100000">
-              <a:srgbClr val="000000">
-                <a:alpha val="10000"/>
-              </a:srgbClr>
-            </a:outerShdw>
-          </a:effectLst>
-        </p:spPr>
-      </p:sp>
-      <p:sp>
-        <p:nvSpPr>
-          <p:cNvPr id="23" name="Shape 21"/>
-          <p:cNvSpPr/>
-          <p:nvPr/>
-        </p:nvSpPr>
-        <p:spPr>
-          <a:xfrm>
-            <a:off x="731520" y="2587752"/>
-            <a:ext cx="54864" cy="658368"/>
-          </a:xfrm>
-          <a:prstGeom prst="rect">
-            <a:avLst/>
-          </a:prstGeom>
-          <a:solidFill>
-            <a:srgbClr val="2A9D8F"/>
-          </a:solidFill>
-          <a:ln/>
-        </p:spPr>
-      </p:sp>
-      <p:sp>
-        <p:nvSpPr>
-          <p:cNvPr id="24" name="Text 22"/>
-          <p:cNvSpPr/>
-          <p:nvPr/>
-        </p:nvSpPr>
-        <p:spPr>
-          <a:xfrm>
-            <a:off x="914400" y="2587752"/>
-            <a:ext cx="1463040" cy="658368"/>
-          </a:xfrm>
-          <a:prstGeom prst="rect">
-            <a:avLst/>
-          </a:prstGeom>
-          <a:noFill/>
-          <a:ln/>
-        </p:spPr>
-        <p:txBody>
-          <a:bodyPr wrap="square" lIns="0" tIns="0" rIns="0" bIns="0" rtlCol="0" anchor="ctr"/>
-          <a:lstStyle/>
-          <a:p>
-            <a:pPr indent="0" marL="0">
-              <a:buNone/>
-            </a:pPr>
-            <a:r>
-              <a:rPr lang="en-US" sz="1300" b="1" dirty="0">
-                <a:solidFill>
-                  <a:srgbClr val="1B2A4A"/>
-                </a:solidFill>
-                <a:latin typeface="Georgia" pitchFamily="34" charset="0"/>
-                <a:ea typeface="Georgia" pitchFamily="34" charset="-122"/>
-                <a:cs typeface="Georgia" pitchFamily="34" charset="-120"/>
-              </a:rPr>
-              <a:t>Round up</a:t>
-            </a:r>
-            <a:endParaRPr lang="en-US" sz="1300" dirty="0"/>
-          </a:p>
-        </p:txBody>
-      </p:sp>
-      <p:sp>
-        <p:nvSpPr>
-          <p:cNvPr id="25" name="Text 23"/>
-          <p:cNvSpPr/>
-          <p:nvPr/>
-        </p:nvSpPr>
-        <p:spPr>
-          <a:xfrm>
-            <a:off x="2377440" y="2587752"/>
-            <a:ext cx="1920240" cy="658368"/>
-          </a:xfrm>
-          <a:prstGeom prst="rect">
-            <a:avLst/>
-          </a:prstGeom>
-          <a:noFill/>
-          <a:ln/>
-        </p:spPr>
-        <p:txBody>
-          <a:bodyPr wrap="square" lIns="0" tIns="0" rIns="0" bIns="0" rtlCol="0" anchor="ctr"/>
-          <a:lstStyle/>
-          <a:p>
-            <a:pPr indent="0" marL="0">
-              <a:buNone/>
-            </a:pPr>
-            <a:r>
-              <a:rPr lang="en-US" sz="1100" dirty="0">
-                <a:solidFill>
-                  <a:srgbClr val="6B6660"/>
-                </a:solidFill>
-                <a:latin typeface="Calibri" pitchFamily="34" charset="0"/>
-                <a:ea typeface="Calibri" pitchFamily="34" charset="-122"/>
-                <a:cs typeface="Calibri" pitchFamily="34" charset="-120"/>
-              </a:rPr>
-              <a:t>Go to the next value (digit is 5+)</a:t>
-            </a:r>
-            <a:endParaRPr lang="en-US" sz="1100" dirty="0"/>
-          </a:p>
-        </p:txBody>
-      </p:sp>
-      <p:sp>
-        <p:nvSpPr>
-          <p:cNvPr id="26" name="Shape 24"/>
-          <p:cNvSpPr/>
-          <p:nvPr/>
-        </p:nvSpPr>
-        <p:spPr>
-          <a:xfrm>
-            <a:off x="4754880" y="2587752"/>
-            <a:ext cx="3657600" cy="658368"/>
-          </a:xfrm>
-          <a:prstGeom prst="rect">
-            <a:avLst/>
-          </a:prstGeom>
-          <a:solidFill>
-            <a:srgbClr val="FFFFFF"/>
-          </a:solidFill>
-          <a:ln/>
-          <a:effectLst>
-            <a:outerShdw sx="100000" sy="100000" kx="0" ky="0" algn="bl" rotWithShape="0" blurRad="50800" dist="25400" dir="8100000">
-              <a:srgbClr val="000000">
-                <a:alpha val="10000"/>
-              </a:srgbClr>
-            </a:outerShdw>
-          </a:effectLst>
-        </p:spPr>
-      </p:sp>
-      <p:sp>
-        <p:nvSpPr>
-          <p:cNvPr id="27" name="Shape 25"/>
-          <p:cNvSpPr/>
-          <p:nvPr/>
-        </p:nvSpPr>
-        <p:spPr>
-          <a:xfrm>
-            <a:off x="4754880" y="2587752"/>
-            <a:ext cx="54864" cy="658368"/>
-          </a:xfrm>
-          <a:prstGeom prst="rect">
-            <a:avLst/>
-          </a:prstGeom>
-          <a:solidFill>
-            <a:srgbClr val="2A9D8F"/>
-          </a:solidFill>
-          <a:ln/>
-        </p:spPr>
-      </p:sp>
-      <p:sp>
-        <p:nvSpPr>
-          <p:cNvPr id="28" name="Text 26"/>
-          <p:cNvSpPr/>
-          <p:nvPr/>
-        </p:nvSpPr>
-        <p:spPr>
-          <a:xfrm>
-            <a:off x="4937760" y="2587752"/>
-            <a:ext cx="1463040" cy="658368"/>
-          </a:xfrm>
-          <a:prstGeom prst="rect">
-            <a:avLst/>
-          </a:prstGeom>
-          <a:noFill/>
-          <a:ln/>
-        </p:spPr>
-        <p:txBody>
-          <a:bodyPr wrap="square" lIns="0" tIns="0" rIns="0" bIns="0" rtlCol="0" anchor="ctr"/>
-          <a:lstStyle/>
-          <a:p>
-            <a:pPr indent="0" marL="0">
-              <a:buNone/>
-            </a:pPr>
-            <a:r>
-              <a:rPr lang="en-US" sz="1300" b="1" dirty="0">
-                <a:solidFill>
-                  <a:srgbClr val="1B2A4A"/>
-                </a:solidFill>
-                <a:latin typeface="Georgia" pitchFamily="34" charset="0"/>
-                <a:ea typeface="Georgia" pitchFamily="34" charset="-122"/>
-                <a:cs typeface="Georgia" pitchFamily="34" charset="-120"/>
-              </a:rPr>
-              <a:t>Round down</a:t>
-            </a:r>
-            <a:endParaRPr lang="en-US" sz="1300" dirty="0"/>
-          </a:p>
-        </p:txBody>
-      </p:sp>
-      <p:sp>
-        <p:nvSpPr>
-          <p:cNvPr id="29" name="Text 27"/>
-          <p:cNvSpPr/>
-          <p:nvPr/>
-        </p:nvSpPr>
-        <p:spPr>
-          <a:xfrm>
-            <a:off x="6400800" y="2587752"/>
-            <a:ext cx="1920240" cy="658368"/>
-          </a:xfrm>
-          <a:prstGeom prst="rect">
-            <a:avLst/>
-          </a:prstGeom>
-          <a:noFill/>
-          <a:ln/>
-        </p:spPr>
-        <p:txBody>
-          <a:bodyPr wrap="square" lIns="0" tIns="0" rIns="0" bIns="0" rtlCol="0" anchor="ctr"/>
-          <a:lstStyle/>
-          <a:p>
-            <a:pPr indent="0" marL="0">
-              <a:buNone/>
-            </a:pPr>
-            <a:r>
-              <a:rPr lang="en-US" sz="1100" dirty="0">
-                <a:solidFill>
-                  <a:srgbClr val="6B6660"/>
-                </a:solidFill>
-                <a:latin typeface="Calibri" pitchFamily="34" charset="0"/>
-                <a:ea typeface="Calibri" pitchFamily="34" charset="-122"/>
-                <a:cs typeface="Calibri" pitchFamily="34" charset="-120"/>
-              </a:rPr>
-              <a:t>Stay at the current value (digit is 0–4)</a:t>
+                <a:latin typeface="Arial" pitchFamily="34" charset="0"/>
+                <a:ea typeface="Arial" pitchFamily="34" charset="-122"/>
+                <a:cs typeface="Arial" pitchFamily="34" charset="-120"/>
+              </a:rPr>
+              <a:t>Position after the decimal point.</a:t>
             </a:r>
             <a:endParaRPr lang="en-US" sz="1100" dirty="0"/>
           </a:p>
@@ -2559,47 +2267,7 @@
         <p:spPr>
           <a:xfrm>
             <a:off x="0" y="0"/>
-            <a:ext cx="9144000" cy="822960"/>
-          </a:xfrm>
-          <a:prstGeom prst="rect">
-            <a:avLst/>
-          </a:prstGeom>
-          <a:solidFill>
-            <a:srgbClr val="FFFFFF"/>
-          </a:solidFill>
-          <a:ln/>
-        </p:spPr>
-      </p:sp>
-      <p:sp>
-        <p:nvSpPr>
-          <p:cNvPr id="3" name="Shape 1"/>
-          <p:cNvSpPr/>
-          <p:nvPr/>
-        </p:nvSpPr>
-        <p:spPr>
-          <a:xfrm>
-            <a:off x="0" y="804672"/>
-            <a:ext cx="9144000" cy="27432"/>
-          </a:xfrm>
-          <a:prstGeom prst="rect">
-            <a:avLst/>
-          </a:prstGeom>
-          <a:solidFill>
-            <a:srgbClr val="E5E2DC"/>
-          </a:solidFill>
-          <a:ln/>
-        </p:spPr>
-      </p:sp>
-      <p:sp>
-        <p:nvSpPr>
-          <p:cNvPr id="4" name="Shape 2"/>
-          <p:cNvSpPr/>
-          <p:nvPr/>
-        </p:nvSpPr>
-        <p:spPr>
-          <a:xfrm>
-            <a:off x="548640" y="201168"/>
-            <a:ext cx="54864" cy="420624"/>
+            <a:ext cx="73152" cy="5148072"/>
           </a:xfrm>
           <a:prstGeom prst="rect">
             <a:avLst/>
@@ -2612,14 +2280,14 @@
       </p:sp>
       <p:sp>
         <p:nvSpPr>
-          <p:cNvPr id="5" name="Text 3"/>
-          <p:cNvSpPr/>
-          <p:nvPr/>
-        </p:nvSpPr>
-        <p:spPr>
-          <a:xfrm>
-            <a:off x="777240" y="137160"/>
-            <a:ext cx="7772400" cy="548640"/>
+          <p:cNvPr id="3" name="Text 1"/>
+          <p:cNvSpPr/>
+          <p:nvPr/>
+        </p:nvSpPr>
+        <p:spPr>
+          <a:xfrm>
+            <a:off x="548640" y="274320"/>
+            <a:ext cx="9144000" cy="640080"/>
           </a:xfrm>
           <a:prstGeom prst="rect">
             <a:avLst/>
@@ -2628,14 +2296,14 @@
           <a:ln/>
         </p:spPr>
         <p:txBody>
-          <a:bodyPr wrap="square" lIns="0" tIns="0" rIns="0" bIns="0" rtlCol="0" anchor="ctr"/>
+          <a:bodyPr wrap="square" rtlCol="0" anchor="ctr"/>
           <a:lstStyle/>
           <a:p>
             <a:pPr indent="0" marL="0">
               <a:buNone/>
             </a:pPr>
             <a:r>
-              <a:rPr lang="en-US" sz="2000" b="1" dirty="0">
+              <a:rPr lang="en-US" sz="2400" b="1" dirty="0">
                 <a:solidFill>
                   <a:srgbClr val="1B2A4A"/>
                 </a:solidFill>
@@ -2643,22 +2311,42 @@
                 <a:ea typeface="Georgia" pitchFamily="34" charset="-122"/>
                 <a:cs typeface="Georgia" pitchFamily="34" charset="-120"/>
               </a:rPr>
-              <a:t>How to Round — The 5 Rule</a:t>
-            </a:r>
-            <a:endParaRPr lang="en-US" sz="2000" dirty="0"/>
-          </a:p>
-        </p:txBody>
-      </p:sp>
-      <p:sp>
-        <p:nvSpPr>
-          <p:cNvPr id="6" name="Text 4"/>
-          <p:cNvSpPr/>
-          <p:nvPr/>
-        </p:nvSpPr>
-        <p:spPr>
-          <a:xfrm>
-            <a:off x="731520" y="1051560"/>
-            <a:ext cx="7680960" cy="3108960"/>
+              <a:t>The Rounding Rule</a:t>
+            </a:r>
+            <a:endParaRPr lang="en-US" sz="2400" dirty="0"/>
+          </a:p>
+        </p:txBody>
+      </p:sp>
+      <p:sp>
+        <p:nvSpPr>
+          <p:cNvPr id="4" name="Shape 2"/>
+          <p:cNvSpPr/>
+          <p:nvPr/>
+        </p:nvSpPr>
+        <p:spPr>
+          <a:xfrm>
+            <a:off x="548640" y="960120"/>
+            <a:ext cx="2286000" cy="36576"/>
+          </a:xfrm>
+          <a:prstGeom prst="rect">
+            <a:avLst/>
+          </a:prstGeom>
+          <a:solidFill>
+            <a:srgbClr val="2A9D8F"/>
+          </a:solidFill>
+          <a:ln/>
+        </p:spPr>
+      </p:sp>
+      <p:sp>
+        <p:nvSpPr>
+          <p:cNvPr id="5" name="Text 3"/>
+          <p:cNvSpPr/>
+          <p:nvPr/>
+        </p:nvSpPr>
+        <p:spPr>
+          <a:xfrm>
+            <a:off x="548640" y="1188720"/>
+            <a:ext cx="10058400" cy="3474720"/>
           </a:xfrm>
           <a:prstGeom prst="rect">
             <a:avLst/>
@@ -2670,210 +2358,114 @@
           <a:bodyPr wrap="square" rtlCol="0" anchor="t"/>
           <a:lstStyle/>
           <a:p>
-            <a:pPr marL="342900" indent="-342900">
+            <a:pPr>
+              <a:lnSpc>
+                <a:spcPct val="150000"/>
+              </a:lnSpc>
               <a:spcAft>
-                <a:spcPts val="800"/>
+                <a:spcPts val="600"/>
               </a:spcAft>
-              <a:buSzPct val="100000"/>
-              <a:buChar char="•"/>
             </a:pPr>
             <a:r>
               <a:rPr lang="en-US" sz="1500" dirty="0">
                 <a:solidFill>
                   <a:srgbClr val="3D3A36"/>
                 </a:solidFill>
-                <a:latin typeface="Calibri" pitchFamily="34" charset="0"/>
-                <a:ea typeface="Calibri" pitchFamily="34" charset="-122"/>
-                <a:cs typeface="Calibri" pitchFamily="34" charset="-120"/>
-              </a:rPr>
-              <a:t>1. Find the PLACE VALUE you are rounding to.</a:t>
+                <a:latin typeface="Arial" pitchFamily="34" charset="0"/>
+                <a:ea typeface="Arial" pitchFamily="34" charset="-122"/>
+                <a:cs typeface="Arial" pitchFamily="34" charset="-120"/>
+              </a:rPr>
+              <a:t>Look at the digit to the RIGHT of the one you're rounding to.</a:t>
             </a:r>
             <a:endParaRPr lang="en-US" sz="1500" dirty="0"/>
           </a:p>
           <a:p>
-            <a:pPr marL="342900" indent="-342900">
+            <a:pPr>
+              <a:lnSpc>
+                <a:spcPct val="150000"/>
+              </a:lnSpc>
               <a:spcAft>
-                <a:spcPts val="800"/>
+                <a:spcPts val="600"/>
               </a:spcAft>
-              <a:buSzPct val="100000"/>
-              <a:buChar char="•"/>
             </a:pPr>
             <a:r>
               <a:rPr lang="en-US" sz="1500" dirty="0">
                 <a:solidFill>
                   <a:srgbClr val="3D3A36"/>
                 </a:solidFill>
-                <a:latin typeface="Calibri" pitchFamily="34" charset="0"/>
-                <a:ea typeface="Calibri" pitchFamily="34" charset="-122"/>
-                <a:cs typeface="Calibri" pitchFamily="34" charset="-120"/>
-              </a:rPr>
-              <a:t>2. Look at the digit ONE PLACE to the RIGHT.</a:t>
+                <a:latin typeface="Arial" pitchFamily="34" charset="0"/>
+                <a:ea typeface="Arial" pitchFamily="34" charset="-122"/>
+                <a:cs typeface="Arial" pitchFamily="34" charset="-120"/>
+              </a:rPr>
+              <a:t>If it is 5 or more → round UP.</a:t>
             </a:r>
             <a:endParaRPr lang="en-US" sz="1500" dirty="0"/>
           </a:p>
           <a:p>
-            <a:pPr marL="342900" indent="-342900">
+            <a:pPr>
+              <a:lnSpc>
+                <a:spcPct val="150000"/>
+              </a:lnSpc>
               <a:spcAft>
-                <a:spcPts val="800"/>
+                <a:spcPts val="600"/>
               </a:spcAft>
-              <a:buSzPct val="100000"/>
-              <a:buChar char="•"/>
             </a:pPr>
             <a:r>
               <a:rPr lang="en-US" sz="1500" dirty="0">
                 <a:solidFill>
                   <a:srgbClr val="3D3A36"/>
                 </a:solidFill>
-                <a:latin typeface="Calibri" pitchFamily="34" charset="0"/>
-                <a:ea typeface="Calibri" pitchFamily="34" charset="-122"/>
-                <a:cs typeface="Calibri" pitchFamily="34" charset="-120"/>
-              </a:rPr>
-              <a:t>3. If it is 0, 1, 2, 3, or 4 → ROUND DOWN (keep the digit the same).</a:t>
+                <a:latin typeface="Arial" pitchFamily="34" charset="0"/>
+                <a:ea typeface="Arial" pitchFamily="34" charset="-122"/>
+                <a:cs typeface="Arial" pitchFamily="34" charset="-120"/>
+              </a:rPr>
+              <a:t>If it is less than 5 → round DOWN (stay the same).</a:t>
             </a:r>
             <a:endParaRPr lang="en-US" sz="1500" dirty="0"/>
           </a:p>
           <a:p>
-            <a:pPr marL="342900" indent="-342900">
+            <a:pPr>
+              <a:lnSpc>
+                <a:spcPct val="150000"/>
+              </a:lnSpc>
               <a:spcAft>
-                <a:spcPts val="800"/>
+                <a:spcPts val="600"/>
               </a:spcAft>
-              <a:buSzPct val="100000"/>
-              <a:buChar char="•"/>
             </a:pPr>
             <a:r>
               <a:rPr lang="en-US" sz="1500" dirty="0">
                 <a:solidFill>
                   <a:srgbClr val="3D3A36"/>
                 </a:solidFill>
-                <a:latin typeface="Calibri" pitchFamily="34" charset="0"/>
-                <a:ea typeface="Calibri" pitchFamily="34" charset="-122"/>
-                <a:cs typeface="Calibri" pitchFamily="34" charset="-120"/>
-              </a:rPr>
-              <a:t>4. If it is 5, 6, 7, 8, or 9 → ROUND UP (increase the digit by 1).</a:t>
+                <a:latin typeface="Arial" pitchFamily="34" charset="0"/>
+                <a:ea typeface="Arial" pitchFamily="34" charset="-122"/>
+                <a:cs typeface="Arial" pitchFamily="34" charset="-120"/>
+              </a:rPr>
+              <a:t>Example: Round 346 to the nearest 10 → look at the 6 → round UP → 350.</a:t>
             </a:r>
             <a:endParaRPr lang="en-US" sz="1500" dirty="0"/>
           </a:p>
           <a:p>
-            <a:pPr marL="342900" indent="-342900">
+            <a:pPr>
+              <a:lnSpc>
+                <a:spcPct val="150000"/>
+              </a:lnSpc>
               <a:spcAft>
-                <a:spcPts val="800"/>
+                <a:spcPts val="600"/>
               </a:spcAft>
-              <a:buSzPct val="100000"/>
-              <a:buChar char="•"/>
             </a:pPr>
             <a:r>
               <a:rPr lang="en-US" sz="1500" dirty="0">
                 <a:solidFill>
                   <a:srgbClr val="3D3A36"/>
                 </a:solidFill>
-                <a:latin typeface="Calibri" pitchFamily="34" charset="0"/>
-                <a:ea typeface="Calibri" pitchFamily="34" charset="-122"/>
-                <a:cs typeface="Calibri" pitchFamily="34" charset="-120"/>
-              </a:rPr>
-              <a:t>5. Replace all digits to the right with zeros.</a:t>
+                <a:latin typeface="Arial" pitchFamily="34" charset="0"/>
+                <a:ea typeface="Arial" pitchFamily="34" charset="-122"/>
+                <a:cs typeface="Arial" pitchFamily="34" charset="-120"/>
+              </a:rPr>
+              <a:t>Example: Round 342 to the nearest 10 → look at the 2 → round DOWN → 340.</a:t>
             </a:r>
             <a:endParaRPr lang="en-US" sz="1500" dirty="0"/>
-          </a:p>
-          <a:p>
-            <a:pPr marL="342900" indent="-342900">
-              <a:spcAft>
-                <a:spcPts val="800"/>
-              </a:spcAft>
-              <a:buSzPct val="100000"/>
-              <a:buChar char="•"/>
-            </a:pPr>
-            <a:r>
-              <a:rPr lang="en-US" sz="1500" dirty="0">
-                <a:solidFill>
-                  <a:srgbClr val="3D3A36"/>
-                </a:solidFill>
-                <a:latin typeface="Calibri" pitchFamily="34" charset="0"/>
-                <a:ea typeface="Calibri" pitchFamily="34" charset="-122"/>
-                <a:cs typeface="Calibri" pitchFamily="34" charset="-120"/>
-              </a:rPr>
-              <a:t>Example: 3,847 rounded to nearest 100 → look at the 4 (tens) → 4 &lt; 5 → round down → 3,800.</a:t>
-            </a:r>
-            <a:endParaRPr lang="en-US" sz="1500" dirty="0"/>
-          </a:p>
-        </p:txBody>
-      </p:sp>
-      <p:sp>
-        <p:nvSpPr>
-          <p:cNvPr id="7" name="Shape 5"/>
-          <p:cNvSpPr/>
-          <p:nvPr/>
-        </p:nvSpPr>
-        <p:spPr>
-          <a:xfrm>
-            <a:off x="731520" y="4206240"/>
-            <a:ext cx="7680960" cy="640080"/>
-          </a:xfrm>
-          <a:prstGeom prst="rect">
-            <a:avLst/>
-          </a:prstGeom>
-          <a:solidFill>
-            <a:srgbClr val="E8F5F3"/>
-          </a:solidFill>
-          <a:ln/>
-          <a:effectLst>
-            <a:outerShdw sx="100000" sy="100000" kx="0" ky="0" algn="bl" rotWithShape="0" blurRad="50800" dist="25400" dir="8100000">
-              <a:srgbClr val="000000">
-                <a:alpha val="10000"/>
-              </a:srgbClr>
-            </a:outerShdw>
-          </a:effectLst>
-        </p:spPr>
-      </p:sp>
-      <p:sp>
-        <p:nvSpPr>
-          <p:cNvPr id="8" name="Text 6"/>
-          <p:cNvSpPr/>
-          <p:nvPr/>
-        </p:nvSpPr>
-        <p:spPr>
-          <a:xfrm>
-            <a:off x="914400" y="4251960"/>
-            <a:ext cx="7315200" cy="548640"/>
-          </a:xfrm>
-          <a:prstGeom prst="rect">
-            <a:avLst/>
-          </a:prstGeom>
-          <a:noFill/>
-          <a:ln/>
-        </p:spPr>
-        <p:txBody>
-          <a:bodyPr wrap="square" rtlCol="0" anchor="ctr"/>
-          <a:lstStyle/>
-          <a:p>
-            <a:pPr indent="0" marL="0">
-              <a:buNone/>
-            </a:pPr>
-            <a:r>
-              <a:rPr lang="en-US" sz="1200" b="1" dirty="0">
-                <a:solidFill>
-                  <a:srgbClr val="2A9D8F"/>
-                </a:solidFill>
-                <a:latin typeface="Calibri" pitchFamily="34" charset="0"/>
-                <a:ea typeface="Calibri" pitchFamily="34" charset="-122"/>
-                <a:cs typeface="Calibri" pitchFamily="34" charset="-120"/>
-              </a:rPr>
-              <a:t>Key Idea: </a:t>
-            </a:r>
-            <a:pPr indent="0" marL="0">
-              <a:buNone/>
-            </a:pPr>
-            <a:r>
-              <a:rPr lang="en-US" sz="1200" i="1" dirty="0">
-                <a:solidFill>
-                  <a:srgbClr val="3D3A36"/>
-                </a:solidFill>
-                <a:latin typeface="Calibri" pitchFamily="34" charset="0"/>
-                <a:ea typeface="Calibri" pitchFamily="34" charset="-122"/>
-                <a:cs typeface="Calibri" pitchFamily="34" charset="-120"/>
-              </a:rPr>
-              <a:t>5 or above? Give it a shove! 4 or below? Let it go!</a:t>
-            </a:r>
-            <a:endParaRPr lang="en-US" sz="1200" dirty="0"/>
           </a:p>
         </p:txBody>
       </p:sp>
@@ -2918,47 +2510,7 @@
         <p:spPr>
           <a:xfrm>
             <a:off x="0" y="0"/>
-            <a:ext cx="9144000" cy="822960"/>
-          </a:xfrm>
-          <a:prstGeom prst="rect">
-            <a:avLst/>
-          </a:prstGeom>
-          <a:solidFill>
-            <a:srgbClr val="FFFFFF"/>
-          </a:solidFill>
-          <a:ln/>
-        </p:spPr>
-      </p:sp>
-      <p:sp>
-        <p:nvSpPr>
-          <p:cNvPr id="3" name="Shape 1"/>
-          <p:cNvSpPr/>
-          <p:nvPr/>
-        </p:nvSpPr>
-        <p:spPr>
-          <a:xfrm>
-            <a:off x="0" y="804672"/>
-            <a:ext cx="9144000" cy="27432"/>
-          </a:xfrm>
-          <a:prstGeom prst="rect">
-            <a:avLst/>
-          </a:prstGeom>
-          <a:solidFill>
-            <a:srgbClr val="E5E2DC"/>
-          </a:solidFill>
-          <a:ln/>
-        </p:spPr>
-      </p:sp>
-      <p:sp>
-        <p:nvSpPr>
-          <p:cNvPr id="4" name="Shape 2"/>
-          <p:cNvSpPr/>
-          <p:nvPr/>
-        </p:nvSpPr>
-        <p:spPr>
-          <a:xfrm>
-            <a:off x="548640" y="201168"/>
-            <a:ext cx="54864" cy="420624"/>
+            <a:ext cx="73152" cy="5148072"/>
           </a:xfrm>
           <a:prstGeom prst="rect">
             <a:avLst/>
@@ -2971,14 +2523,75 @@
       </p:sp>
       <p:sp>
         <p:nvSpPr>
+          <p:cNvPr id="3" name="Shape 1"/>
+          <p:cNvSpPr/>
+          <p:nvPr/>
+        </p:nvSpPr>
+        <p:spPr>
+          <a:xfrm>
+            <a:off x="548640" y="274320"/>
+            <a:ext cx="2011680" cy="320040"/>
+          </a:xfrm>
+          <a:prstGeom prst="roundRect">
+            <a:avLst>
+              <a:gd name="adj" fmla="val 17143"/>
+            </a:avLst>
+          </a:prstGeom>
+          <a:solidFill>
+            <a:srgbClr val="2A9D8F"/>
+          </a:solidFill>
+          <a:ln/>
+        </p:spPr>
+      </p:sp>
+      <p:sp>
+        <p:nvSpPr>
+          <p:cNvPr id="4" name="Text 2"/>
+          <p:cNvSpPr/>
+          <p:nvPr/>
+        </p:nvSpPr>
+        <p:spPr>
+          <a:xfrm>
+            <a:off x="548640" y="274320"/>
+            <a:ext cx="2011680" cy="320040"/>
+          </a:xfrm>
+          <a:prstGeom prst="rect">
+            <a:avLst/>
+          </a:prstGeom>
+          <a:noFill/>
+          <a:ln/>
+        </p:spPr>
+        <p:txBody>
+          <a:bodyPr wrap="square" rtlCol="0" anchor="ctr"/>
+          <a:lstStyle/>
+          <a:p>
+            <a:pPr algn="ctr" indent="0" marL="0">
+              <a:buNone/>
+            </a:pPr>
+            <a:r>
+              <a:rPr lang="en-US" sz="1000" b="1" dirty="0">
+                <a:solidFill>
+                  <a:srgbClr val="FFFFFF"/>
+                </a:solidFill>
+                <a:latin typeface="Arial" pitchFamily="34" charset="0"/>
+                <a:ea typeface="Arial" pitchFamily="34" charset="-122"/>
+                <a:cs typeface="Arial" pitchFamily="34" charset="-120"/>
+              </a:rPr>
+              <a:t>WORKED EXAMPLE</a:t>
+            </a:r>
+            <a:endParaRPr lang="en-US" sz="1000" dirty="0"/>
+          </a:p>
+        </p:txBody>
+      </p:sp>
+      <p:sp>
+        <p:nvSpPr>
           <p:cNvPr id="5" name="Text 3"/>
           <p:cNvSpPr/>
           <p:nvPr/>
         </p:nvSpPr>
         <p:spPr>
           <a:xfrm>
-            <a:off x="777240" y="137160"/>
-            <a:ext cx="7772400" cy="548640"/>
+            <a:off x="2743200" y="274320"/>
+            <a:ext cx="7315200" cy="457200"/>
           </a:xfrm>
           <a:prstGeom prst="rect">
             <a:avLst/>
@@ -2987,7 +2600,7 @@
           <a:ln/>
         </p:spPr>
         <p:txBody>
-          <a:bodyPr wrap="square" lIns="0" tIns="0" rIns="0" bIns="0" rtlCol="0" anchor="ctr"/>
+          <a:bodyPr wrap="square" rtlCol="0" anchor="ctr"/>
           <a:lstStyle/>
           <a:p>
             <a:pPr indent="0" marL="0">
@@ -3002,7 +2615,7 @@
                 <a:ea typeface="Georgia" pitchFamily="34" charset="-122"/>
                 <a:cs typeface="Georgia" pitchFamily="34" charset="-120"/>
               </a:rPr>
-              <a:t>Why Estimate?</a:t>
+              <a:t>Round 4,567 to the nearest...</a:t>
             </a:r>
             <a:endParaRPr lang="en-US" sz="2000" dirty="0"/>
           </a:p>
@@ -3017,36 +2630,303 @@
         <p:spPr>
           <a:xfrm>
             <a:off x="548640" y="1051560"/>
-            <a:ext cx="3840480" cy="3474720"/>
-          </a:xfrm>
-          <a:prstGeom prst="rect">
+            <a:ext cx="365760" cy="365760"/>
+          </a:xfrm>
+          <a:prstGeom prst="ellipse">
             <a:avLst/>
           </a:prstGeom>
           <a:solidFill>
-            <a:srgbClr val="FFFFFF"/>
+            <a:srgbClr val="111D35"/>
           </a:solidFill>
           <a:ln/>
-          <a:effectLst>
-            <a:outerShdw sx="100000" sy="100000" kx="0" ky="0" algn="bl" rotWithShape="0" blurRad="50800" dist="25400" dir="8100000">
-              <a:srgbClr val="000000">
-                <a:alpha val="10000"/>
-              </a:srgbClr>
-            </a:outerShdw>
-          </a:effectLst>
-        </p:spPr>
-      </p:sp>
-      <p:sp>
-        <p:nvSpPr>
-          <p:cNvPr id="7" name="Shape 5"/>
+        </p:spPr>
+      </p:sp>
+      <p:sp>
+        <p:nvSpPr>
+          <p:cNvPr id="7" name="Text 5"/>
           <p:cNvSpPr/>
           <p:nvPr/>
         </p:nvSpPr>
         <p:spPr>
           <a:xfrm>
             <a:off x="548640" y="1051560"/>
-            <a:ext cx="3840480" cy="54864"/>
-          </a:xfrm>
-          <a:prstGeom prst="rect">
+            <a:ext cx="365760" cy="365760"/>
+          </a:xfrm>
+          <a:prstGeom prst="rect">
+            <a:avLst/>
+          </a:prstGeom>
+          <a:noFill/>
+          <a:ln/>
+        </p:spPr>
+        <p:txBody>
+          <a:bodyPr wrap="square" rtlCol="0" anchor="ctr"/>
+          <a:lstStyle/>
+          <a:p>
+            <a:pPr algn="ctr" indent="0" marL="0">
+              <a:buNone/>
+            </a:pPr>
+            <a:r>
+              <a:rPr lang="en-US" sz="1300" b="1" dirty="0">
+                <a:solidFill>
+                  <a:srgbClr val="FFFFFF"/>
+                </a:solidFill>
+                <a:latin typeface="Arial" pitchFamily="34" charset="0"/>
+                <a:ea typeface="Arial" pitchFamily="34" charset="-122"/>
+                <a:cs typeface="Arial" pitchFamily="34" charset="-120"/>
+              </a:rPr>
+              <a:t>1</a:t>
+            </a:r>
+            <a:endParaRPr lang="en-US" sz="1300" dirty="0"/>
+          </a:p>
+        </p:txBody>
+      </p:sp>
+      <p:sp>
+        <p:nvSpPr>
+          <p:cNvPr id="8" name="Text 6"/>
+          <p:cNvSpPr/>
+          <p:nvPr/>
+        </p:nvSpPr>
+        <p:spPr>
+          <a:xfrm>
+            <a:off x="1097280" y="1005840"/>
+            <a:ext cx="9601200" cy="502920"/>
+          </a:xfrm>
+          <a:prstGeom prst="rect">
+            <a:avLst/>
+          </a:prstGeom>
+          <a:noFill/>
+          <a:ln/>
+        </p:spPr>
+        <p:txBody>
+          <a:bodyPr wrap="square" rtlCol="0" anchor="ctr"/>
+          <a:lstStyle/>
+          <a:p>
+            <a:pPr indent="0" marL="0">
+              <a:buNone/>
+            </a:pPr>
+            <a:r>
+              <a:rPr lang="en-US" sz="1500" dirty="0">
+                <a:solidFill>
+                  <a:srgbClr val="3D3A36"/>
+                </a:solidFill>
+                <a:latin typeface="Arial" pitchFamily="34" charset="0"/>
+                <a:ea typeface="Arial" pitchFamily="34" charset="-122"/>
+                <a:cs typeface="Arial" pitchFamily="34" charset="-120"/>
+              </a:rPr>
+              <a:t>Nearest 10: look at 7 → round up → 4,570</a:t>
+            </a:r>
+            <a:endParaRPr lang="en-US" sz="1500" dirty="0"/>
+          </a:p>
+        </p:txBody>
+      </p:sp>
+      <p:sp>
+        <p:nvSpPr>
+          <p:cNvPr id="9" name="Shape 7"/>
+          <p:cNvSpPr/>
+          <p:nvPr/>
+        </p:nvSpPr>
+        <p:spPr>
+          <a:xfrm>
+            <a:off x="548640" y="1783080"/>
+            <a:ext cx="365760" cy="365760"/>
+          </a:xfrm>
+          <a:prstGeom prst="ellipse">
+            <a:avLst/>
+          </a:prstGeom>
+          <a:solidFill>
+            <a:srgbClr val="111D35"/>
+          </a:solidFill>
+          <a:ln/>
+        </p:spPr>
+      </p:sp>
+      <p:sp>
+        <p:nvSpPr>
+          <p:cNvPr id="10" name="Text 8"/>
+          <p:cNvSpPr/>
+          <p:nvPr/>
+        </p:nvSpPr>
+        <p:spPr>
+          <a:xfrm>
+            <a:off x="548640" y="1783080"/>
+            <a:ext cx="365760" cy="365760"/>
+          </a:xfrm>
+          <a:prstGeom prst="rect">
+            <a:avLst/>
+          </a:prstGeom>
+          <a:noFill/>
+          <a:ln/>
+        </p:spPr>
+        <p:txBody>
+          <a:bodyPr wrap="square" rtlCol="0" anchor="ctr"/>
+          <a:lstStyle/>
+          <a:p>
+            <a:pPr algn="ctr" indent="0" marL="0">
+              <a:buNone/>
+            </a:pPr>
+            <a:r>
+              <a:rPr lang="en-US" sz="1300" b="1" dirty="0">
+                <a:solidFill>
+                  <a:srgbClr val="FFFFFF"/>
+                </a:solidFill>
+                <a:latin typeface="Arial" pitchFamily="34" charset="0"/>
+                <a:ea typeface="Arial" pitchFamily="34" charset="-122"/>
+                <a:cs typeface="Arial" pitchFamily="34" charset="-120"/>
+              </a:rPr>
+              <a:t>2</a:t>
+            </a:r>
+            <a:endParaRPr lang="en-US" sz="1300" dirty="0"/>
+          </a:p>
+        </p:txBody>
+      </p:sp>
+      <p:sp>
+        <p:nvSpPr>
+          <p:cNvPr id="11" name="Text 9"/>
+          <p:cNvSpPr/>
+          <p:nvPr/>
+        </p:nvSpPr>
+        <p:spPr>
+          <a:xfrm>
+            <a:off x="1097280" y="1737360"/>
+            <a:ext cx="9601200" cy="502920"/>
+          </a:xfrm>
+          <a:prstGeom prst="rect">
+            <a:avLst/>
+          </a:prstGeom>
+          <a:noFill/>
+          <a:ln/>
+        </p:spPr>
+        <p:txBody>
+          <a:bodyPr wrap="square" rtlCol="0" anchor="ctr"/>
+          <a:lstStyle/>
+          <a:p>
+            <a:pPr indent="0" marL="0">
+              <a:buNone/>
+            </a:pPr>
+            <a:r>
+              <a:rPr lang="en-US" sz="1500" dirty="0">
+                <a:solidFill>
+                  <a:srgbClr val="3D3A36"/>
+                </a:solidFill>
+                <a:latin typeface="Arial" pitchFamily="34" charset="0"/>
+                <a:ea typeface="Arial" pitchFamily="34" charset="-122"/>
+                <a:cs typeface="Arial" pitchFamily="34" charset="-120"/>
+              </a:rPr>
+              <a:t>Nearest 100: look at 6 → round up → 4,600</a:t>
+            </a:r>
+            <a:endParaRPr lang="en-US" sz="1500" dirty="0"/>
+          </a:p>
+        </p:txBody>
+      </p:sp>
+      <p:sp>
+        <p:nvSpPr>
+          <p:cNvPr id="12" name="Shape 10"/>
+          <p:cNvSpPr/>
+          <p:nvPr/>
+        </p:nvSpPr>
+        <p:spPr>
+          <a:xfrm>
+            <a:off x="548640" y="2514600"/>
+            <a:ext cx="365760" cy="365760"/>
+          </a:xfrm>
+          <a:prstGeom prst="ellipse">
+            <a:avLst/>
+          </a:prstGeom>
+          <a:solidFill>
+            <a:srgbClr val="111D35"/>
+          </a:solidFill>
+          <a:ln/>
+        </p:spPr>
+      </p:sp>
+      <p:sp>
+        <p:nvSpPr>
+          <p:cNvPr id="13" name="Text 11"/>
+          <p:cNvSpPr/>
+          <p:nvPr/>
+        </p:nvSpPr>
+        <p:spPr>
+          <a:xfrm>
+            <a:off x="548640" y="2514600"/>
+            <a:ext cx="365760" cy="365760"/>
+          </a:xfrm>
+          <a:prstGeom prst="rect">
+            <a:avLst/>
+          </a:prstGeom>
+          <a:noFill/>
+          <a:ln/>
+        </p:spPr>
+        <p:txBody>
+          <a:bodyPr wrap="square" rtlCol="0" anchor="ctr"/>
+          <a:lstStyle/>
+          <a:p>
+            <a:pPr algn="ctr" indent="0" marL="0">
+              <a:buNone/>
+            </a:pPr>
+            <a:r>
+              <a:rPr lang="en-US" sz="1300" b="1" dirty="0">
+                <a:solidFill>
+                  <a:srgbClr val="FFFFFF"/>
+                </a:solidFill>
+                <a:latin typeface="Arial" pitchFamily="34" charset="0"/>
+                <a:ea typeface="Arial" pitchFamily="34" charset="-122"/>
+                <a:cs typeface="Arial" pitchFamily="34" charset="-120"/>
+              </a:rPr>
+              <a:t>3</a:t>
+            </a:r>
+            <a:endParaRPr lang="en-US" sz="1300" dirty="0"/>
+          </a:p>
+        </p:txBody>
+      </p:sp>
+      <p:sp>
+        <p:nvSpPr>
+          <p:cNvPr id="14" name="Text 12"/>
+          <p:cNvSpPr/>
+          <p:nvPr/>
+        </p:nvSpPr>
+        <p:spPr>
+          <a:xfrm>
+            <a:off x="1097280" y="2468880"/>
+            <a:ext cx="9601200" cy="502920"/>
+          </a:xfrm>
+          <a:prstGeom prst="rect">
+            <a:avLst/>
+          </a:prstGeom>
+          <a:noFill/>
+          <a:ln/>
+        </p:spPr>
+        <p:txBody>
+          <a:bodyPr wrap="square" rtlCol="0" anchor="ctr"/>
+          <a:lstStyle/>
+          <a:p>
+            <a:pPr indent="0" marL="0">
+              <a:buNone/>
+            </a:pPr>
+            <a:r>
+              <a:rPr lang="en-US" sz="1500" dirty="0">
+                <a:solidFill>
+                  <a:srgbClr val="3D3A36"/>
+                </a:solidFill>
+                <a:latin typeface="Arial" pitchFamily="34" charset="0"/>
+                <a:ea typeface="Arial" pitchFamily="34" charset="-122"/>
+                <a:cs typeface="Arial" pitchFamily="34" charset="-120"/>
+              </a:rPr>
+              <a:t>Nearest 1,000: look at 5 → round up → 5,000</a:t>
+            </a:r>
+            <a:endParaRPr lang="en-US" sz="1500" dirty="0"/>
+          </a:p>
+        </p:txBody>
+      </p:sp>
+      <p:sp>
+        <p:nvSpPr>
+          <p:cNvPr id="15" name="Shape 13"/>
+          <p:cNvSpPr/>
+          <p:nvPr/>
+        </p:nvSpPr>
+        <p:spPr>
+          <a:xfrm>
+            <a:off x="548640" y="3246120"/>
+            <a:ext cx="365760" cy="365760"/>
+          </a:xfrm>
+          <a:prstGeom prst="ellipse">
             <a:avLst/>
           </a:prstGeom>
           <a:solidFill>
@@ -3057,14 +2937,14 @@
       </p:sp>
       <p:sp>
         <p:nvSpPr>
-          <p:cNvPr id="8" name="Text 6"/>
-          <p:cNvSpPr/>
-          <p:nvPr/>
-        </p:nvSpPr>
-        <p:spPr>
-          <a:xfrm>
-            <a:off x="777240" y="1188720"/>
-            <a:ext cx="3383280" cy="457200"/>
+          <p:cNvPr id="16" name="Text 14"/>
+          <p:cNvSpPr/>
+          <p:nvPr/>
+        </p:nvSpPr>
+        <p:spPr>
+          <a:xfrm>
+            <a:off x="548640" y="3246120"/>
+            <a:ext cx="365760" cy="365760"/>
           </a:xfrm>
           <a:prstGeom prst="rect">
             <a:avLst/>
@@ -3073,7 +2953,46 @@
           <a:ln/>
         </p:spPr>
         <p:txBody>
-          <a:bodyPr wrap="square" lIns="0" tIns="0" rIns="0" bIns="0" rtlCol="0" anchor="ctr"/>
+          <a:bodyPr wrap="square" rtlCol="0" anchor="ctr"/>
+          <a:lstStyle/>
+          <a:p>
+            <a:pPr algn="ctr" indent="0" marL="0">
+              <a:buNone/>
+            </a:pPr>
+            <a:r>
+              <a:rPr lang="en-US" sz="1300" b="1" dirty="0">
+                <a:solidFill>
+                  <a:srgbClr val="FFFFFF"/>
+                </a:solidFill>
+                <a:latin typeface="Arial" pitchFamily="34" charset="0"/>
+                <a:ea typeface="Arial" pitchFamily="34" charset="-122"/>
+                <a:cs typeface="Arial" pitchFamily="34" charset="-120"/>
+              </a:rPr>
+              <a:t>4</a:t>
+            </a:r>
+            <a:endParaRPr lang="en-US" sz="1300" dirty="0"/>
+          </a:p>
+        </p:txBody>
+      </p:sp>
+      <p:sp>
+        <p:nvSpPr>
+          <p:cNvPr id="17" name="Text 15"/>
+          <p:cNvSpPr/>
+          <p:nvPr/>
+        </p:nvSpPr>
+        <p:spPr>
+          <a:xfrm>
+            <a:off x="1097280" y="3200400"/>
+            <a:ext cx="9601200" cy="502920"/>
+          </a:xfrm>
+          <a:prstGeom prst="rect">
+            <a:avLst/>
+          </a:prstGeom>
+          <a:noFill/>
+          <a:ln/>
+        </p:spPr>
+        <p:txBody>
+          <a:bodyPr wrap="square" rtlCol="0" anchor="ctr"/>
           <a:lstStyle/>
           <a:p>
             <a:pPr indent="0" marL="0">
@@ -3082,313 +3001,15 @@
             <a:r>
               <a:rPr lang="en-US" sz="1500" b="1" dirty="0">
                 <a:solidFill>
-                  <a:srgbClr val="1B2A4A"/>
-                </a:solidFill>
-                <a:latin typeface="Georgia" pitchFamily="34" charset="0"/>
-                <a:ea typeface="Georgia" pitchFamily="34" charset="-122"/>
-                <a:cs typeface="Georgia" pitchFamily="34" charset="-120"/>
-              </a:rPr>
-              <a:t>When To Estimate</a:t>
+                  <a:srgbClr val="2A9D8F"/>
+                </a:solidFill>
+                <a:latin typeface="Arial" pitchFamily="34" charset="0"/>
+                <a:ea typeface="Arial" pitchFamily="34" charset="-122"/>
+                <a:cs typeface="Arial" pitchFamily="34" charset="-120"/>
+              </a:rPr>
+              <a:t>Remember: 5 always rounds UP!</a:t>
             </a:r>
             <a:endParaRPr lang="en-US" sz="1500" dirty="0"/>
-          </a:p>
-        </p:txBody>
-      </p:sp>
-      <p:sp>
-        <p:nvSpPr>
-          <p:cNvPr id="9" name="Text 7"/>
-          <p:cNvSpPr/>
-          <p:nvPr/>
-        </p:nvSpPr>
-        <p:spPr>
-          <a:xfrm>
-            <a:off x="777240" y="1691640"/>
-            <a:ext cx="3383280" cy="2651760"/>
-          </a:xfrm>
-          <a:prstGeom prst="rect">
-            <a:avLst/>
-          </a:prstGeom>
-          <a:noFill/>
-          <a:ln/>
-        </p:spPr>
-        <p:txBody>
-          <a:bodyPr wrap="square" rtlCol="0" anchor="t"/>
-          <a:lstStyle/>
-          <a:p>
-            <a:pPr marL="342900" indent="-342900">
-              <a:spcAft>
-                <a:spcPts val="600"/>
-              </a:spcAft>
-              <a:buSzPct val="100000"/>
-              <a:buChar char="•"/>
-            </a:pPr>
-            <a:r>
-              <a:rPr lang="en-US" sz="1300" dirty="0">
-                <a:solidFill>
-                  <a:srgbClr val="3D3A36"/>
-                </a:solidFill>
-                <a:latin typeface="Calibri" pitchFamily="34" charset="0"/>
-                <a:ea typeface="Calibri" pitchFamily="34" charset="-122"/>
-                <a:cs typeface="Calibri" pitchFamily="34" charset="-120"/>
-              </a:rPr>
-              <a:t>Checking if your answer is reasonable</a:t>
-            </a:r>
-            <a:endParaRPr lang="en-US" sz="1300" dirty="0"/>
-          </a:p>
-          <a:p>
-            <a:pPr marL="342900" indent="-342900">
-              <a:spcAft>
-                <a:spcPts val="600"/>
-              </a:spcAft>
-              <a:buSzPct val="100000"/>
-              <a:buChar char="•"/>
-            </a:pPr>
-            <a:r>
-              <a:rPr lang="en-US" sz="1300" dirty="0">
-                <a:solidFill>
-                  <a:srgbClr val="3D3A36"/>
-                </a:solidFill>
-                <a:latin typeface="Calibri" pitchFamily="34" charset="0"/>
-                <a:ea typeface="Calibri" pitchFamily="34" charset="-122"/>
-                <a:cs typeface="Calibri" pitchFamily="34" charset="-120"/>
-              </a:rPr>
-              <a:t>Quick mental calculations</a:t>
-            </a:r>
-            <a:endParaRPr lang="en-US" sz="1300" dirty="0"/>
-          </a:p>
-          <a:p>
-            <a:pPr marL="342900" indent="-342900">
-              <a:spcAft>
-                <a:spcPts val="600"/>
-              </a:spcAft>
-              <a:buSzPct val="100000"/>
-              <a:buChar char="•"/>
-            </a:pPr>
-            <a:r>
-              <a:rPr lang="en-US" sz="1300" dirty="0">
-                <a:solidFill>
-                  <a:srgbClr val="3D3A36"/>
-                </a:solidFill>
-                <a:latin typeface="Calibri" pitchFamily="34" charset="0"/>
-                <a:ea typeface="Calibri" pitchFamily="34" charset="-122"/>
-                <a:cs typeface="Calibri" pitchFamily="34" charset="-120"/>
-              </a:rPr>
-              <a:t>When exact values aren't needed</a:t>
-            </a:r>
-            <a:endParaRPr lang="en-US" sz="1300" dirty="0"/>
-          </a:p>
-          <a:p>
-            <a:pPr marL="342900" indent="-342900">
-              <a:spcAft>
-                <a:spcPts val="600"/>
-              </a:spcAft>
-              <a:buSzPct val="100000"/>
-              <a:buChar char="•"/>
-            </a:pPr>
-            <a:r>
-              <a:rPr lang="en-US" sz="1300" dirty="0">
-                <a:solidFill>
-                  <a:srgbClr val="3D3A36"/>
-                </a:solidFill>
-                <a:latin typeface="Calibri" pitchFamily="34" charset="0"/>
-                <a:ea typeface="Calibri" pitchFamily="34" charset="-122"/>
-                <a:cs typeface="Calibri" pitchFamily="34" charset="-120"/>
-              </a:rPr>
-              <a:t>Shopping: 'About how much will this cost?'</a:t>
-            </a:r>
-            <a:endParaRPr lang="en-US" sz="1300" dirty="0"/>
-          </a:p>
-        </p:txBody>
-      </p:sp>
-      <p:sp>
-        <p:nvSpPr>
-          <p:cNvPr id="10" name="Shape 8"/>
-          <p:cNvSpPr/>
-          <p:nvPr/>
-        </p:nvSpPr>
-        <p:spPr>
-          <a:xfrm>
-            <a:off x="4754880" y="1051560"/>
-            <a:ext cx="3840480" cy="3474720"/>
-          </a:xfrm>
-          <a:prstGeom prst="rect">
-            <a:avLst/>
-          </a:prstGeom>
-          <a:solidFill>
-            <a:srgbClr val="FFFFFF"/>
-          </a:solidFill>
-          <a:ln/>
-          <a:effectLst>
-            <a:outerShdw sx="100000" sy="100000" kx="0" ky="0" algn="bl" rotWithShape="0" blurRad="50800" dist="25400" dir="8100000">
-              <a:srgbClr val="000000">
-                <a:alpha val="10000"/>
-              </a:srgbClr>
-            </a:outerShdw>
-          </a:effectLst>
-        </p:spPr>
-      </p:sp>
-      <p:sp>
-        <p:nvSpPr>
-          <p:cNvPr id="11" name="Shape 9"/>
-          <p:cNvSpPr/>
-          <p:nvPr/>
-        </p:nvSpPr>
-        <p:spPr>
-          <a:xfrm>
-            <a:off x="4754880" y="1051560"/>
-            <a:ext cx="3840480" cy="54864"/>
-          </a:xfrm>
-          <a:prstGeom prst="rect">
-            <a:avLst/>
-          </a:prstGeom>
-          <a:solidFill>
-            <a:srgbClr val="E9C46A"/>
-          </a:solidFill>
-          <a:ln/>
-        </p:spPr>
-      </p:sp>
-      <p:sp>
-        <p:nvSpPr>
-          <p:cNvPr id="12" name="Text 10"/>
-          <p:cNvSpPr/>
-          <p:nvPr/>
-        </p:nvSpPr>
-        <p:spPr>
-          <a:xfrm>
-            <a:off x="4983480" y="1188720"/>
-            <a:ext cx="3383280" cy="457200"/>
-          </a:xfrm>
-          <a:prstGeom prst="rect">
-            <a:avLst/>
-          </a:prstGeom>
-          <a:noFill/>
-          <a:ln/>
-        </p:spPr>
-        <p:txBody>
-          <a:bodyPr wrap="square" lIns="0" tIns="0" rIns="0" bIns="0" rtlCol="0" anchor="ctr"/>
-          <a:lstStyle/>
-          <a:p>
-            <a:pPr indent="0" marL="0">
-              <a:buNone/>
-            </a:pPr>
-            <a:r>
-              <a:rPr lang="en-US" sz="1500" b="1" dirty="0">
-                <a:solidFill>
-                  <a:srgbClr val="1B2A4A"/>
-                </a:solidFill>
-                <a:latin typeface="Georgia" pitchFamily="34" charset="0"/>
-                <a:ea typeface="Georgia" pitchFamily="34" charset="-122"/>
-                <a:cs typeface="Georgia" pitchFamily="34" charset="-120"/>
-              </a:rPr>
-              <a:t>How To Estimate</a:t>
-            </a:r>
-            <a:endParaRPr lang="en-US" sz="1500" dirty="0"/>
-          </a:p>
-        </p:txBody>
-      </p:sp>
-      <p:sp>
-        <p:nvSpPr>
-          <p:cNvPr id="13" name="Text 11"/>
-          <p:cNvSpPr/>
-          <p:nvPr/>
-        </p:nvSpPr>
-        <p:spPr>
-          <a:xfrm>
-            <a:off x="4983480" y="1691640"/>
-            <a:ext cx="3383280" cy="2651760"/>
-          </a:xfrm>
-          <a:prstGeom prst="rect">
-            <a:avLst/>
-          </a:prstGeom>
-          <a:noFill/>
-          <a:ln/>
-        </p:spPr>
-        <p:txBody>
-          <a:bodyPr wrap="square" rtlCol="0" anchor="t"/>
-          <a:lstStyle/>
-          <a:p>
-            <a:pPr marL="342900" indent="-342900">
-              <a:spcAft>
-                <a:spcPts val="600"/>
-              </a:spcAft>
-              <a:buSzPct val="100000"/>
-              <a:buChar char="•"/>
-            </a:pPr>
-            <a:r>
-              <a:rPr lang="en-US" sz="1300" dirty="0">
-                <a:solidFill>
-                  <a:srgbClr val="3D3A36"/>
-                </a:solidFill>
-                <a:latin typeface="Calibri" pitchFamily="34" charset="0"/>
-                <a:ea typeface="Calibri" pitchFamily="34" charset="-122"/>
-                <a:cs typeface="Calibri" pitchFamily="34" charset="-120"/>
-              </a:rPr>
-              <a:t>Round each number first, then calculate</a:t>
-            </a:r>
-            <a:endParaRPr lang="en-US" sz="1300" dirty="0"/>
-          </a:p>
-          <a:p>
-            <a:pPr marL="342900" indent="-342900">
-              <a:spcAft>
-                <a:spcPts val="600"/>
-              </a:spcAft>
-              <a:buSzPct val="100000"/>
-              <a:buChar char="•"/>
-            </a:pPr>
-            <a:r>
-              <a:rPr lang="en-US" sz="1300" dirty="0">
-                <a:solidFill>
-                  <a:srgbClr val="3D3A36"/>
-                </a:solidFill>
-                <a:latin typeface="Calibri" pitchFamily="34" charset="0"/>
-                <a:ea typeface="Calibri" pitchFamily="34" charset="-122"/>
-                <a:cs typeface="Calibri" pitchFamily="34" charset="-120"/>
-              </a:rPr>
-              <a:t>Example: 48 × 21 ≈ 50 × 20 = 1,000</a:t>
-            </a:r>
-            <a:endParaRPr lang="en-US" sz="1300" dirty="0"/>
-          </a:p>
-          <a:p>
-            <a:pPr marL="342900" indent="-342900">
-              <a:spcAft>
-                <a:spcPts val="600"/>
-              </a:spcAft>
-              <a:buSzPct val="100000"/>
-              <a:buChar char="•"/>
-            </a:pPr>
-            <a:r>
-              <a:rPr lang="en-US" sz="1300" dirty="0">
-                <a:solidFill>
-                  <a:srgbClr val="3D3A36"/>
-                </a:solidFill>
-                <a:latin typeface="Calibri" pitchFamily="34" charset="0"/>
-                <a:ea typeface="Calibri" pitchFamily="34" charset="-122"/>
-                <a:cs typeface="Calibri" pitchFamily="34" charset="-120"/>
-              </a:rPr>
-              <a:t>The actual answer is 1,008 — close!</a:t>
-            </a:r>
-            <a:endParaRPr lang="en-US" sz="1300" dirty="0"/>
-          </a:p>
-          <a:p>
-            <a:pPr marL="342900" indent="-342900">
-              <a:spcAft>
-                <a:spcPts val="600"/>
-              </a:spcAft>
-              <a:buSzPct val="100000"/>
-              <a:buChar char="•"/>
-            </a:pPr>
-            <a:r>
-              <a:rPr lang="en-US" sz="1300" dirty="0">
-                <a:solidFill>
-                  <a:srgbClr val="3D3A36"/>
-                </a:solidFill>
-                <a:latin typeface="Calibri" pitchFamily="34" charset="0"/>
-                <a:ea typeface="Calibri" pitchFamily="34" charset="-122"/>
-                <a:cs typeface="Calibri" pitchFamily="34" charset="-120"/>
-              </a:rPr>
-              <a:t>Estimation catches big mistakes</a:t>
-            </a:r>
-            <a:endParaRPr lang="en-US" sz="1300" dirty="0"/>
           </a:p>
         </p:txBody>
       </p:sp>
@@ -3433,47 +3054,7 @@
         <p:spPr>
           <a:xfrm>
             <a:off x="0" y="0"/>
-            <a:ext cx="9144000" cy="822960"/>
-          </a:xfrm>
-          <a:prstGeom prst="rect">
-            <a:avLst/>
-          </a:prstGeom>
-          <a:solidFill>
-            <a:srgbClr val="FFFFFF"/>
-          </a:solidFill>
-          <a:ln/>
-        </p:spPr>
-      </p:sp>
-      <p:sp>
-        <p:nvSpPr>
-          <p:cNvPr id="3" name="Shape 1"/>
-          <p:cNvSpPr/>
-          <p:nvPr/>
-        </p:nvSpPr>
-        <p:spPr>
-          <a:xfrm>
-            <a:off x="0" y="804672"/>
-            <a:ext cx="9144000" cy="27432"/>
-          </a:xfrm>
-          <a:prstGeom prst="rect">
-            <a:avLst/>
-          </a:prstGeom>
-          <a:solidFill>
-            <a:srgbClr val="E5E2DC"/>
-          </a:solidFill>
-          <a:ln/>
-        </p:spPr>
-      </p:sp>
-      <p:sp>
-        <p:nvSpPr>
-          <p:cNvPr id="4" name="Shape 2"/>
-          <p:cNvSpPr/>
-          <p:nvPr/>
-        </p:nvSpPr>
-        <p:spPr>
-          <a:xfrm>
-            <a:off x="548640" y="201168"/>
-            <a:ext cx="54864" cy="420624"/>
+            <a:ext cx="73152" cy="5148072"/>
           </a:xfrm>
           <a:prstGeom prst="rect">
             <a:avLst/>
@@ -3486,14 +3067,14 @@
       </p:sp>
       <p:sp>
         <p:nvSpPr>
-          <p:cNvPr id="5" name="Text 3"/>
-          <p:cNvSpPr/>
-          <p:nvPr/>
-        </p:nvSpPr>
-        <p:spPr>
-          <a:xfrm>
-            <a:off x="777240" y="137160"/>
-            <a:ext cx="7772400" cy="548640"/>
+          <p:cNvPr id="3" name="Text 1"/>
+          <p:cNvSpPr/>
+          <p:nvPr/>
+        </p:nvSpPr>
+        <p:spPr>
+          <a:xfrm>
+            <a:off x="548640" y="274320"/>
+            <a:ext cx="9144000" cy="640080"/>
           </a:xfrm>
           <a:prstGeom prst="rect">
             <a:avLst/>
@@ -3502,14 +3083,14 @@
           <a:ln/>
         </p:spPr>
         <p:txBody>
-          <a:bodyPr wrap="square" lIns="0" tIns="0" rIns="0" bIns="0" rtlCol="0" anchor="ctr"/>
+          <a:bodyPr wrap="square" rtlCol="0" anchor="ctr"/>
           <a:lstStyle/>
           <a:p>
             <a:pPr indent="0" marL="0">
               <a:buNone/>
             </a:pPr>
             <a:r>
-              <a:rPr lang="en-US" sz="2000" b="1" dirty="0">
+              <a:rPr lang="en-US" sz="2400" b="1" dirty="0">
                 <a:solidFill>
                   <a:srgbClr val="1B2A4A"/>
                 </a:solidFill>
@@ -3517,22 +3098,42 @@
                 <a:ea typeface="Georgia" pitchFamily="34" charset="-122"/>
                 <a:cs typeface="Georgia" pitchFamily="34" charset="-120"/>
               </a:rPr>
-              <a:t>Rounding Decimals</a:t>
-            </a:r>
-            <a:endParaRPr lang="en-US" sz="2000" dirty="0"/>
-          </a:p>
-        </p:txBody>
-      </p:sp>
-      <p:sp>
-        <p:nvSpPr>
-          <p:cNvPr id="6" name="Text 4"/>
-          <p:cNvSpPr/>
-          <p:nvPr/>
-        </p:nvSpPr>
-        <p:spPr>
-          <a:xfrm>
-            <a:off x="731520" y="1051560"/>
-            <a:ext cx="7680960" cy="3108960"/>
+              <a:t>Why Estimation Matters</a:t>
+            </a:r>
+            <a:endParaRPr lang="en-US" sz="2400" dirty="0"/>
+          </a:p>
+        </p:txBody>
+      </p:sp>
+      <p:sp>
+        <p:nvSpPr>
+          <p:cNvPr id="4" name="Shape 2"/>
+          <p:cNvSpPr/>
+          <p:nvPr/>
+        </p:nvSpPr>
+        <p:spPr>
+          <a:xfrm>
+            <a:off x="548640" y="960120"/>
+            <a:ext cx="2286000" cy="36576"/>
+          </a:xfrm>
+          <a:prstGeom prst="rect">
+            <a:avLst/>
+          </a:prstGeom>
+          <a:solidFill>
+            <a:srgbClr val="2A9D8F"/>
+          </a:solidFill>
+          <a:ln/>
+        </p:spPr>
+      </p:sp>
+      <p:sp>
+        <p:nvSpPr>
+          <p:cNvPr id="5" name="Text 3"/>
+          <p:cNvSpPr/>
+          <p:nvPr/>
+        </p:nvSpPr>
+        <p:spPr>
+          <a:xfrm>
+            <a:off x="548640" y="1188720"/>
+            <a:ext cx="10058400" cy="3474720"/>
           </a:xfrm>
           <a:prstGeom prst="rect">
             <a:avLst/>
@@ -3544,107 +3145,112 @@
           <a:bodyPr wrap="square" rtlCol="0" anchor="t"/>
           <a:lstStyle/>
           <a:p>
-            <a:pPr marL="342900" indent="-342900">
+            <a:pPr>
+              <a:lnSpc>
+                <a:spcPct val="150000"/>
+              </a:lnSpc>
               <a:spcAft>
-                <a:spcPts val="800"/>
+                <a:spcPts val="600"/>
               </a:spcAft>
-              <a:buSzPct val="100000"/>
-              <a:buChar char="•"/>
             </a:pPr>
             <a:r>
               <a:rPr lang="en-US" sz="1500" dirty="0">
                 <a:solidFill>
                   <a:srgbClr val="3D3A36"/>
                 </a:solidFill>
-                <a:latin typeface="Calibri" pitchFamily="34" charset="0"/>
-                <a:ea typeface="Calibri" pitchFamily="34" charset="-122"/>
-                <a:cs typeface="Calibri" pitchFamily="34" charset="-120"/>
-              </a:rPr>
-              <a:t>Rounding to 1 decimal place (1 d.p.): look at the 2nd decimal digit.</a:t>
+                <a:latin typeface="Arial" pitchFamily="34" charset="0"/>
+                <a:ea typeface="Arial" pitchFamily="34" charset="-122"/>
+                <a:cs typeface="Arial" pitchFamily="34" charset="-120"/>
+              </a:rPr>
+              <a:t>Quick check: does your calculator answer make sense?</a:t>
             </a:r>
             <a:endParaRPr lang="en-US" sz="1500" dirty="0"/>
           </a:p>
           <a:p>
-            <a:pPr marL="342900" indent="-342900">
+            <a:pPr>
+              <a:lnSpc>
+                <a:spcPct val="150000"/>
+              </a:lnSpc>
               <a:spcAft>
-                <a:spcPts val="800"/>
+                <a:spcPts val="600"/>
               </a:spcAft>
-              <a:buSzPct val="100000"/>
-              <a:buChar char="•"/>
             </a:pPr>
             <a:r>
               <a:rPr lang="en-US" sz="1500" dirty="0">
                 <a:solidFill>
                   <a:srgbClr val="3D3A36"/>
                 </a:solidFill>
-                <a:latin typeface="Calibri" pitchFamily="34" charset="0"/>
-                <a:ea typeface="Calibri" pitchFamily="34" charset="-122"/>
-                <a:cs typeface="Calibri" pitchFamily="34" charset="-120"/>
-              </a:rPr>
-              <a:t>Example: 3.847 to 1 d.p. → look at 4 → 4 &lt; 5 → round down → 3.8.</a:t>
+                <a:latin typeface="Arial" pitchFamily="34" charset="0"/>
+                <a:ea typeface="Arial" pitchFamily="34" charset="-122"/>
+                <a:cs typeface="Arial" pitchFamily="34" charset="-120"/>
+              </a:rPr>
+              <a:t>Example: 48 × 21 ≈ 50 × 20 = 1,000 (actual: 1,008 ✓).</a:t>
             </a:r>
             <a:endParaRPr lang="en-US" sz="1500" dirty="0"/>
           </a:p>
           <a:p>
-            <a:pPr marL="342900" indent="-342900">
+            <a:pPr>
+              <a:lnSpc>
+                <a:spcPct val="150000"/>
+              </a:lnSpc>
               <a:spcAft>
-                <a:spcPts val="800"/>
+                <a:spcPts val="600"/>
               </a:spcAft>
-              <a:buSzPct val="100000"/>
-              <a:buChar char="•"/>
             </a:pPr>
             <a:r>
               <a:rPr lang="en-US" sz="1500" dirty="0">
                 <a:solidFill>
                   <a:srgbClr val="3D3A36"/>
                 </a:solidFill>
-                <a:latin typeface="Calibri" pitchFamily="34" charset="0"/>
-                <a:ea typeface="Calibri" pitchFamily="34" charset="-122"/>
-                <a:cs typeface="Calibri" pitchFamily="34" charset="-120"/>
-              </a:rPr>
-              <a:t>Example: 6.251 to 1 d.p. → look at 5 → 5 ≥ 5 → round up → 6.3.</a:t>
+                <a:latin typeface="Arial" pitchFamily="34" charset="0"/>
+                <a:ea typeface="Arial" pitchFamily="34" charset="-122"/>
+                <a:cs typeface="Arial" pitchFamily="34" charset="-120"/>
+              </a:rPr>
+              <a:t>Example: 389 + 612 ≈ 400 + 600 = 1,000 (actual: 1,001 ✓).</a:t>
             </a:r>
             <a:endParaRPr lang="en-US" sz="1500" dirty="0"/>
           </a:p>
           <a:p>
-            <a:pPr marL="342900" indent="-342900">
+            <a:pPr>
+              <a:lnSpc>
+                <a:spcPct val="150000"/>
+              </a:lnSpc>
               <a:spcAft>
-                <a:spcPts val="800"/>
+                <a:spcPts val="600"/>
               </a:spcAft>
-              <a:buSzPct val="100000"/>
-              <a:buChar char="•"/>
             </a:pPr>
             <a:r>
               <a:rPr lang="en-US" sz="1500" dirty="0">
                 <a:solidFill>
                   <a:srgbClr val="3D3A36"/>
                 </a:solidFill>
-                <a:latin typeface="Calibri" pitchFamily="34" charset="0"/>
-                <a:ea typeface="Calibri" pitchFamily="34" charset="-122"/>
-                <a:cs typeface="Calibri" pitchFamily="34" charset="-120"/>
-              </a:rPr>
-              <a:t>Rounding to the nearest whole number: look at the first decimal digit.</a:t>
+                <a:latin typeface="Arial" pitchFamily="34" charset="0"/>
+                <a:ea typeface="Arial" pitchFamily="34" charset="-122"/>
+                <a:cs typeface="Arial" pitchFamily="34" charset="-120"/>
+              </a:rPr>
+              <a:t>Real life: 'About how much will 3 shirts at $18.99 each cost?'</a:t>
             </a:r>
             <a:endParaRPr lang="en-US" sz="1500" dirty="0"/>
           </a:p>
           <a:p>
-            <a:pPr marL="342900" indent="-342900">
+            <a:pPr>
+              <a:lnSpc>
+                <a:spcPct val="150000"/>
+              </a:lnSpc>
               <a:spcAft>
-                <a:spcPts val="800"/>
+                <a:spcPts val="600"/>
               </a:spcAft>
-              <a:buSzPct val="100000"/>
-              <a:buChar char="•"/>
             </a:pPr>
             <a:r>
               <a:rPr lang="en-US" sz="1500" dirty="0">
                 <a:solidFill>
                   <a:srgbClr val="3D3A36"/>
                 </a:solidFill>
-                <a:latin typeface="Calibri" pitchFamily="34" charset="0"/>
-                <a:ea typeface="Calibri" pitchFamily="34" charset="-122"/>
-                <a:cs typeface="Calibri" pitchFamily="34" charset="-120"/>
-              </a:rPr>
-              <a:t>Example: 7.6 → 6 ≥ 5 → round up → 8.</a:t>
+                <a:latin typeface="Arial" pitchFamily="34" charset="0"/>
+                <a:ea typeface="Arial" pitchFamily="34" charset="-122"/>
+                <a:cs typeface="Arial" pitchFamily="34" charset="-120"/>
+              </a:rPr>
+              <a:t>Round to $19 × 3 ≈ $57. Good enough for budgeting!</a:t>
             </a:r>
             <a:endParaRPr lang="en-US" sz="1500" dirty="0"/>
           </a:p>
@@ -3691,67 +3297,113 @@
         <p:spPr>
           <a:xfrm>
             <a:off x="0" y="0"/>
-            <a:ext cx="9144000" cy="822960"/>
-          </a:xfrm>
-          <a:prstGeom prst="rect">
-            <a:avLst/>
+            <a:ext cx="73152" cy="5148072"/>
+          </a:xfrm>
+          <a:prstGeom prst="rect">
+            <a:avLst/>
+          </a:prstGeom>
+          <a:solidFill>
+            <a:srgbClr val="2A9D8F"/>
+          </a:solidFill>
+          <a:ln/>
+        </p:spPr>
+      </p:sp>
+      <p:sp>
+        <p:nvSpPr>
+          <p:cNvPr id="3" name="Text 1"/>
+          <p:cNvSpPr/>
+          <p:nvPr/>
+        </p:nvSpPr>
+        <p:spPr>
+          <a:xfrm>
+            <a:off x="548640" y="274320"/>
+            <a:ext cx="9144000" cy="640080"/>
+          </a:xfrm>
+          <a:prstGeom prst="rect">
+            <a:avLst/>
+          </a:prstGeom>
+          <a:noFill/>
+          <a:ln/>
+        </p:spPr>
+        <p:txBody>
+          <a:bodyPr wrap="square" rtlCol="0" anchor="ctr"/>
+          <a:lstStyle/>
+          <a:p>
+            <a:pPr indent="0" marL="0">
+              <a:buNone/>
+            </a:pPr>
+            <a:r>
+              <a:rPr lang="en-US" sz="2400" b="1" dirty="0">
+                <a:solidFill>
+                  <a:srgbClr val="1B2A4A"/>
+                </a:solidFill>
+                <a:latin typeface="Georgia" pitchFamily="34" charset="0"/>
+                <a:ea typeface="Georgia" pitchFamily="34" charset="-122"/>
+                <a:cs typeface="Georgia" pitchFamily="34" charset="-120"/>
+              </a:rPr>
+              <a:t>Common Mistakes</a:t>
+            </a:r>
+            <a:endParaRPr lang="en-US" sz="2400" dirty="0"/>
+          </a:p>
+        </p:txBody>
+      </p:sp>
+      <p:sp>
+        <p:nvSpPr>
+          <p:cNvPr id="4" name="Shape 2"/>
+          <p:cNvSpPr/>
+          <p:nvPr/>
+        </p:nvSpPr>
+        <p:spPr>
+          <a:xfrm>
+            <a:off x="548640" y="960120"/>
+            <a:ext cx="2286000" cy="36576"/>
+          </a:xfrm>
+          <a:prstGeom prst="rect">
+            <a:avLst/>
+          </a:prstGeom>
+          <a:solidFill>
+            <a:srgbClr val="2A9D8F"/>
+          </a:solidFill>
+          <a:ln/>
+        </p:spPr>
+      </p:sp>
+      <p:sp>
+        <p:nvSpPr>
+          <p:cNvPr id="5" name="Shape 3"/>
+          <p:cNvSpPr/>
+          <p:nvPr/>
+        </p:nvSpPr>
+        <p:spPr>
+          <a:xfrm>
+            <a:off x="548640" y="1188720"/>
+            <a:ext cx="5029200" cy="3474720"/>
+          </a:xfrm>
+          <a:prstGeom prst="roundRect">
+            <a:avLst>
+              <a:gd name="adj" fmla="val 3158"/>
+            </a:avLst>
           </a:prstGeom>
           <a:solidFill>
             <a:srgbClr val="FFFFFF"/>
           </a:solidFill>
-          <a:ln/>
-        </p:spPr>
-      </p:sp>
-      <p:sp>
-        <p:nvSpPr>
-          <p:cNvPr id="3" name="Shape 1"/>
-          <p:cNvSpPr/>
-          <p:nvPr/>
-        </p:nvSpPr>
-        <p:spPr>
-          <a:xfrm>
-            <a:off x="0" y="804672"/>
-            <a:ext cx="9144000" cy="27432"/>
-          </a:xfrm>
-          <a:prstGeom prst="rect">
-            <a:avLst/>
-          </a:prstGeom>
-          <a:solidFill>
-            <a:srgbClr val="E5E2DC"/>
-          </a:solidFill>
-          <a:ln/>
-        </p:spPr>
-      </p:sp>
-      <p:sp>
-        <p:nvSpPr>
-          <p:cNvPr id="4" name="Shape 2"/>
-          <p:cNvSpPr/>
-          <p:nvPr/>
-        </p:nvSpPr>
-        <p:spPr>
-          <a:xfrm>
-            <a:off x="548640" y="201168"/>
-            <a:ext cx="54864" cy="420624"/>
-          </a:xfrm>
-          <a:prstGeom prst="rect">
-            <a:avLst/>
-          </a:prstGeom>
-          <a:solidFill>
-            <a:srgbClr val="2A9D8F"/>
-          </a:solidFill>
-          <a:ln/>
-        </p:spPr>
-      </p:sp>
-      <p:sp>
-        <p:nvSpPr>
-          <p:cNvPr id="5" name="Text 3"/>
-          <p:cNvSpPr/>
-          <p:nvPr/>
-        </p:nvSpPr>
-        <p:spPr>
-          <a:xfrm>
-            <a:off x="777240" y="137160"/>
-            <a:ext cx="7772400" cy="548640"/>
+          <a:ln w="9525">
+            <a:solidFill>
+              <a:srgbClr val="E5E2DC"/>
+            </a:solidFill>
+            <a:prstDash val="solid"/>
+          </a:ln>
+        </p:spPr>
+      </p:sp>
+      <p:sp>
+        <p:nvSpPr>
+          <p:cNvPr id="6" name="Text 4"/>
+          <p:cNvSpPr/>
+          <p:nvPr/>
+        </p:nvSpPr>
+        <p:spPr>
+          <a:xfrm>
+            <a:off x="777240" y="1325880"/>
+            <a:ext cx="4572000" cy="365760"/>
           </a:xfrm>
           <a:prstGeom prst="rect">
             <a:avLst/>
@@ -3760,57 +3412,152 @@
           <a:ln/>
         </p:spPr>
         <p:txBody>
-          <a:bodyPr wrap="square" lIns="0" tIns="0" rIns="0" bIns="0" rtlCol="0" anchor="ctr"/>
+          <a:bodyPr wrap="square" rtlCol="0" anchor="ctr"/>
           <a:lstStyle/>
           <a:p>
             <a:pPr indent="0" marL="0">
               <a:buNone/>
             </a:pPr>
             <a:r>
-              <a:rPr lang="en-US" sz="2000" b="1" dirty="0">
-                <a:solidFill>
-                  <a:srgbClr val="1B2A4A"/>
+              <a:rPr lang="en-US" sz="1500" b="1" dirty="0">
+                <a:solidFill>
+                  <a:srgbClr val="2A9D8F"/>
                 </a:solidFill>
                 <a:latin typeface="Georgia" pitchFamily="34" charset="0"/>
                 <a:ea typeface="Georgia" pitchFamily="34" charset="-122"/>
                 <a:cs typeface="Georgia" pitchFamily="34" charset="-120"/>
               </a:rPr>
-              <a:t>Check Your Understanding</a:t>
-            </a:r>
-            <a:endParaRPr lang="en-US" sz="2000" dirty="0"/>
-          </a:p>
-        </p:txBody>
-      </p:sp>
-      <p:sp>
-        <p:nvSpPr>
-          <p:cNvPr id="6" name="Shape 4"/>
-          <p:cNvSpPr/>
-          <p:nvPr/>
-        </p:nvSpPr>
-        <p:spPr>
-          <a:xfrm>
-            <a:off x="731520" y="1051560"/>
-            <a:ext cx="7680960" cy="438912"/>
-          </a:xfrm>
-          <a:prstGeom prst="rect">
-            <a:avLst/>
+              <a:t>❌ Wrong</a:t>
+            </a:r>
+            <a:endParaRPr lang="en-US" sz="1500" dirty="0"/>
+          </a:p>
+        </p:txBody>
+      </p:sp>
+      <p:sp>
+        <p:nvSpPr>
+          <p:cNvPr id="7" name="Text 5"/>
+          <p:cNvSpPr/>
+          <p:nvPr/>
+        </p:nvSpPr>
+        <p:spPr>
+          <a:xfrm>
+            <a:off x="777240" y="1783080"/>
+            <a:ext cx="4572000" cy="2651760"/>
+          </a:xfrm>
+          <a:prstGeom prst="rect">
+            <a:avLst/>
+          </a:prstGeom>
+          <a:noFill/>
+          <a:ln/>
+        </p:spPr>
+        <p:txBody>
+          <a:bodyPr wrap="square" rtlCol="0" anchor="t"/>
+          <a:lstStyle/>
+          <a:p>
+            <a:pPr>
+              <a:lnSpc>
+                <a:spcPct val="140000"/>
+              </a:lnSpc>
+              <a:spcAft>
+                <a:spcPts val="400"/>
+              </a:spcAft>
+            </a:pPr>
+            <a:r>
+              <a:rPr lang="en-US" sz="1300" dirty="0">
+                <a:solidFill>
+                  <a:srgbClr val="3D3A36"/>
+                </a:solidFill>
+                <a:latin typeface="Arial" pitchFamily="34" charset="0"/>
+                <a:ea typeface="Arial" pitchFamily="34" charset="-122"/>
+                <a:cs typeface="Arial" pitchFamily="34" charset="-120"/>
+              </a:rPr>
+              <a:t>Rounding 450 to nearest 100 → 400</a:t>
+            </a:r>
+            <a:endParaRPr lang="en-US" sz="1300" dirty="0"/>
+          </a:p>
+          <a:p>
+            <a:pPr>
+              <a:lnSpc>
+                <a:spcPct val="140000"/>
+              </a:lnSpc>
+              <a:spcAft>
+                <a:spcPts val="400"/>
+              </a:spcAft>
+            </a:pPr>
+            <a:r>
+              <a:rPr lang="en-US" sz="1300" dirty="0">
+                <a:solidFill>
+                  <a:srgbClr val="3D3A36"/>
+                </a:solidFill>
+                <a:latin typeface="Arial" pitchFamily="34" charset="0"/>
+                <a:ea typeface="Arial" pitchFamily="34" charset="-122"/>
+                <a:cs typeface="Arial" pitchFamily="34" charset="-120"/>
+              </a:rPr>
+              <a:t>Rounding 3.45 to 1dp → 3.4</a:t>
+            </a:r>
+            <a:endParaRPr lang="en-US" sz="1300" dirty="0"/>
+          </a:p>
+          <a:p>
+            <a:pPr>
+              <a:lnSpc>
+                <a:spcPct val="140000"/>
+              </a:lnSpc>
+              <a:spcAft>
+                <a:spcPts val="400"/>
+              </a:spcAft>
+            </a:pPr>
+            <a:r>
+              <a:rPr lang="en-US" sz="1300" dirty="0">
+                <a:solidFill>
+                  <a:srgbClr val="3D3A36"/>
+                </a:solidFill>
+                <a:latin typeface="Arial" pitchFamily="34" charset="0"/>
+                <a:ea typeface="Arial" pitchFamily="34" charset="-122"/>
+                <a:cs typeface="Arial" pitchFamily="34" charset="-120"/>
+              </a:rPr>
+              <a:t>Forgetting to fill with zeros: 4,567 → 500</a:t>
+            </a:r>
+            <a:endParaRPr lang="en-US" sz="1300" dirty="0"/>
+          </a:p>
+        </p:txBody>
+      </p:sp>
+      <p:sp>
+        <p:nvSpPr>
+          <p:cNvPr id="8" name="Shape 6"/>
+          <p:cNvSpPr/>
+          <p:nvPr/>
+        </p:nvSpPr>
+        <p:spPr>
+          <a:xfrm>
+            <a:off x="5852160" y="1188720"/>
+            <a:ext cx="5029200" cy="3474720"/>
+          </a:xfrm>
+          <a:prstGeom prst="roundRect">
+            <a:avLst>
+              <a:gd name="adj" fmla="val 3158"/>
+            </a:avLst>
           </a:prstGeom>
           <a:solidFill>
             <a:srgbClr val="FFFFFF"/>
           </a:solidFill>
-          <a:ln/>
-        </p:spPr>
-      </p:sp>
-      <p:sp>
-        <p:nvSpPr>
-          <p:cNvPr id="7" name="Text 5"/>
-          <p:cNvSpPr/>
-          <p:nvPr/>
-        </p:nvSpPr>
-        <p:spPr>
-          <a:xfrm>
-            <a:off x="868680" y="1051560"/>
-            <a:ext cx="320040" cy="438912"/>
+          <a:ln w="9525">
+            <a:solidFill>
+              <a:srgbClr val="E5E2DC"/>
+            </a:solidFill>
+            <a:prstDash val="solid"/>
+          </a:ln>
+        </p:spPr>
+      </p:sp>
+      <p:sp>
+        <p:nvSpPr>
+          <p:cNvPr id="9" name="Text 7"/>
+          <p:cNvSpPr/>
+          <p:nvPr/>
+        </p:nvSpPr>
+        <p:spPr>
+          <a:xfrm>
+            <a:off x="6080760" y="1325880"/>
+            <a:ext cx="4572000" cy="365760"/>
           </a:xfrm>
           <a:prstGeom prst="rect">
             <a:avLst/>
@@ -3826,27 +3573,30 @@
               <a:buNone/>
             </a:pPr>
             <a:r>
-              <a:rPr lang="en-US" sz="1400" dirty="0">
-                <a:solidFill>
-                  <a:srgbClr val="2A9D8F"/>
-                </a:solidFill>
-              </a:rPr>
-              <a:t>☐</a:t>
-            </a:r>
-            <a:endParaRPr lang="en-US" sz="1400" dirty="0"/>
-          </a:p>
-        </p:txBody>
-      </p:sp>
-      <p:sp>
-        <p:nvSpPr>
-          <p:cNvPr id="8" name="Text 6"/>
-          <p:cNvSpPr/>
-          <p:nvPr/>
-        </p:nvSpPr>
-        <p:spPr>
-          <a:xfrm>
-            <a:off x="1234440" y="1051560"/>
-            <a:ext cx="6949440" cy="438912"/>
+              <a:rPr lang="en-US" sz="1500" b="1" dirty="0">
+                <a:solidFill>
+                  <a:srgbClr val="E9C46A"/>
+                </a:solidFill>
+                <a:latin typeface="Georgia" pitchFamily="34" charset="0"/>
+                <a:ea typeface="Georgia" pitchFamily="34" charset="-122"/>
+                <a:cs typeface="Georgia" pitchFamily="34" charset="-120"/>
+              </a:rPr>
+              <a:t>✅ Correct</a:t>
+            </a:r>
+            <a:endParaRPr lang="en-US" sz="1500" dirty="0"/>
+          </a:p>
+        </p:txBody>
+      </p:sp>
+      <p:sp>
+        <p:nvSpPr>
+          <p:cNvPr id="10" name="Text 8"/>
+          <p:cNvSpPr/>
+          <p:nvPr/>
+        </p:nvSpPr>
+        <p:spPr>
+          <a:xfrm>
+            <a:off x="6080760" y="1783080"/>
+            <a:ext cx="4572000" cy="2651760"/>
           </a:xfrm>
           <a:prstGeom prst="rect">
             <a:avLst/>
@@ -3855,484 +3605,73 @@
           <a:ln/>
         </p:spPr>
         <p:txBody>
-          <a:bodyPr wrap="square" rtlCol="0" anchor="ctr"/>
-          <a:lstStyle/>
-          <a:p>
-            <a:pPr indent="0" marL="0">
-              <a:buNone/>
+          <a:bodyPr wrap="square" rtlCol="0" anchor="t"/>
+          <a:lstStyle/>
+          <a:p>
+            <a:pPr>
+              <a:lnSpc>
+                <a:spcPct val="140000"/>
+              </a:lnSpc>
+              <a:spcAft>
+                <a:spcPts val="400"/>
+              </a:spcAft>
             </a:pPr>
             <a:r>
               <a:rPr lang="en-US" sz="1300" dirty="0">
                 <a:solidFill>
                   <a:srgbClr val="3D3A36"/>
                 </a:solidFill>
-                <a:latin typeface="Calibri" pitchFamily="34" charset="0"/>
-                <a:ea typeface="Calibri" pitchFamily="34" charset="-122"/>
-                <a:cs typeface="Calibri" pitchFamily="34" charset="-120"/>
-              </a:rPr>
-              <a:t>I can round numbers to the nearest 10, 100, and 1000</a:t>
+                <a:latin typeface="Arial" pitchFamily="34" charset="0"/>
+                <a:ea typeface="Arial" pitchFamily="34" charset="-122"/>
+                <a:cs typeface="Arial" pitchFamily="34" charset="-120"/>
+              </a:rPr>
+              <a:t>450 → 500 (5 rounds UP)</a:t>
             </a:r>
             <a:endParaRPr lang="en-US" sz="1300" dirty="0"/>
           </a:p>
-        </p:txBody>
-      </p:sp>
-      <p:sp>
-        <p:nvSpPr>
-          <p:cNvPr id="9" name="Shape 7"/>
-          <p:cNvSpPr/>
-          <p:nvPr/>
-        </p:nvSpPr>
-        <p:spPr>
-          <a:xfrm>
-            <a:off x="731520" y="1554480"/>
-            <a:ext cx="7680960" cy="438912"/>
-          </a:xfrm>
-          <a:prstGeom prst="rect">
-            <a:avLst/>
-          </a:prstGeom>
-          <a:solidFill>
-            <a:srgbClr val="F8F6F3"/>
-          </a:solidFill>
-          <a:ln/>
-        </p:spPr>
-      </p:sp>
-      <p:sp>
-        <p:nvSpPr>
-          <p:cNvPr id="10" name="Text 8"/>
-          <p:cNvSpPr/>
-          <p:nvPr/>
-        </p:nvSpPr>
-        <p:spPr>
-          <a:xfrm>
-            <a:off x="868680" y="1554480"/>
-            <a:ext cx="320040" cy="438912"/>
-          </a:xfrm>
-          <a:prstGeom prst="rect">
-            <a:avLst/>
-          </a:prstGeom>
-          <a:noFill/>
-          <a:ln/>
-        </p:spPr>
-        <p:txBody>
-          <a:bodyPr wrap="square" rtlCol="0" anchor="ctr"/>
-          <a:lstStyle/>
-          <a:p>
-            <a:pPr indent="0" marL="0">
-              <a:buNone/>
-            </a:pPr>
-            <a:r>
-              <a:rPr lang="en-US" sz="1400" dirty="0">
-                <a:solidFill>
-                  <a:srgbClr val="2A9D8F"/>
-                </a:solidFill>
-              </a:rPr>
-              <a:t>☐</a:t>
-            </a:r>
-            <a:endParaRPr lang="en-US" sz="1400" dirty="0"/>
-          </a:p>
-        </p:txBody>
-      </p:sp>
-      <p:sp>
-        <p:nvSpPr>
-          <p:cNvPr id="11" name="Text 9"/>
-          <p:cNvSpPr/>
-          <p:nvPr/>
-        </p:nvSpPr>
-        <p:spPr>
-          <a:xfrm>
-            <a:off x="1234440" y="1554480"/>
-            <a:ext cx="6949440" cy="438912"/>
-          </a:xfrm>
-          <a:prstGeom prst="rect">
-            <a:avLst/>
-          </a:prstGeom>
-          <a:noFill/>
-          <a:ln/>
-        </p:spPr>
-        <p:txBody>
-          <a:bodyPr wrap="square" rtlCol="0" anchor="ctr"/>
-          <a:lstStyle/>
-          <a:p>
-            <a:pPr indent="0" marL="0">
-              <a:buNone/>
+          <a:p>
+            <a:pPr>
+              <a:lnSpc>
+                <a:spcPct val="140000"/>
+              </a:lnSpc>
+              <a:spcAft>
+                <a:spcPts val="400"/>
+              </a:spcAft>
             </a:pPr>
             <a:r>
               <a:rPr lang="en-US" sz="1300" dirty="0">
                 <a:solidFill>
                   <a:srgbClr val="3D3A36"/>
                 </a:solidFill>
-                <a:latin typeface="Calibri" pitchFamily="34" charset="0"/>
-                <a:ea typeface="Calibri" pitchFamily="34" charset="-122"/>
-                <a:cs typeface="Calibri" pitchFamily="34" charset="-120"/>
-              </a:rPr>
-              <a:t>I can round decimal numbers to 1 and 2 decimal places</a:t>
+                <a:latin typeface="Arial" pitchFamily="34" charset="0"/>
+                <a:ea typeface="Arial" pitchFamily="34" charset="-122"/>
+                <a:cs typeface="Arial" pitchFamily="34" charset="-120"/>
+              </a:rPr>
+              <a:t>3.45 → 3.5 (5 rounds UP)</a:t>
             </a:r>
             <a:endParaRPr lang="en-US" sz="1300" dirty="0"/>
           </a:p>
-        </p:txBody>
-      </p:sp>
-      <p:sp>
-        <p:nvSpPr>
-          <p:cNvPr id="12" name="Shape 10"/>
-          <p:cNvSpPr/>
-          <p:nvPr/>
-        </p:nvSpPr>
-        <p:spPr>
-          <a:xfrm>
-            <a:off x="731520" y="2057400"/>
-            <a:ext cx="7680960" cy="438912"/>
-          </a:xfrm>
-          <a:prstGeom prst="rect">
-            <a:avLst/>
-          </a:prstGeom>
-          <a:solidFill>
-            <a:srgbClr val="FFFFFF"/>
-          </a:solidFill>
-          <a:ln/>
-        </p:spPr>
-      </p:sp>
-      <p:sp>
-        <p:nvSpPr>
-          <p:cNvPr id="13" name="Text 11"/>
-          <p:cNvSpPr/>
-          <p:nvPr/>
-        </p:nvSpPr>
-        <p:spPr>
-          <a:xfrm>
-            <a:off x="868680" y="2057400"/>
-            <a:ext cx="320040" cy="438912"/>
-          </a:xfrm>
-          <a:prstGeom prst="rect">
-            <a:avLst/>
-          </a:prstGeom>
-          <a:noFill/>
-          <a:ln/>
-        </p:spPr>
-        <p:txBody>
-          <a:bodyPr wrap="square" rtlCol="0" anchor="ctr"/>
-          <a:lstStyle/>
-          <a:p>
-            <a:pPr indent="0" marL="0">
-              <a:buNone/>
-            </a:pPr>
-            <a:r>
-              <a:rPr lang="en-US" sz="1400" dirty="0">
-                <a:solidFill>
-                  <a:srgbClr val="2A9D8F"/>
-                </a:solidFill>
-              </a:rPr>
-              <a:t>☐</a:t>
-            </a:r>
-            <a:endParaRPr lang="en-US" sz="1400" dirty="0"/>
-          </a:p>
-        </p:txBody>
-      </p:sp>
-      <p:sp>
-        <p:nvSpPr>
-          <p:cNvPr id="14" name="Text 12"/>
-          <p:cNvSpPr/>
-          <p:nvPr/>
-        </p:nvSpPr>
-        <p:spPr>
-          <a:xfrm>
-            <a:off x="1234440" y="2057400"/>
-            <a:ext cx="6949440" cy="438912"/>
-          </a:xfrm>
-          <a:prstGeom prst="rect">
-            <a:avLst/>
-          </a:prstGeom>
-          <a:noFill/>
-          <a:ln/>
-        </p:spPr>
-        <p:txBody>
-          <a:bodyPr wrap="square" rtlCol="0" anchor="ctr"/>
-          <a:lstStyle/>
-          <a:p>
-            <a:pPr indent="0" marL="0">
-              <a:buNone/>
+          <a:p>
+            <a:pPr>
+              <a:lnSpc>
+                <a:spcPct val="140000"/>
+              </a:lnSpc>
+              <a:spcAft>
+                <a:spcPts val="400"/>
+              </a:spcAft>
             </a:pPr>
             <a:r>
               <a:rPr lang="en-US" sz="1300" dirty="0">
                 <a:solidFill>
                   <a:srgbClr val="3D3A36"/>
                 </a:solidFill>
-                <a:latin typeface="Calibri" pitchFamily="34" charset="0"/>
-                <a:ea typeface="Calibri" pitchFamily="34" charset="-122"/>
-                <a:cs typeface="Calibri" pitchFamily="34" charset="-120"/>
-              </a:rPr>
-              <a:t>I know the '5 or above' rule</a:t>
+                <a:latin typeface="Arial" pitchFamily="34" charset="0"/>
+                <a:ea typeface="Arial" pitchFamily="34" charset="-122"/>
+                <a:cs typeface="Arial" pitchFamily="34" charset="-120"/>
+              </a:rPr>
+              <a:t>4,567 → 5,000 (fill with zeros)</a:t>
             </a:r>
             <a:endParaRPr lang="en-US" sz="1300" dirty="0"/>
-          </a:p>
-        </p:txBody>
-      </p:sp>
-      <p:sp>
-        <p:nvSpPr>
-          <p:cNvPr id="15" name="Shape 13"/>
-          <p:cNvSpPr/>
-          <p:nvPr/>
-        </p:nvSpPr>
-        <p:spPr>
-          <a:xfrm>
-            <a:off x="731520" y="2560320"/>
-            <a:ext cx="7680960" cy="438912"/>
-          </a:xfrm>
-          <a:prstGeom prst="rect">
-            <a:avLst/>
-          </a:prstGeom>
-          <a:solidFill>
-            <a:srgbClr val="F8F6F3"/>
-          </a:solidFill>
-          <a:ln/>
-        </p:spPr>
-      </p:sp>
-      <p:sp>
-        <p:nvSpPr>
-          <p:cNvPr id="16" name="Text 14"/>
-          <p:cNvSpPr/>
-          <p:nvPr/>
-        </p:nvSpPr>
-        <p:spPr>
-          <a:xfrm>
-            <a:off x="868680" y="2560320"/>
-            <a:ext cx="320040" cy="438912"/>
-          </a:xfrm>
-          <a:prstGeom prst="rect">
-            <a:avLst/>
-          </a:prstGeom>
-          <a:noFill/>
-          <a:ln/>
-        </p:spPr>
-        <p:txBody>
-          <a:bodyPr wrap="square" rtlCol="0" anchor="ctr"/>
-          <a:lstStyle/>
-          <a:p>
-            <a:pPr indent="0" marL="0">
-              <a:buNone/>
-            </a:pPr>
-            <a:r>
-              <a:rPr lang="en-US" sz="1400" dirty="0">
-                <a:solidFill>
-                  <a:srgbClr val="2A9D8F"/>
-                </a:solidFill>
-              </a:rPr>
-              <a:t>☐</a:t>
-            </a:r>
-            <a:endParaRPr lang="en-US" sz="1400" dirty="0"/>
-          </a:p>
-        </p:txBody>
-      </p:sp>
-      <p:sp>
-        <p:nvSpPr>
-          <p:cNvPr id="17" name="Text 15"/>
-          <p:cNvSpPr/>
-          <p:nvPr/>
-        </p:nvSpPr>
-        <p:spPr>
-          <a:xfrm>
-            <a:off x="1234440" y="2560320"/>
-            <a:ext cx="6949440" cy="438912"/>
-          </a:xfrm>
-          <a:prstGeom prst="rect">
-            <a:avLst/>
-          </a:prstGeom>
-          <a:noFill/>
-          <a:ln/>
-        </p:spPr>
-        <p:txBody>
-          <a:bodyPr wrap="square" rtlCol="0" anchor="ctr"/>
-          <a:lstStyle/>
-          <a:p>
-            <a:pPr indent="0" marL="0">
-              <a:buNone/>
-            </a:pPr>
-            <a:r>
-              <a:rPr lang="en-US" sz="1300" dirty="0">
-                <a:solidFill>
-                  <a:srgbClr val="3D3A36"/>
-                </a:solidFill>
-                <a:latin typeface="Calibri" pitchFamily="34" charset="0"/>
-                <a:ea typeface="Calibri" pitchFamily="34" charset="-122"/>
-                <a:cs typeface="Calibri" pitchFamily="34" charset="-120"/>
-              </a:rPr>
-              <a:t>I can use estimation to check my answers</a:t>
-            </a:r>
-            <a:endParaRPr lang="en-US" sz="1300" dirty="0"/>
-          </a:p>
-        </p:txBody>
-      </p:sp>
-      <p:sp>
-        <p:nvSpPr>
-          <p:cNvPr id="18" name="Shape 16"/>
-          <p:cNvSpPr/>
-          <p:nvPr/>
-        </p:nvSpPr>
-        <p:spPr>
-          <a:xfrm>
-            <a:off x="731520" y="3063240"/>
-            <a:ext cx="7680960" cy="438912"/>
-          </a:xfrm>
-          <a:prstGeom prst="rect">
-            <a:avLst/>
-          </a:prstGeom>
-          <a:solidFill>
-            <a:srgbClr val="FFFFFF"/>
-          </a:solidFill>
-          <a:ln/>
-        </p:spPr>
-      </p:sp>
-      <p:sp>
-        <p:nvSpPr>
-          <p:cNvPr id="19" name="Text 17"/>
-          <p:cNvSpPr/>
-          <p:nvPr/>
-        </p:nvSpPr>
-        <p:spPr>
-          <a:xfrm>
-            <a:off x="868680" y="3063240"/>
-            <a:ext cx="320040" cy="438912"/>
-          </a:xfrm>
-          <a:prstGeom prst="rect">
-            <a:avLst/>
-          </a:prstGeom>
-          <a:noFill/>
-          <a:ln/>
-        </p:spPr>
-        <p:txBody>
-          <a:bodyPr wrap="square" rtlCol="0" anchor="ctr"/>
-          <a:lstStyle/>
-          <a:p>
-            <a:pPr indent="0" marL="0">
-              <a:buNone/>
-            </a:pPr>
-            <a:r>
-              <a:rPr lang="en-US" sz="1400" dirty="0">
-                <a:solidFill>
-                  <a:srgbClr val="2A9D8F"/>
-                </a:solidFill>
-              </a:rPr>
-              <a:t>☐</a:t>
-            </a:r>
-            <a:endParaRPr lang="en-US" sz="1400" dirty="0"/>
-          </a:p>
-        </p:txBody>
-      </p:sp>
-      <p:sp>
-        <p:nvSpPr>
-          <p:cNvPr id="20" name="Text 18"/>
-          <p:cNvSpPr/>
-          <p:nvPr/>
-        </p:nvSpPr>
-        <p:spPr>
-          <a:xfrm>
-            <a:off x="1234440" y="3063240"/>
-            <a:ext cx="6949440" cy="438912"/>
-          </a:xfrm>
-          <a:prstGeom prst="rect">
-            <a:avLst/>
-          </a:prstGeom>
-          <a:noFill/>
-          <a:ln/>
-        </p:spPr>
-        <p:txBody>
-          <a:bodyPr wrap="square" rtlCol="0" anchor="ctr"/>
-          <a:lstStyle/>
-          <a:p>
-            <a:pPr indent="0" marL="0">
-              <a:buNone/>
-            </a:pPr>
-            <a:r>
-              <a:rPr lang="en-US" sz="1300" dirty="0">
-                <a:solidFill>
-                  <a:srgbClr val="3D3A36"/>
-                </a:solidFill>
-                <a:latin typeface="Calibri" pitchFamily="34" charset="0"/>
-                <a:ea typeface="Calibri" pitchFamily="34" charset="-122"/>
-                <a:cs typeface="Calibri" pitchFamily="34" charset="-120"/>
-              </a:rPr>
-              <a:t>I understand why rounding is useful in real life</a:t>
-            </a:r>
-            <a:endParaRPr lang="en-US" sz="1300" dirty="0"/>
-          </a:p>
-        </p:txBody>
-      </p:sp>
-      <p:sp>
-        <p:nvSpPr>
-          <p:cNvPr id="21" name="Shape 19"/>
-          <p:cNvSpPr/>
-          <p:nvPr/>
-        </p:nvSpPr>
-        <p:spPr>
-          <a:xfrm>
-            <a:off x="731520" y="3749040"/>
-            <a:ext cx="7680960" cy="594360"/>
-          </a:xfrm>
-          <a:prstGeom prst="rect">
-            <a:avLst/>
-          </a:prstGeom>
-          <a:solidFill>
-            <a:srgbClr val="E8F5F3"/>
-          </a:solidFill>
-          <a:ln/>
-          <a:effectLst>
-            <a:outerShdw sx="100000" sy="100000" kx="0" ky="0" algn="bl" rotWithShape="0" blurRad="50800" dist="25400" dir="8100000">
-              <a:srgbClr val="000000">
-                <a:alpha val="10000"/>
-              </a:srgbClr>
-            </a:outerShdw>
-          </a:effectLst>
-        </p:spPr>
-      </p:sp>
-      <p:sp>
-        <p:nvSpPr>
-          <p:cNvPr id="22" name="Text 20"/>
-          <p:cNvSpPr/>
-          <p:nvPr/>
-        </p:nvSpPr>
-        <p:spPr>
-          <a:xfrm>
-            <a:off x="914400" y="3749040"/>
-            <a:ext cx="7315200" cy="594360"/>
-          </a:xfrm>
-          <a:prstGeom prst="rect">
-            <a:avLst/>
-          </a:prstGeom>
-          <a:noFill/>
-          <a:ln/>
-        </p:spPr>
-        <p:txBody>
-          <a:bodyPr wrap="square" rtlCol="0" anchor="ctr"/>
-          <a:lstStyle/>
-          <a:p>
-            <a:pPr indent="0" marL="0">
-              <a:buNone/>
-            </a:pPr>
-            <a:r>
-              <a:rPr lang="en-US" sz="1200" b="1" dirty="0">
-                <a:solidFill>
-                  <a:srgbClr val="2A9D8F"/>
-                </a:solidFill>
-                <a:latin typeface="Calibri" pitchFamily="34" charset="0"/>
-                <a:ea typeface="Calibri" pitchFamily="34" charset="-122"/>
-                <a:cs typeface="Calibri" pitchFamily="34" charset="-120"/>
-              </a:rPr>
-              <a:t>Key Idea: </a:t>
-            </a:r>
-            <a:pPr indent="0" marL="0">
-              <a:buNone/>
-            </a:pPr>
-            <a:r>
-              <a:rPr lang="en-US" sz="1200" i="1" dirty="0">
-                <a:solidFill>
-                  <a:srgbClr val="3D3A36"/>
-                </a:solidFill>
-                <a:latin typeface="Calibri" pitchFamily="34" charset="0"/>
-                <a:ea typeface="Calibri" pitchFamily="34" charset="-122"/>
-                <a:cs typeface="Calibri" pitchFamily="34" charset="-120"/>
-              </a:rPr>
-              <a:t>Rounding makes big numbers easier to work with and helps you check answers.</a:t>
-            </a:r>
-            <a:endParaRPr lang="en-US" sz="1200" dirty="0"/>
           </a:p>
         </p:txBody>
       </p:sp>
@@ -4347,6 +3686,13 @@
 <file path=ppt/slides/slide7.xml><?xml version="1.0" encoding="utf-8"?>
 <p:sld xmlns:a="http://schemas.openxmlformats.org/drawingml/2006/main" xmlns:r="http://schemas.openxmlformats.org/officeDocument/2006/relationships" xmlns:p="http://schemas.openxmlformats.org/presentationml/2006/main">
   <p:cSld name="Slide 7">
+    <p:bg>
+      <p:bgPr>
+        <a:solidFill>
+          <a:srgbClr val="FAF8F5"/>
+        </a:solidFill>
+      </p:bgPr>
+    </p:bg>
     <p:spTree>
       <p:nvGrpSpPr>
         <p:cNvPr id="1" name=""/>
@@ -4370,27 +3716,7 @@
         <p:spPr>
           <a:xfrm>
             <a:off x="0" y="0"/>
-            <a:ext cx="9144000" cy="5143500"/>
-          </a:xfrm>
-          <a:prstGeom prst="rect">
-            <a:avLst/>
-          </a:prstGeom>
-          <a:solidFill>
-            <a:srgbClr val="1B2A4A"/>
-          </a:solidFill>
-          <a:ln/>
-        </p:spPr>
-      </p:sp>
-      <p:sp>
-        <p:nvSpPr>
-          <p:cNvPr id="3" name="Shape 1"/>
-          <p:cNvSpPr/>
-          <p:nvPr/>
-        </p:nvSpPr>
-        <p:spPr>
-          <a:xfrm>
-            <a:off x="0" y="4777740"/>
-            <a:ext cx="9144000" cy="365760"/>
+            <a:ext cx="73152" cy="5148072"/>
           </a:xfrm>
           <a:prstGeom prst="rect">
             <a:avLst/>
@@ -4403,36 +3729,14 @@
       </p:sp>
       <p:sp>
         <p:nvSpPr>
-          <p:cNvPr id="4" name="Shape 2"/>
-          <p:cNvSpPr/>
-          <p:nvPr/>
-        </p:nvSpPr>
-        <p:spPr>
-          <a:xfrm>
-            <a:off x="-914400" y="-914400"/>
-            <a:ext cx="3657600" cy="3657600"/>
-          </a:xfrm>
-          <a:prstGeom prst="ellipse">
-            <a:avLst/>
-          </a:prstGeom>
-          <a:solidFill>
-            <a:srgbClr val="2A9D8F">
-              <a:alpha val="10000"/>
-            </a:srgbClr>
-          </a:solidFill>
-          <a:ln/>
-        </p:spPr>
-      </p:sp>
-      <p:sp>
-        <p:nvSpPr>
-          <p:cNvPr id="5" name="Text 3"/>
-          <p:cNvSpPr/>
-          <p:nvPr/>
-        </p:nvSpPr>
-        <p:spPr>
-          <a:xfrm>
-            <a:off x="731520" y="1463040"/>
-            <a:ext cx="7680960" cy="822960"/>
+          <p:cNvPr id="3" name="Text 1"/>
+          <p:cNvSpPr/>
+          <p:nvPr/>
+        </p:nvSpPr>
+        <p:spPr>
+          <a:xfrm>
+            <a:off x="548640" y="274320"/>
+            <a:ext cx="9144000" cy="640080"/>
           </a:xfrm>
           <a:prstGeom prst="rect">
             <a:avLst/>
@@ -4444,34 +3748,368 @@
           <a:bodyPr wrap="square" rtlCol="0" anchor="ctr"/>
           <a:lstStyle/>
           <a:p>
-            <a:pPr algn="ctr" indent="0" marL="0">
+            <a:pPr indent="0" marL="0">
               <a:buNone/>
             </a:pPr>
             <a:r>
-              <a:rPr lang="en-US" sz="3400" b="1" dirty="0">
-                <a:solidFill>
-                  <a:srgbClr val="FFFFFF"/>
+              <a:rPr lang="en-US" sz="2400" b="1" dirty="0">
+                <a:solidFill>
+                  <a:srgbClr val="1B2A4A"/>
                 </a:solidFill>
                 <a:latin typeface="Georgia" pitchFamily="34" charset="0"/>
                 <a:ea typeface="Georgia" pitchFamily="34" charset="-122"/>
                 <a:cs typeface="Georgia" pitchFamily="34" charset="-120"/>
               </a:rPr>
+              <a:t>Check Your Understanding</a:t>
+            </a:r>
+            <a:endParaRPr lang="en-US" sz="2400" dirty="0"/>
+          </a:p>
+        </p:txBody>
+      </p:sp>
+      <p:sp>
+        <p:nvSpPr>
+          <p:cNvPr id="4" name="Shape 2"/>
+          <p:cNvSpPr/>
+          <p:nvPr/>
+        </p:nvSpPr>
+        <p:spPr>
+          <a:xfrm>
+            <a:off x="548640" y="960120"/>
+            <a:ext cx="2286000" cy="36576"/>
+          </a:xfrm>
+          <a:prstGeom prst="rect">
+            <a:avLst/>
+          </a:prstGeom>
+          <a:solidFill>
+            <a:srgbClr val="2A9D8F"/>
+          </a:solidFill>
+          <a:ln/>
+        </p:spPr>
+      </p:sp>
+      <p:sp>
+        <p:nvSpPr>
+          <p:cNvPr id="5" name="Text 3"/>
+          <p:cNvSpPr/>
+          <p:nvPr/>
+        </p:nvSpPr>
+        <p:spPr>
+          <a:xfrm>
+            <a:off x="548640" y="1188720"/>
+            <a:ext cx="365760" cy="457200"/>
+          </a:xfrm>
+          <a:prstGeom prst="rect">
+            <a:avLst/>
+          </a:prstGeom>
+          <a:noFill/>
+          <a:ln/>
+        </p:spPr>
+        <p:txBody>
+          <a:bodyPr wrap="square" rtlCol="0" anchor="ctr"/>
+          <a:lstStyle/>
+          <a:p>
+            <a:pPr indent="0" marL="0">
+              <a:buNone/>
+            </a:pPr>
+            <a:r>
+              <a:rPr lang="en-US" sz="1600" dirty="0">
+                <a:solidFill>
+                  <a:srgbClr val="2A9D8F"/>
+                </a:solidFill>
+                <a:latin typeface="Arial" pitchFamily="34" charset="0"/>
+                <a:ea typeface="Arial" pitchFamily="34" charset="-122"/>
+                <a:cs typeface="Arial" pitchFamily="34" charset="-120"/>
+              </a:rPr>
+              <a:t>☐</a:t>
+            </a:r>
+            <a:endParaRPr lang="en-US" sz="1600" dirty="0"/>
+          </a:p>
+        </p:txBody>
+      </p:sp>
+      <p:sp>
+        <p:nvSpPr>
+          <p:cNvPr id="6" name="Text 4"/>
+          <p:cNvSpPr/>
+          <p:nvPr/>
+        </p:nvSpPr>
+        <p:spPr>
+          <a:xfrm>
+            <a:off x="1005840" y="1188720"/>
+            <a:ext cx="9601200" cy="457200"/>
+          </a:xfrm>
+          <a:prstGeom prst="rect">
+            <a:avLst/>
+          </a:prstGeom>
+          <a:noFill/>
+          <a:ln/>
+        </p:spPr>
+        <p:txBody>
+          <a:bodyPr wrap="square" rtlCol="0" anchor="ctr"/>
+          <a:lstStyle/>
+          <a:p>
+            <a:pPr indent="0" marL="0">
+              <a:lnSpc>
+                <a:spcPct val="130000"/>
+              </a:lnSpc>
+              <a:buNone/>
+            </a:pPr>
+            <a:r>
+              <a:rPr lang="en-US" sz="1400" dirty="0">
+                <a:solidFill>
+                  <a:srgbClr val="3D3A36"/>
+                </a:solidFill>
+                <a:latin typeface="Arial" pitchFamily="34" charset="0"/>
+                <a:ea typeface="Arial" pitchFamily="34" charset="-122"/>
+                <a:cs typeface="Arial" pitchFamily="34" charset="-120"/>
+              </a:rPr>
+              <a:t>I can round any number to the nearest 10, 100, or 1,000.</a:t>
+            </a:r>
+            <a:endParaRPr lang="en-US" sz="1400" dirty="0"/>
+          </a:p>
+        </p:txBody>
+      </p:sp>
+      <p:sp>
+        <p:nvSpPr>
+          <p:cNvPr id="7" name="Text 5"/>
+          <p:cNvSpPr/>
+          <p:nvPr/>
+        </p:nvSpPr>
+        <p:spPr>
+          <a:xfrm>
+            <a:off x="548640" y="1783080"/>
+            <a:ext cx="365760" cy="457200"/>
+          </a:xfrm>
+          <a:prstGeom prst="rect">
+            <a:avLst/>
+          </a:prstGeom>
+          <a:noFill/>
+          <a:ln/>
+        </p:spPr>
+        <p:txBody>
+          <a:bodyPr wrap="square" rtlCol="0" anchor="ctr"/>
+          <a:lstStyle/>
+          <a:p>
+            <a:pPr indent="0" marL="0">
+              <a:buNone/>
+            </a:pPr>
+            <a:r>
+              <a:rPr lang="en-US" sz="1600" dirty="0">
+                <a:solidFill>
+                  <a:srgbClr val="2A9D8F"/>
+                </a:solidFill>
+                <a:latin typeface="Arial" pitchFamily="34" charset="0"/>
+                <a:ea typeface="Arial" pitchFamily="34" charset="-122"/>
+                <a:cs typeface="Arial" pitchFamily="34" charset="-120"/>
+              </a:rPr>
+              <a:t>☐</a:t>
+            </a:r>
+            <a:endParaRPr lang="en-US" sz="1600" dirty="0"/>
+          </a:p>
+        </p:txBody>
+      </p:sp>
+      <p:sp>
+        <p:nvSpPr>
+          <p:cNvPr id="8" name="Text 6"/>
+          <p:cNvSpPr/>
+          <p:nvPr/>
+        </p:nvSpPr>
+        <p:spPr>
+          <a:xfrm>
+            <a:off x="1005840" y="1783080"/>
+            <a:ext cx="9601200" cy="457200"/>
+          </a:xfrm>
+          <a:prstGeom prst="rect">
+            <a:avLst/>
+          </a:prstGeom>
+          <a:noFill/>
+          <a:ln/>
+        </p:spPr>
+        <p:txBody>
+          <a:bodyPr wrap="square" rtlCol="0" anchor="ctr"/>
+          <a:lstStyle/>
+          <a:p>
+            <a:pPr indent="0" marL="0">
+              <a:lnSpc>
+                <a:spcPct val="130000"/>
+              </a:lnSpc>
+              <a:buNone/>
+            </a:pPr>
+            <a:r>
+              <a:rPr lang="en-US" sz="1400" dirty="0">
+                <a:solidFill>
+                  <a:srgbClr val="3D3A36"/>
+                </a:solidFill>
+                <a:latin typeface="Arial" pitchFamily="34" charset="0"/>
+                <a:ea typeface="Arial" pitchFamily="34" charset="-122"/>
+                <a:cs typeface="Arial" pitchFamily="34" charset="-120"/>
+              </a:rPr>
+              <a:t>I can use estimation to check if my answer is reasonable.</a:t>
+            </a:r>
+            <a:endParaRPr lang="en-US" sz="1400" dirty="0"/>
+          </a:p>
+        </p:txBody>
+      </p:sp>
+      <p:sp>
+        <p:nvSpPr>
+          <p:cNvPr id="9" name="Text 7"/>
+          <p:cNvSpPr/>
+          <p:nvPr/>
+        </p:nvSpPr>
+        <p:spPr>
+          <a:xfrm>
+            <a:off x="548640" y="2377440"/>
+            <a:ext cx="365760" cy="457200"/>
+          </a:xfrm>
+          <a:prstGeom prst="rect">
+            <a:avLst/>
+          </a:prstGeom>
+          <a:noFill/>
+          <a:ln/>
+        </p:spPr>
+        <p:txBody>
+          <a:bodyPr wrap="square" rtlCol="0" anchor="ctr"/>
+          <a:lstStyle/>
+          <a:p>
+            <a:pPr indent="0" marL="0">
+              <a:buNone/>
+            </a:pPr>
+            <a:r>
+              <a:rPr lang="en-US" sz="1600" dirty="0">
+                <a:solidFill>
+                  <a:srgbClr val="2A9D8F"/>
+                </a:solidFill>
+                <a:latin typeface="Arial" pitchFamily="34" charset="0"/>
+                <a:ea typeface="Arial" pitchFamily="34" charset="-122"/>
+                <a:cs typeface="Arial" pitchFamily="34" charset="-120"/>
+              </a:rPr>
+              <a:t>☐</a:t>
+            </a:r>
+            <a:endParaRPr lang="en-US" sz="1600" dirty="0"/>
+          </a:p>
+        </p:txBody>
+      </p:sp>
+      <p:sp>
+        <p:nvSpPr>
+          <p:cNvPr id="10" name="Text 8"/>
+          <p:cNvSpPr/>
+          <p:nvPr/>
+        </p:nvSpPr>
+        <p:spPr>
+          <a:xfrm>
+            <a:off x="1005840" y="2377440"/>
+            <a:ext cx="9601200" cy="457200"/>
+          </a:xfrm>
+          <a:prstGeom prst="rect">
+            <a:avLst/>
+          </a:prstGeom>
+          <a:noFill/>
+          <a:ln/>
+        </p:spPr>
+        <p:txBody>
+          <a:bodyPr wrap="square" rtlCol="0" anchor="ctr"/>
+          <a:lstStyle/>
+          <a:p>
+            <a:pPr indent="0" marL="0">
+              <a:lnSpc>
+                <a:spcPct val="130000"/>
+              </a:lnSpc>
+              <a:buNone/>
+            </a:pPr>
+            <a:r>
+              <a:rPr lang="en-US" sz="1400" dirty="0">
+                <a:solidFill>
+                  <a:srgbClr val="3D3A36"/>
+                </a:solidFill>
+                <a:latin typeface="Arial" pitchFamily="34" charset="0"/>
+                <a:ea typeface="Arial" pitchFamily="34" charset="-122"/>
+                <a:cs typeface="Arial" pitchFamily="34" charset="-120"/>
+              </a:rPr>
+              <a:t>I know that 5 always rounds up.</a:t>
+            </a:r>
+            <a:endParaRPr lang="en-US" sz="1400" dirty="0"/>
+          </a:p>
+        </p:txBody>
+      </p:sp>
+    </p:spTree>
+  </p:cSld>
+  <p:clrMapOvr>
+    <a:masterClrMapping/>
+  </p:clrMapOvr>
+</p:sld>
+</file>
+
+<file path=ppt/slides/slide8.xml><?xml version="1.0" encoding="utf-8"?>
+<p:sld xmlns:a="http://schemas.openxmlformats.org/drawingml/2006/main" xmlns:r="http://schemas.openxmlformats.org/officeDocument/2006/relationships" xmlns:p="http://schemas.openxmlformats.org/presentationml/2006/main">
+  <p:cSld name="Slide 8">
+    <p:bg>
+      <p:bgPr>
+        <a:solidFill>
+          <a:srgbClr val="111D35"/>
+        </a:solidFill>
+      </p:bgPr>
+    </p:bg>
+    <p:spTree>
+      <p:nvGrpSpPr>
+        <p:cNvPr id="1" name=""/>
+        <p:cNvGrpSpPr/>
+        <p:nvPr/>
+      </p:nvGrpSpPr>
+      <p:grpSpPr>
+        <a:xfrm>
+          <a:off x="0" y="0"/>
+          <a:ext cx="0" cy="0"/>
+          <a:chOff x="0" y="0"/>
+          <a:chExt cx="0" cy="0"/>
+        </a:xfrm>
+      </p:grpSpPr>
+      <p:sp>
+        <p:nvSpPr>
+          <p:cNvPr id="2" name="Text 0"/>
+          <p:cNvSpPr/>
+          <p:nvPr/>
+        </p:nvSpPr>
+        <p:spPr>
+          <a:xfrm>
+            <a:off x="731520" y="1371600"/>
+            <a:ext cx="9144000" cy="914400"/>
+          </a:xfrm>
+          <a:prstGeom prst="rect">
+            <a:avLst/>
+          </a:prstGeom>
+          <a:noFill/>
+          <a:ln/>
+        </p:spPr>
+        <p:txBody>
+          <a:bodyPr wrap="square" rtlCol="0" anchor="ctr"/>
+          <a:lstStyle/>
+          <a:p>
+            <a:pPr indent="0" marL="0">
+              <a:buNone/>
+            </a:pPr>
+            <a:r>
+              <a:rPr lang="en-US" sz="3200" b="1" dirty="0">
+                <a:solidFill>
+                  <a:srgbClr val="FFFFFF"/>
+                </a:solidFill>
+                <a:latin typeface="Georgia" pitchFamily="34" charset="0"/>
+                <a:ea typeface="Georgia" pitchFamily="34" charset="-122"/>
+                <a:cs typeface="Georgia" pitchFamily="34" charset="-120"/>
+              </a:rPr>
               <a:t>Review &amp; Practise</a:t>
             </a:r>
-            <a:endParaRPr lang="en-US" sz="3400" dirty="0"/>
-          </a:p>
-        </p:txBody>
-      </p:sp>
-      <p:sp>
-        <p:nvSpPr>
-          <p:cNvPr id="6" name="Text 4"/>
-          <p:cNvSpPr/>
-          <p:nvPr/>
-        </p:nvSpPr>
-        <p:spPr>
-          <a:xfrm>
-            <a:off x="731520" y="2468880"/>
-            <a:ext cx="7680960" cy="457200"/>
+            <a:endParaRPr lang="en-US" sz="3200" dirty="0"/>
+          </a:p>
+        </p:txBody>
+      </p:sp>
+      <p:sp>
+        <p:nvSpPr>
+          <p:cNvPr id="3" name="Text 1"/>
+          <p:cNvSpPr/>
+          <p:nvPr/>
+        </p:nvSpPr>
+        <p:spPr>
+          <a:xfrm>
+            <a:off x="731520" y="2377440"/>
+            <a:ext cx="7315200" cy="548640"/>
           </a:xfrm>
           <a:prstGeom prst="rect">
             <a:avLst/>
@@ -4483,60 +4121,62 @@
           <a:bodyPr wrap="square" rtlCol="0" anchor="ctr"/>
           <a:lstStyle/>
           <a:p>
-            <a:pPr algn="ctr" indent="0" marL="0">
+            <a:pPr indent="0" marL="0">
               <a:buNone/>
             </a:pPr>
             <a:r>
-              <a:rPr lang="en-US" sz="1800" dirty="0">
-                <a:solidFill>
-                  <a:srgbClr val="2A9D8F"/>
-                </a:solidFill>
-                <a:latin typeface="Calibri" pitchFamily="34" charset="0"/>
-                <a:ea typeface="Calibri" pitchFamily="34" charset="-122"/>
-                <a:cs typeface="Calibri" pitchFamily="34" charset="-120"/>
+              <a:rPr lang="en-US" sz="1500" dirty="0">
+                <a:solidFill>
+                  <a:srgbClr val="FFFFFF">
+                    <a:alpha val="60000"/>
+                  </a:srgbClr>
+                </a:solidFill>
+                <a:latin typeface="Arial" pitchFamily="34" charset="0"/>
+                <a:ea typeface="Arial" pitchFamily="34" charset="-122"/>
+                <a:cs typeface="Arial" pitchFamily="34" charset="-120"/>
+              </a:rPr>
+              <a:t>Use the Self-Quiz, Review Games, and Practice Builder to test yourself.</a:t>
+            </a:r>
+            <a:endParaRPr lang="en-US" sz="1500" dirty="0"/>
+          </a:p>
+        </p:txBody>
+      </p:sp>
+      <p:sp>
+        <p:nvSpPr>
+          <p:cNvPr id="4" name="Text 2"/>
+          <p:cNvSpPr/>
+          <p:nvPr/>
+        </p:nvSpPr>
+        <p:spPr>
+          <a:xfrm>
+            <a:off x="731520" y="3291840"/>
+            <a:ext cx="3657600" cy="457200"/>
+          </a:xfrm>
+          <a:prstGeom prst="rect">
+            <a:avLst/>
+          </a:prstGeom>
+          <a:noFill/>
+          <a:ln/>
+        </p:spPr>
+        <p:txBody>
+          <a:bodyPr wrap="square" rtlCol="0" anchor="ctr"/>
+          <a:lstStyle/>
+          <a:p>
+            <a:pPr indent="0" marL="0">
+              <a:buNone/>
+            </a:pPr>
+            <a:r>
+              <a:rPr lang="en-US" sz="1800" b="1" dirty="0">
+                <a:solidFill>
+                  <a:srgbClr val="E9C46A"/>
+                </a:solidFill>
+                <a:latin typeface="Georgia" pitchFamily="34" charset="0"/>
+                <a:ea typeface="Georgia" pitchFamily="34" charset="-122"/>
+                <a:cs typeface="Georgia" pitchFamily="34" charset="-120"/>
               </a:rPr>
               <a:t>mrzocchi.com</a:t>
             </a:r>
             <a:endParaRPr lang="en-US" sz="1800" dirty="0"/>
-          </a:p>
-        </p:txBody>
-      </p:sp>
-      <p:sp>
-        <p:nvSpPr>
-          <p:cNvPr id="7" name="Text 5"/>
-          <p:cNvSpPr/>
-          <p:nvPr/>
-        </p:nvSpPr>
-        <p:spPr>
-          <a:xfrm>
-            <a:off x="731520" y="3108960"/>
-            <a:ext cx="7680960" cy="457200"/>
-          </a:xfrm>
-          <a:prstGeom prst="rect">
-            <a:avLst/>
-          </a:prstGeom>
-          <a:noFill/>
-          <a:ln/>
-        </p:spPr>
-        <p:txBody>
-          <a:bodyPr wrap="square" rtlCol="0" anchor="ctr"/>
-          <a:lstStyle/>
-          <a:p>
-            <a:pPr algn="ctr" indent="0" marL="0">
-              <a:buNone/>
-            </a:pPr>
-            <a:r>
-              <a:rPr lang="en-US" sz="1300" dirty="0">
-                <a:solidFill>
-                  <a:srgbClr val="9B9690"/>
-                </a:solidFill>
-                <a:latin typeface="Calibri" pitchFamily="34" charset="0"/>
-                <a:ea typeface="Calibri" pitchFamily="34" charset="-122"/>
-                <a:cs typeface="Calibri" pitchFamily="34" charset="-120"/>
-              </a:rPr>
-              <a:t>Use the Self-Quiz, Review Games, and Practice Builder to test yourself.</a:t>
-            </a:r>
-            <a:endParaRPr lang="en-US" sz="1300" dirty="0"/>
           </a:p>
         </p:txBody>
       </p:sp>
